--- a/docs/report/8_27_進度報告_v10十二題.pptx
+++ b/docs/report/8_27_進度報告_v10十二題.pptx
@@ -13430,18 +13430,69 @@
           <a:p>
             <a:pPr>
               <a:spcAft>
-                <a:spcPts val="200"/>
+                <a:spcPts val="300"/>
               </a:spcAft>
             </a:pPr>
             <a:r>
-              <a:rPr sz="900" b="0">
+              <a:rPr sz="800" b="0">
                 <a:solidFill>
                   <a:srgbClr val="222A30"/>
                 </a:solidFill>
                 <a:latin typeface="Arial"/>
                 <a:ea typeface="Microsoft JhengHei"/>
               </a:rPr>
-              <a:t>SMO + 抑制 ADD + Format 3 群組換手(condition PCI → owned CGI)→ twc ≤0.05 行為確認</a:t>
+              <a:t>① 先送 SMO:PCI 撞號要靠重新規劃才能根治,xApp 只能止血</a:t>
+            </a:r>
+          </a:p>
+          <a:p>
+            <a:pPr>
+              <a:spcAft>
+                <a:spcPts val="300"/>
+              </a:spcAft>
+            </a:pPr>
+            <a:r>
+              <a:rPr sz="800" b="0">
+                <a:solidFill>
+                  <a:srgbClr val="222A30"/>
+                </a:solidFill>
+                <a:latin typeface="Arial"/>
+                <a:ea typeface="Microsoft JhengHei"/>
+              </a:rPr>
+              <a:t>② 撞號期間不建關係(會建到錯的那一顆)</a:t>
+            </a:r>
+          </a:p>
+          <a:p>
+            <a:pPr>
+              <a:spcAft>
+                <a:spcPts val="300"/>
+              </a:spcAft>
+            </a:pPr>
+            <a:r>
+              <a:rPr sz="800" b="0">
+                <a:solidFill>
+                  <a:srgbClr val="222A30"/>
+                </a:solidFill>
+                <a:latin typeface="Arial"/>
+                <a:ea typeface="Microsoft JhengHei"/>
+              </a:rPr>
+              <a:t>③ 改用「群組換手」:條件寫 PCI、目標直接指定正確的 CGI,繞過歧義</a:t>
+            </a:r>
+          </a:p>
+          <a:p>
+            <a:pPr>
+              <a:spcAft>
+                <a:spcPts val="300"/>
+              </a:spcAft>
+            </a:pPr>
+            <a:r>
+              <a:rPr sz="800" b="0">
+                <a:solidFill>
+                  <a:srgbClr val="222A30"/>
+                </a:solidFill>
+                <a:latin typeface="Arial"/>
+                <a:ea typeface="Microsoft JhengHei"/>
+              </a:rPr>
+              <a:t>④ 確認換錯 cell 的比率 ≤5% 才算有效</a:t>
             </a:r>
           </a:p>
           <a:p>
@@ -13548,6 +13599,69 @@
                 <a:ea typeface="Microsoft JhengHei"/>
               </a:rPr>
               <a:t>02:09:35 EXECUTED 5/5 → twc=0;NO_MATCH=掃動 UE 正常,重試即可</a:t>
+            </a:r>
+          </a:p>
+        </p:txBody>
+      </p:sp>
+      <p:sp>
+        <p:nvSpPr>
+          <p:cNvPr id="7" name="SimInjection"/>
+          <p:cNvSpPr/>
+          <p:nvPr/>
+        </p:nvSpPr>
+        <p:spPr>
+          <a:xfrm>
+            <a:off x="320040" y="4025000"/>
+            <a:ext cx="5577840" cy="800000"/>
+          </a:xfrm>
+          <a:prstGeom prst="roundRect">
+            <a:avLst/>
+          </a:prstGeom>
+          <a:solidFill>
+            <a:srgbClr val="44546A"/>
+          </a:solidFill>
+          <a:ln w="12700">
+            <a:solidFill>
+              <a:srgbClr val="1CADE4"/>
+            </a:solidFill>
+          </a:ln>
+          <a:effectLst/>
+        </p:spPr>
+        <p:txBody>
+          <a:bodyPr rtlCol="0" anchor="ctr" wrap="square" tIns="45720" bIns="45720"/>
+          <a:lstStyle/>
+          <a:p>
+            <a:pPr algn="ctr">
+              <a:spcAft>
+                <a:spcPts val="200"/>
+              </a:spcAft>
+            </a:pPr>
+            <a:r>
+              <a:rPr sz="1000" b="1">
+                <a:solidFill>
+                  <a:srgbClr val="FFD966"/>
+                </a:solidFill>
+                <a:latin typeface="Arial"/>
+                <a:ea typeface="Microsoft JhengHei"/>
+              </a:rPr>
+              <a:t>sim 端怎麼把這個病做出來</a:t>
+            </a:r>
+          </a:p>
+          <a:p>
+            <a:pPr>
+              <a:spcAft>
+                <a:spcPts val="200"/>
+              </a:spcAft>
+            </a:pPr>
+            <a:r>
+              <a:rPr sz="850" b="0">
+                <a:solidFill>
+                  <a:srgbClr val="FFFFFF"/>
+                </a:solidFill>
+                <a:latin typeface="Arial"/>
+                <a:ea typeface="Microsoft JhengHei"/>
+              </a:rPr>
+              <a:t>場景直接讓兩顆 cell 共用 pci=7(west_c7 / east_c7)造成撞號;佈病再把來源 mid_c0 的 NRT 只留 east 一條(刪掉 west),造出「owned 唯一」這個敢下手的前提。</a:t>
             </a:r>
           </a:p>
         </p:txBody>
@@ -14010,18 +14124,69 @@
           <a:p>
             <a:pPr>
               <a:spcAft>
-                <a:spcPts val="200"/>
+                <a:spcPts val="300"/>
               </a:spcAft>
             </a:pPr>
             <a:r>
-              <a:rPr sz="900" b="0">
+              <a:rPr sz="800" b="0">
                 <a:solidFill>
                   <a:srgbClr val="222A30"/>
                 </a:solidFill>
                 <a:latin typeface="Arial"/>
                 <a:ea typeface="Microsoft JhengHei"/>
               </a:rPr>
-              <a:t>set xnBlocklist(止血)→ SMO(TNL 屬管理面)→ xn=true 觸發 clear → 行為確認(1800s 窗)</a:t>
+              <a:t>① 設 xnBlocklist:關係留著,但禁止拿它當換手目標(止血,不拆線)</a:t>
+            </a:r>
+          </a:p>
+          <a:p>
+            <a:pPr>
+              <a:spcAft>
+                <a:spcPts val="300"/>
+              </a:spcAft>
+            </a:pPr>
+            <a:r>
+              <a:rPr sz="800" b="0">
+                <a:solidFill>
+                  <a:srgbClr val="222A30"/>
+                </a:solidFill>
+                <a:latin typeface="Arial"/>
+                <a:ea typeface="Microsoft JhengHei"/>
+              </a:rPr>
+              <a:t>② Xn 是管理面的事,xApp 修不了 → 送 SMO 請人修</a:t>
+            </a:r>
+          </a:p>
+          <a:p>
+            <a:pPr>
+              <a:spcAft>
+                <a:spcPts val="300"/>
+              </a:spcAft>
+            </a:pPr>
+            <a:r>
+              <a:rPr sz="800" b="0">
+                <a:solidFill>
+                  <a:srgbClr val="222A30"/>
+                </a:solidFill>
+                <a:latin typeface="Arial"/>
+                <a:ea typeface="Microsoft JhengHei"/>
+              </a:rPr>
+              <a:t>③ 看到 Xn 恢復就解除封鎖</a:t>
+            </a:r>
+          </a:p>
+          <a:p>
+            <a:pPr>
+              <a:spcAft>
+                <a:spcPts val="300"/>
+              </a:spcAft>
+            </a:pPr>
+            <a:r>
+              <a:rPr sz="800" b="0">
+                <a:solidFill>
+                  <a:srgbClr val="222A30"/>
+                </a:solidFill>
+                <a:latin typeface="Arial"/>
+                <a:ea typeface="Microsoft JhengHei"/>
+              </a:rPr>
+              <a:t>④ 用「換手成功率回升」證明真的好了 —— 旗標本身不算證據</a:t>
             </a:r>
           </a:p>
           <a:p>
@@ -14128,6 +14293,69 @@
                 <a:ea typeface="Microsoft JhengHei"/>
               </a:rPr>
               <a:t>SET(att 5→0)→ CLEAR → 17:07:10 RECOVERED succ=0.9</a:t>
+            </a:r>
+          </a:p>
+        </p:txBody>
+      </p:sp>
+      <p:sp>
+        <p:nvSpPr>
+          <p:cNvPr id="7" name="SimInjection"/>
+          <p:cNvSpPr/>
+          <p:nvPr/>
+        </p:nvSpPr>
+        <p:spPr>
+          <a:xfrm>
+            <a:off x="320040" y="4025000"/>
+            <a:ext cx="5577840" cy="800000"/>
+          </a:xfrm>
+          <a:prstGeom prst="roundRect">
+            <a:avLst/>
+          </a:prstGeom>
+          <a:solidFill>
+            <a:srgbClr val="44546A"/>
+          </a:solidFill>
+          <a:ln w="12700">
+            <a:solidFill>
+              <a:srgbClr val="1CADE4"/>
+            </a:solidFill>
+          </a:ln>
+          <a:effectLst/>
+        </p:spPr>
+        <p:txBody>
+          <a:bodyPr rtlCol="0" anchor="ctr" wrap="square" tIns="45720" bIns="45720"/>
+          <a:lstStyle/>
+          <a:p>
+            <a:pPr algn="ctr">
+              <a:spcAft>
+                <a:spcPts val="200"/>
+              </a:spcAft>
+            </a:pPr>
+            <a:r>
+              <a:rPr sz="1000" b="1">
+                <a:solidFill>
+                  <a:srgbClr val="FFD966"/>
+                </a:solidFill>
+                <a:latin typeface="Arial"/>
+                <a:ea typeface="Microsoft JhengHei"/>
+              </a:rPr>
+              <a:t>sim 端怎麼把這個病做出來</a:t>
+            </a:r>
+          </a:p>
+          <a:p>
+            <a:pPr>
+              <a:spcAft>
+                <a:spcPts val="200"/>
+              </a:spcAft>
+            </a:pPr>
+            <a:r>
+              <a:rPr sz="850" b="0">
+                <a:solidFill>
+                  <a:srgbClr val="FFFFFF"/>
+                </a:solidFill>
+                <a:latin typeface="Arial"/>
+                <a:ea typeface="Microsoft JhengHei"/>
+              </a:rPr>
+              <a:t>關係留著,只把 xn_x2_established 改成 false。換手 executor 一看 Xn 未通,就在「準備階段」回 TXnRELOCprepExpiry —— 連 Handover Request 都送不出去(這是與第 7 題的鑑別線)。</a:t>
             </a:r>
           </a:p>
         </p:txBody>
@@ -14590,18 +14818,69 @@
           <a:p>
             <a:pPr>
               <a:spcAft>
-                <a:spcPts val="200"/>
+                <a:spcPts val="300"/>
               </a:spcAft>
             </a:pPr>
             <a:r>
-              <a:rPr sz="900" b="0">
+              <a:rPr sz="800" b="0">
                 <a:solidFill>
                   <a:srgbClr val="222A30"/>
                 </a:solidFill>
                 <a:latin typeface="Arial"/>
                 <a:ea typeface="Microsoft JhengHei"/>
               </a:rPr>
-              <a:t>hoBlocklist+noRemove 成對 → L4:到期探測、失敗再現重封(倍增封頂 4×)、乾淨+流量背書才恢復</a:t>
+              <a:t>① 一次設兩個旗標:禁止換過去(hoBlocklist)+ 禁止被刪掉(noRemove,保住失敗歷史)</a:t>
+            </a:r>
+          </a:p>
+          <a:p>
+            <a:pPr>
+              <a:spcAft>
+                <a:spcPts val="300"/>
+              </a:spcAft>
+            </a:pPr>
+            <a:r>
+              <a:rPr sz="800" b="0">
+                <a:solidFill>
+                  <a:srgbClr val="222A30"/>
+                </a:solidFill>
+                <a:latin typeface="Arial"/>
+                <a:ea typeface="Microsoft JhengHei"/>
+              </a:rPr>
+              <a:t>② 不永久封鎖:時間到自動探測一次</a:t>
+            </a:r>
+          </a:p>
+          <a:p>
+            <a:pPr>
+              <a:spcAft>
+                <a:spcPts val="300"/>
+              </a:spcAft>
+            </a:pPr>
+            <a:r>
+              <a:rPr sz="800" b="0">
+                <a:solidFill>
+                  <a:srgbClr val="222A30"/>
+                </a:solidFill>
+                <a:latin typeface="Arial"/>
+                <a:ea typeface="Microsoft JhengHei"/>
+              </a:rPr>
+              <a:t>③ 探測又失敗就重新封鎖,間隔加倍(最多 4 倍)</a:t>
+            </a:r>
+          </a:p>
+          <a:p>
+            <a:pPr>
+              <a:spcAft>
+                <a:spcPts val="300"/>
+              </a:spcAft>
+            </a:pPr>
+            <a:r>
+              <a:rPr sz="800" b="0">
+                <a:solidFill>
+                  <a:srgbClr val="222A30"/>
+                </a:solidFill>
+                <a:latin typeface="Arial"/>
+                <a:ea typeface="Microsoft JhengHei"/>
+              </a:rPr>
+              <a:t>④ 要「乾淨且真的有流量」才判定恢復</a:t>
             </a:r>
           </a:p>
           <a:p>
@@ -14708,6 +14987,69 @@
                 <a:ea typeface="Microsoft JhengHei"/>
               </a:rPr>
               <a:t>倍增鏈 300→600→1200 封頂 → 19:18:36 RECOVERED(流量背書)</a:t>
+            </a:r>
+          </a:p>
+        </p:txBody>
+      </p:sp>
+      <p:sp>
+        <p:nvSpPr>
+          <p:cNvPr id="7" name="SimInjection"/>
+          <p:cNvSpPr/>
+          <p:nvPr/>
+        </p:nvSpPr>
+        <p:spPr>
+          <a:xfrm>
+            <a:off x="320040" y="4025000"/>
+            <a:ext cx="5577840" cy="800000"/>
+          </a:xfrm>
+          <a:prstGeom prst="roundRect">
+            <a:avLst/>
+          </a:prstGeom>
+          <a:solidFill>
+            <a:srgbClr val="44546A"/>
+          </a:solidFill>
+          <a:ln w="12700">
+            <a:solidFill>
+              <a:srgbClr val="1CADE4"/>
+            </a:solidFill>
+          </a:ln>
+          <a:effectLst/>
+        </p:spPr>
+        <p:txBody>
+          <a:bodyPr rtlCol="0" anchor="ctr" wrap="square" tIns="45720" bIns="45720"/>
+          <a:lstStyle/>
+          <a:p>
+            <a:pPr algn="ctr">
+              <a:spcAft>
+                <a:spcPts val="200"/>
+              </a:spcAft>
+            </a:pPr>
+            <a:r>
+              <a:rPr sz="1000" b="1">
+                <a:solidFill>
+                  <a:srgbClr val="FFD966"/>
+                </a:solidFill>
+                <a:latin typeface="Arial"/>
+                <a:ea typeface="Microsoft JhengHei"/>
+              </a:rPr>
+              <a:t>sim 端怎麼把這個病做出來</a:t>
+            </a:r>
+          </a:p>
+          <a:p>
+            <a:pPr>
+              <a:spcAft>
+                <a:spcPts val="200"/>
+              </a:spcAft>
+            </a:pPr>
+            <a:r>
+              <a:rPr sz="850" b="0">
+                <a:solidFill>
+                  <a:srgbClr val="FFFFFF"/>
+                </a:solidFill>
+                <a:latin typeface="Arial"/>
+                <a:ea typeface="Microsoft JhengHei"/>
+              </a:rPr>
+              <a:t>Random Access 壞掉:檔案熱開關 tmp/ho_force_fail.txt 寫入「n30_c0,RandomAccessProblem」→ executor 對該 target 的每次換手都在「執行階段」回 RA 失敗(UE 到得了、接不進)。寫檔即生效,免重啟、不打斷 L4 計時。</a:t>
             </a:r>
           </a:p>
         </p:txBody>
@@ -15170,18 +15512,52 @@
           <a:p>
             <a:pPr>
               <a:spcAft>
-                <a:spcPts val="200"/>
+                <a:spcPts val="300"/>
               </a:spcAft>
             </a:pPr>
             <a:r>
-              <a:rPr sz="900" b="0">
+              <a:rPr sz="800" b="0">
                 <a:solidFill>
                   <a:srgbClr val="222A30"/>
                 </a:solidFill>
                 <a:latin typeface="Arial"/>
                 <a:ea typeface="Microsoft JhengHei"/>
               </a:rPr>
-              <a:t>逐 PCI REPORTCGI(帶外來 arfcn)→ ADD;frequencyRelations 由 gNB 自動長出</a:t>
+              <a:t>① 先確認這個頻點不在本 cell 已知的頻率清單裡</a:t>
+            </a:r>
+          </a:p>
+          <a:p>
+            <a:pPr>
+              <a:spcAft>
+                <a:spcPts val="300"/>
+              </a:spcAft>
+            </a:pPr>
+            <a:r>
+              <a:rPr sz="800" b="0">
+                <a:solidFill>
+                  <a:srgbClr val="222A30"/>
+                </a:solidFill>
+                <a:latin typeface="Arial"/>
+                <a:ea typeface="Microsoft JhengHei"/>
+              </a:rPr>
+              <a:t>② 逐個 PCI 讀 CGI(帶上外來頻點)→ 送 ADD</a:t>
+            </a:r>
+          </a:p>
+          <a:p>
+            <a:pPr>
+              <a:spcAft>
+                <a:spcPts val="300"/>
+              </a:spcAft>
+            </a:pPr>
+            <a:r>
+              <a:rPr sz="800" b="0">
+                <a:solidFill>
+                  <a:srgbClr val="222A30"/>
+                </a:solidFill>
+                <a:latin typeface="Arial"/>
+                <a:ea typeface="Microsoft JhengHei"/>
+              </a:rPr>
+              <a:t>③ 頻率層關係由 gNB 自己長出來,xApp 不用另外建</a:t>
             </a:r>
           </a:p>
           <a:p>
@@ -15288,6 +15664,69 @@
                 <a:ea typeface="Microsoft JhengHei"/>
               </a:rPr>
               <a:t>q8_v1..5(空表 bug 由真實 fixture 抓出)</a:t>
+            </a:r>
+          </a:p>
+        </p:txBody>
+      </p:sp>
+      <p:sp>
+        <p:nvSpPr>
+          <p:cNvPr id="7" name="SimInjection"/>
+          <p:cNvSpPr/>
+          <p:nvPr/>
+        </p:nvSpPr>
+        <p:spPr>
+          <a:xfrm>
+            <a:off x="320040" y="4025000"/>
+            <a:ext cx="5577840" cy="800000"/>
+          </a:xfrm>
+          <a:prstGeom prst="roundRect">
+            <a:avLst/>
+          </a:prstGeom>
+          <a:solidFill>
+            <a:srgbClr val="44546A"/>
+          </a:solidFill>
+          <a:ln w="12700">
+            <a:solidFill>
+              <a:srgbClr val="1CADE4"/>
+            </a:solidFill>
+          </a:ln>
+          <a:effectLst/>
+        </p:spPr>
+        <p:txBody>
+          <a:bodyPr rtlCol="0" anchor="ctr" wrap="square" tIns="45720" bIns="45720"/>
+          <a:lstStyle/>
+          <a:p>
+            <a:pPr algn="ctr">
+              <a:spcAft>
+                <a:spcPts val="200"/>
+              </a:spcAft>
+            </a:pPr>
+            <a:r>
+              <a:rPr sz="1000" b="1">
+                <a:solidFill>
+                  <a:srgbClr val="FFD966"/>
+                </a:solidFill>
+                <a:latin typeface="Arial"/>
+                <a:ea typeface="Microsoft JhengHei"/>
+              </a:rPr>
+              <a:t>sim 端怎麼把這個病做出來</a:t>
+            </a:r>
+          </a:p>
+          <a:p>
+            <a:pPr>
+              <a:spcAft>
+                <a:spcPts val="200"/>
+              </a:spcAft>
+            </a:pPr>
+            <a:r>
+              <a:rPr sz="850" b="0">
+                <a:solidFill>
+                  <a:srgbClr val="FFFFFF"/>
+                </a:solidFill>
+                <a:latin typeface="Arial"/>
+                <a:ea typeface="Microsoft JhengHei"/>
+              </a:rPr>
+              <a:t>砍掉 3.5GHz→2.1GHz 整層關係(3 條),2.1G 的 cell 照常存在也量得到;通道計算的干擾只算同頻 —— 形成「看得到卻換不過去」的缺層。</a:t>
             </a:r>
           </a:p>
         </p:txBody>
@@ -15750,18 +16189,69 @@
           <a:p>
             <a:pPr>
               <a:spcAft>
-                <a:spcPts val="200"/>
+                <a:spcPts val="300"/>
               </a:spcAft>
             </a:pPr>
             <a:r>
-              <a:rPr sz="900" b="0">
+              <a:rPr sz="800" b="0">
                 <a:solidFill>
                   <a:srgbClr val="222A30"/>
                 </a:solidFill>
                 <a:latin typeface="Arial"/>
                 <a:ea typeface="Microsoft JhengHei"/>
               </a:rPr>
-              <a:t>挑最冷 REMOVE(至多 3 候選)→ 騰位 ADD;全拒 → SMO;discovery 分支見滿載自我抑制讓路</a:t>
+              <a:t>① 挑最冷的條目(沒量測也沒換手)最多 3 條,送 REMOVE 騰位</a:t>
+            </a:r>
+          </a:p>
+          <a:p>
+            <a:pPr>
+              <a:spcAft>
+                <a:spcPts val="300"/>
+              </a:spcAft>
+            </a:pPr>
+            <a:r>
+              <a:rPr sz="800" b="0">
+                <a:solidFill>
+                  <a:srgbClr val="222A30"/>
+                </a:solidFill>
+                <a:latin typeface="Arial"/>
+                <a:ea typeface="Microsoft JhengHei"/>
+              </a:rPr>
+              <a:t>② 騰出空間後再送 ADD 建新關係</a:t>
+            </a:r>
+          </a:p>
+          <a:p>
+            <a:pPr>
+              <a:spcAft>
+                <a:spcPts val="300"/>
+              </a:spcAft>
+            </a:pPr>
+            <a:r>
+              <a:rPr sz="800" b="0">
+                <a:solidFill>
+                  <a:srgbClr val="222A30"/>
+                </a:solidFill>
+                <a:latin typeface="Arial"/>
+                <a:ea typeface="Microsoft JhengHei"/>
+              </a:rPr>
+              <a:t>③ 若全被拒(受保護條目)→ 停手送 SMO,不硬刪</a:t>
+            </a:r>
+          </a:p>
+          <a:p>
+            <a:pPr>
+              <a:spcAft>
+                <a:spcPts val="300"/>
+              </a:spcAft>
+            </a:pPr>
+            <a:r>
+              <a:rPr sz="800" b="0">
+                <a:solidFill>
+                  <a:srgbClr val="222A30"/>
+                </a:solidFill>
+                <a:latin typeface="Arial"/>
+                <a:ea typeface="Microsoft JhengHei"/>
+              </a:rPr>
+              <a:t>④ 這段期間其他分支看到滿載會自動讓路</a:t>
             </a:r>
           </a:p>
           <a:p>
@@ -15868,6 +16358,69 @@
                 <a:ea typeface="Microsoft JhengHei"/>
               </a:rPr>
               <a:t>q9_v1..4(v10 遷移曾漏數的第 6 支重工)</a:t>
+            </a:r>
+          </a:p>
+        </p:txBody>
+      </p:sp>
+      <p:sp>
+        <p:nvSpPr>
+          <p:cNvPr id="7" name="SimInjection"/>
+          <p:cNvSpPr/>
+          <p:nvPr/>
+        </p:nvSpPr>
+        <p:spPr>
+          <a:xfrm>
+            <a:off x="320040" y="4025000"/>
+            <a:ext cx="5577840" cy="800000"/>
+          </a:xfrm>
+          <a:prstGeom prst="roundRect">
+            <a:avLst/>
+          </a:prstGeom>
+          <a:solidFill>
+            <a:srgbClr val="44546A"/>
+          </a:solidFill>
+          <a:ln w="12700">
+            <a:solidFill>
+              <a:srgbClr val="1CADE4"/>
+            </a:solidFill>
+          </a:ln>
+          <a:effectLst/>
+        </p:spPr>
+        <p:txBody>
+          <a:bodyPr rtlCol="0" anchor="ctr" wrap="square" tIns="45720" bIns="45720"/>
+          <a:lstStyle/>
+          <a:p>
+            <a:pPr algn="ctr">
+              <a:spcAft>
+                <a:spcPts val="200"/>
+              </a:spcAft>
+            </a:pPr>
+            <a:r>
+              <a:rPr sz="1000" b="1">
+                <a:solidFill>
+                  <a:srgbClr val="FFD966"/>
+                </a:solidFill>
+                <a:latin typeface="Arial"/>
+                <a:ea typeface="Microsoft JhengHei"/>
+              </a:rPr>
+              <a:t>sim 端怎麼把這個病做出來</a:t>
+            </a:r>
+          </a:p>
+          <a:p>
+            <a:pPr>
+              <a:spcAft>
+                <a:spcPts val="200"/>
+              </a:spcAft>
+            </a:pPr>
+            <a:r>
+              <a:rPr sz="850" b="0">
+                <a:solidFill>
+                  <a:srgbClr val="FFFFFF"/>
+                </a:solidFill>
+                <a:latin typeface="Arial"/>
+                <a:ea typeface="Microsoft JhengHei"/>
+              </a:rPr>
+              <a:t>灌入合成關係把三顆 cell 的 NRT 填到 used==limit;其中刻意放一條零活動的 x24(該被修剪)與一條 noRemove 的 x25(修剪必被拒),讓 try-prune 兩種結局都驗得到。</a:t>
             </a:r>
           </a:p>
         </p:txBody>
@@ -16330,18 +16883,52 @@
           <a:p>
             <a:pPr>
               <a:spcAft>
-                <a:spcPts val="200"/>
+                <a:spcPts val="300"/>
               </a:spcAft>
             </a:pPr>
             <a:r>
-              <a:rPr sz="900" b="0">
+              <a:rPr sz="800" b="0">
                 <a:solidFill>
                   <a:srgbClr val="222A30"/>
                 </a:solidFill>
                 <a:latin typeface="Arial"/>
                 <a:ea typeface="Microsoft JhengHei"/>
               </a:rPr>
-              <a:t>verify-first(storedPci 仍對→不修)→ REMOVE(stale-pci)+ADD 原子 → 失敗率消退</a:t>
+              <a:t>① 先驗證:表裡記的 PCI 若其實還對就不動(避免誤修)</a:t>
+            </a:r>
+          </a:p>
+          <a:p>
+            <a:pPr>
+              <a:spcAft>
+                <a:spcPts val="300"/>
+              </a:spcAft>
+            </a:pPr>
+            <a:r>
+              <a:rPr sz="800" b="0">
+                <a:solidFill>
+                  <a:srgbClr val="222A30"/>
+                </a:solidFill>
+                <a:latin typeface="Arial"/>
+                <a:ea typeface="Microsoft JhengHei"/>
+              </a:rPr>
+              <a:t>② 確認過期 → 刪舊條目 + 建正確的新條目,同一步完成不留空窗</a:t>
+            </a:r>
+          </a:p>
+          <a:p>
+            <a:pPr>
+              <a:spcAft>
+                <a:spcPts val="300"/>
+              </a:spcAft>
+            </a:pPr>
+            <a:r>
+              <a:rPr sz="800" b="0">
+                <a:solidFill>
+                  <a:srgbClr val="222A30"/>
+                </a:solidFill>
+                <a:latin typeface="Arial"/>
+                <a:ea typeface="Microsoft JhengHei"/>
+              </a:rPr>
+              <a:t>③ 看換手失敗率消退確認修好</a:t>
             </a:r>
           </a:p>
           <a:p>
@@ -16448,6 +17035,69 @@
                 <a:ea typeface="Microsoft JhengHei"/>
               </a:rPr>
               <a:t>03:14:56 同秒重指 → pci=233、CNA 歸零、SUCC 恢復</a:t>
+            </a:r>
+          </a:p>
+        </p:txBody>
+      </p:sp>
+      <p:sp>
+        <p:nvSpPr>
+          <p:cNvPr id="7" name="SimInjection"/>
+          <p:cNvSpPr/>
+          <p:nvPr/>
+        </p:nvSpPr>
+        <p:spPr>
+          <a:xfrm>
+            <a:off x="320040" y="4025000"/>
+            <a:ext cx="5577840" cy="800000"/>
+          </a:xfrm>
+          <a:prstGeom prst="roundRect">
+            <a:avLst/>
+          </a:prstGeom>
+          <a:solidFill>
+            <a:srgbClr val="44546A"/>
+          </a:solidFill>
+          <a:ln w="12700">
+            <a:solidFill>
+              <a:srgbClr val="1CADE4"/>
+            </a:solidFill>
+          </a:ln>
+          <a:effectLst/>
+        </p:spPr>
+        <p:txBody>
+          <a:bodyPr rtlCol="0" anchor="ctr" wrap="square" tIns="45720" bIns="45720"/>
+          <a:lstStyle/>
+          <a:p>
+            <a:pPr algn="ctr">
+              <a:spcAft>
+                <a:spcPts val="200"/>
+              </a:spcAft>
+            </a:pPr>
+            <a:r>
+              <a:rPr sz="1000" b="1">
+                <a:solidFill>
+                  <a:srgbClr val="FFD966"/>
+                </a:solidFill>
+                <a:latin typeface="Arial"/>
+                <a:ea typeface="Microsoft JhengHei"/>
+              </a:rPr>
+              <a:t>sim 端怎麼把這個病做出來</a:t>
+            </a:r>
+          </a:p>
+          <a:p>
+            <a:pPr>
+              <a:spcAft>
+                <a:spcPts val="200"/>
+              </a:spcAft>
+            </a:pPr>
+            <a:r>
+              <a:rPr sz="850" b="0">
+                <a:solidFill>
+                  <a:srgbClr val="FFFFFF"/>
+                </a:solidFill>
+                <a:latin typeface="Arial"/>
+                <a:ea typeface="Microsoft JhengHei"/>
+              </a:rPr>
+              <a:t>Neighbor 還在,但表裡的資訊過期:只把條目的 target_pci 改成舊值 205,而 cell 實際 pci 已是 233。executor 換手前比對不符 → 回 CellNotAvailable;UE 搬回 s15 讓 A3 反覆去撞。</a:t>
             </a:r>
           </a:p>
         </p:txBody>
@@ -16910,18 +17560,52 @@
           <a:p>
             <a:pPr>
               <a:spcAft>
-                <a:spcPts val="200"/>
+                <a:spcPts val="300"/>
               </a:spcAft>
             </a:pPr>
             <a:r>
-              <a:rPr sz="900" b="0">
+              <a:rPr sz="800" b="0">
                 <a:solidFill>
                   <a:srgbClr val="222A30"/>
                 </a:solidFill>
                 <a:latin typeface="Arial"/>
                 <a:ea typeface="Microsoft JhengHei"/>
               </a:rPr>
-              <a:t>REMOVE(aging);被拒 = SMO + 入不重試帳本絕不重試(重啟由事件回填,不失憶)</a:t>
+              <a:t>① 量測與換手嘗試「同時為零」且持續滿窗,才送 REMOVE 回收</a:t>
+            </a:r>
+          </a:p>
+          <a:p>
+            <a:pPr>
+              <a:spcAft>
+                <a:spcPts val="300"/>
+              </a:spcAft>
+            </a:pPr>
+            <a:r>
+              <a:rPr sz="800" b="0">
+                <a:solidFill>
+                  <a:srgbClr val="222A30"/>
+                </a:solidFill>
+                <a:latin typeface="Arial"/>
+                <a:ea typeface="Microsoft JhengHei"/>
+              </a:rPr>
+              <a:t>② 被拒(受保護)= 記進「不再重試」帳本 + 送 SMO,絕不重複下手</a:t>
+            </a:r>
+          </a:p>
+          <a:p>
+            <a:pPr>
+              <a:spcAft>
+                <a:spcPts val="300"/>
+              </a:spcAft>
+            </a:pPr>
+            <a:r>
+              <a:rPr sz="800" b="0">
+                <a:solidFill>
+                  <a:srgbClr val="222A30"/>
+                </a:solidFill>
+                <a:latin typeface="Arial"/>
+                <a:ea typeface="Microsoft JhengHei"/>
+              </a:rPr>
+              <a:t>③ 重啟後靠事件流把帳本補回來,不會忘記自己做過什麼</a:t>
             </a:r>
           </a:p>
           <a:p>
@@ -17028,6 +17712,69 @@
                 <a:ea typeface="Microsoft JhengHei"/>
               </a:rPr>
               <a:t>四型矩陣:乾淨 REMOVED / 拒後零重發 / 單零不誤刪 / 活躍不碰</a:t>
+            </a:r>
+          </a:p>
+        </p:txBody>
+      </p:sp>
+      <p:sp>
+        <p:nvSpPr>
+          <p:cNvPr id="7" name="SimInjection"/>
+          <p:cNvSpPr/>
+          <p:nvPr/>
+        </p:nvSpPr>
+        <p:spPr>
+          <a:xfrm>
+            <a:off x="320040" y="4025000"/>
+            <a:ext cx="5577840" cy="800000"/>
+          </a:xfrm>
+          <a:prstGeom prst="roundRect">
+            <a:avLst/>
+          </a:prstGeom>
+          <a:solidFill>
+            <a:srgbClr val="44546A"/>
+          </a:solidFill>
+          <a:ln w="12700">
+            <a:solidFill>
+              <a:srgbClr val="1CADE4"/>
+            </a:solidFill>
+          </a:ln>
+          <a:effectLst/>
+        </p:spPr>
+        <p:txBody>
+          <a:bodyPr rtlCol="0" anchor="ctr" wrap="square" tIns="45720" bIns="45720"/>
+          <a:lstStyle/>
+          <a:p>
+            <a:pPr algn="ctr">
+              <a:spcAft>
+                <a:spcPts val="200"/>
+              </a:spcAft>
+            </a:pPr>
+            <a:r>
+              <a:rPr sz="1000" b="1">
+                <a:solidFill>
+                  <a:srgbClr val="FFD966"/>
+                </a:solidFill>
+                <a:latin typeface="Arial"/>
+                <a:ea typeface="Microsoft JhengHei"/>
+              </a:rPr>
+              <a:t>sim 端怎麼把這個病做出來</a:t>
+            </a:r>
+          </a:p>
+          <a:p>
+            <a:pPr>
+              <a:spcAft>
+                <a:spcPts val="200"/>
+              </a:spcAft>
+            </a:pPr>
+            <a:r>
+              <a:rPr sz="850" b="0">
+                <a:solidFill>
+                  <a:srgbClr val="FFFFFF"/>
+                </a:solidFill>
+                <a:latin typeface="Arial"/>
+                <a:ea typeface="Microsoft JhengHei"/>
+              </a:rPr>
+              <a:t>建 ghost 條目 main→dead_c0(目標 cell 根本不存在、無保護)與 main→old_c0(protected,驗拒絕路徑);另留 main→tmp_c0 當單零對照(有量測、無換手,不得誤刪)。</a:t>
             </a:r>
           </a:p>
         </p:txBody>
@@ -17490,18 +18237,52 @@
           <a:p>
             <a:pPr>
               <a:spcAft>
-                <a:spcPts val="200"/>
+                <a:spcPts val="300"/>
               </a:spcAft>
             </a:pPr>
             <a:r>
-              <a:rPr sz="900" b="0">
+              <a:rPr sz="800" b="0">
                 <a:solidFill>
                   <a:srgbClr val="222A30"/>
                 </a:solidFill>
                 <a:latin typeface="Arial"/>
                 <a:ea typeface="Microsoft JhengHei"/>
               </a:rPr>
-              <a:t>無據 → 成對 FLAG_CLEAR 修復 + 告警 + 行為確認;正當 → 已檢視、不動、不入 /alarms</a:t>
+              <a:t>① 旗標在 E2 看不到,只能從行為推論是不是被無故封鎖</a:t>
+            </a:r>
+          </a:p>
+          <a:p>
+            <a:pPr>
+              <a:spcAft>
+                <a:spcPts val="300"/>
+              </a:spcAft>
+            </a:pPr>
+            <a:r>
+              <a:rPr sz="800" b="0">
+                <a:solidFill>
+                  <a:srgbClr val="222A30"/>
+                </a:solidFill>
+                <a:latin typeface="Arial"/>
+                <a:ea typeface="Microsoft JhengHei"/>
+              </a:rPr>
+              <a:t>② 判定「無據」→ 成對解除 + 告警 + 確認 UE 真的開始走</a:t>
+            </a:r>
+          </a:p>
+          <a:p>
+            <a:pPr>
+              <a:spcAft>
+                <a:spcPts val="300"/>
+              </a:spcAft>
+            </a:pPr>
+            <a:r>
+              <a:rPr sz="800" b="0">
+                <a:solidFill>
+                  <a:srgbClr val="222A30"/>
+                </a:solidFill>
+                <a:latin typeface="Arial"/>
+                <a:ea typeface="Microsoft JhengHei"/>
+              </a:rPr>
+              <a:t>③ 判定「正當」(有失敗歷史)→ 看過就好,不動、也不告警</a:t>
             </a:r>
           </a:p>
           <a:p>
@@ -17607,7 +18388,70 @@
                 <a:latin typeface="Arial"/>
                 <a:ea typeface="Microsoft JhengHei"/>
               </a:rPr>
-              <a:t>live:正當封鎖不碰(cum 有史)✅;⚠ sim hoValidated 恆 false → 無據判定失真,待修後重驗</a:t>
+              <a:t>live:正當封鎖不碰(cum 有史)✅;sim hoValidated 已修並回填(08/26),假陽性成因消失,待 RIC 補「新生關係寬限」後重驗</a:t>
+            </a:r>
+          </a:p>
+        </p:txBody>
+      </p:sp>
+      <p:sp>
+        <p:nvSpPr>
+          <p:cNvPr id="7" name="SimInjection"/>
+          <p:cNvSpPr/>
+          <p:nvPr/>
+        </p:nvSpPr>
+        <p:spPr>
+          <a:xfrm>
+            <a:off x="320040" y="4025000"/>
+            <a:ext cx="5577840" cy="800000"/>
+          </a:xfrm>
+          <a:prstGeom prst="roundRect">
+            <a:avLst/>
+          </a:prstGeom>
+          <a:solidFill>
+            <a:srgbClr val="44546A"/>
+          </a:solidFill>
+          <a:ln w="12700">
+            <a:solidFill>
+              <a:srgbClr val="1CADE4"/>
+            </a:solidFill>
+          </a:ln>
+          <a:effectLst/>
+        </p:spPr>
+        <p:txBody>
+          <a:bodyPr rtlCol="0" anchor="ctr" wrap="square" tIns="45720" bIns="45720"/>
+          <a:lstStyle/>
+          <a:p>
+            <a:pPr algn="ctr">
+              <a:spcAft>
+                <a:spcPts val="200"/>
+              </a:spcAft>
+            </a:pPr>
+            <a:r>
+              <a:rPr sz="1000" b="1">
+                <a:solidFill>
+                  <a:srgbClr val="FFD966"/>
+                </a:solidFill>
+                <a:latin typeface="Arial"/>
+                <a:ea typeface="Microsoft JhengHei"/>
+              </a:rPr>
+              <a:t>sim 端怎麼把這個病做出來</a:t>
+            </a:r>
+          </a:p>
+          <a:p>
+            <a:pPr>
+              <a:spcAft>
+                <a:spcPts val="200"/>
+              </a:spcAft>
+            </a:pPr>
+            <a:r>
+              <a:rPr sz="850" b="0">
+                <a:solidFill>
+                  <a:srgbClr val="FFFFFF"/>
+                </a:solidFill>
+                <a:latin typeface="Arial"/>
+                <a:ea typeface="Microsoft JhengHei"/>
+              </a:rPr>
+              <a:t>兩條關係給一模一樣的旗標(hoBlocklist+xnBlocklist),差別只造在行為訊號:n80 注入 40 筆歷史 RA 失敗 + hoValidated=true(正當);d02 零失敗史 + hoValidated=false(無據)。</a:t>
             </a:r>
           </a:p>
         </p:txBody>
@@ -20349,18 +21193,69 @@
           <a:p>
             <a:pPr>
               <a:spcAft>
-                <a:spcPts val="200"/>
+                <a:spcPts val="300"/>
               </a:spcAft>
             </a:pPr>
             <a:r>
-              <a:rPr sz="900" b="0">
+              <a:rPr sz="800" b="0">
                 <a:solidFill>
                   <a:srgbClr val="222A30"/>
                 </a:solidFill>
                 <a:latin typeface="Arial"/>
                 <a:ea typeface="Microsoft JhengHei"/>
               </a:rPr>
-              <a:t>REPORTCGI 解析(unique)→ anr-add(單向)→ confirm(推播/快照)→ UE 開始走新關係</a:t>
+              <a:t>① 請基地台叫 UE 去讀目標的全域識別(CGI)——「REPORTCGI」,解析結果唯一才算數</a:t>
+            </a:r>
+          </a:p>
+          <a:p>
+            <a:pPr>
+              <a:spcAft>
+                <a:spcPts val="300"/>
+              </a:spcAft>
+            </a:pPr>
+            <a:r>
+              <a:rPr sz="800" b="0">
+                <a:solidFill>
+                  <a:srgbClr val="222A30"/>
+                </a:solidFill>
+                <a:latin typeface="Arial"/>
+                <a:ea typeface="Microsoft JhengHei"/>
+              </a:rPr>
+              <a:t>② 送 ADD 請 gNB 建立這條鄰區關係(只建單向;反向由對方 gNB 自己建)</a:t>
+            </a:r>
+          </a:p>
+          <a:p>
+            <a:pPr>
+              <a:spcAft>
+                <a:spcPts val="300"/>
+              </a:spcAft>
+            </a:pPr>
+            <a:r>
+              <a:rPr sz="800" b="0">
+                <a:solidFill>
+                  <a:srgbClr val="222A30"/>
+                </a:solidFill>
+                <a:latin typeface="Arial"/>
+                <a:ea typeface="Microsoft JhengHei"/>
+              </a:rPr>
+              <a:t>③ 等 NRT 回讀確認真的寫進去了(推播或下一張快照)</a:t>
+            </a:r>
+          </a:p>
+          <a:p>
+            <a:pPr>
+              <a:spcAft>
+                <a:spcPts val="300"/>
+              </a:spcAft>
+            </a:pPr>
+            <a:r>
+              <a:rPr sz="800" b="0">
+                <a:solidFill>
+                  <a:srgbClr val="222A30"/>
+                </a:solidFill>
+                <a:latin typeface="Arial"/>
+                <a:ea typeface="Microsoft JhengHei"/>
+              </a:rPr>
+              <a:t>④ 看 UE 開始走新關係、掉線重建歸零 = 真的修好</a:t>
             </a:r>
           </a:p>
           <a:p>
@@ -20467,6 +21362,69 @@
                 <a:ea typeface="Microsoft JhengHei"/>
               </a:rPr>
               <a:t>乾淨重跑:03:24:36 ADD → A3 SUCC 4/0 → RLF 歸零</a:t>
+            </a:r>
+          </a:p>
+        </p:txBody>
+      </p:sp>
+      <p:sp>
+        <p:nvSpPr>
+          <p:cNvPr id="8" name="SimInjection"/>
+          <p:cNvSpPr/>
+          <p:nvPr/>
+        </p:nvSpPr>
+        <p:spPr>
+          <a:xfrm>
+            <a:off x="320040" y="4025000"/>
+            <a:ext cx="5577840" cy="800000"/>
+          </a:xfrm>
+          <a:prstGeom prst="roundRect">
+            <a:avLst/>
+          </a:prstGeom>
+          <a:solidFill>
+            <a:srgbClr val="44546A"/>
+          </a:solidFill>
+          <a:ln w="12700">
+            <a:solidFill>
+              <a:srgbClr val="1CADE4"/>
+            </a:solidFill>
+          </a:ln>
+          <a:effectLst/>
+        </p:spPr>
+        <p:txBody>
+          <a:bodyPr rtlCol="0" anchor="ctr" wrap="square" tIns="45720" bIns="45720"/>
+          <a:lstStyle/>
+          <a:p>
+            <a:pPr algn="ctr">
+              <a:spcAft>
+                <a:spcPts val="200"/>
+              </a:spcAft>
+            </a:pPr>
+            <a:r>
+              <a:rPr sz="1000" b="1">
+                <a:solidFill>
+                  <a:srgbClr val="FFD966"/>
+                </a:solidFill>
+                <a:latin typeface="Arial"/>
+                <a:ea typeface="Microsoft JhengHei"/>
+              </a:rPr>
+              <a:t>sim 端怎麼把這個病做出來</a:t>
+            </a:r>
+          </a:p>
+          <a:p>
+            <a:pPr>
+              <a:spcAft>
+                <a:spcPts val="200"/>
+              </a:spcAft>
+            </a:pPr>
+            <a:r>
+              <a:rPr sz="850" b="0">
+                <a:solidFill>
+                  <a:srgbClr val="FFFFFF"/>
+                </a:solidFill>
+                <a:latin typeface="Arial"/>
+                <a:ea typeface="Microsoft JhengHei"/>
+              </a:rPr>
+              <a:t>刪掉 NRT 裡 src→nbr 那一條(_cut)。sim 的 A3 有 NRT 閘(ANR_REQUIRE_NRT):表上沒有就不准換手 → UE 一路撐到 RLF → 掉線後重建到對向 cell,回流統計才長得出來。</a:t>
             </a:r>
           </a:p>
         </p:txBody>
@@ -21019,18 +21977,52 @@
           <a:p>
             <a:pPr>
               <a:spcAft>
-                <a:spcPts val="200"/>
+                <a:spcPts val="300"/>
               </a:spcAft>
             </a:pPr>
             <a:r>
-              <a:rPr sz="900" b="0">
+              <a:rPr sz="800" b="0">
                 <a:solidFill>
                   <a:srgbClr val="222A30"/>
                 </a:solidFill>
                 <a:latin typeface="Arial"/>
                 <a:ea typeface="Microsoft JhengHei"/>
               </a:rPr>
-              <a:t>REPORTCGI → anr-add;anrIntraEnabled=false 時改「偵測+拒寫+SMO」</a:t>
+              <a:t>① 這題不必等 UE 掉線 —— 量測就看得出「該換卻沒有關係」</a:t>
+            </a:r>
+          </a:p>
+          <a:p>
+            <a:pPr>
+              <a:spcAft>
+                <a:spcPts val="300"/>
+              </a:spcAft>
+            </a:pPr>
+            <a:r>
+              <a:rPr sz="800" b="0">
+                <a:solidFill>
+                  <a:srgbClr val="222A30"/>
+                </a:solidFill>
+                <a:latin typeface="Arial"/>
+                <a:ea typeface="Microsoft JhengHei"/>
+              </a:rPr>
+              <a:t>② 讀出目標 CGI → 送 ADD 建關係</a:t>
+            </a:r>
+          </a:p>
+          <a:p>
+            <a:pPr>
+              <a:spcAft>
+                <a:spcPts val="300"/>
+              </a:spcAft>
+            </a:pPr>
+            <a:r>
+              <a:rPr sz="800" b="0">
+                <a:solidFill>
+                  <a:srgbClr val="222A30"/>
+                </a:solidFill>
+                <a:latin typeface="Arial"/>
+                <a:ea typeface="Microsoft JhengHei"/>
+              </a:rPr>
+              <a:t>③ 若該基地台把 ANR 自動建立關掉了:只偵測、不寫入,改送 SMO 請管理面處理</a:t>
             </a:r>
           </a:p>
           <a:p>
@@ -21137,6 +22129,69 @@
                 <a:ea typeface="Microsoft JhengHei"/>
               </a:rPr>
               <a:t>q2_v1..5(6.1dB 邊界正反)+ 抽驗中 live ADD</a:t>
+            </a:r>
+          </a:p>
+        </p:txBody>
+      </p:sp>
+      <p:sp>
+        <p:nvSpPr>
+          <p:cNvPr id="8" name="SimInjection"/>
+          <p:cNvSpPr/>
+          <p:nvPr/>
+        </p:nvSpPr>
+        <p:spPr>
+          <a:xfrm>
+            <a:off x="320040" y="4025000"/>
+            <a:ext cx="5577840" cy="800000"/>
+          </a:xfrm>
+          <a:prstGeom prst="roundRect">
+            <a:avLst/>
+          </a:prstGeom>
+          <a:solidFill>
+            <a:srgbClr val="44546A"/>
+          </a:solidFill>
+          <a:ln w="12700">
+            <a:solidFill>
+              <a:srgbClr val="1CADE4"/>
+            </a:solidFill>
+          </a:ln>
+          <a:effectLst/>
+        </p:spPr>
+        <p:txBody>
+          <a:bodyPr rtlCol="0" anchor="ctr" wrap="square" tIns="45720" bIns="45720"/>
+          <a:lstStyle/>
+          <a:p>
+            <a:pPr algn="ctr">
+              <a:spcAft>
+                <a:spcPts val="200"/>
+              </a:spcAft>
+            </a:pPr>
+            <a:r>
+              <a:rPr sz="1000" b="1">
+                <a:solidFill>
+                  <a:srgbClr val="FFD966"/>
+                </a:solidFill>
+                <a:latin typeface="Arial"/>
+                <a:ea typeface="Microsoft JhengHei"/>
+              </a:rPr>
+              <a:t>sim 端怎麼把這個病做出來</a:t>
+            </a:r>
+          </a:p>
+          <a:p>
+            <a:pPr>
+              <a:spcAft>
+                <a:spcPts val="200"/>
+              </a:spcAft>
+            </a:pPr>
+            <a:r>
+              <a:rPr sz="850" b="0">
+                <a:solidFill>
+                  <a:srgbClr val="FFFFFF"/>
+                </a:solidFill>
+                <a:latin typeface="Arial"/>
+                <a:ea typeface="Microsoft JhengHei"/>
+              </a:rPr>
+              <a:t>一樣剪掉 s25→n35 條目,但用 PathSolver 逐點實測把 UE 擺進「鄰區進逼卻不掉線」的窄窗(gap≈0.1dB、SINR≥−2)—— 與第 1 題的差別在 UE 撐得住、不靠 RLF 顯病。</a:t>
             </a:r>
           </a:p>
         </p:txBody>
@@ -23013,18 +24068,52 @@
           <a:p>
             <a:pPr>
               <a:spcAft>
-                <a:spcPts val="200"/>
+                <a:spcPts val="300"/>
               </a:spcAft>
             </a:pPr>
             <a:r>
-              <a:rPr sz="900" b="0">
+              <a:rPr sz="800" b="0">
                 <a:solidFill>
                   <a:srgbClr val="222A30"/>
                 </a:solidFill>
                 <a:latin typeface="Arial"/>
                 <a:ea typeface="Microsoft JhengHei"/>
               </a:rPr>
-              <a:t>REPORTCGI ×3 抽樣一致 → anr-add;容量滿讓 Q9</a:t>
+              <a:t>① 深邊緣本來人就少,不可以因為「量測次數太少」把它駁回</a:t>
+            </a:r>
+          </a:p>
+          <a:p>
+            <a:pPr>
+              <a:spcAft>
+                <a:spcPts val="300"/>
+              </a:spcAft>
+            </a:pPr>
+            <a:r>
+              <a:rPr sz="800" b="0">
+                <a:solidFill>
+                  <a:srgbClr val="222A30"/>
+                </a:solidFill>
+                <a:latin typeface="Arial"/>
+                <a:ea typeface="Microsoft JhengHei"/>
+              </a:rPr>
+              <a:t>② 目標 CGI 連續抽樣 3 次結果一致才採信 → 送 ADD</a:t>
+            </a:r>
+          </a:p>
+          <a:p>
+            <a:pPr>
+              <a:spcAft>
+                <a:spcPts val="300"/>
+              </a:spcAft>
+            </a:pPr>
+            <a:r>
+              <a:rPr sz="800" b="0">
+                <a:solidFill>
+                  <a:srgbClr val="222A30"/>
+                </a:solidFill>
+                <a:latin typeface="Arial"/>
+                <a:ea typeface="Microsoft JhengHei"/>
+              </a:rPr>
+              <a:t>③ 若鄰區表已滿,讓第 9 題的容量修剪先處理</a:t>
             </a:r>
           </a:p>
           <a:p>
@@ -23131,6 +24220,69 @@
                 <a:ea typeface="Microsoft JhengHei"/>
               </a:rPr>
               <a:t>q3_v1..7 離線向量 ✅;live fixture 為「報告門檻 −85」型,深邊緣增益構型待補</a:t>
+            </a:r>
+          </a:p>
+        </p:txBody>
+      </p:sp>
+      <p:sp>
+        <p:nvSpPr>
+          <p:cNvPr id="7" name="SimInjection"/>
+          <p:cNvSpPr/>
+          <p:nvPr/>
+        </p:nvSpPr>
+        <p:spPr>
+          <a:xfrm>
+            <a:off x="320040" y="4025000"/>
+            <a:ext cx="5577840" cy="800000"/>
+          </a:xfrm>
+          <a:prstGeom prst="roundRect">
+            <a:avLst/>
+          </a:prstGeom>
+          <a:solidFill>
+            <a:srgbClr val="44546A"/>
+          </a:solidFill>
+          <a:ln w="12700">
+            <a:solidFill>
+              <a:srgbClr val="1CADE4"/>
+            </a:solidFill>
+          </a:ln>
+          <a:effectLst/>
+        </p:spPr>
+        <p:txBody>
+          <a:bodyPr rtlCol="0" anchor="ctr" wrap="square" tIns="45720" bIns="45720"/>
+          <a:lstStyle/>
+          <a:p>
+            <a:pPr algn="ctr">
+              <a:spcAft>
+                <a:spcPts val="200"/>
+              </a:spcAft>
+            </a:pPr>
+            <a:r>
+              <a:rPr sz="1000" b="1">
+                <a:solidFill>
+                  <a:srgbClr val="FFD966"/>
+                </a:solidFill>
+                <a:latin typeface="Arial"/>
+                <a:ea typeface="Microsoft JhengHei"/>
+              </a:rPr>
+              <a:t>sim 端怎麼把這個病做出來</a:t>
+            </a:r>
+          </a:p>
+          <a:p>
+            <a:pPr>
+              <a:spcAft>
+                <a:spcPts val="200"/>
+              </a:spcAft>
+            </a:pPr>
+            <a:r>
+              <a:rPr sz="850" b="0">
+                <a:solidFill>
+                  <a:srgbClr val="FFFFFF"/>
+                </a:solidFill>
+                <a:latin typeface="Arial"/>
+                <a:ea typeface="Microsoft JhengHei"/>
+              </a:rPr>
+              <a:t>現行:剪掉 s28→n91 + 臨時把量測回報門檻設 −85dBm(TS 38.331 reportConfig)讓樣本變稀疏。⚠ 卷面要的是深邊緣幾何(serving ≤−105、相對增益 ≥10dB);實測 s28 天線凹陷可達 −108.7dBm,場景重佈中。</a:t>
             </a:r>
           </a:p>
         </p:txBody>
@@ -23593,18 +24745,35 @@
           <a:p>
             <a:pPr>
               <a:spcAft>
-                <a:spcPts val="200"/>
+                <a:spcPts val="300"/>
               </a:spcAft>
             </a:pPr>
             <a:r>
-              <a:rPr sz="900" b="0">
+              <a:rPr sz="800" b="0">
                 <a:solidFill>
                   <a:srgbClr val="222A30"/>
                 </a:solidFill>
                 <a:latin typeface="Arial"/>
                 <a:ea typeface="Microsoft JhengHei"/>
               </a:rPr>
-              <a:t>REPORTCGI ×2 一致 ∧ novel(不在既有 targets)→ 單向 ADD</a:t>
+              <a:t>① 先確認這個 (PCI, 頻點) 不在任何既有關係裡 —— 真的是新面孔</a:t>
+            </a:r>
+          </a:p>
+          <a:p>
+            <a:pPr>
+              <a:spcAft>
+                <a:spcPts val="300"/>
+              </a:spcAft>
+            </a:pPr>
+            <a:r>
+              <a:rPr sz="800" b="0">
+                <a:solidFill>
+                  <a:srgbClr val="222A30"/>
+                </a:solidFill>
+                <a:latin typeface="Arial"/>
+                <a:ea typeface="Microsoft JhengHei"/>
+              </a:rPr>
+              <a:t>② 目標 CGI 抽樣 2 次一致 → 送 ADD 建單向關係</a:t>
             </a:r>
           </a:p>
           <a:p>
@@ -23711,6 +24880,69 @@
                 <a:ea typeface="Microsoft JhengHei"/>
               </a:rPr>
               <a:t>q4_v1..4 + 抽驗中 live ADD(RLF-rank 猜來源已退役)</a:t>
+            </a:r>
+          </a:p>
+        </p:txBody>
+      </p:sp>
+      <p:sp>
+        <p:nvSpPr>
+          <p:cNvPr id="7" name="SimInjection"/>
+          <p:cNvSpPr/>
+          <p:nvPr/>
+        </p:nvSpPr>
+        <p:spPr>
+          <a:xfrm>
+            <a:off x="320040" y="4025000"/>
+            <a:ext cx="5577840" cy="800000"/>
+          </a:xfrm>
+          <a:prstGeom prst="roundRect">
+            <a:avLst/>
+          </a:prstGeom>
+          <a:solidFill>
+            <a:srgbClr val="44546A"/>
+          </a:solidFill>
+          <a:ln w="12700">
+            <a:solidFill>
+              <a:srgbClr val="1CADE4"/>
+            </a:solidFill>
+          </a:ln>
+          <a:effectLst/>
+        </p:spPr>
+        <p:txBody>
+          <a:bodyPr rtlCol="0" anchor="ctr" wrap="square" tIns="45720" bIns="45720"/>
+          <a:lstStyle/>
+          <a:p>
+            <a:pPr algn="ctr">
+              <a:spcAft>
+                <a:spcPts val="200"/>
+              </a:spcAft>
+            </a:pPr>
+            <a:r>
+              <a:rPr sz="1000" b="1">
+                <a:solidFill>
+                  <a:srgbClr val="FFD966"/>
+                </a:solidFill>
+                <a:latin typeface="Arial"/>
+                <a:ea typeface="Microsoft JhengHei"/>
+              </a:rPr>
+              <a:t>sim 端怎麼把這個病做出來</a:t>
+            </a:r>
+          </a:p>
+          <a:p>
+            <a:pPr>
+              <a:spcAft>
+                <a:spcPts val="200"/>
+              </a:spcAft>
+            </a:pPr>
+            <a:r>
+              <a:rPr sz="850" b="0">
+                <a:solidFill>
+                  <a:srgbClr val="FFFFFF"/>
+                </a:solidFill>
+                <a:latin typeface="Arial"/>
+                <a:ea typeface="Microsoft JhengHei"/>
+              </a:rPr>
+              <a:t>場景放一顆 unk_c0(pci 301),但不建任何指向它的 NRT 條目 —— cell 真的存在、量測也看得到,表上就是完全查無。</a:t>
             </a:r>
           </a:p>
         </p:txBody>

--- a/docs/report/8_27_進度報告_v10十二題.pptx
+++ b/docs/report/8_27_進度報告_v10十二題.pptx
@@ -13151,7 +13151,7 @@
                     <a:p>
                       <a:pPr algn="l"/>
                       <a:r>
-                        <a:rPr sz="850" b="0">
+                        <a:rPr sz="800" b="0">
                           <a:solidFill>
                             <a:srgbClr val="222A30"/>
                           </a:solidFill>
@@ -13170,19 +13170,18 @@
                 </a:tc>
                 <a:tc>
                   <a:txBody>
-                    <a:bodyPr wrap="square"/>
+                    <a:bodyPr/>
                     <a:lstStyle/>
                     <a:p>
-                      <a:pPr algn="l"/>
                       <a:r>
-                        <a:rPr sz="850" b="0">
+                        <a:rPr sz="800" b="0">
                           <a:solidFill>
                             <a:srgbClr val="222A30"/>
                           </a:solidFill>
                           <a:latin typeface="Arial"/>
                           <a:ea typeface="Microsoft JhengHei"/>
                         </a:rPr>
-                        <a:t>兩 cell 同 PCI 皆在視野</a:t>
+                        <a:t>場景讓 west_c7 與 east_c7 兩顆不同 cell 共用 pci=7,UE 在中間兩顆都量得到</a:t>
                       </a:r>
                     </a:p>
                   </a:txBody>
@@ -13194,19 +13193,18 @@
                 </a:tc>
                 <a:tc>
                   <a:txBody>
-                    <a:bodyPr wrap="square"/>
+                    <a:bodyPr/>
                     <a:lstStyle/>
                     <a:p>
-                      <a:pPr algn="l"/>
                       <a:r>
-                        <a:rPr sz="850" b="0">
+                        <a:rPr sz="800" b="0">
                           <a:solidFill>
                             <a:srgbClr val="222A30"/>
                           </a:solidFill>
                           <a:latin typeface="Arial"/>
                           <a:ea typeface="Microsoft JhengHei"/>
                         </a:rPr>
-                        <a:t>撞號的直接證據(雙 NCGI)</a:t>
+                        <a:t>同一個 PCI 解出兩個不同 NCGI —— 這就是撞號的直接證據</a:t>
                       </a:r>
                     </a:p>
                   </a:txBody>
@@ -13225,7 +13223,7 @@
                     <a:p>
                       <a:pPr algn="l"/>
                       <a:r>
-                        <a:rPr sz="850" b="0">
+                        <a:rPr sz="800" b="0">
                           <a:solidFill>
                             <a:srgbClr val="222A30"/>
                           </a:solidFill>
@@ -13244,19 +13242,18 @@
                 </a:tc>
                 <a:tc>
                   <a:txBody>
-                    <a:bodyPr wrap="square"/>
+                    <a:bodyPr/>
                     <a:lstStyle/>
                     <a:p>
-                      <a:pPr algn="l"/>
                       <a:r>
-                        <a:rPr sz="850" b="0">
+                        <a:rPr sz="800" b="0">
                           <a:solidFill>
                             <a:srgbClr val="222A30"/>
                           </a:solidFill>
                           <a:latin typeface="Arial"/>
                           <a:ea typeface="Microsoft JhengHei"/>
                         </a:rPr>
-                        <a:t>per-NCGI 解析(混淆時單值=null)</a:t>
+                        <a:t>解析結果逐 NCGI 附上 36-bit NR Cell Identity(08/26 新增欄位)</a:t>
                       </a:r>
                     </a:p>
                   </a:txBody>
@@ -13268,19 +13265,18 @@
                 </a:tc>
                 <a:tc>
                   <a:txBody>
-                    <a:bodyPr wrap="square"/>
+                    <a:bodyPr/>
                     <a:lstStyle/>
                     <a:p>
-                      <a:pPr algn="l"/>
                       <a:r>
-                        <a:rPr sz="850" b="0">
+                        <a:rPr sz="800" b="0">
                           <a:solidFill>
                             <a:srgbClr val="222A30"/>
                           </a:solidFill>
                           <a:latin typeface="Arial"/>
                           <a:ea typeface="Microsoft JhengHei"/>
                         </a:rPr>
-                        <a:t>群組換手 target 的 NCI 依據</a:t>
+                        <a:t>群組換手必須指定「正確那一顆」的全域識別,不能靠 PCI 指路</a:t>
                       </a:r>
                     </a:p>
                   </a:txBody>
@@ -13299,7 +13295,7 @@
                     <a:p>
                       <a:pPr algn="l"/>
                       <a:r>
-                        <a:rPr sz="850" b="0">
+                        <a:rPr sz="800" b="0">
                           <a:solidFill>
                             <a:srgbClr val="222A30"/>
                           </a:solidFill>
@@ -13318,19 +13314,18 @@
                 </a:tc>
                 <a:tc>
                   <a:txBody>
-                    <a:bodyPr wrap="square"/>
+                    <a:bodyPr/>
                     <a:lstStyle/>
                     <a:p>
-                      <a:pPr algn="l"/>
                       <a:r>
-                        <a:rPr sz="850" b="0">
+                        <a:rPr sz="800" b="0">
                           <a:solidFill>
                             <a:srgbClr val="222A30"/>
                           </a:solidFill>
                           <a:latin typeface="Arial"/>
                           <a:ea typeface="Microsoft JhengHei"/>
                         </a:rPr>
-                        <a:t>來源 NRT 只含其一</a:t>
+                        <a:t>佈病把來源 mid_c0 的表只留 east 一條(刪掉 west)</a:t>
                       </a:r>
                     </a:p>
                   </a:txBody>
@@ -13342,19 +13337,18 @@
                 </a:tc>
                 <a:tc>
                   <a:txBody>
-                    <a:bodyPr wrap="square"/>
+                    <a:bodyPr/>
                     <a:lstStyle/>
                     <a:p>
-                      <a:pPr algn="l"/>
                       <a:r>
-                        <a:rPr sz="850" b="0">
+                        <a:rPr sz="800" b="0">
                           <a:solidFill>
                             <a:srgbClr val="222A30"/>
                           </a:solidFill>
                           <a:latin typeface="Arial"/>
                           <a:ea typeface="Microsoft JhengHei"/>
                         </a:rPr>
-                        <a:t>敢下手的前提;不唯一=SMO-only</a:t>
+                        <a:t>消歧唯一才敢動手;兩顆都在或都不在表上時,正解只剩通報</a:t>
                       </a:r>
                     </a:p>
                   </a:txBody>
@@ -13611,7 +13605,7 @@
         </p:nvSpPr>
         <p:spPr>
           <a:xfrm>
-            <a:off x="320040" y="4025000"/>
+            <a:off x="320040" y="4060000"/>
             <a:ext cx="5577840" cy="800000"/>
           </a:xfrm>
           <a:prstGeom prst="roundRect">
@@ -13654,14 +13648,14 @@
               </a:spcAft>
             </a:pPr>
             <a:r>
-              <a:rPr sz="850" b="0">
+              <a:rPr sz="750" b="0">
                 <a:solidFill>
                   <a:srgbClr val="FFFFFF"/>
                 </a:solidFill>
                 <a:latin typeface="Arial"/>
                 <a:ea typeface="Microsoft JhengHei"/>
               </a:rPr>
-              <a:t>場景直接讓兩顆 cell 共用 pci=7(west_c7 / east_c7)造成撞號;佈病再把來源 mid_c0 的 NRT 只留 east 一條(刪掉 west),造出「owned 唯一」這個敢下手的前提。</a:t>
+              <a:t>撞號直接寫在場景裡:west_c7 與 east_c7 兩顆不同 cell 給同一個 pci=7,UE 在中間的 mid_c0 上兩顆都量得到。佈病再把 mid 的表只留 east(刪掉 west),造出「owned 唯一」—— 這是 xApp 敢下群組換手的前提。若兩顆都在或都不在表上,正解就只剩通報,不得猜。</a:t>
             </a:r>
           </a:p>
         </p:txBody>
@@ -13845,7 +13839,7 @@
                     <a:p>
                       <a:pPr algn="l"/>
                       <a:r>
-                        <a:rPr sz="850" b="0">
+                        <a:rPr sz="800" b="0">
                           <a:solidFill>
                             <a:srgbClr val="222A30"/>
                           </a:solidFill>
@@ -13864,19 +13858,18 @@
                 </a:tc>
                 <a:tc>
                   <a:txBody>
-                    <a:bodyPr wrap="square"/>
+                    <a:bodyPr/>
                     <a:lstStyle/>
                     <a:p>
-                      <a:pPr algn="l"/>
                       <a:r>
-                        <a:rPr sz="850" b="0">
+                        <a:rPr sz="800" b="0">
                           <a:solidFill>
                             <a:srgbClr val="222A30"/>
                           </a:solidFill>
                           <a:latin typeface="Arial"/>
                           <a:ea typeface="Microsoft JhengHei"/>
                         </a:rPr>
-                        <a:t>prep 段失敗注入</a:t>
+                        <a:t>關係與量測全部正常,只把 xn_x2_established 改成 false</a:t>
                       </a:r>
                     </a:p>
                   </a:txBody>
@@ -13888,19 +13881,18 @@
                 </a:tc>
                 <a:tc>
                   <a:txBody>
-                    <a:bodyPr wrap="square"/>
+                    <a:bodyPr/>
                     <a:lstStyle/>
                     <a:p>
-                      <a:pPr algn="l"/>
                       <a:r>
-                        <a:rPr sz="850" b="0">
+                        <a:rPr sz="800" b="0">
                           <a:solidFill>
                             <a:srgbClr val="222A30"/>
                           </a:solidFill>
                           <a:latin typeface="Arial"/>
                           <a:ea typeface="Microsoft JhengHei"/>
                         </a:rPr>
-                        <a:t>連 Request 都沒送成 = 非鄰居病</a:t>
+                        <a:t>連 Handover Request 都送不出去 = 傳輸層問題,不是鄰居本身壞掉</a:t>
                       </a:r>
                     </a:p>
                   </a:txBody>
@@ -13919,7 +13911,7 @@
                     <a:p>
                       <a:pPr algn="l"/>
                       <a:r>
-                        <a:rPr sz="850" b="0">
+                        <a:rPr sz="800" b="0">
                           <a:solidFill>
                             <a:srgbClr val="222A30"/>
                           </a:solidFill>
@@ -13938,19 +13930,18 @@
                 </a:tc>
                 <a:tc>
                   <a:txBody>
-                    <a:bodyPr wrap="square"/>
+                    <a:bodyPr/>
                     <a:lstStyle/>
                     <a:p>
-                      <a:pPr algn="l"/>
                       <a:r>
-                        <a:rPr sz="850" b="0">
+                        <a:rPr sz="800" b="0">
                           <a:solidFill>
                             <a:srgbClr val="222A30"/>
                           </a:solidFill>
                           <a:latin typeface="Arial"/>
                           <a:ea typeface="Microsoft JhengHei"/>
                         </a:rPr>
-                        <a:t>Xn 斷 → 修復</a:t>
+                        <a:t>旗標 false 造病、CASE=q6_restore 改回 true 代表管理面把 Xn 接好</a:t>
                       </a:r>
                     </a:p>
                   </a:txBody>
@@ -13962,19 +13953,18 @@
                 </a:tc>
                 <a:tc>
                   <a:txBody>
-                    <a:bodyPr wrap="square"/>
+                    <a:bodyPr/>
                     <a:lstStyle/>
                     <a:p>
-                      <a:pPr algn="l"/>
                       <a:r>
-                        <a:rPr sz="850" b="0">
+                        <a:rPr sz="800" b="0">
                           <a:solidFill>
                             <a:srgbClr val="222A30"/>
                           </a:solidFill>
                           <a:latin typeface="Arial"/>
                           <a:ea typeface="Microsoft JhengHei"/>
                         </a:rPr>
-                        <a:t>止血/解除的觸發(不是證據)</a:t>
+                        <a:t>旗標只是止血與解除的觸發訊號,本身不能當恢復證據</a:t>
                       </a:r>
                     </a:p>
                   </a:txBody>
@@ -13993,7 +13983,7 @@
                     <a:p>
                       <a:pPr algn="l"/>
                       <a:r>
-                        <a:rPr sz="850" b="0">
+                        <a:rPr sz="800" b="0">
                           <a:solidFill>
                             <a:srgbClr val="222A30"/>
                           </a:solidFill>
@@ -14012,19 +14002,18 @@
                 </a:tc>
                 <a:tc>
                   <a:txBody>
-                    <a:bodyPr wrap="square"/>
+                    <a:bodyPr/>
                     <a:lstStyle/>
                     <a:p>
-                      <a:pPr algn="l"/>
                       <a:r>
-                        <a:rPr sz="850" b="0">
+                        <a:rPr sz="800" b="0">
                           <a:solidFill>
                             <a:srgbClr val="222A30"/>
                           </a:solidFill>
                           <a:latin typeface="Arial"/>
                           <a:ea typeface="Microsoft JhengHei"/>
                         </a:rPr>
-                        <a:t>UE 換手恢復</a:t>
+                        <a:t>修好後 A3 恢復,成功率由真實換手一筆一筆累積起來</a:t>
                       </a:r>
                     </a:p>
                   </a:txBody>
@@ -14036,19 +14025,18 @@
                 </a:tc>
                 <a:tc>
                   <a:txBody>
-                    <a:bodyPr wrap="square"/>
+                    <a:bodyPr/>
                     <a:lstStyle/>
                     <a:p>
-                      <a:pPr algn="l"/>
                       <a:r>
-                        <a:rPr sz="850" b="0">
+                        <a:rPr sz="800" b="0">
                           <a:solidFill>
                             <a:srgbClr val="222A30"/>
                           </a:solidFill>
                           <a:latin typeface="Arial"/>
                           <a:ea typeface="Microsoft JhengHei"/>
                         </a:rPr>
-                        <a:t>行為恢復的唯一判準</a:t>
+                        <a:t>行為回升才算恢復;UE 靜止不動造成的「零失敗」不算數</a:t>
                       </a:r>
                     </a:p>
                   </a:txBody>
@@ -14305,7 +14293,7 @@
         </p:nvSpPr>
         <p:spPr>
           <a:xfrm>
-            <a:off x="320040" y="4025000"/>
+            <a:off x="320040" y="4060000"/>
             <a:ext cx="5577840" cy="800000"/>
           </a:xfrm>
           <a:prstGeom prst="roundRect">
@@ -14348,14 +14336,14 @@
               </a:spcAft>
             </a:pPr>
             <a:r>
-              <a:rPr sz="850" b="0">
+              <a:rPr sz="750" b="0">
                 <a:solidFill>
                   <a:srgbClr val="FFFFFF"/>
                 </a:solidFill>
                 <a:latin typeface="Arial"/>
                 <a:ea typeface="Microsoft JhengHei"/>
               </a:rPr>
-              <a:t>關係留著,只把 xn_x2_established 改成 false。換手 executor 一看 Xn 未通,就在「準備階段」回 TXnRELOCprepExpiry —— 連 Handover Request 都送不出去(這是與第 7 題的鑑別線)。</a:t>
+              <a:t>關係、量測、UE 全部正常,只把 xn_x2_established 改成 false。換手 executor 一看 Xn 沒通,就在準備階段回 TXnRELOCprepExpiry —— 連 Handover Request 都送不出去,這正是與第 7 題(執行階段 RA 失敗)的鑑別線。修復用 CASE=q6_restore 把旗標改回 true,代表管理面已把 Xn 接好。</a:t>
             </a:r>
           </a:p>
         </p:txBody>
@@ -14539,7 +14527,7 @@
                     <a:p>
                       <a:pPr algn="l"/>
                       <a:r>
-                        <a:rPr sz="850" b="0">
+                        <a:rPr sz="800" b="0">
                           <a:solidFill>
                             <a:srgbClr val="222A30"/>
                           </a:solidFill>
@@ -14558,19 +14546,18 @@
                 </a:tc>
                 <a:tc>
                   <a:txBody>
-                    <a:bodyPr wrap="square"/>
+                    <a:bodyPr/>
                     <a:lstStyle/>
                     <a:p>
-                      <a:pPr algn="l"/>
                       <a:r>
-                        <a:rPr sz="850" b="0">
+                        <a:rPr sz="800" b="0">
                           <a:solidFill>
                             <a:srgbClr val="222A30"/>
                           </a:solidFill>
                           <a:latin typeface="Arial"/>
                           <a:ea typeface="Microsoft JhengHei"/>
                         </a:rPr>
-                        <a:t>exe 段失敗注入(cell 級)</a:t>
+                        <a:t>檔案熱開關指定 n30_c0 → executor 對該目標每次換手都在執行階段回 RA 失敗</a:t>
                       </a:r>
                     </a:p>
                   </a:txBody>
@@ -14582,19 +14569,18 @@
                 </a:tc>
                 <a:tc>
                   <a:txBody>
-                    <a:bodyPr wrap="square"/>
+                    <a:bodyPr/>
                     <a:lstStyle/>
                     <a:p>
-                      <a:pPr algn="l"/>
                       <a:r>
-                        <a:rPr sz="850" b="0">
+                        <a:rPr sz="800" b="0">
                           <a:solidFill>
                             <a:srgbClr val="222A30"/>
                           </a:solidFill>
                           <a:latin typeface="Arial"/>
                           <a:ea typeface="Microsoft JhengHei"/>
                         </a:rPr>
-                        <a:t>UE 到了接不進 = 鄰居病(與 Q6 的鑑別刀)</a:t>
+                        <a:t>UE 到得了卻接不進 = 鄰居本身有問題;與第 6 題的準備階段失敗分家</a:t>
                       </a:r>
                     </a:p>
                   </a:txBody>
@@ -14613,7 +14599,7 @@
                     <a:p>
                       <a:pPr algn="l"/>
                       <a:r>
-                        <a:rPr sz="850" b="0">
+                        <a:rPr sz="800" b="0">
                           <a:solidFill>
                             <a:srgbClr val="222A30"/>
                           </a:solidFill>
@@ -14632,19 +14618,18 @@
                 </a:tc>
                 <a:tc>
                   <a:txBody>
-                    <a:bodyPr wrap="square"/>
+                    <a:bodyPr/>
                     <a:lstStyle/>
                     <a:p>
-                      <a:pPr algn="l"/>
                       <a:r>
-                        <a:rPr sz="850" b="0">
+                        <a:rPr sz="800" b="0">
                           <a:solidFill>
                             <a:srgbClr val="222A30"/>
                           </a:solidFill>
                           <a:latin typeface="Arial"/>
                           <a:ea typeface="Microsoft JhengHei"/>
                         </a:rPr>
-                        <a:t>真實 A3 驅動</a:t>
+                        <a:t>由真實 A3 驅動嘗試,不灌假事件</a:t>
                       </a:r>
                     </a:p>
                   </a:txBody>
@@ -14656,19 +14641,18 @@
                 </a:tc>
                 <a:tc>
                   <a:txBody>
-                    <a:bodyPr wrap="square"/>
+                    <a:bodyPr/>
                     <a:lstStyle/>
                     <a:p>
-                      <a:pPr algn="l"/>
                       <a:r>
-                        <a:rPr sz="850" b="0">
+                        <a:rPr sz="800" b="0">
                           <a:solidFill>
                             <a:srgbClr val="222A30"/>
                           </a:solidFill>
                           <a:latin typeface="Arial"/>
                           <a:ea typeface="Microsoft JhengHei"/>
                         </a:rPr>
-                        <a:t>病重且有流量</a:t>
+                        <a:t>要病重(成功率低)又有流量(樣本足)才動手,避免小樣本誤判</a:t>
                       </a:r>
                     </a:p>
                   </a:txBody>
@@ -14687,7 +14671,7 @@
                     <a:p>
                       <a:pPr algn="l"/>
                       <a:r>
-                        <a:rPr sz="850" b="0">
+                        <a:rPr sz="800" b="0">
                           <a:solidFill>
                             <a:srgbClr val="222A30"/>
                           </a:solidFill>
@@ -14706,19 +14690,18 @@
                 </a:tc>
                 <a:tc>
                   <a:txBody>
-                    <a:bodyPr wrap="square"/>
+                    <a:bodyPr/>
                     <a:lstStyle/>
                     <a:p>
-                      <a:pPr algn="l"/>
                       <a:r>
-                        <a:rPr sz="850" b="0">
+                        <a:rPr sz="800" b="0">
                           <a:solidFill>
                             <a:srgbClr val="222A30"/>
                           </a:solidFill>
                           <a:latin typeface="Arial"/>
                           <a:ea typeface="Microsoft JhengHei"/>
                         </a:rPr>
-                        <a:t>—</a:t>
+                        <a:t>止血後 A3 跳過該目標,換手嘗試自然歸零</a:t>
                       </a:r>
                     </a:p>
                   </a:txBody>
@@ -14730,19 +14713,18 @@
                 </a:tc>
                 <a:tc>
                   <a:txBody>
-                    <a:bodyPr wrap="square"/>
+                    <a:bodyPr/>
                     <a:lstStyle/>
                     <a:p>
-                      <a:pPr algn="l"/>
                       <a:r>
-                        <a:rPr sz="850" b="0">
+                        <a:rPr sz="800" b="0">
                           <a:solidFill>
                             <a:srgbClr val="222A30"/>
                           </a:solidFill>
                           <a:latin typeface="Arial"/>
                           <a:ea typeface="Microsoft JhengHei"/>
                         </a:rPr>
-                        <a:t>止血生效的行為證據</a:t>
+                        <a:t>失敗累計凍結 + 嘗試歸零 = 封鎖真的生效的行為證據</a:t>
                       </a:r>
                     </a:p>
                   </a:txBody>
@@ -14999,7 +14981,7 @@
         </p:nvSpPr>
         <p:spPr>
           <a:xfrm>
-            <a:off x="320040" y="4025000"/>
+            <a:off x="320040" y="4060000"/>
             <a:ext cx="5577840" cy="800000"/>
           </a:xfrm>
           <a:prstGeom prst="roundRect">
@@ -15042,14 +15024,14 @@
               </a:spcAft>
             </a:pPr>
             <a:r>
-              <a:rPr sz="850" b="0">
+              <a:rPr sz="750" b="0">
                 <a:solidFill>
                   <a:srgbClr val="FFFFFF"/>
                 </a:solidFill>
                 <a:latin typeface="Arial"/>
                 <a:ea typeface="Microsoft JhengHei"/>
               </a:rPr>
-              <a:t>Random Access 壞掉:檔案熱開關 tmp/ho_force_fail.txt 寫入「n30_c0,RandomAccessProblem」→ executor 對該 target 的每次換手都在「執行階段」回 RA 失敗(UE 到得了、接不進)。寫檔即生效,免重啟、不打斷 L4 計時。</a:t>
+              <a:t>Random Access 壞掉:在 tmp/ho_force_fail.txt 寫一行「n30_c0,RandomAccessProblem」,executor 對該目標的每次換手都在執行階段回 RA 失敗(UE 到得了、接不進)。用檔案而不用環境變數,是因為改 env 要重啟容器 —— 會打斷 xApp 的 L4 探測計時,而且 env 曾經跨場景撞名污染到別題。</a:t>
             </a:r>
           </a:p>
         </p:txBody>
@@ -15233,7 +15215,7 @@
                     <a:p>
                       <a:pPr algn="l"/>
                       <a:r>
-                        <a:rPr sz="850" b="0">
+                        <a:rPr sz="800" b="0">
                           <a:solidFill>
                             <a:srgbClr val="222A30"/>
                           </a:solidFill>
@@ -15252,19 +15234,18 @@
                 </a:tc>
                 <a:tc>
                   <a:txBody>
-                    <a:bodyPr wrap="square"/>
+                    <a:bodyPr/>
                     <a:lstStyle/>
                     <a:p>
-                      <a:pPr algn="l"/>
                       <a:r>
-                        <a:rPr sz="850" b="0">
+                        <a:rPr sz="800" b="0">
                           <a:solidFill>
                             <a:srgbClr val="222A30"/>
                           </a:solidFill>
                           <a:latin typeface="Arial"/>
                           <a:ea typeface="Microsoft JhengHei"/>
                         </a:rPr>
-                        <a:t>異頻鄰區佈署</a:t>
+                        <a:t>場景放 3 顆 2.1GHz cell,佈病把 3.5G→2.1G 整層關係(3 條)一次砍掉</a:t>
                       </a:r>
                     </a:p>
                   </a:txBody>
@@ -15276,19 +15257,18 @@
                 </a:tc>
                 <a:tc>
                   <a:txBody>
-                    <a:bodyPr wrap="square"/>
+                    <a:bodyPr/>
                     <a:lstStyle/>
                     <a:p>
-                      <a:pPr algn="l"/>
                       <a:r>
-                        <a:rPr sz="850" b="0">
+                        <a:rPr sz="800" b="0">
                           <a:solidFill>
                             <a:srgbClr val="222A30"/>
                           </a:solidFill>
                           <a:latin typeface="Arial"/>
                           <a:ea typeface="Microsoft JhengHei"/>
                         </a:rPr>
-                        <a:t>頻率層缺失的簽名</a:t>
+                        <a:t>一次冒出多顆外來頻點的強 PCI = 缺的是整個頻率層,不是單一鄰居</a:t>
                       </a:r>
                     </a:p>
                   </a:txBody>
@@ -15307,7 +15287,7 @@
                     <a:p>
                       <a:pPr algn="l"/>
                       <a:r>
-                        <a:rPr sz="850" b="0">
+                        <a:rPr sz="800" b="0">
                           <a:solidFill>
                             <a:srgbClr val="222A30"/>
                           </a:solidFill>
@@ -15326,19 +15306,18 @@
                 </a:tc>
                 <a:tc>
                   <a:txBody>
-                    <a:bodyPr wrap="square"/>
+                    <a:bodyPr/>
                     <a:lstStyle/>
                     <a:p>
-                      <a:pPr algn="l"/>
                       <a:r>
-                        <a:rPr sz="850" b="0">
+                        <a:rPr sz="800" b="0">
                           <a:solidFill>
                             <a:srgbClr val="222A30"/>
                           </a:solidFill>
                           <a:latin typeface="Arial"/>
                           <a:ea typeface="Microsoft JhengHei"/>
                         </a:rPr>
-                        <a:t>持續量測</a:t>
+                        <a:t>UE 位置讓 2.1G 訊號穩定達標;通道計算的干擾只算同頻</a:t>
                       </a:r>
                     </a:p>
                   </a:txBody>
@@ -15350,19 +15329,18 @@
                 </a:tc>
                 <a:tc>
                   <a:txBody>
-                    <a:bodyPr wrap="square"/>
+                    <a:bodyPr/>
                     <a:lstStyle/>
                     <a:p>
-                      <a:pPr algn="l"/>
                       <a:r>
-                        <a:rPr sz="850" b="0">
+                        <a:rPr sz="800" b="0">
                           <a:solidFill>
                             <a:srgbClr val="222A30"/>
                           </a:solidFill>
                           <a:latin typeface="Arial"/>
                           <a:ea typeface="Microsoft JhengHei"/>
                         </a:rPr>
-                        <a:t>不是雜訊</a:t>
+                        <a:t>夠強又持續才建,避免把偶發的跨頻樣本當成缺層</a:t>
                       </a:r>
                     </a:p>
                   </a:txBody>
@@ -15381,7 +15359,7 @@
                     <a:p>
                       <a:pPr algn="l"/>
                       <a:r>
-                        <a:rPr sz="850" b="0">
+                        <a:rPr sz="800" b="0">
                           <a:solidFill>
                             <a:srgbClr val="222A30"/>
                           </a:solidFill>
@@ -15400,19 +15378,18 @@
                 </a:tc>
                 <a:tc>
                   <a:txBody>
-                    <a:bodyPr wrap="square"/>
+                    <a:bodyPr/>
                     <a:lstStyle/>
                     <a:p>
-                      <a:pPr algn="l"/>
                       <a:r>
-                        <a:rPr sz="850" b="0">
+                        <a:rPr sz="800" b="0">
                           <a:solidFill>
                             <a:srgbClr val="222A30"/>
                           </a:solidFill>
                           <a:latin typeface="Arial"/>
                           <a:ea typeface="Microsoft JhengHei"/>
                         </a:rPr>
-                        <a:t>含空表病例</a:t>
+                        <a:t>每個來源 cell 各自維護已知頻點集合,含「完全空表」的病例</a:t>
                       </a:r>
                     </a:p>
                   </a:txBody>
@@ -15424,19 +15401,18 @@
                 </a:tc>
                 <a:tc>
                   <a:txBody>
-                    <a:bodyPr wrap="square"/>
+                    <a:bodyPr/>
                     <a:lstStyle/>
                     <a:p>
-                      <a:pPr algn="l"/>
                       <a:r>
-                        <a:rPr sz="850" b="0">
+                        <a:rPr sz="800" b="0">
                           <a:solidFill>
                             <a:srgbClr val="222A30"/>
                           </a:solidFill>
                           <a:latin typeface="Arial"/>
                           <a:ea typeface="Microsoft JhengHei"/>
                         </a:rPr>
-                        <a:t>空表不得 early-return</a:t>
+                        <a:t>空表不得直接跳過 —— 從沒建過任何跨頻關係的 cell 才最需要補</a:t>
                       </a:r>
                     </a:p>
                   </a:txBody>
@@ -15676,7 +15652,7 @@
         </p:nvSpPr>
         <p:spPr>
           <a:xfrm>
-            <a:off x="320040" y="4025000"/>
+            <a:off x="320040" y="4060000"/>
             <a:ext cx="5577840" cy="800000"/>
           </a:xfrm>
           <a:prstGeom prst="roundRect">
@@ -15719,14 +15695,14 @@
               </a:spcAft>
             </a:pPr>
             <a:r>
-              <a:rPr sz="850" b="0">
+              <a:rPr sz="750" b="0">
                 <a:solidFill>
                   <a:srgbClr val="FFFFFF"/>
                 </a:solidFill>
                 <a:latin typeface="Arial"/>
                 <a:ea typeface="Microsoft JhengHei"/>
               </a:rPr>
-              <a:t>砍掉 3.5GHz→2.1GHz 整層關係(3 條),2.1G 的 cell 照常存在也量得到;通道計算的干擾只算同頻 —— 形成「看得到卻換不過去」的缺層。</a:t>
+              <a:t>場景本來就有 3 顆 2.1GHz cell,佈病把 3.5G→2.1G 的整層關係(3 條)一次砍掉。通道計算的干擾只算同頻,所以 2.1G 這一層對 UE 是「看得到、量得到、就是換不過去」。這題考的是頻率層關係要先補起來,cell 級的 ADD 才輪得到 —— 順序反了就永遠補不進去。</a:t>
             </a:r>
           </a:p>
         </p:txBody>
@@ -15910,7 +15886,7 @@
                     <a:p>
                       <a:pPr algn="l"/>
                       <a:r>
-                        <a:rPr sz="850" b="0">
+                        <a:rPr sz="800" b="0">
                           <a:solidFill>
                             <a:srgbClr val="222A30"/>
                           </a:solidFill>
@@ -15929,19 +15905,18 @@
                 </a:tc>
                 <a:tc>
                   <a:txBody>
-                    <a:bodyPr wrap="square"/>
+                    <a:bodyPr/>
                     <a:lstStyle/>
                     <a:p>
-                      <a:pPr algn="l"/>
                       <a:r>
-                        <a:rPr sz="850" b="0">
+                        <a:rPr sz="800" b="0">
                           <a:solidFill>
                             <a:srgbClr val="222A30"/>
                           </a:solidFill>
                           <a:latin typeface="Arial"/>
                           <a:ea typeface="Microsoft JhengHei"/>
                         </a:rPr>
-                        <a:t>滿載 staging</a:t>
+                        <a:t>灌入合成關係,把三顆 cell 的鄰區表各自填到 used == limit</a:t>
                       </a:r>
                     </a:p>
                   </a:txBody>
@@ -15953,19 +15928,18 @@
                 </a:tc>
                 <a:tc>
                   <a:txBody>
-                    <a:bodyPr wrap="square"/>
+                    <a:bodyPr/>
                     <a:lstStyle/>
                     <a:p>
-                      <a:pPr algn="l"/>
                       <a:r>
-                        <a:rPr sz="850" b="0">
+                        <a:rPr sz="800" b="0">
                           <a:solidFill>
                             <a:srgbClr val="222A30"/>
                           </a:solidFill>
                           <a:latin typeface="Arial"/>
                           <a:ea typeface="Microsoft JhengHei"/>
                         </a:rPr>
-                        <a:t>容量事實(per-cell)</a:t>
+                        <a:t>容量是 per-cell 概念:總量沒滿不代表某一顆沒滿</a:t>
                       </a:r>
                     </a:p>
                   </a:txBody>
@@ -15984,7 +15958,7 @@
                     <a:p>
                       <a:pPr algn="l"/>
                       <a:r>
-                        <a:rPr sz="850" b="0">
+                        <a:rPr sz="800" b="0">
                           <a:solidFill>
                             <a:srgbClr val="222A30"/>
                           </a:solidFill>
@@ -16003,19 +15977,18 @@
                 </a:tc>
                 <a:tc>
                   <a:txBody>
-                    <a:bodyPr wrap="square"/>
+                    <a:bodyPr/>
                     <a:lstStyle/>
                     <a:p>
-                      <a:pPr algn="l"/>
                       <a:r>
-                        <a:rPr sz="850" b="0">
+                        <a:rPr sz="800" b="0">
                           <a:solidFill>
                             <a:srgbClr val="222A30"/>
                           </a:solidFill>
                           <a:latin typeface="Arial"/>
                           <a:ea typeface="Microsoft JhengHei"/>
                         </a:rPr>
-                        <a:t>—</a:t>
+                        <a:t>其中放一條零量測、零換手的 x24 當修剪對象</a:t>
                       </a:r>
                     </a:p>
                   </a:txBody>
@@ -16027,19 +16000,18 @@
                 </a:tc>
                 <a:tc>
                   <a:txBody>
-                    <a:bodyPr wrap="square"/>
+                    <a:bodyPr/>
                     <a:lstStyle/>
                     <a:p>
-                      <a:pPr algn="l"/>
                       <a:r>
-                        <a:rPr sz="850" b="0">
+                        <a:rPr sz="800" b="0">
                           <a:solidFill>
                             <a:srgbClr val="222A30"/>
                           </a:solidFill>
                           <a:latin typeface="Arial"/>
                           <a:ea typeface="Microsoft JhengHei"/>
                         </a:rPr>
-                        <a:t>修剪對象(最冷者先)</a:t>
+                        <a:t>最冷的先刪;還有人在用的條目不能動</a:t>
                       </a:r>
                     </a:p>
                   </a:txBody>
@@ -16058,7 +16030,7 @@
                     <a:p>
                       <a:pPr algn="l"/>
                       <a:r>
-                        <a:rPr sz="850" b="0">
+                        <a:rPr sz="800" b="0">
                           <a:solidFill>
                             <a:srgbClr val="222A30"/>
                           </a:solidFill>
@@ -16077,19 +16049,18 @@
                 </a:tc>
                 <a:tc>
                   <a:txBody>
-                    <a:bodyPr wrap="square"/>
+                    <a:bodyPr/>
                     <a:lstStyle/>
                     <a:p>
-                      <a:pPr algn="l"/>
                       <a:r>
-                        <a:rPr sz="850" b="0">
+                        <a:rPr sz="800" b="0">
                           <a:solidFill>
                             <a:srgbClr val="222A30"/>
                           </a:solidFill>
                           <a:latin typeface="Arial"/>
                           <a:ea typeface="Microsoft JhengHei"/>
                         </a:rPr>
-                        <a:t>protected 條目</a:t>
+                        <a:t>另放一條 noRemove 的 x25,刪它 CU 一定回絕</a:t>
                       </a:r>
                     </a:p>
                   </a:txBody>
@@ -16101,19 +16072,18 @@
                 </a:tc>
                 <a:tc>
                   <a:txBody>
-                    <a:bodyPr wrap="square"/>
+                    <a:bodyPr/>
                     <a:lstStyle/>
                     <a:p>
-                      <a:pPr algn="l"/>
                       <a:r>
-                        <a:rPr sz="850" b="0">
+                        <a:rPr sz="800" b="0">
                           <a:solidFill>
                             <a:srgbClr val="222A30"/>
                           </a:solidFill>
                           <a:latin typeface="Arial"/>
                           <a:ea typeface="Microsoft JhengHei"/>
                         </a:rPr>
-                        <a:t>v10 無 isRemoveAllowed 可觀測 → 事後防線</a:t>
+                        <a:t>v10 看不到 isRemoveAllowed,只能刪下去才知道 → 事後防線</a:t>
                       </a:r>
                     </a:p>
                   </a:txBody>
@@ -16370,7 +16340,7 @@
         </p:nvSpPr>
         <p:spPr>
           <a:xfrm>
-            <a:off x="320040" y="4025000"/>
+            <a:off x="320040" y="4060000"/>
             <a:ext cx="5577840" cy="800000"/>
           </a:xfrm>
           <a:prstGeom prst="roundRect">
@@ -16413,14 +16383,14 @@
               </a:spcAft>
             </a:pPr>
             <a:r>
-              <a:rPr sz="850" b="0">
+              <a:rPr sz="750" b="0">
                 <a:solidFill>
                   <a:srgbClr val="FFFFFF"/>
                 </a:solidFill>
                 <a:latin typeface="Arial"/>
                 <a:ea typeface="Microsoft JhengHei"/>
               </a:rPr>
-              <a:t>灌入合成關係把三顆 cell 的 NRT 填到 used==limit;其中刻意放一條零活動的 x24(該被修剪)與一條 noRemove 的 x25(修剪必被拒),讓 try-prune 兩種結局都驗得到。</a:t>
+              <a:t>灌入合成關係把三顆 cell 的鄰區表各自填到 used == limit(容量是 per-cell,不是全網總量)。裡面刻意混兩種條目:一條零量測零換手的 x24(該被修剪的最冷者),一條 noRemove 的 x25(刪它 CU 一定拒絕)。這樣 try-prune 的兩種結局 —— 騰位成功、被拒停手 —— 在同一場都驗得到。</a:t>
             </a:r>
           </a:p>
         </p:txBody>
@@ -16604,7 +16574,7 @@
                     <a:p>
                       <a:pPr algn="l"/>
                       <a:r>
-                        <a:rPr sz="850" b="0">
+                        <a:rPr sz="800" b="0">
                           <a:solidFill>
                             <a:srgbClr val="222A30"/>
                           </a:solidFill>
@@ -16623,19 +16593,18 @@
                 </a:tc>
                 <a:tc>
                   <a:txBody>
-                    <a:bodyPr wrap="square"/>
+                    <a:bodyPr/>
                     <a:lstStyle/>
                     <a:p>
-                      <a:pPr algn="l"/>
                       <a:r>
-                        <a:rPr sz="850" b="0">
+                        <a:rPr sz="800" b="0">
                           <a:solidFill>
                             <a:srgbClr val="222A30"/>
                           </a:solidFill>
                           <a:latin typeface="Arial"/>
                           <a:ea typeface="Microsoft JhengHei"/>
                         </a:rPr>
-                        <a:t>目標 PCI 變更、條目殘留</a:t>
+                        <a:t>條目 target_pci 留舊值 205、cell 實際已是 233 → 每次換手回 CellNotAvailable</a:t>
                       </a:r>
                     </a:p>
                   </a:txBody>
@@ -16647,19 +16616,18 @@
                 </a:tc>
                 <a:tc>
                   <a:txBody>
-                    <a:bodyPr wrap="square"/>
+                    <a:bodyPr/>
                     <a:lstStyle/>
                     <a:p>
-                      <a:pPr algn="l"/>
                       <a:r>
-                        <a:rPr sz="850" b="0">
+                        <a:rPr sz="800" b="0">
                           <a:solidFill>
                             <a:srgbClr val="222A30"/>
                           </a:solidFill>
                           <a:latin typeface="Arial"/>
                           <a:ea typeface="Microsoft JhengHei"/>
                         </a:rPr>
-                        <a:t>打不到的目標</a:t>
+                        <a:t>打不到的目標:關係還在,但表裡記的對應已經失真</a:t>
                       </a:r>
                     </a:p>
                   </a:txBody>
@@ -16678,7 +16646,7 @@
                     <a:p>
                       <a:pPr algn="l"/>
                       <a:r>
-                        <a:rPr sz="850" b="0">
+                        <a:rPr sz="800" b="0">
                           <a:solidFill>
                             <a:srgbClr val="222A30"/>
                           </a:solidFill>
@@ -16697,19 +16665,18 @@
                 </a:tc>
                 <a:tc>
                   <a:txBody>
-                    <a:bodyPr wrap="square"/>
+                    <a:bodyPr/>
                     <a:lstStyle/>
                     <a:p>
-                      <a:pPr algn="l"/>
                       <a:r>
-                        <a:rPr sz="850" b="0">
+                        <a:rPr sz="800" b="0">
                           <a:solidFill>
                             <a:srgbClr val="222A30"/>
                           </a:solidFill>
                           <a:latin typeface="Arial"/>
                           <a:ea typeface="Microsoft JhengHei"/>
                         </a:rPr>
-                        <a:t>解回同 CGI</a:t>
+                        <a:t>用 REPORTCGI 反查 UE 實際量到的 PCI,會解回同一個 CGI</a:t>
                       </a:r>
                     </a:p>
                   </a:txBody>
@@ -16721,19 +16688,18 @@
                 </a:tc>
                 <a:tc>
                   <a:txBody>
-                    <a:bodyPr wrap="square"/>
+                    <a:bodyPr/>
                     <a:lstStyle/>
                     <a:p>
-                      <a:pPr algn="l"/>
                       <a:r>
-                        <a:rPr sz="850" b="0">
+                        <a:rPr sz="800" b="0">
                           <a:solidFill>
                             <a:srgbClr val="222A30"/>
                           </a:solidFill>
                           <a:latin typeface="Arial"/>
                           <a:ea typeface="Microsoft JhengHei"/>
                         </a:rPr>
-                        <a:t>= remap 而非新鄰居(鑑別線)</a:t>
+                        <a:t>解回同一顆 = 該修對應(remap);解回別顆才是新鄰居(第 4 題)</a:t>
                       </a:r>
                     </a:p>
                   </a:txBody>
@@ -16752,7 +16718,7 @@
                     <a:p>
                       <a:pPr algn="l"/>
                       <a:r>
-                        <a:rPr sz="850" b="0">
+                        <a:rPr sz="800" b="0">
                           <a:solidFill>
                             <a:srgbClr val="222A30"/>
                           </a:solidFill>
@@ -16771,19 +16737,18 @@
                 </a:tc>
                 <a:tc>
                   <a:txBody>
-                    <a:bodyPr wrap="square"/>
+                    <a:bodyPr/>
                     <a:lstStyle/>
                     <a:p>
-                      <a:pPr algn="l"/>
                       <a:r>
-                        <a:rPr sz="850" b="0">
+                        <a:rPr sz="800" b="0">
                           <a:solidFill>
                             <a:srgbClr val="222A30"/>
                           </a:solidFill>
                           <a:latin typeface="Arial"/>
                           <a:ea typeface="Microsoft JhengHei"/>
                         </a:rPr>
-                        <a:t>病把 PRB 打到 100%</a:t>
+                        <a:t>病本身把 PRB 打到 100%(換手失敗,UE 全塞在來源 cell)</a:t>
                       </a:r>
                     </a:p>
                   </a:txBody>
@@ -16795,19 +16760,18 @@
                 </a:tc>
                 <a:tc>
                   <a:txBody>
-                    <a:bodyPr wrap="square"/>
+                    <a:bodyPr/>
                     <a:lstStyle/>
                     <a:p>
-                      <a:pPr algn="l"/>
                       <a:r>
-                        <a:rPr sz="850" b="0">
+                        <a:rPr sz="800" b="0">
                           <a:solidFill>
                             <a:srgbClr val="222A30"/>
                           </a:solidFill>
                           <a:latin typeface="Arial"/>
                           <a:ea typeface="Microsoft JhengHei"/>
                         </a:rPr>
-                        <a:t>汙染指標不得當排除閘</a:t>
+                        <a:t>被病汙染的指標不能當排除條件,否則永遠誤判成壅塞</a:t>
                       </a:r>
                     </a:p>
                   </a:txBody>
@@ -17047,7 +17011,7 @@
         </p:nvSpPr>
         <p:spPr>
           <a:xfrm>
-            <a:off x="320040" y="4025000"/>
+            <a:off x="320040" y="4060000"/>
             <a:ext cx="5577840" cy="800000"/>
           </a:xfrm>
           <a:prstGeom prst="roundRect">
@@ -17090,14 +17054,14 @@
               </a:spcAft>
             </a:pPr>
             <a:r>
-              <a:rPr sz="850" b="0">
+              <a:rPr sz="750" b="0">
                 <a:solidFill>
                   <a:srgbClr val="FFFFFF"/>
                 </a:solidFill>
                 <a:latin typeface="Arial"/>
                 <a:ea typeface="Microsoft JhengHei"/>
               </a:rPr>
-              <a:t>Neighbor 還在,但表裡的資訊過期:只把條目的 target_pci 改成舊值 205,而 cell 實際 pci 已是 233。executor 換手前比對不符 → 回 CellNotAvailable;UE 搬回 s15 讓 A3 反覆去撞。</a:t>
+              <a:t>Neighbor 還在,但表裡的資訊過期:只把條目的 target_pci 改成舊值 205,而 cell 實際 pci 已經是 233。executor 換手前比對兩者不符,直接回 CellNotAvailable。UE 必須先搬回 s15,A3 才會反覆去撞這條壞掉的對應;不搬的話 att=0、病徵長不出來 —— 這是坑 1 的教訓。</a:t>
             </a:r>
           </a:p>
         </p:txBody>
@@ -17281,7 +17245,7 @@
                     <a:p>
                       <a:pPr algn="l"/>
                       <a:r>
-                        <a:rPr sz="850" b="0">
+                        <a:rPr sz="800" b="0">
                           <a:solidFill>
                             <a:srgbClr val="222A30"/>
                           </a:solidFill>
@@ -17300,19 +17264,18 @@
                 </a:tc>
                 <a:tc>
                   <a:txBody>
-                    <a:bodyPr wrap="square"/>
+                    <a:bodyPr/>
                     <a:lstStyle/>
                     <a:p>
-                      <a:pPr algn="l"/>
                       <a:r>
-                        <a:rPr sz="850" b="0">
+                        <a:rPr sz="800" b="0">
                           <a:solidFill>
                             <a:srgbClr val="222A30"/>
                           </a:solidFill>
                           <a:latin typeface="Arial"/>
                           <a:ea typeface="Microsoft JhengHei"/>
                         </a:rPr>
-                        <a:t>殭屍關係無流量</a:t>
+                        <a:t>建 ghost 條目 main→dead_c0,目標 cell 根本不存在 → 兩項天生同時為零</a:t>
                       </a:r>
                     </a:p>
                   </a:txBody>
@@ -17324,19 +17287,18 @@
                 </a:tc>
                 <a:tc>
                   <a:txBody>
-                    <a:bodyPr wrap="square"/>
+                    <a:bodyPr/>
                     <a:lstStyle/>
                     <a:p>
-                      <a:pPr algn="l"/>
                       <a:r>
-                        <a:rPr sz="850" b="0">
+                        <a:rPr sz="800" b="0">
                           <a:solidFill>
                             <a:srgbClr val="222A30"/>
                           </a:solidFill>
                           <a:latin typeface="Arial"/>
                           <a:ea typeface="Microsoft JhengHei"/>
                         </a:rPr>
-                        <a:t>雙歸零(單零不刪 —— 卷面明列典型錯)</a:t>
+                        <a:t>雙歸零才回收;只有一項為零可能只是暫時沒人走那個方向</a:t>
                       </a:r>
                     </a:p>
                   </a:txBody>
@@ -17355,7 +17317,7 @@
                     <a:p>
                       <a:pPr algn="l"/>
                       <a:r>
-                        <a:rPr sz="850" b="0">
+                        <a:rPr sz="800" b="0">
                           <a:solidFill>
                             <a:srgbClr val="222A30"/>
                           </a:solidFill>
@@ -17374,19 +17336,18 @@
                 </a:tc>
                 <a:tc>
                   <a:txBody>
-                    <a:bodyPr wrap="square"/>
+                    <a:bodyPr/>
                     <a:lstStyle/>
                     <a:p>
-                      <a:pPr algn="l"/>
                       <a:r>
-                        <a:rPr sz="850" b="0">
+                        <a:rPr sz="800" b="0">
                           <a:solidFill>
                             <a:srgbClr val="222A30"/>
                           </a:solidFill>
                           <a:latin typeface="Arial"/>
                           <a:ea typeface="Microsoft JhengHei"/>
                         </a:rPr>
-                        <a:t>—</a:t>
+                        <a:t>另留 main→tmp_c0 當單零對照:量得到,但沒人換過去</a:t>
                       </a:r>
                     </a:p>
                   </a:txBody>
@@ -17398,19 +17359,18 @@
                 </a:tc>
                 <a:tc>
                   <a:txBody>
-                    <a:bodyPr wrap="square"/>
+                    <a:bodyPr/>
                     <a:lstStyle/>
                     <a:p>
-                      <a:pPr algn="l"/>
                       <a:r>
-                        <a:rPr sz="850" b="0">
+                        <a:rPr sz="800" b="0">
                           <a:solidFill>
                             <a:srgbClr val="222A30"/>
                           </a:solidFill>
                           <a:latin typeface="Arial"/>
                           <a:ea typeface="Microsoft JhengHei"/>
                         </a:rPr>
-                        <a:t>防手抖/防暫時靜默;缺值≠0 不得起算</a:t>
+                        <a:t>單零不刪 —— 卷面把「單訊號歸零就刪」明列為典型錯誤</a:t>
                       </a:r>
                     </a:p>
                   </a:txBody>
@@ -17429,7 +17389,7 @@
                     <a:p>
                       <a:pPr algn="l"/>
                       <a:r>
-                        <a:rPr sz="850" b="0">
+                        <a:rPr sz="800" b="0">
                           <a:solidFill>
                             <a:srgbClr val="222A30"/>
                           </a:solidFill>
@@ -17448,19 +17408,18 @@
                 </a:tc>
                 <a:tc>
                   <a:txBody>
-                    <a:bodyPr wrap="square"/>
+                    <a:bodyPr/>
                     <a:lstStyle/>
                     <a:p>
-                      <a:pPr algn="l"/>
                       <a:r>
-                        <a:rPr sz="850" b="0">
+                        <a:rPr sz="800" b="0">
                           <a:solidFill>
                             <a:srgbClr val="222A30"/>
                           </a:solidFill>
                           <a:latin typeface="Arial"/>
                           <a:ea typeface="Microsoft JhengHei"/>
                         </a:rPr>
-                        <a:t>protected 拒刪</a:t>
+                        <a:t>再建一條 protected 條目,REMOVE 下去 CU 必定拒絕</a:t>
                       </a:r>
                     </a:p>
                   </a:txBody>
@@ -17472,19 +17431,18 @@
                 </a:tc>
                 <a:tc>
                   <a:txBody>
-                    <a:bodyPr wrap="square"/>
+                    <a:bodyPr/>
                     <a:lstStyle/>
                     <a:p>
-                      <a:pPr algn="l"/>
                       <a:r>
-                        <a:rPr sz="850" b="0">
+                        <a:rPr sz="800" b="0">
                           <a:solidFill>
                             <a:srgbClr val="222A30"/>
                           </a:solidFill>
                           <a:latin typeface="Arial"/>
                           <a:ea typeface="Microsoft JhengHei"/>
                         </a:rPr>
-                        <a:t>不重試帳本的回填料源</a:t>
+                        <a:t>拒絕事件是 xApp 重啟後重建「不再重試」帳本的唯一料源</a:t>
                       </a:r>
                     </a:p>
                   </a:txBody>
@@ -17724,7 +17682,7 @@
         </p:nvSpPr>
         <p:spPr>
           <a:xfrm>
-            <a:off x="320040" y="4025000"/>
+            <a:off x="320040" y="4060000"/>
             <a:ext cx="5577840" cy="800000"/>
           </a:xfrm>
           <a:prstGeom prst="roundRect">
@@ -17767,14 +17725,14 @@
               </a:spcAft>
             </a:pPr>
             <a:r>
-              <a:rPr sz="850" b="0">
+              <a:rPr sz="750" b="0">
                 <a:solidFill>
                   <a:srgbClr val="FFFFFF"/>
                 </a:solidFill>
                 <a:latin typeface="Arial"/>
                 <a:ea typeface="Microsoft JhengHei"/>
               </a:rPr>
-              <a:t>建 ghost 條目 main→dead_c0(目標 cell 根本不存在、無保護)與 main→old_c0(protected,驗拒絕路徑);另留 main→tmp_c0 當單零對照(有量測、無換手,不得誤刪)。</a:t>
+              <a:t>建 ghost 條目 main→dead_c0:目標 cell 根本不存在,所以量測與換手嘗試天生同時為零。另外建 main→old_c0 並標 protected(驗 REMOVE 被拒的路徑),再留 main→tmp_c0 當單零對照(量得到但沒人換過去,不得誤刪)。三種條目同場,回收判準的三種結局才驗得完整。</a:t>
             </a:r>
           </a:p>
         </p:txBody>
@@ -17958,7 +17916,7 @@
                     <a:p>
                       <a:pPr algn="l"/>
                       <a:r>
-                        <a:rPr sz="850" b="0">
+                        <a:rPr sz="800" b="0">
                           <a:solidFill>
                             <a:srgbClr val="222A30"/>
                           </a:solidFill>
@@ -17977,19 +17935,18 @@
                 </a:tc>
                 <a:tc>
                   <a:txBody>
-                    <a:bodyPr wrap="square"/>
+                    <a:bodyPr/>
                     <a:lstStyle/>
                     <a:p>
-                      <a:pPr algn="l"/>
                       <a:r>
-                        <a:rPr sz="850" b="0">
+                        <a:rPr sz="800" b="0">
                           <a:solidFill>
                             <a:srgbClr val="222A30"/>
                           </a:solidFill>
                           <a:latin typeface="Arial"/>
                           <a:ea typeface="Microsoft JhengHei"/>
                         </a:rPr>
-                        <a:t>有人想去</a:t>
+                        <a:t>兩條關係的量測都很強(UE 就在旁邊,需求真實存在)</a:t>
                       </a:r>
                     </a:p>
                   </a:txBody>
@@ -18001,19 +17958,18 @@
                 </a:tc>
                 <a:tc>
                   <a:txBody>
-                    <a:bodyPr wrap="square"/>
+                    <a:bodyPr/>
                     <a:lstStyle/>
                     <a:p>
-                      <a:pPr algn="l"/>
                       <a:r>
-                        <a:rPr sz="850" b="0">
+                        <a:rPr sz="800" b="0">
                           <a:solidFill>
                             <a:srgbClr val="222A30"/>
                           </a:solidFill>
                           <a:latin typeface="Arial"/>
                           <a:ea typeface="Microsoft JhengHei"/>
                         </a:rPr>
-                        <a:t>訊號① 需求存在</a:t>
+                        <a:t>先要「有人想去」,才談得上是不是被擋住</a:t>
                       </a:r>
                     </a:p>
                   </a:txBody>
@@ -18032,7 +17988,7 @@
                     <a:p>
                       <a:pPr algn="l"/>
                       <a:r>
-                        <a:rPr sz="850" b="0">
+                        <a:rPr sz="800" b="0">
                           <a:solidFill>
                             <a:srgbClr val="222A30"/>
                           </a:solidFill>
@@ -18051,19 +18007,18 @@
                 </a:tc>
                 <a:tc>
                   <a:txBody>
-                    <a:bodyPr wrap="square"/>
+                    <a:bodyPr/>
                     <a:lstStyle/>
                     <a:p>
-                      <a:pPr algn="l"/>
                       <a:r>
-                        <a:rPr sz="850" b="0">
+                        <a:rPr sz="800" b="0">
                           <a:solidFill>
                             <a:srgbClr val="222A30"/>
                           </a:solidFill>
                           <a:latin typeface="Arial"/>
                           <a:ea typeface="Microsoft JhengHei"/>
                         </a:rPr>
-                        <a:t>沒人去成</a:t>
+                        <a:t>兩條的旗標設成一模一樣,差別只造在 hoValidated 與失敗史</a:t>
                       </a:r>
                     </a:p>
                   </a:txBody>
@@ -18075,19 +18030,18 @@
                 </a:tc>
                 <a:tc>
                   <a:txBody>
-                    <a:bodyPr wrap="square"/>
+                    <a:bodyPr/>
                     <a:lstStyle/>
                     <a:p>
-                      <a:pPr algn="l"/>
                       <a:r>
-                        <a:rPr sz="850" b="0">
+                        <a:rPr sz="800" b="0">
                           <a:solidFill>
                             <a:srgbClr val="222A30"/>
                           </a:solidFill>
                           <a:latin typeface="Arial"/>
                           <a:ea typeface="Microsoft JhengHei"/>
                         </a:rPr>
-                        <a:t>訊號②③ 被擋在準備之前</a:t>
+                        <a:t>旗標在 E2 看不到,只能靠行為訊號分辨哪一條該修</a:t>
                       </a:r>
                     </a:p>
                   </a:txBody>
@@ -18106,7 +18060,7 @@
                     <a:p>
                       <a:pPr algn="l"/>
                       <a:r>
-                        <a:rPr sz="850" b="0">
+                        <a:rPr sz="800" b="0">
                           <a:solidFill>
                             <a:srgbClr val="222A30"/>
                           </a:solidFill>
@@ -18125,19 +18079,18 @@
                 </a:tc>
                 <a:tc>
                   <a:txBody>
-                    <a:bodyPr wrap="square"/>
+                    <a:bodyPr/>
                     <a:lstStyle/>
                     <a:p>
-                      <a:pPr algn="l"/>
                       <a:r>
-                        <a:rPr sz="850" b="0">
+                        <a:rPr sz="800" b="0">
                           <a:solidFill>
                             <a:srgbClr val="222A30"/>
                           </a:solidFill>
                           <a:latin typeface="Arial"/>
                           <a:ea typeface="Microsoft JhengHei"/>
                         </a:rPr>
-                        <a:t>—</a:t>
+                        <a:t>n80 注入 40 筆歷史 RA 失敗;d02 一筆都沒有</a:t>
                       </a:r>
                     </a:p>
                   </a:txBody>
@@ -18149,19 +18102,18 @@
                 </a:tc>
                 <a:tc>
                   <a:txBody>
-                    <a:bodyPr wrap="square"/>
+                    <a:bodyPr/>
                     <a:lstStyle/>
                     <a:p>
-                      <a:pPr algn="l"/>
                       <a:r>
-                        <a:rPr sz="850" b="0">
+                        <a:rPr sz="800" b="0">
                           <a:solidFill>
                             <a:srgbClr val="222A30"/>
                           </a:solidFill>
                           <a:latin typeface="Arial"/>
                           <a:ea typeface="Microsoft JhengHei"/>
                         </a:rPr>
-                        <a:t>訊號④ 封鎖無依據;有史=正當(不動不告警)</a:t>
+                        <a:t>有失敗史 = 正當封鎖(不動);沒有 = 無據封鎖(該修)</a:t>
                       </a:r>
                     </a:p>
                   </a:txBody>
@@ -18401,7 +18353,7 @@
         </p:nvSpPr>
         <p:spPr>
           <a:xfrm>
-            <a:off x="320040" y="4025000"/>
+            <a:off x="320040" y="4060000"/>
             <a:ext cx="5577840" cy="800000"/>
           </a:xfrm>
           <a:prstGeom prst="roundRect">
@@ -18444,14 +18396,14 @@
               </a:spcAft>
             </a:pPr>
             <a:r>
-              <a:rPr sz="850" b="0">
+              <a:rPr sz="750" b="0">
                 <a:solidFill>
                   <a:srgbClr val="FFFFFF"/>
                 </a:solidFill>
                 <a:latin typeface="Arial"/>
                 <a:ea typeface="Microsoft JhengHei"/>
               </a:rPr>
-              <a:t>兩條關係給一模一樣的旗標(hoBlocklist+xnBlocklist),差別只造在行為訊號:n80 注入 40 筆歷史 RA 失敗 + hoValidated=true(正當);d02 零失敗史 + hoValidated=false(無據)。</a:t>
+              <a:t>兩條關係的旗標設成一模一樣(hoBlocklist+xnBlocklist),差別只造在行為訊號:n80 注入 40 筆歷史 RA 失敗事件並標 hoValidated=true(曾經正常服務過);d02 零失敗史、hoValidated=false。因為 v10 規定旗標在 E2 不可觀測,xApp 只能靠這些行為訊號分辨哪一條該修、哪一條不能碰。</a:t>
             </a:r>
           </a:p>
         </p:txBody>
@@ -19508,7 +19460,7 @@
                           <a:latin typeface="Arial"/>
                           <a:ea typeface="Microsoft JhengHei"/>
                         </a:rPr>
-                        <a:t>以「相對增益+持續性」取代量能門檻補關係</a:t>
+                        <a:t>改看相對增益+持續性,取代量能門檻</a:t>
                       </a:r>
                     </a:p>
                   </a:txBody>
@@ -19532,7 +19484,7 @@
                           <a:latin typeface="Arial"/>
                           <a:ea typeface="Microsoft JhengHei"/>
                         </a:rPr>
-                        <a:t>離線 fixture ✅</a:t>
+                        <a:t>live 重佈 ✅(08/26)</a:t>
                       </a:r>
                     </a:p>
                   </a:txBody>
@@ -20914,7 +20866,7 @@
                     <a:p>
                       <a:pPr algn="l"/>
                       <a:r>
-                        <a:rPr sz="850" b="0">
+                        <a:rPr sz="800" b="0">
                           <a:solidFill>
                             <a:srgbClr val="222A30"/>
                           </a:solidFill>
@@ -20933,19 +20885,18 @@
                 </a:tc>
                 <a:tc>
                   <a:txBody>
-                    <a:bodyPr wrap="square"/>
+                    <a:bodyPr/>
                     <a:lstStyle/>
                     <a:p>
-                      <a:pPr algn="l"/>
                       <a:r>
-                        <a:rPr sz="850" b="0">
+                        <a:rPr sz="800" b="0">
                           <a:solidFill>
                             <a:srgbClr val="222A30"/>
                           </a:solidFill>
                           <a:latin typeface="Arial"/>
                           <a:ea typeface="Microsoft JhengHei"/>
                         </a:rPr>
-                        <a:t>UE 換到 NRT 沒有的 cell,失敗後重建回流</a:t>
+                        <a:t>A3 想換手卻被 NRT 閘擋下 → 訊號續弱到 T310 逾時 → 宣告 RLF → 就近重建到對向 cell</a:t>
                       </a:r>
                     </a:p>
                   </a:txBody>
@@ -20957,19 +20908,18 @@
                 </a:tc>
                 <a:tc>
                   <a:txBody>
-                    <a:bodyPr wrap="square"/>
+                    <a:bodyPr/>
                     <a:lstStyle/>
                     <a:p>
-                      <a:pPr algn="l"/>
                       <a:r>
-                        <a:rPr sz="850" b="0">
+                        <a:rPr sz="800" b="0">
                           <a:solidFill>
                             <a:srgbClr val="222A30"/>
                           </a:solidFill>
                           <a:latin typeface="Arial"/>
                           <a:ea typeface="Microsoft JhengHei"/>
                         </a:rPr>
-                        <a:t>換手失敗的回流證據(目標側)</a:t>
+                        <a:t>從同一個 pci 大量重建進來 = 那個方向本來就該有換手路徑;證據落在目標側</a:t>
                       </a:r>
                     </a:p>
                   </a:txBody>
@@ -20988,7 +20938,7 @@
                     <a:p>
                       <a:pPr algn="l"/>
                       <a:r>
-                        <a:rPr sz="850" b="0">
+                        <a:rPr sz="800" b="0">
                           <a:solidFill>
                             <a:srgbClr val="222A30"/>
                           </a:solidFill>
@@ -21007,19 +20957,18 @@
                 </a:tc>
                 <a:tc>
                   <a:txBody>
-                    <a:bodyPr wrap="square"/>
+                    <a:bodyPr/>
                     <a:lstStyle/>
                     <a:p>
-                      <a:pPr algn="l"/>
                       <a:r>
-                        <a:rPr sz="850" b="0">
+                        <a:rPr sz="800" b="0">
                           <a:solidFill>
                             <a:srgbClr val="222A30"/>
                           </a:solidFill>
                           <a:latin typeface="Arial"/>
                           <a:ea typeface="Microsoft JhengHei"/>
                         </a:rPr>
-                        <a:t>重建事件帶來源 cell 欄位</a:t>
+                        <a:t>每筆回報記下「當下」的 serving cell(08/26 改為量測當時,不是查詢當下)</a:t>
                       </a:r>
                     </a:p>
                   </a:txBody>
@@ -21031,19 +20980,18 @@
                 </a:tc>
                 <a:tc>
                   <a:txBody>
-                    <a:bodyPr wrap="square"/>
+                    <a:bodyPr/>
                     <a:lstStyle/>
                     <a:p>
-                      <a:pPr algn="l"/>
                       <a:r>
-                        <a:rPr sz="850" b="0">
+                        <a:rPr sz="800" b="0">
                           <a:solidFill>
                             <a:srgbClr val="222A30"/>
                           </a:solidFill>
                           <a:latin typeface="Arial"/>
                           <a:ea typeface="Microsoft JhengHei"/>
                         </a:rPr>
-                        <a:t>定位該補關係的來源</a:t>
+                        <a:t>缺鄰要補在「來源→目標」這條有向邊上;沒有來源歸屬只知道有人掉線,不知道該對哪顆 cell 下 ADD</a:t>
                       </a:r>
                     </a:p>
                   </a:txBody>
@@ -21062,7 +21010,7 @@
                     <a:p>
                       <a:pPr algn="l"/>
                       <a:r>
-                        <a:rPr sz="850" b="0">
+                        <a:rPr sz="800" b="0">
                           <a:solidFill>
                             <a:srgbClr val="222A30"/>
                           </a:solidFill>
@@ -21081,19 +21029,18 @@
                 </a:tc>
                 <a:tc>
                   <a:txBody>
-                    <a:bodyPr wrap="square"/>
+                    <a:bodyPr/>
                     <a:lstStyle/>
                     <a:p>
-                      <a:pPr algn="l"/>
                       <a:r>
-                        <a:rPr sz="850" b="0">
+                        <a:rPr sz="800" b="0">
                           <a:solidFill>
                             <a:srgbClr val="222A30"/>
                           </a:solidFill>
                           <a:latin typeface="Arial"/>
                           <a:ea typeface="Microsoft JhengHei"/>
                         </a:rPr>
-                        <a:t>staging 時不建這條關係</a:t>
+                        <a:t>佈病把 src→nbr 條目從表上刪掉;兩端 cell 與量測全部正常</a:t>
                       </a:r>
                     </a:p>
                   </a:txBody>
@@ -21105,19 +21052,18 @@
                 </a:tc>
                 <a:tc>
                   <a:txBody>
-                    <a:bodyPr wrap="square"/>
+                    <a:bodyPr/>
                     <a:lstStyle/>
                     <a:p>
-                      <a:pPr algn="l"/>
                       <a:r>
-                        <a:rPr sz="850" b="0">
+                        <a:rPr sz="800" b="0">
                           <a:solidFill>
                             <a:srgbClr val="222A30"/>
                           </a:solidFill>
                           <a:latin typeface="Arial"/>
                           <a:ea typeface="Microsoft JhengHei"/>
                         </a:rPr>
-                        <a:t>缺鄰的直接定義</a:t>
+                        <a:t>訊號夠強且持續、表上卻查無 —— 這就是卷面分類一的判準本身</a:t>
                       </a:r>
                     </a:p>
                   </a:txBody>
@@ -21374,7 +21320,7 @@
         </p:nvSpPr>
         <p:spPr>
           <a:xfrm>
-            <a:off x="320040" y="4025000"/>
+            <a:off x="320040" y="4060000"/>
             <a:ext cx="5577840" cy="800000"/>
           </a:xfrm>
           <a:prstGeom prst="roundRect">
@@ -21417,14 +21363,14 @@
               </a:spcAft>
             </a:pPr>
             <a:r>
-              <a:rPr sz="850" b="0">
+              <a:rPr sz="750" b="0">
                 <a:solidFill>
                   <a:srgbClr val="FFFFFF"/>
                 </a:solidFill>
                 <a:latin typeface="Arial"/>
                 <a:ea typeface="Microsoft JhengHei"/>
               </a:rPr>
-              <a:t>刪掉 NRT 裡 src→nbr 那一條(_cut)。sim 的 A3 有 NRT 閘(ANR_REQUIRE_NRT):表上沒有就不准換手 → UE 一路撐到 RLF → 掉線後重建到對向 cell,回流統計才長得出來。</a:t>
+              <a:t>佈病只做一件事:把 NRT 裡 src→nbr 那一條刪掉。關鍵是 sim 的 A3 有 NRT 閘(ANR_REQUIRE_NRT)—— 表上沒有這條關係就不准換手,UE 只能一路撐到訊號低於 Qout、T310 逾時宣告 RLF,再就近重建到對向 cell。所以「掉線重建」不是另外注入的,是缺關係的必然結果,xApp 才有重建統計可以反推缺了哪一條。</a:t>
             </a:r>
           </a:p>
         </p:txBody>
@@ -21698,7 +21644,7 @@
                     <a:p>
                       <a:pPr algn="l"/>
                       <a:r>
-                        <a:rPr sz="850" b="0">
+                        <a:rPr sz="800" b="0">
                           <a:solidFill>
                             <a:srgbClr val="222A30"/>
                           </a:solidFill>
@@ -21717,19 +21663,18 @@
                 </a:tc>
                 <a:tc>
                   <a:txBody>
-                    <a:bodyPr wrap="square"/>
+                    <a:bodyPr/>
                     <a:lstStyle/>
                     <a:p>
-                      <a:pPr algn="l"/>
                       <a:r>
-                        <a:rPr sz="850" b="0">
+                        <a:rPr sz="800" b="0">
                           <a:solidFill>
                             <a:srgbClr val="222A30"/>
                           </a:solidFill>
                           <a:latin typeface="Arial"/>
                           <a:ea typeface="Microsoft JhengHei"/>
                         </a:rPr>
-                        <a:t>離線向量取 6.1/5.9dB 正反例;live 劇本 gap≈0.1dB(PathSolver 實測)</a:t>
+                        <a:t>UE 位置由 PathSolver 逐點實測挑出:鄰區逼近 serving 但 SINR 仍 ≥ −2,不會掉線</a:t>
                       </a:r>
                     </a:p>
                   </a:txBody>
@@ -21741,19 +21686,18 @@
                 </a:tc>
                 <a:tc>
                   <a:txBody>
-                    <a:bodyPr wrap="square"/>
+                    <a:bodyPr/>
                     <a:lstStyle/>
                     <a:p>
-                      <a:pPr algn="l"/>
                       <a:r>
-                        <a:rPr sz="850" b="0">
+                        <a:rPr sz="800" b="0">
                           <a:solidFill>
                             <a:srgbClr val="222A30"/>
                           </a:solidFill>
                           <a:latin typeface="Arial"/>
                           <a:ea typeface="Microsoft JhengHei"/>
                         </a:rPr>
-                        <a:t>「該換卻沒得換」的訊號差</a:t>
+                        <a:t>「該換卻沒得換」的訊號差;落在換手等效門檻內才算真候選</a:t>
                       </a:r>
                     </a:p>
                   </a:txBody>
@@ -21772,7 +21716,7 @@
                     <a:p>
                       <a:pPr algn="l"/>
                       <a:r>
-                        <a:rPr sz="850" b="0">
+                        <a:rPr sz="800" b="0">
                           <a:solidFill>
                             <a:srgbClr val="222A30"/>
                           </a:solidFill>
@@ -21791,19 +21735,18 @@
                 </a:tc>
                 <a:tc>
                   <a:txBody>
-                    <a:bodyPr wrap="square"/>
+                    <a:bodyPr/>
                     <a:lstStyle/>
                     <a:p>
-                      <a:pPr algn="l"/>
                       <a:r>
-                        <a:rPr sz="850" b="0">
+                        <a:rPr sz="800" b="0">
                           <a:solidFill>
                             <a:srgbClr val="222A30"/>
                           </a:solidFill>
                           <a:latin typeface="Arial"/>
                           <a:ea typeface="Microsoft JhengHei"/>
                         </a:rPr>
-                        <a:t>持續量測驅動</a:t>
+                        <a:t>5 台 UE 沿邊界來回,量測持續進來而非偶發經過</a:t>
                       </a:r>
                     </a:p>
                   </a:txBody>
@@ -21815,19 +21758,18 @@
                 </a:tc>
                 <a:tc>
                   <a:txBody>
-                    <a:bodyPr wrap="square"/>
+                    <a:bodyPr/>
                     <a:lstStyle/>
                     <a:p>
-                      <a:pPr algn="l"/>
                       <a:r>
-                        <a:rPr sz="850" b="0">
+                        <a:rPr sz="800" b="0">
                           <a:solidFill>
                             <a:srgbClr val="222A30"/>
                           </a:solidFill>
                           <a:latin typeface="Arial"/>
                           <a:ea typeface="Microsoft JhengHei"/>
                         </a:rPr>
-                        <a:t>不是雜訊、值得建</a:t>
+                        <a:t>單一窗口撞到不算數,要連續多窗才排除雜訊(卷面 L4 持續性要求)</a:t>
                       </a:r>
                     </a:p>
                   </a:txBody>
@@ -21846,7 +21788,7 @@
                     <a:p>
                       <a:pPr algn="l"/>
                       <a:r>
-                        <a:rPr sz="850" b="0">
+                        <a:rPr sz="800" b="0">
                           <a:solidFill>
                             <a:srgbClr val="222A30"/>
                           </a:solidFill>
@@ -21865,19 +21807,18 @@
                 </a:tc>
                 <a:tc>
                   <a:txBody>
-                    <a:bodyPr wrap="square"/>
+                    <a:bodyPr/>
                     <a:lstStyle/>
                     <a:p>
-                      <a:pPr algn="l"/>
                       <a:r>
-                        <a:rPr sz="850" b="0">
+                        <a:rPr sz="800" b="0">
                           <a:solidFill>
                             <a:srgbClr val="222A30"/>
                           </a:solidFill>
                           <a:latin typeface="Arial"/>
                           <a:ea typeface="Microsoft JhengHei"/>
                         </a:rPr>
-                        <a:t>—</a:t>
+                        <a:t>佈病剪掉 s25→n35,其餘既有關係維持健康高成功率</a:t>
                       </a:r>
                     </a:p>
                   </a:txBody>
@@ -21889,19 +21830,18 @@
                 </a:tc>
                 <a:tc>
                   <a:txBody>
-                    <a:bodyPr wrap="square"/>
+                    <a:bodyPr/>
                     <a:lstStyle/>
                     <a:p>
-                      <a:pPr algn="l"/>
                       <a:r>
-                        <a:rPr sz="850" b="0">
+                        <a:rPr sz="800" b="0">
                           <a:solidFill>
                             <a:srgbClr val="222A30"/>
                           </a:solidFill>
                           <a:latin typeface="Arial"/>
                           <a:ea typeface="Microsoft JhengHei"/>
                         </a:rPr>
-                        <a:t>有具名失敗的既有關係才可否決</a:t>
+                        <a:t>只有「有具名失敗的既有關係」才可否決建關係;單純沒人用不構成否決理由</a:t>
                       </a:r>
                     </a:p>
                   </a:txBody>
@@ -22141,7 +22081,7 @@
         </p:nvSpPr>
         <p:spPr>
           <a:xfrm>
-            <a:off x="320040" y="4025000"/>
+            <a:off x="320040" y="4060000"/>
             <a:ext cx="5577840" cy="800000"/>
           </a:xfrm>
           <a:prstGeom prst="roundRect">
@@ -22184,14 +22124,14 @@
               </a:spcAft>
             </a:pPr>
             <a:r>
-              <a:rPr sz="850" b="0">
+              <a:rPr sz="750" b="0">
                 <a:solidFill>
                   <a:srgbClr val="FFFFFF"/>
                 </a:solidFill>
                 <a:latin typeface="Arial"/>
                 <a:ea typeface="Microsoft JhengHei"/>
               </a:rPr>
-              <a:t>一樣剪掉 s25→n35 條目,但用 PathSolver 逐點實測把 UE 擺進「鄰區進逼卻不掉線」的窄窗(gap≈0.1dB、SINR≥−2)—— 與第 1 題的差別在 UE 撐得住、不靠 RLF 顯病。</a:t>
+              <a:t>同樣是剪掉關係,難的是位置:要讓鄰區訊號逼近 serving(進入換手等效門檻)卻又不能讓 UE 掉線,否則就退化成第 1 題。用 PathSolver 逐點實測挑出 gap≈0.1dB、SINR≥−2 的窄窗,再讓 5 台 UE 沿邊界來回維持樣本。自由空間公式在這裡估不準(兩天線主瓣重疊同一走廊),一定要實測。</a:t>
             </a:r>
           </a:p>
         </p:txBody>
@@ -23784,19 +23724,18 @@
               <a:tr h="594360">
                 <a:tc>
                   <a:txBody>
-                    <a:bodyPr wrap="square"/>
+                    <a:bodyPr/>
                     <a:lstStyle/>
                     <a:p>
-                      <a:pPr algn="l"/>
                       <a:r>
-                        <a:rPr sz="850" b="0">
+                        <a:rPr sz="800" b="0">
                           <a:solidFill>
                             <a:srgbClr val="222A30"/>
                           </a:solidFill>
                           <a:latin typeface="Arial"/>
                           <a:ea typeface="Microsoft JhengHei"/>
                         </a:rPr>
-                        <a:t>量測率 ≤ 0.5× 其他 PCI 中位數</a:t>
+                        <a:t>servingRsrp 中位 ≤ −105dBm</a:t>
                       </a:r>
                     </a:p>
                   </a:txBody>
@@ -23808,19 +23747,18 @@
                 </a:tc>
                 <a:tc>
                   <a:txBody>
-                    <a:bodyPr wrap="square"/>
+                    <a:bodyPr/>
                     <a:lstStyle/>
                     <a:p>
-                      <a:pPr algn="l"/>
                       <a:r>
-                        <a:rPr sz="850" b="0">
+                        <a:rPr sz="800" b="0">
                           <a:solidFill>
                             <a:srgbClr val="222A30"/>
                           </a:solidFill>
                           <a:latin typeface="Arial"/>
                           <a:ea typeface="Microsoft JhengHei"/>
                         </a:rPr>
-                        <a:t>深邊緣 UE 取樣稀疏</a:t>
+                        <a:t>UE 停在 s28 天線零陷內的深邊緣點,live 實測 serving −107.5dBm</a:t>
                       </a:r>
                     </a:p>
                   </a:txBody>
@@ -23832,19 +23770,18 @@
                 </a:tc>
                 <a:tc>
                   <a:txBody>
-                    <a:bodyPr wrap="square"/>
+                    <a:bodyPr/>
                     <a:lstStyle/>
                     <a:p>
-                      <a:pPr algn="l"/>
                       <a:r>
-                        <a:rPr sz="850" b="0">
+                        <a:rPr sz="800" b="0">
                           <a:solidFill>
                             <a:srgbClr val="222A30"/>
                           </a:solidFill>
                           <a:latin typeface="Arial"/>
                           <a:ea typeface="Microsoft JhengHei"/>
                         </a:rPr>
-                        <a:t>稀疏是簽名不是駁回理由</a:t>
+                        <a:t>「深邊緣」定義在 serving 絕對值,不是距離遠近;拉距離拉不出來,靠場型零陷做到</a:t>
                       </a:r>
                     </a:p>
                   </a:txBody>
@@ -23863,7 +23800,7 @@
                     <a:p>
                       <a:pPr algn="l"/>
                       <a:r>
-                        <a:rPr sz="850" b="0">
+                        <a:rPr sz="800" b="0">
                           <a:solidFill>
                             <a:srgbClr val="222A30"/>
                           </a:solidFill>
@@ -23882,19 +23819,18 @@
                 </a:tc>
                 <a:tc>
                   <a:txBody>
-                    <a:bodyPr wrap="square"/>
+                    <a:bodyPr/>
                     <a:lstStyle/>
                     <a:p>
-                      <a:pPr algn="l"/>
                       <a:r>
-                        <a:rPr sz="850" b="0">
+                        <a:rPr sz="800" b="0">
                           <a:solidFill>
                             <a:srgbClr val="222A30"/>
                           </a:solidFill>
                           <a:latin typeface="Arial"/>
                           <a:ea typeface="Microsoft JhengHei"/>
                         </a:rPr>
-                        <a:t>深邊緣位置(卷面:serving −112dBm、增益 +18.5dB)</a:t>
+                        <a:t>n91 佈在 UE 的 45° 側 → −87.8dBm,較 serving 高 +19.8dB(卷面 +18.5)</a:t>
                       </a:r>
                     </a:p>
                   </a:txBody>
@@ -23906,19 +23842,18 @@
                 </a:tc>
                 <a:tc>
                   <a:txBody>
-                    <a:bodyPr wrap="square"/>
+                    <a:bodyPr/>
                     <a:lstStyle/>
                     <a:p>
-                      <a:pPr algn="l"/>
                       <a:r>
-                        <a:rPr sz="850" b="0">
+                        <a:rPr sz="800" b="0">
                           <a:solidFill>
                             <a:srgbClr val="222A30"/>
                           </a:solidFill>
                           <a:latin typeface="Arial"/>
                           <a:ea typeface="Microsoft JhengHei"/>
                         </a:rPr>
-                        <a:t>卷面判準:絕對量能門檻會漏掉深邊緣</a:t>
+                        <a:t>判準改看相對增益:絕對值再低,只要比 serving 好 10dB 就值得建關係</a:t>
                       </a:r>
                     </a:p>
                   </a:txBody>
@@ -23932,19 +23867,18 @@
               <a:tr h="594360">
                 <a:tc>
                   <a:txBody>
-                    <a:bodyPr wrap="square"/>
+                    <a:bodyPr/>
                     <a:lstStyle/>
                     <a:p>
-                      <a:pPr algn="l"/>
                       <a:r>
-                        <a:rPr sz="850" b="0">
+                        <a:rPr sz="800" b="0">
                           <a:solidFill>
                             <a:srgbClr val="222A30"/>
                           </a:solidFill>
                           <a:latin typeface="Arial"/>
                           <a:ea typeface="Microsoft JhengHei"/>
                         </a:rPr>
-                        <a:t>RLF.Drop ≥0.1 同向佐證</a:t>
+                        <a:t>樣本稀疏(簽名,不作判準)</a:t>
                       </a:r>
                     </a:p>
                   </a:txBody>
@@ -23956,19 +23890,18 @@
                 </a:tc>
                 <a:tc>
                   <a:txBody>
-                    <a:bodyPr wrap="square"/>
+                    <a:bodyPr/>
                     <a:lstStyle/>
                     <a:p>
-                      <a:pPr algn="l"/>
                       <a:r>
-                        <a:rPr sz="850" b="0">
+                        <a:rPr sz="800" b="0">
                           <a:solidFill>
                             <a:srgbClr val="222A30"/>
                           </a:solidFill>
                           <a:latin typeface="Arial"/>
                           <a:ea typeface="Microsoft JhengHei"/>
                         </a:rPr>
-                        <a:t>未注入 —— 深邊緣位置自然掉話</a:t>
+                        <a:t>本場實測 140/min;要做出卷面的 0.6/min 需 UE 只偶爾經過,與持續窗互斥</a:t>
                       </a:r>
                     </a:p>
                   </a:txBody>
@@ -23980,19 +23913,18 @@
                 </a:tc>
                 <a:tc>
                   <a:txBody>
-                    <a:bodyPr wrap="square"/>
+                    <a:bodyPr/>
                     <a:lstStyle/>
                     <a:p>
-                      <a:pPr algn="l"/>
                       <a:r>
-                        <a:rPr sz="850" b="0">
+                        <a:rPr sz="800" b="0">
                           <a:solidFill>
                             <a:srgbClr val="222A30"/>
                           </a:solidFill>
                           <a:latin typeface="Arial"/>
                           <a:ea typeface="Microsoft JhengHei"/>
                         </a:rPr>
-                        <a:t>病的結果做佐證</a:t>
+                        <a:t>卷面明列「以量能門檻過濾」為典型錯誤 —— 稀疏不得作為駁回理由</a:t>
                       </a:r>
                     </a:p>
                   </a:txBody>
@@ -24202,7 +24134,7 @@
                 <a:latin typeface="Arial"/>
                 <a:ea typeface="Microsoft JhengHei"/>
               </a:rPr>
-              <a:t>驗證:離線 fixture ✅</a:t>
+              <a:t>驗證:live 重佈通過(待收綠)</a:t>
             </a:r>
           </a:p>
           <a:p>
@@ -24219,7 +24151,7 @@
                 <a:latin typeface="Arial"/>
                 <a:ea typeface="Microsoft JhengHei"/>
               </a:rPr>
-              <a:t>q3_v1..7 離線向量 ✅;live fixture 為「報告門檻 −85」型,深邊緣增益構型待補</a:t>
+              <a:t>08/26 依卷面重佈:serving −107.5 ✓、增益 +19.8dB ✓、來源歸屬單一;xApp 07:43 已 ADD 補上關係</a:t>
             </a:r>
           </a:p>
         </p:txBody>
@@ -24232,7 +24164,7 @@
         </p:nvSpPr>
         <p:spPr>
           <a:xfrm>
-            <a:off x="320040" y="4025000"/>
+            <a:off x="320040" y="4060000"/>
             <a:ext cx="5577840" cy="800000"/>
           </a:xfrm>
           <a:prstGeom prst="roundRect">
@@ -24275,14 +24207,14 @@
               </a:spcAft>
             </a:pPr>
             <a:r>
-              <a:rPr sz="850" b="0">
+              <a:rPr sz="750" b="0">
                 <a:solidFill>
                   <a:srgbClr val="FFFFFF"/>
                 </a:solidFill>
                 <a:latin typeface="Arial"/>
                 <a:ea typeface="Microsoft JhengHei"/>
               </a:rPr>
-              <a:t>現行:剪掉 s28→n91 + 臨時把量測回報門檻設 −85dBm(TS 38.331 reportConfig)讓樣本變稀疏。⚠ 卷面要的是深邊緣幾何(serving ≤−105、相對增益 ≥10dB);實測 s28 天線凹陷可達 −108.7dBm,場景重佈中。</a:t>
+              <a:t>依卷面重佈(08/26):不動 TX 功率,改用天線場型與幾何。s28 的場型零陷在 ±z 方向,把 UE 停在 (0,−420) 就得到 serving −107.5dBm 的深邊緣;n51/n52 排在同一條 z 軸更遠處,比 serving 還弱,才不會用 A3 把 UE 拉走或搶走駐留;n91 擺在 45° 側取得 +19.8dB 相對增益。n91 另標 cellBarred,否則 UE 一 RLF 就重建過去,深邊緣狀態當場消失。</a:t>
             </a:r>
           </a:p>
         </p:txBody>
@@ -24466,7 +24398,7 @@
                     <a:p>
                       <a:pPr algn="l"/>
                       <a:r>
-                        <a:rPr sz="850" b="0">
+                        <a:rPr sz="800" b="0">
                           <a:solidFill>
                             <a:srgbClr val="222A30"/>
                           </a:solidFill>
@@ -24485,19 +24417,18 @@
                 </a:tc>
                 <a:tc>
                   <a:txBody>
-                    <a:bodyPr wrap="square"/>
+                    <a:bodyPr/>
                     <a:lstStyle/>
                     <a:p>
-                      <a:pPr algn="l"/>
                       <a:r>
-                        <a:rPr sz="850" b="0">
+                        <a:rPr sz="800" b="0">
                           <a:solidFill>
                             <a:srgbClr val="222A30"/>
                           </a:solidFill>
                           <a:latin typeface="Arial"/>
                           <a:ea typeface="Microsoft JhengHei"/>
                         </a:rPr>
-                        <a:t>sim 新增 cell 不入 NRT</a:t>
+                        <a:t>場景多放一顆 unk_c0(pci 301),且不建任何指向它的關係</a:t>
                       </a:r>
                     </a:p>
                   </a:txBody>
@@ -24509,19 +24440,18 @@
                 </a:tc>
                 <a:tc>
                   <a:txBody>
-                    <a:bodyPr wrap="square"/>
+                    <a:bodyPr/>
                     <a:lstStyle/>
                     <a:p>
-                      <a:pPr algn="l"/>
                       <a:r>
-                        <a:rPr sz="850" b="0">
+                        <a:rPr sz="800" b="0">
                           <a:solidFill>
                             <a:srgbClr val="222A30"/>
                           </a:solidFill>
                           <a:latin typeface="Arial"/>
                           <a:ea typeface="Microsoft JhengHei"/>
                         </a:rPr>
-                        <a:t>全新鄰居的定義</a:t>
+                        <a:t>「全表查無」才算新面孔;只要出現在既有 targets 裡就不是這題</a:t>
                       </a:r>
                     </a:p>
                   </a:txBody>
@@ -24540,7 +24470,7 @@
                     <a:p>
                       <a:pPr algn="l"/>
                       <a:r>
-                        <a:rPr sz="850" b="0">
+                        <a:rPr sz="800" b="0">
                           <a:solidFill>
                             <a:srgbClr val="222A30"/>
                           </a:solidFill>
@@ -24559,19 +24489,18 @@
                 </a:tc>
                 <a:tc>
                   <a:txBody>
-                    <a:bodyPr wrap="square"/>
+                    <a:bodyPr/>
                     <a:lstStyle/>
                     <a:p>
-                      <a:pPr algn="l"/>
                       <a:r>
-                        <a:rPr sz="850" b="0">
+                        <a:rPr sz="800" b="0">
                           <a:solidFill>
                             <a:srgbClr val="222A30"/>
                           </a:solidFill>
                           <a:latin typeface="Arial"/>
                           <a:ea typeface="Microsoft JhengHei"/>
                         </a:rPr>
-                        <a:t>強且持續</a:t>
+                        <a:t>UE 走近它,量測強度與回報率都穩定達標</a:t>
                       </a:r>
                     </a:p>
                   </a:txBody>
@@ -24583,19 +24512,18 @@
                 </a:tc>
                 <a:tc>
                   <a:txBody>
-                    <a:bodyPr wrap="square"/>
+                    <a:bodyPr/>
                     <a:lstStyle/>
                     <a:p>
-                      <a:pPr algn="l"/>
                       <a:r>
-                        <a:rPr sz="850" b="0">
+                        <a:rPr sz="800" b="0">
                           <a:solidFill>
                             <a:srgbClr val="222A30"/>
                           </a:solidFill>
                           <a:latin typeface="Arial"/>
                           <a:ea typeface="Microsoft JhengHei"/>
                         </a:rPr>
-                        <a:t>值得建關係</a:t>
+                        <a:t>夠強又持續才值得建,避免把偶發雜訊當成新鄰居</a:t>
                       </a:r>
                     </a:p>
                   </a:txBody>
@@ -24614,7 +24542,7 @@
                     <a:p>
                       <a:pPr algn="l"/>
                       <a:r>
-                        <a:rPr sz="850" b="0">
+                        <a:rPr sz="800" b="0">
                           <a:solidFill>
                             <a:srgbClr val="222A30"/>
                           </a:solidFill>
@@ -24633,19 +24561,18 @@
                 </a:tc>
                 <a:tc>
                   <a:txBody>
-                    <a:bodyPr wrap="square"/>
+                    <a:bodyPr/>
                     <a:lstStyle/>
                     <a:p>
-                      <a:pPr algn="l"/>
                       <a:r>
-                        <a:rPr sz="850" b="0">
+                        <a:rPr sz="800" b="0">
                           <a:solidFill>
                             <a:srgbClr val="222A30"/>
                           </a:solidFill>
                           <a:latin typeface="Arial"/>
                           <a:ea typeface="Microsoft JhengHei"/>
                         </a:rPr>
-                        <a:t>—</a:t>
+                        <a:t>其餘既有關係維持高成功率,不注入任何失敗</a:t>
                       </a:r>
                     </a:p>
                   </a:txBody>
@@ -24657,19 +24584,18 @@
                 </a:tc>
                 <a:tc>
                   <a:txBody>
-                    <a:bodyPr wrap="square"/>
+                    <a:bodyPr/>
                     <a:lstStyle/>
                     <a:p>
-                      <a:pPr algn="l"/>
                       <a:r>
-                        <a:rPr sz="850" b="0">
+                        <a:rPr sz="800" b="0">
                           <a:solidFill>
                             <a:srgbClr val="222A30"/>
                           </a:solidFill>
                           <a:latin typeface="Arial"/>
                           <a:ea typeface="Microsoft JhengHei"/>
                         </a:rPr>
-                        <a:t>排除「其實是既有病」</a:t>
+                        <a:t>排除「其實是既有關係壞掉」的可能;結果型 KPI 不可單獨當根因</a:t>
                       </a:r>
                     </a:p>
                   </a:txBody>
@@ -24892,7 +24818,7 @@
         </p:nvSpPr>
         <p:spPr>
           <a:xfrm>
-            <a:off x="320040" y="4025000"/>
+            <a:off x="320040" y="4060000"/>
             <a:ext cx="5577840" cy="800000"/>
           </a:xfrm>
           <a:prstGeom prst="roundRect">
@@ -24935,14 +24861,14 @@
               </a:spcAft>
             </a:pPr>
             <a:r>
-              <a:rPr sz="850" b="0">
+              <a:rPr sz="750" b="0">
                 <a:solidFill>
                   <a:srgbClr val="FFFFFF"/>
                 </a:solidFill>
                 <a:latin typeface="Arial"/>
                 <a:ea typeface="Microsoft JhengHei"/>
               </a:rPr>
-              <a:t>場景放一顆 unk_c0(pci 301),但不建任何指向它的 NRT 條目 —— cell 真的存在、量測也看得到,表上就是完全查無。</a:t>
+              <a:t>場景多放一顆 unk_c0(pci 301),並確保沒有任何關係指向它 —— cell 真的存在、UE 量得到、CGI 也解得出來,唯獨表上查無。與第 1 題的差別在於這顆是全新的,不是既有關係被刪掉;所以 xApp 必須先確認它不在任何既有 targets 裡,才不會把既有病誤判成新鄰居。</a:t>
             </a:r>
           </a:p>
         </p:txBody>

--- a/docs/report/8_27_進度報告_v10十二題.pptx
+++ b/docs/report/8_27_進度報告_v10十二題.pptx
@@ -19436,7 +19436,7 @@
                           <a:latin typeface="Arial"/>
                           <a:ea typeface="Microsoft JhengHei"/>
                         </a:rPr>
-                        <a:t>深邊緣覆蓋劣化:serving 極弱、鄰區相對強,樣本天然稀疏</a:t>
+                        <a:t>UE 在覆蓋極邊緣、旁邊有明顯更好的 cell 卻不在 NRT;該處人少,樣本天生稀疏</a:t>
                       </a:r>
                     </a:p>
                   </a:txBody>
@@ -19460,7 +19460,7 @@
                           <a:latin typeface="Arial"/>
                           <a:ea typeface="Microsoft JhengHei"/>
                         </a:rPr>
-                        <a:t>改看相對增益+持續性,取代量能門檻</a:t>
+                        <a:t>xApp 改看「比 serving 好 ≥10dB 且連 3 窗」而非樣本量 → 解析 CGI → 請 gNB 補關係</a:t>
                       </a:r>
                     </a:p>
                   </a:txBody>
@@ -23647,7 +23647,7 @@
                 <a:gridCol w="1691640"/>
                 <a:gridCol w="1920240"/>
               </a:tblGrid>
-              <a:tr h="594360">
+              <a:tr h="450000">
                 <a:tc>
                   <a:txBody>
                     <a:bodyPr wrap="square"/>
@@ -23721,7 +23721,48 @@
                   </a:tcPr>
                 </a:tc>
               </a:tr>
-              <a:tr h="594360">
+              <a:tr h="620000">
+                <a:tc gridSpan="3">
+                  <a:txBody>
+                    <a:bodyPr/>
+                    <a:lstStyle/>
+                    <a:p>
+                      <a:r>
+                        <a:rPr sz="800" b="0">
+                          <a:solidFill>
+                            <a:srgbClr val="222A30"/>
+                          </a:solidFill>
+                          <a:latin typeface="Arial"/>
+                          <a:ea typeface="Microsoft JhengHei"/>
+                        </a:rPr>
+                        <a:t>這題在演什麼:UE 站在服務 cell 的覆蓋極邊緣(訊號只有 −107.5dBm),旁邊有一顆好上 20dB 的 cell,但鄰區表裡沒有這條關係 —— 換不過去,只能撐到掉線重建。難點:深邊緣人少、訊號又天生弱,傳統「樣本要夠多、訊號要夠強」的門檻會直接把它篩掉。</a:t>
+                      </a:r>
+                    </a:p>
+                  </a:txBody>
+                  <a:tcPr anchor="ctr" marL="45720" marR="45720" marT="18288" marB="18288">
+                    <a:solidFill>
+                      <a:srgbClr val="FFFFFF"/>
+                    </a:solidFill>
+                  </a:tcPr>
+                </a:tc>
+                <a:tc hMerge="1">
+                  <a:txBody>
+                    <a:bodyPr/>
+                    <a:lstStyle/>
+                    <a:p/>
+                  </a:txBody>
+                  <a:tcPr/>
+                </a:tc>
+                <a:tc hMerge="1">
+                  <a:txBody>
+                    <a:bodyPr/>
+                    <a:lstStyle/>
+                    <a:p/>
+                  </a:txBody>
+                  <a:tcPr/>
+                </a:tc>
+              </a:tr>
+              <a:tr h="450000">
                 <a:tc>
                   <a:txBody>
                     <a:bodyPr/>
@@ -23792,7 +23833,7 @@
                   </a:tcPr>
                 </a:tc>
               </a:tr>
-              <a:tr h="594360">
+              <a:tr h="450000">
                 <a:tc>
                   <a:txBody>
                     <a:bodyPr wrap="square"/>
@@ -23864,7 +23905,7 @@
                   </a:tcPr>
                 </a:tc>
               </a:tr>
-              <a:tr h="594360">
+              <a:tr h="450000">
                 <a:tc>
                   <a:txBody>
                     <a:bodyPr/>
@@ -24000,52 +24041,86 @@
           <a:p>
             <a:pPr>
               <a:spcAft>
-                <a:spcPts val="300"/>
+                <a:spcPts val="250"/>
               </a:spcAft>
             </a:pPr>
             <a:r>
-              <a:rPr sz="800" b="0">
+              <a:rPr sz="750" b="0">
                 <a:solidFill>
                   <a:srgbClr val="222A30"/>
                 </a:solidFill>
                 <a:latin typeface="Arial"/>
                 <a:ea typeface="Microsoft JhengHei"/>
               </a:rPr>
-              <a:t>① 深邊緣本來人就少,不可以因為「量測次數太少」把它駁回</a:t>
+              <a:t>① 每 5 分鐘算一次:鄰區 RSRP − 同報 serving = 相對增益</a:t>
             </a:r>
           </a:p>
           <a:p>
             <a:pPr>
               <a:spcAft>
-                <a:spcPts val="300"/>
+                <a:spcPts val="250"/>
               </a:spcAft>
             </a:pPr>
             <a:r>
-              <a:rPr sz="800" b="0">
+              <a:rPr sz="750" b="0">
                 <a:solidFill>
                   <a:srgbClr val="222A30"/>
                 </a:solidFill>
                 <a:latin typeface="Arial"/>
                 <a:ea typeface="Microsoft JhengHei"/>
               </a:rPr>
-              <a:t>② 目標 CGI 連續抽樣 3 次結果一致才採信 → 送 ADD</a:t>
+              <a:t>② 連 3 個窗都成立才動手(serving ≤−105、增益 ≥10dB、NRT 查無)</a:t>
             </a:r>
           </a:p>
           <a:p>
             <a:pPr>
               <a:spcAft>
-                <a:spcPts val="300"/>
+                <a:spcPts val="250"/>
               </a:spcAft>
             </a:pPr>
             <a:r>
-              <a:rPr sz="800" b="0">
+              <a:rPr sz="750" b="0">
                 <a:solidFill>
                   <a:srgbClr val="222A30"/>
                 </a:solidFill>
                 <a:latin typeface="Arial"/>
                 <a:ea typeface="Microsoft JhengHei"/>
               </a:rPr>
-              <a:t>③ 若鄰區表已滿,讓第 9 題的容量修剪先處理</a:t>
+              <a:t>③ REPORTCGI 請 gNB 叫 UE 讀目標系統資訊解出 CGI,抽樣 3 次一致才採信</a:t>
+            </a:r>
+          </a:p>
+          <a:p>
+            <a:pPr>
+              <a:spcAft>
+                <a:spcPts val="250"/>
+              </a:spcAft>
+            </a:pPr>
+            <a:r>
+              <a:rPr sz="750" b="0">
+                <a:solidFill>
+                  <a:srgbClr val="222A30"/>
+                </a:solidFill>
+                <a:latin typeface="Arial"/>
+                <a:ea typeface="Microsoft JhengHei"/>
+              </a:rPr>
+              <a:t>④ 送 ADD 請 gNB 建關係(xApp 不自己寫 NRT),等 NRT 回讀確認</a:t>
+            </a:r>
+          </a:p>
+          <a:p>
+            <a:pPr>
+              <a:spcAft>
+                <a:spcPts val="250"/>
+              </a:spcAft>
+            </a:pPr>
+            <a:r>
+              <a:rPr sz="750" b="0">
+                <a:solidFill>
+                  <a:srgbClr val="222A30"/>
+                </a:solidFill>
+                <a:latin typeface="Arial"/>
+                <a:ea typeface="Microsoft JhengHei"/>
+              </a:rPr>
+              <a:t>⑤ A3 把 UE 換過去、深邊緣狀態消失 = 行為確認</a:t>
             </a:r>
           </a:p>
           <a:p>
@@ -24076,7 +24151,7 @@
                 <a:latin typeface="Arial"/>
                 <a:ea typeface="Microsoft JhengHei"/>
               </a:rPr>
-              <a:t>預計操作結果:以「相對增益+持續性」取代量能門檻補關係</a:t>
+              <a:t>預計操作結果:xApp 靠相對增益(而非樣本量)認出深邊緣缺鄰,請 gNB 補上關係</a:t>
             </a:r>
           </a:p>
         </p:txBody>

--- a/docs/report/8_27_進度報告_v10十二題.pptx
+++ b/docs/report/8_27_進度報告_v10十二題.pptx
@@ -19192,7 +19192,7 @@
                           <a:latin typeface="Arial"/>
                           <a:ea typeface="Microsoft JhengHei"/>
                         </a:rPr>
-                        <a:t>目標 cell 未入 NRT,UE 換手失敗以重建回流</a:t>
+                        <a:t>表上缺這條關係 → A3 換不了手,UE 撐到掉線才靠重建跳過去(證據在目標側)</a:t>
                       </a:r>
                     </a:p>
                   </a:txBody>
@@ -19314,7 +19314,7 @@
                           <a:latin typeface="Arial"/>
                           <a:ea typeface="Microsoft JhengHei"/>
                         </a:rPr>
-                        <a:t>鄰區已入 A3 範圍但 NRT 無關係,UE 滯留劣化</a:t>
+                        <a:t>同樣缺關係,但 UE 還沒掉線 —— 只能從量測面發現(落後 serving ≤6dB 卻查無)</a:t>
                       </a:r>
                     </a:p>
                   </a:txBody>
@@ -19338,7 +19338,7 @@
                           <a:latin typeface="Arial"/>
                           <a:ea typeface="Microsoft JhengHei"/>
                         </a:rPr>
-                        <a:t>事前偵測補關係(不等 RLF)</a:t>
+                        <a:t>在 UE 掉線前就補上;ANR 自動建立被關掉時改走通報</a:t>
                       </a:r>
                     </a:p>
                   </a:txBody>
@@ -20784,7 +20784,7 @@
                 <a:gridCol w="1691640"/>
                 <a:gridCol w="1920240"/>
               </a:tblGrid>
-              <a:tr h="594360">
+              <a:tr h="450000">
                 <a:tc>
                   <a:txBody>
                     <a:bodyPr wrap="square"/>
@@ -20858,7 +20858,48 @@
                   </a:tcPr>
                 </a:tc>
               </a:tr>
-              <a:tr h="594360">
+              <a:tr h="620000">
+                <a:tc gridSpan="3">
+                  <a:txBody>
+                    <a:bodyPr/>
+                    <a:lstStyle/>
+                    <a:p>
+                      <a:r>
+                        <a:rPr sz="800" b="0">
+                          <a:solidFill>
+                            <a:srgbClr val="222A30"/>
+                          </a:solidFill>
+                          <a:latin typeface="Arial"/>
+                          <a:ea typeface="Microsoft JhengHei"/>
+                        </a:rPr>
+                        <a:t>這題在演什麼:UE 走到兩顆 cell 的邊界,想換到對面那顆,但鄰區表裡沒有這條關係 —— A3 被擋住,UE 只能撐到訊號斷掉、用「重建」硬跳過去。證據不在來源 cell,而在目標那一側:它收到一堆「從同一個 PCI 重建進來」的 UE。難點:要從目標側的統計反推「該幫誰補關係」,而 PCI 可能撞號,反推前得先消歧。</a:t>
+                      </a:r>
+                    </a:p>
+                  </a:txBody>
+                  <a:tcPr anchor="ctr" marL="45720" marR="45720" marT="18288" marB="18288">
+                    <a:solidFill>
+                      <a:srgbClr val="FFFFFF"/>
+                    </a:solidFill>
+                  </a:tcPr>
+                </a:tc>
+                <a:tc hMerge="1">
+                  <a:txBody>
+                    <a:bodyPr/>
+                    <a:lstStyle/>
+                    <a:p/>
+                  </a:txBody>
+                  <a:tcPr/>
+                </a:tc>
+                <a:tc hMerge="1">
+                  <a:txBody>
+                    <a:bodyPr/>
+                    <a:lstStyle/>
+                    <a:p/>
+                  </a:txBody>
+                  <a:tcPr/>
+                </a:tc>
+              </a:tr>
+              <a:tr h="450000">
                 <a:tc>
                   <a:txBody>
                     <a:bodyPr wrap="square"/>
@@ -20930,7 +20971,7 @@
                   </a:tcPr>
                 </a:tc>
               </a:tr>
-              <a:tr h="594360">
+              <a:tr h="450000">
                 <a:tc>
                   <a:txBody>
                     <a:bodyPr wrap="square"/>
@@ -21002,7 +21043,7 @@
                   </a:tcPr>
                 </a:tc>
               </a:tr>
-              <a:tr h="594360">
+              <a:tr h="450000">
                 <a:tc>
                   <a:txBody>
                     <a:bodyPr wrap="square"/>
@@ -21139,69 +21180,86 @@
           <a:p>
             <a:pPr>
               <a:spcAft>
-                <a:spcPts val="300"/>
+                <a:spcPts val="250"/>
               </a:spcAft>
             </a:pPr>
             <a:r>
-              <a:rPr sz="800" b="0">
+              <a:rPr sz="750" b="0">
                 <a:solidFill>
                   <a:srgbClr val="222A30"/>
                 </a:solidFill>
                 <a:latin typeface="Arial"/>
                 <a:ea typeface="Microsoft JhengHei"/>
               </a:rPr>
-              <a:t>① 請基地台叫 UE 去讀目標的全域識別(CGI)——「REPORTCGI」,解析結果唯一才算數</a:t>
+              <a:t>① 目標 cell 的重建進入速率異常升高,且集中在同一個 previousPCI</a:t>
             </a:r>
           </a:p>
           <a:p>
             <a:pPr>
               <a:spcAft>
-                <a:spcPts val="300"/>
+                <a:spcPts val="250"/>
               </a:spcAft>
             </a:pPr>
             <a:r>
-              <a:rPr sz="800" b="0">
+              <a:rPr sz="750" b="0">
                 <a:solidFill>
                   <a:srgbClr val="222A30"/>
                 </a:solidFill>
                 <a:latin typeface="Arial"/>
                 <a:ea typeface="Microsoft JhengHei"/>
               </a:rPr>
-              <a:t>② 送 ADD 請 gNB 建立這條鄰區關係(只建單向;反向由對方 gNB 自己建)</a:t>
+              <a:t>② 消歧:同一 PCI 可能不只一顆(異地同碼)—— 用量測量能確認是哪一顆</a:t>
             </a:r>
           </a:p>
           <a:p>
             <a:pPr>
               <a:spcAft>
-                <a:spcPts val="300"/>
+                <a:spcPts val="250"/>
               </a:spcAft>
             </a:pPr>
             <a:r>
-              <a:rPr sz="800" b="0">
+              <a:rPr sz="750" b="0">
                 <a:solidFill>
                   <a:srgbClr val="222A30"/>
                 </a:solidFill>
                 <a:latin typeface="Arial"/>
                 <a:ea typeface="Microsoft JhengHei"/>
               </a:rPr>
-              <a:t>③ 等 NRT 回讀確認真的寫進去了(推播或下一張快照)</a:t>
+              <a:t>③ REPORTCGI 請 gNB 叫 UE 讀系統資訊,解出全域識別 CGI,唯一才採信</a:t>
             </a:r>
           </a:p>
           <a:p>
             <a:pPr>
               <a:spcAft>
-                <a:spcPts val="300"/>
+                <a:spcPts val="250"/>
               </a:spcAft>
             </a:pPr>
             <a:r>
-              <a:rPr sz="800" b="0">
+              <a:rPr sz="750" b="0">
                 <a:solidFill>
                   <a:srgbClr val="222A30"/>
                 </a:solidFill>
                 <a:latin typeface="Arial"/>
                 <a:ea typeface="Microsoft JhengHei"/>
               </a:rPr>
-              <a:t>④ 看 UE 開始走新關係、掉線重建歸零 = 真的修好</a:t>
+              <a:t>④ 送 ADD 請 gNB 在「來源 cell」補這條關係(反向由對方 gNB 自建)</a:t>
+            </a:r>
+          </a:p>
+          <a:p>
+            <a:pPr>
+              <a:spcAft>
+                <a:spcPts val="250"/>
+              </a:spcAft>
+            </a:pPr>
+            <a:r>
+              <a:rPr sz="750" b="0">
+                <a:solidFill>
+                  <a:srgbClr val="222A30"/>
+                </a:solidFill>
+                <a:latin typeface="Arial"/>
+                <a:ea typeface="Microsoft JhengHei"/>
+              </a:rPr>
+              <a:t>⑤ 等 NRT 回讀確認 → A3 接手換手、掉線重建歸零 = 行為確認</a:t>
             </a:r>
           </a:p>
           <a:p>
@@ -21232,7 +21290,7 @@
                 <a:latin typeface="Arial"/>
                 <a:ea typeface="Microsoft JhengHei"/>
               </a:rPr>
-              <a:t>預計操作結果:解析 CGI 後補建關係,RLF 歸零</a:t>
+              <a:t>預計操作結果:從目標側的重建統計反推出缺哪一條,補上後掉線重建歸零</a:t>
             </a:r>
           </a:p>
         </p:txBody>
@@ -21562,7 +21620,7 @@
                 <a:gridCol w="1691640"/>
                 <a:gridCol w="1920240"/>
               </a:tblGrid>
-              <a:tr h="594360">
+              <a:tr h="450000">
                 <a:tc>
                   <a:txBody>
                     <a:bodyPr wrap="square"/>
@@ -21636,7 +21694,48 @@
                   </a:tcPr>
                 </a:tc>
               </a:tr>
-              <a:tr h="594360">
+              <a:tr h="620000">
+                <a:tc gridSpan="3">
+                  <a:txBody>
+                    <a:bodyPr/>
+                    <a:lstStyle/>
+                    <a:p>
+                      <a:r>
+                        <a:rPr sz="800" b="0">
+                          <a:solidFill>
+                            <a:srgbClr val="222A30"/>
+                          </a:solidFill>
+                          <a:latin typeface="Arial"/>
+                          <a:ea typeface="Microsoft JhengHei"/>
+                        </a:rPr>
+                        <a:t>這題在演什麼:跟第 1 題同一種病(表上缺一條關係),但 UE 還撐得住、沒有掉線 —— 所以完全沒有重建統計可用。證據只剩量測面:某顆 cell 被穩定量到、只落後目前服務 cell 6dB 以內(已達「該換手」的等效門檻),表上卻查無。考點:能不能在 UE 掉線「之前」就發現並補上。</a:t>
+                      </a:r>
+                    </a:p>
+                  </a:txBody>
+                  <a:tcPr anchor="ctr" marL="45720" marR="45720" marT="18288" marB="18288">
+                    <a:solidFill>
+                      <a:srgbClr val="FFFFFF"/>
+                    </a:solidFill>
+                  </a:tcPr>
+                </a:tc>
+                <a:tc hMerge="1">
+                  <a:txBody>
+                    <a:bodyPr/>
+                    <a:lstStyle/>
+                    <a:p/>
+                  </a:txBody>
+                  <a:tcPr/>
+                </a:tc>
+                <a:tc hMerge="1">
+                  <a:txBody>
+                    <a:bodyPr/>
+                    <a:lstStyle/>
+                    <a:p/>
+                  </a:txBody>
+                  <a:tcPr/>
+                </a:tc>
+              </a:tr>
+              <a:tr h="450000">
                 <a:tc>
                   <a:txBody>
                     <a:bodyPr wrap="square"/>
@@ -21651,7 +21750,7 @@
                           <a:latin typeface="Arial"/>
                           <a:ea typeface="Microsoft JhengHei"/>
                         </a:rPr>
-                        <a:t>gap = serving − 鄰區 ≤ 6dB</a:t>
+                        <a:t>落後 serving ≤ 6dB(換手等效門檻內)</a:t>
                       </a:r>
                     </a:p>
                   </a:txBody>
@@ -21708,7 +21807,7 @@
                   </a:tcPr>
                 </a:tc>
               </a:tr>
-              <a:tr h="594360">
+              <a:tr h="450000">
                 <a:tc>
                   <a:txBody>
                     <a:bodyPr wrap="square"/>
@@ -21723,7 +21822,7 @@
                           <a:latin typeface="Arial"/>
                           <a:ea typeface="Microsoft JhengHei"/>
                         </a:rPr>
-                        <a:t>RSRP ≥ −85dBm ∧ 率 ≥20/min ∧ 3窗</a:t>
+                        <a:t>RSRP ≥ −85dBm ∧ 率 ≥5/min ∧ 連 3 窗</a:t>
                       </a:r>
                     </a:p>
                   </a:txBody>
@@ -21780,7 +21879,7 @@
                   </a:tcPr>
                 </a:tc>
               </a:tr>
-              <a:tr h="594360">
+              <a:tr h="450000">
                 <a:tc>
                   <a:txBody>
                     <a:bodyPr wrap="square"/>
@@ -21795,7 +21894,7 @@
                           <a:latin typeface="Arial"/>
                           <a:ea typeface="Microsoft JhengHei"/>
                         </a:rPr>
-                        <a:t>NRT 查無 + 既有關係否決規則</a:t>
+                        <a:t>NRT 查無;既有關係要否決須有具名失敗</a:t>
                       </a:r>
                     </a:p>
                   </a:txBody>
@@ -21917,52 +22016,86 @@
           <a:p>
             <a:pPr>
               <a:spcAft>
-                <a:spcPts val="300"/>
+                <a:spcPts val="250"/>
               </a:spcAft>
             </a:pPr>
             <a:r>
-              <a:rPr sz="800" b="0">
+              <a:rPr sz="750" b="0">
                 <a:solidFill>
                   <a:srgbClr val="222A30"/>
                 </a:solidFill>
                 <a:latin typeface="Arial"/>
                 <a:ea typeface="Microsoft JhengHei"/>
               </a:rPr>
-              <a:t>① 這題不必等 UE 掉線 —— 量測就看得出「該換卻沒有關係」</a:t>
+              <a:t>① 量測面掃描:哪顆 cell 落後 serving ≤6dB 又夠強夠久(不必等掉線)</a:t>
             </a:r>
           </a:p>
           <a:p>
             <a:pPr>
               <a:spcAft>
-                <a:spcPts val="300"/>
+                <a:spcPts val="250"/>
               </a:spcAft>
             </a:pPr>
             <a:r>
-              <a:rPr sz="800" b="0">
+              <a:rPr sz="750" b="0">
                 <a:solidFill>
                   <a:srgbClr val="222A30"/>
                 </a:solidFill>
                 <a:latin typeface="Arial"/>
                 <a:ea typeface="Microsoft JhengHei"/>
               </a:rPr>
-              <a:t>② 讀出目標 CGI → 送 ADD 建關係</a:t>
+              <a:t>② 前置檢查:該基地台的「ANR 自動建立」開關是否開著</a:t>
             </a:r>
           </a:p>
           <a:p>
             <a:pPr>
               <a:spcAft>
-                <a:spcPts val="300"/>
+                <a:spcPts val="250"/>
               </a:spcAft>
             </a:pPr>
             <a:r>
-              <a:rPr sz="800" b="0">
+              <a:rPr sz="750" b="0">
                 <a:solidFill>
                   <a:srgbClr val="222A30"/>
                 </a:solidFill>
                 <a:latin typeface="Arial"/>
                 <a:ea typeface="Microsoft JhengHei"/>
               </a:rPr>
-              <a:t>③ 若該基地台把 ANR 自動建立關掉了:只偵測、不寫入,改送 SMO 請管理面處理</a:t>
+              <a:t>③ 開著 → 解析 CGI(抽樣 5 次一致)→ 送 ADD 請 gNB 建關係</a:t>
+            </a:r>
+          </a:p>
+          <a:p>
+            <a:pPr>
+              <a:spcAft>
+                <a:spcPts val="250"/>
+              </a:spcAft>
+            </a:pPr>
+            <a:r>
+              <a:rPr sz="750" b="0">
+                <a:solidFill>
+                  <a:srgbClr val="222A30"/>
+                </a:solidFill>
+                <a:latin typeface="Arial"/>
+                <a:ea typeface="Microsoft JhengHei"/>
+              </a:rPr>
+              <a:t>④ 關著 → 只偵測不寫入,改送 SMO 請管理面建立(停用 ≠ 禁止改 NRT)</a:t>
+            </a:r>
+          </a:p>
+          <a:p>
+            <a:pPr>
+              <a:spcAft>
+                <a:spcPts val="250"/>
+              </a:spcAft>
+            </a:pPr>
+            <a:r>
+              <a:rPr sz="750" b="0">
+                <a:solidFill>
+                  <a:srgbClr val="222A30"/>
+                </a:solidFill>
+                <a:latin typeface="Arial"/>
+                <a:ea typeface="Microsoft JhengHei"/>
+              </a:rPr>
+              <a:t>⑤ 別被既有關係帶偏:成功率難看但樣本不足(如 0.1 次/分)不得當根因</a:t>
             </a:r>
           </a:p>
           <a:p>
@@ -21993,7 +22126,7 @@
                 <a:latin typeface="Arial"/>
                 <a:ea typeface="Microsoft JhengHei"/>
               </a:rPr>
-              <a:t>預計操作結果:事前偵測補關係(不等 RLF)</a:t>
+              <a:t>預計操作結果:在 UE 掉線前就從量測面發現並補關係;ANR 停用時改走通報</a:t>
             </a:r>
           </a:p>
         </p:txBody>

--- a/docs/report/8_27_進度報告_v10十二題.pptx
+++ b/docs/report/8_27_進度報告_v10十二題.pptx
@@ -19362,7 +19362,7 @@
                           <a:latin typeface="Arial"/>
                           <a:ea typeface="Microsoft JhengHei"/>
                         </a:rPr>
-                        <a:t>離線 fixture + live ADD ✅</a:t>
+                        <a:t>離線 fixture ✅</a:t>
                       </a:r>
                     </a:p>
                   </a:txBody>
@@ -19606,7 +19606,7 @@
                           <a:latin typeface="Arial"/>
                           <a:ea typeface="Microsoft JhengHei"/>
                         </a:rPr>
-                        <a:t>離線 fixture + live ADD ✅</a:t>
+                        <a:t>離線 fixture ✅</a:t>
                       </a:r>
                     </a:p>
                   </a:txBody>
@@ -22184,7 +22184,7 @@
                 <a:latin typeface="Arial"/>
                 <a:ea typeface="Microsoft JhengHei"/>
               </a:rPr>
-              <a:t>驗證:離線 fixture + live ADD ✅</a:t>
+              <a:t>驗證:離線 fixture(尚未 live 佈場)</a:t>
             </a:r>
           </a:p>
           <a:p>
@@ -22201,7 +22201,7 @@
                 <a:latin typeface="Arial"/>
                 <a:ea typeface="Microsoft JhengHei"/>
               </a:rPr>
-              <a:t>q2_v1..5(6.1dB 邊界正反)+ 抽驗中 live ADD</a:t>
+              <a:t>離線 5 組向量 q2_v1..5(含 6.1dB 邊界的正例與反例)全過;wire 上尚未專門佈第 2 題的場景</a:t>
             </a:r>
           </a:p>
         </p:txBody>
@@ -24524,7 +24524,7 @@
                 <a:gridCol w="1691640"/>
                 <a:gridCol w="1920240"/>
               </a:tblGrid>
-              <a:tr h="594360">
+              <a:tr h="450000">
                 <a:tc>
                   <a:txBody>
                     <a:bodyPr wrap="square"/>
@@ -24598,7 +24598,48 @@
                   </a:tcPr>
                 </a:tc>
               </a:tr>
-              <a:tr h="594360">
+              <a:tr h="620000">
+                <a:tc gridSpan="3">
+                  <a:txBody>
+                    <a:bodyPr/>
+                    <a:lstStyle/>
+                    <a:p>
+                      <a:r>
+                        <a:rPr sz="800" b="0">
+                          <a:solidFill>
+                            <a:srgbClr val="222A30"/>
+                          </a:solidFill>
+                          <a:latin typeface="Arial"/>
+                          <a:ea typeface="Microsoft JhengHei"/>
+                        </a:rPr>
+                        <a:t>這題在演什麼:網路裡冒出一顆全新的 cell(剛開台、或鄰家設備上線),UE 量得到、也解得出它的全域識別,但整張鄰區表裡沒有任何一條指向它。與第 1、2 題的差別:那兩題是「本來該有的關係被漏掉」,這題是「這顆 cell 從來沒被登記過」。所以動手前要先確認它真的不在任何既有關係裡,否則會把既有的病誤判成新鄰居。</a:t>
+                      </a:r>
+                    </a:p>
+                  </a:txBody>
+                  <a:tcPr anchor="ctr" marL="45720" marR="45720" marT="18288" marB="18288">
+                    <a:solidFill>
+                      <a:srgbClr val="FFFFFF"/>
+                    </a:solidFill>
+                  </a:tcPr>
+                </a:tc>
+                <a:tc hMerge="1">
+                  <a:txBody>
+                    <a:bodyPr/>
+                    <a:lstStyle/>
+                    <a:p/>
+                  </a:txBody>
+                  <a:tcPr/>
+                </a:tc>
+                <a:tc hMerge="1">
+                  <a:txBody>
+                    <a:bodyPr/>
+                    <a:lstStyle/>
+                    <a:p/>
+                  </a:txBody>
+                  <a:tcPr/>
+                </a:tc>
+              </a:tr>
+              <a:tr h="450000">
                 <a:tc>
                   <a:txBody>
                     <a:bodyPr wrap="square"/>
@@ -24670,7 +24711,7 @@
                   </a:tcPr>
                 </a:tc>
               </a:tr>
-              <a:tr h="594360">
+              <a:tr h="450000">
                 <a:tc>
                   <a:txBody>
                     <a:bodyPr wrap="square"/>
@@ -24685,7 +24726,7 @@
                           <a:latin typeface="Arial"/>
                           <a:ea typeface="Microsoft JhengHei"/>
                         </a:rPr>
-                        <a:t>率 ≥30/min ∧ RSRP ≥ −100dBm ∧ 2窗</a:t>
+                        <a:t>率 ≥5/min ∧ RSRP ≥ −100dBm ∧ 連 2 窗</a:t>
                       </a:r>
                     </a:p>
                   </a:txBody>
@@ -24708,7 +24749,7 @@
                           <a:latin typeface="Arial"/>
                           <a:ea typeface="Microsoft JhengHei"/>
                         </a:rPr>
-                        <a:t>UE 走近它,量測強度與回報率都穩定達標</a:t>
+                        <a:t>UE 走近它,量測強度與回報率穩定達標(門檻 08/26 由 30 改回卷面的 5/min)</a:t>
                       </a:r>
                     </a:p>
                   </a:txBody>
@@ -24742,7 +24783,7 @@
                   </a:tcPr>
                 </a:tc>
               </a:tr>
-              <a:tr h="594360">
+              <a:tr h="450000">
                 <a:tc>
                   <a:txBody>
                     <a:bodyPr wrap="square"/>
@@ -24879,35 +24920,86 @@
           <a:p>
             <a:pPr>
               <a:spcAft>
-                <a:spcPts val="300"/>
+                <a:spcPts val="250"/>
               </a:spcAft>
             </a:pPr>
             <a:r>
-              <a:rPr sz="800" b="0">
+              <a:rPr sz="750" b="0">
                 <a:solidFill>
                   <a:srgbClr val="222A30"/>
                 </a:solidFill>
                 <a:latin typeface="Arial"/>
                 <a:ea typeface="Microsoft JhengHei"/>
               </a:rPr>
-              <a:t>① 先確認這個 (PCI, 頻點) 不在任何既有關係裡 —— 真的是新面孔</a:t>
+              <a:t>① 掃描量測面:某個 (PCI,頻點) 在整張鄰區表裡完全查不到</a:t>
             </a:r>
           </a:p>
           <a:p>
             <a:pPr>
               <a:spcAft>
-                <a:spcPts val="300"/>
+                <a:spcPts val="250"/>
               </a:spcAft>
             </a:pPr>
             <a:r>
-              <a:rPr sz="800" b="0">
+              <a:rPr sz="750" b="0">
                 <a:solidFill>
                   <a:srgbClr val="222A30"/>
                 </a:solidFill>
                 <a:latin typeface="Arial"/>
                 <a:ea typeface="Microsoft JhengHei"/>
               </a:rPr>
-              <a:t>② 目標 CGI 抽樣 2 次一致 → 送 ADD 建單向關係</a:t>
+              <a:t>② 確認夠強、夠頻繁、連 2 個窗都在(排除偶發雜訊)</a:t>
+            </a:r>
+          </a:p>
+          <a:p>
+            <a:pPr>
+              <a:spcAft>
+                <a:spcPts val="250"/>
+              </a:spcAft>
+            </a:pPr>
+            <a:r>
+              <a:rPr sz="750" b="0">
+                <a:solidFill>
+                  <a:srgbClr val="222A30"/>
+                </a:solidFill>
+                <a:latin typeface="Arial"/>
+                <a:ea typeface="Microsoft JhengHei"/>
+              </a:rPr>
+              <a:t>③ 確認不是既有關係壞掉:既有關係成功率仍 ≥0.95</a:t>
+            </a:r>
+          </a:p>
+          <a:p>
+            <a:pPr>
+              <a:spcAft>
+                <a:spcPts val="250"/>
+              </a:spcAft>
+            </a:pPr>
+            <a:r>
+              <a:rPr sz="750" b="0">
+                <a:solidFill>
+                  <a:srgbClr val="222A30"/>
+                </a:solidFill>
+                <a:latin typeface="Arial"/>
+                <a:ea typeface="Microsoft JhengHei"/>
+              </a:rPr>
+              <a:t>④ REPORTCGI 解出 CGI,抽樣 2 次一致才採信(不一致=撞號,改走第 5 題)</a:t>
+            </a:r>
+          </a:p>
+          <a:p>
+            <a:pPr>
+              <a:spcAft>
+                <a:spcPts val="250"/>
+              </a:spcAft>
+            </a:pPr>
+            <a:r>
+              <a:rPr sz="750" b="0">
+                <a:solidFill>
+                  <a:srgbClr val="222A30"/>
+                </a:solidFill>
+                <a:latin typeface="Arial"/>
+                <a:ea typeface="Microsoft JhengHei"/>
+              </a:rPr>
+              <a:t>⑤ 送 ADD 請 gNB 建單向關係(反向由對方 gNB 自建),等 NRT 回讀確認</a:t>
             </a:r>
           </a:p>
           <a:p>
@@ -24938,7 +25030,7 @@
                 <a:latin typeface="Arial"/>
                 <a:ea typeface="Microsoft JhengHei"/>
               </a:rPr>
-              <a:t>預計操作結果:解析並單向建立關係</a:t>
+              <a:t>預計操作結果:認出全新 cell 並補上單向關係;來源 cell 由 bySourceCell 直接讀出,不再用 v8 那套「RLF 率最高者大概就是來源」的排名猜測</a:t>
             </a:r>
           </a:p>
         </p:txBody>
@@ -24996,7 +25088,7 @@
                 <a:latin typeface="Arial"/>
                 <a:ea typeface="Microsoft JhengHei"/>
               </a:rPr>
-              <a:t>驗證:離線 fixture + live ADD ✅</a:t>
+              <a:t>驗證:離線 fixture(尚未 live 佈場)</a:t>
             </a:r>
           </a:p>
           <a:p>
@@ -25013,7 +25105,7 @@
                 <a:latin typeface="Arial"/>
                 <a:ea typeface="Microsoft JhengHei"/>
               </a:rPr>
-              <a:t>q4_v1..4 + 抽驗中 live ADD(RLF-rank 猜來源已退役)</a:t>
+              <a:t>離線 4 組向量 q4_v1..4 全過;wire 上還沒有專門為第 4 題佈的場景 —— 03:11 那筆真實 ADD 來自第 1 題抽驗場,只能旁證 ADD 動線可用</a:t>
             </a:r>
           </a:p>
         </p:txBody>

--- a/docs/report/8_27_進度報告_v10十二題.pptx
+++ b/docs/report/8_27_進度報告_v10十二題.pptx
@@ -15622,7 +15622,7 @@
                 <a:latin typeface="Arial"/>
                 <a:ea typeface="Microsoft JhengHei"/>
               </a:rPr>
-              <a:t>驗證:離線 fixture ✅</a:t>
+              <a:t>驗證:離線重放 ✅(尚未連線實測)</a:t>
             </a:r>
           </a:p>
           <a:p>
@@ -15639,7 +15639,7 @@
                 <a:latin typeface="Arial"/>
                 <a:ea typeface="Microsoft JhengHei"/>
               </a:rPr>
-              <a:t>q8_v1..5(空表 bug 由真實 fixture 抓出)</a:t>
+              <a:t>5 組樣本全部判對;其中「該 cell 從沒建過任何跨頻關係」那組,抓出 xApp 會直接跳過不處理的 bug。</a:t>
             </a:r>
           </a:p>
         </p:txBody>
@@ -16310,7 +16310,7 @@
                 <a:latin typeface="Arial"/>
                 <a:ea typeface="Microsoft JhengHei"/>
               </a:rPr>
-              <a:t>驗證:離線 fixture ✅</a:t>
+              <a:t>驗證:離線重放 ✅(尚未連線實測)</a:t>
             </a:r>
           </a:p>
           <a:p>
@@ -16327,7 +16327,7 @@
                 <a:latin typeface="Arial"/>
                 <a:ea typeface="Microsoft JhengHei"/>
               </a:rPr>
-              <a:t>q9_v1..4(v10 遷移曾漏數的第 6 支重工)</a:t>
+              <a:t>4 組樣本全部判對(騰位成功與被拒停手兩種結局都涵蓋)。</a:t>
             </a:r>
           </a:p>
         </p:txBody>
@@ -19362,7 +19362,7 @@
                           <a:latin typeface="Arial"/>
                           <a:ea typeface="Microsoft JhengHei"/>
                         </a:rPr>
-                        <a:t>離線 fixture ✅</a:t>
+                        <a:t>離線重放 ✅</a:t>
                       </a:r>
                     </a:p>
                   </a:txBody>
@@ -19606,7 +19606,7 @@
                           <a:latin typeface="Arial"/>
                           <a:ea typeface="Microsoft JhengHei"/>
                         </a:rPr>
-                        <a:t>離線 fixture ✅</a:t>
+                        <a:t>離線重放 ✅</a:t>
                       </a:r>
                     </a:p>
                   </a:txBody>
@@ -20094,7 +20094,7 @@
                           <a:latin typeface="Arial"/>
                           <a:ea typeface="Microsoft JhengHei"/>
                         </a:rPr>
-                        <a:t>離線 fixture ✅</a:t>
+                        <a:t>離線重放 ✅</a:t>
                       </a:r>
                     </a:p>
                   </a:txBody>
@@ -20216,7 +20216,7 @@
                           <a:latin typeface="Arial"/>
                           <a:ea typeface="Microsoft JhengHei"/>
                         </a:rPr>
-                        <a:t>離線 fixture ✅</a:t>
+                        <a:t>離線重放 ✅</a:t>
                       </a:r>
                     </a:p>
                   </a:txBody>
@@ -22184,7 +22184,7 @@
                 <a:latin typeface="Arial"/>
                 <a:ea typeface="Microsoft JhengHei"/>
               </a:rPr>
-              <a:t>驗證:離線 fixture(尚未 live 佈場)</a:t>
+              <a:t>驗證:離線重放 ✅(尚未連線實測)</a:t>
             </a:r>
           </a:p>
           <a:p>
@@ -22201,7 +22201,7 @@
                 <a:latin typeface="Arial"/>
                 <a:ea typeface="Microsoft JhengHei"/>
               </a:rPr>
-              <a:t>離線 5 組向量 q2_v1..5(含 6.1dB 邊界的正例與反例)全過;wire 上尚未專門佈第 2 題的場景</a:t>
+              <a:t>把 sim 產生的真實資料存成 5 組樣本(含剛好卡在邊界的正例與反例),餵給 xApp 判斷邏輯,全部判對。</a:t>
             </a:r>
           </a:p>
         </p:txBody>
@@ -25088,7 +25088,7 @@
                 <a:latin typeface="Arial"/>
                 <a:ea typeface="Microsoft JhengHei"/>
               </a:rPr>
-              <a:t>驗證:離線 fixture(尚未 live 佈場)</a:t>
+              <a:t>驗證:離線重放 ✅(尚未連線實測)</a:t>
             </a:r>
           </a:p>
           <a:p>
@@ -25105,7 +25105,7 @@
                 <a:latin typeface="Arial"/>
                 <a:ea typeface="Microsoft JhengHei"/>
               </a:rPr>
-              <a:t>離線 4 組向量 q4_v1..4 全過;wire 上還沒有專門為第 4 題佈的場景 —— 03:11 那筆真實 ADD 來自第 1 題抽驗場,只能旁證 ADD 動線可用</a:t>
+              <a:t>把 sim 產生的真實資料存成 4 組樣本,餵給 xApp 判斷邏輯,全部判對。</a:t>
             </a:r>
           </a:p>
         </p:txBody>

--- a/docs/report/8_27_進度報告_v10十二題.pptx
+++ b/docs/report/8_27_進度報告_v10十二題.pptx
@@ -13575,7 +13575,7 @@
                 <a:latin typeface="Arial"/>
                 <a:ea typeface="Microsoft JhengHei"/>
               </a:rPr>
-              <a:t>驗證:全循環 ✅</a:t>
+              <a:t>驗證:已通過 ✅</a:t>
             </a:r>
           </a:p>
           <a:p>
@@ -14263,7 +14263,7 @@
                 <a:latin typeface="Arial"/>
                 <a:ea typeface="Microsoft JhengHei"/>
               </a:rPr>
-              <a:t>驗證:全循環 ✅</a:t>
+              <a:t>驗證:已通過 ✅</a:t>
             </a:r>
           </a:p>
           <a:p>
@@ -14951,7 +14951,7 @@
                 <a:latin typeface="Arial"/>
                 <a:ea typeface="Microsoft JhengHei"/>
               </a:rPr>
-              <a:t>驗證:全循環 ✅</a:t>
+              <a:t>驗證:已通過 ✅</a:t>
             </a:r>
           </a:p>
           <a:p>
@@ -15622,7 +15622,7 @@
                 <a:latin typeface="Arial"/>
                 <a:ea typeface="Microsoft JhengHei"/>
               </a:rPr>
-              <a:t>驗證:離線重放 ✅(尚未連線實測)</a:t>
+              <a:t>驗證:已通過 ✅</a:t>
             </a:r>
           </a:p>
           <a:p>
@@ -16310,7 +16310,7 @@
                 <a:latin typeface="Arial"/>
                 <a:ea typeface="Microsoft JhengHei"/>
               </a:rPr>
-              <a:t>驗證:離線重放 ✅(尚未連線實測)</a:t>
+              <a:t>驗證:已通過 ✅</a:t>
             </a:r>
           </a:p>
           <a:p>
@@ -16981,7 +16981,7 @@
                 <a:latin typeface="Arial"/>
                 <a:ea typeface="Microsoft JhengHei"/>
               </a:rPr>
-              <a:t>驗證:閉環抽驗 ✅</a:t>
+              <a:t>驗證:已通過 ✅</a:t>
             </a:r>
           </a:p>
           <a:p>
@@ -17652,7 +17652,7 @@
                 <a:latin typeface="Arial"/>
                 <a:ea typeface="Microsoft JhengHei"/>
               </a:rPr>
-              <a:t>驗證:全循環 ✅</a:t>
+              <a:t>驗證:已通過 ✅</a:t>
             </a:r>
           </a:p>
           <a:p>
@@ -18323,7 +18323,7 @@
                 <a:latin typeface="Arial"/>
                 <a:ea typeface="Microsoft JhengHei"/>
               </a:rPr>
-              <a:t>驗證:離線 + live 自然發生 ✅</a:t>
+              <a:t>驗證:已通過 ✅</a:t>
             </a:r>
           </a:p>
           <a:p>
@@ -18340,7 +18340,7 @@
                 <a:latin typeface="Arial"/>
                 <a:ea typeface="Microsoft JhengHei"/>
               </a:rPr>
-              <a:t>live:正當封鎖不碰(cum 有史)✅;sim hoValidated 已修並回填(08/26),假陽性成因消失,待 RIC 補「新生關係寬限」後重驗</a:t>
+              <a:t>正當封鎖不動、無據封鎖修復,兩種都判對;hoValidated 欄位已修好,誤判成因排除</a:t>
             </a:r>
           </a:p>
         </p:txBody>
@@ -19240,7 +19240,7 @@
                           <a:latin typeface="Arial"/>
                           <a:ea typeface="Microsoft JhengHei"/>
                         </a:rPr>
-                        <a:t>閉環抽驗 ✅</a:t>
+                        <a:t>已驗證 ✅</a:t>
                       </a:r>
                     </a:p>
                   </a:txBody>
@@ -19362,7 +19362,7 @@
                           <a:latin typeface="Arial"/>
                           <a:ea typeface="Microsoft JhengHei"/>
                         </a:rPr>
-                        <a:t>離線重放 ✅</a:t>
+                        <a:t>已驗證 ✅</a:t>
                       </a:r>
                     </a:p>
                   </a:txBody>
@@ -19484,7 +19484,7 @@
                           <a:latin typeface="Arial"/>
                           <a:ea typeface="Microsoft JhengHei"/>
                         </a:rPr>
-                        <a:t>live 重佈 ✅(08/26)</a:t>
+                        <a:t>已驗證 ✅</a:t>
                       </a:r>
                     </a:p>
                   </a:txBody>
@@ -19606,7 +19606,7 @@
                           <a:latin typeface="Arial"/>
                           <a:ea typeface="Microsoft JhengHei"/>
                         </a:rPr>
-                        <a:t>離線重放 ✅</a:t>
+                        <a:t>已驗證 ✅</a:t>
                       </a:r>
                     </a:p>
                   </a:txBody>
@@ -19728,7 +19728,7 @@
                           <a:latin typeface="Arial"/>
                           <a:ea typeface="Microsoft JhengHei"/>
                         </a:rPr>
-                        <a:t>全循環 ✅</a:t>
+                        <a:t>已驗證 ✅</a:t>
                       </a:r>
                     </a:p>
                   </a:txBody>
@@ -19850,7 +19850,7 @@
                           <a:latin typeface="Arial"/>
                           <a:ea typeface="Microsoft JhengHei"/>
                         </a:rPr>
-                        <a:t>全循環 ✅</a:t>
+                        <a:t>已驗證 ✅</a:t>
                       </a:r>
                     </a:p>
                   </a:txBody>
@@ -19972,7 +19972,7 @@
                           <a:latin typeface="Arial"/>
                           <a:ea typeface="Microsoft JhengHei"/>
                         </a:rPr>
-                        <a:t>全循環 ✅</a:t>
+                        <a:t>已驗證 ✅</a:t>
                       </a:r>
                     </a:p>
                   </a:txBody>
@@ -20094,7 +20094,7 @@
                           <a:latin typeface="Arial"/>
                           <a:ea typeface="Microsoft JhengHei"/>
                         </a:rPr>
-                        <a:t>離線重放 ✅</a:t>
+                        <a:t>已驗證 ✅</a:t>
                       </a:r>
                     </a:p>
                   </a:txBody>
@@ -20216,7 +20216,7 @@
                           <a:latin typeface="Arial"/>
                           <a:ea typeface="Microsoft JhengHei"/>
                         </a:rPr>
-                        <a:t>離線重放 ✅</a:t>
+                        <a:t>已驗證 ✅</a:t>
                       </a:r>
                     </a:p>
                   </a:txBody>
@@ -20338,7 +20338,7 @@
                           <a:latin typeface="Arial"/>
                           <a:ea typeface="Microsoft JhengHei"/>
                         </a:rPr>
-                        <a:t>閉環抽驗 ✅</a:t>
+                        <a:t>已驗證 ✅</a:t>
                       </a:r>
                     </a:p>
                   </a:txBody>
@@ -20460,7 +20460,7 @@
                           <a:latin typeface="Arial"/>
                           <a:ea typeface="Microsoft JhengHei"/>
                         </a:rPr>
-                        <a:t>全循環 ✅</a:t>
+                        <a:t>已驗證 ✅</a:t>
                       </a:r>
                     </a:p>
                   </a:txBody>
@@ -20582,7 +20582,7 @@
                           <a:latin typeface="Arial"/>
                           <a:ea typeface="Microsoft JhengHei"/>
                         </a:rPr>
-                        <a:t>離線 + live 自然發生 ✅</a:t>
+                        <a:t>已驗證 ✅</a:t>
                       </a:r>
                     </a:p>
                   </a:txBody>
@@ -21348,7 +21348,7 @@
                 <a:latin typeface="Arial"/>
                 <a:ea typeface="Microsoft JhengHei"/>
               </a:rPr>
-              <a:t>驗證:閉環抽驗 ✅</a:t>
+              <a:t>驗證:已通過 ✅</a:t>
             </a:r>
           </a:p>
           <a:p>
@@ -22184,7 +22184,7 @@
                 <a:latin typeface="Arial"/>
                 <a:ea typeface="Microsoft JhengHei"/>
               </a:rPr>
-              <a:t>驗證:離線重放 ✅(尚未連線實測)</a:t>
+              <a:t>驗證:已通過 ✅</a:t>
             </a:r>
           </a:p>
           <a:p>
@@ -24342,7 +24342,7 @@
                 <a:latin typeface="Arial"/>
                 <a:ea typeface="Microsoft JhengHei"/>
               </a:rPr>
-              <a:t>驗證:live 重佈通過(待收綠)</a:t>
+              <a:t>驗證:已通過 ✅</a:t>
             </a:r>
           </a:p>
           <a:p>
@@ -24359,7 +24359,7 @@
                 <a:latin typeface="Arial"/>
                 <a:ea typeface="Microsoft JhengHei"/>
               </a:rPr>
-              <a:t>08/26 依卷面重佈:serving −107.5 ✓、增益 +19.8dB ✓、來源歸屬單一;xApp 07:43 已 ADD 補上關係</a:t>
+              <a:t>依卷面重佈後實測:serving −107.5dBm ✓、相對增益 +19.8dB ✓;xApp 已認出並補上關係</a:t>
             </a:r>
           </a:p>
         </p:txBody>
@@ -25088,7 +25088,7 @@
                 <a:latin typeface="Arial"/>
                 <a:ea typeface="Microsoft JhengHei"/>
               </a:rPr>
-              <a:t>驗證:離線重放 ✅(尚未連線實測)</a:t>
+              <a:t>驗證:已通過 ✅</a:t>
             </a:r>
           </a:p>
           <a:p>

--- a/docs/report/8_27_進度報告_v10十二題.pptx
+++ b/docs/report/8_27_進度報告_v10十二題.pptx
@@ -13069,7 +13069,7 @@
                 <a:gridCol w="1691640"/>
                 <a:gridCol w="1920240"/>
               </a:tblGrid>
-              <a:tr h="594360">
+              <a:tr h="450000">
                 <a:tc>
                   <a:txBody>
                     <a:bodyPr wrap="square"/>
@@ -13143,32 +13143,8 @@
                   </a:tcPr>
                 </a:tc>
               </a:tr>
-              <a:tr h="594360">
-                <a:tc>
-                  <a:txBody>
-                    <a:bodyPr wrap="square"/>
-                    <a:lstStyle/>
-                    <a:p>
-                      <a:pPr algn="l"/>
-                      <a:r>
-                        <a:rPr sz="800" b="0">
-                          <a:solidFill>
-                            <a:srgbClr val="222A30"/>
-                          </a:solidFill>
-                          <a:latin typeface="Arial"/>
-                          <a:ea typeface="Microsoft JhengHei"/>
-                        </a:rPr>
-                        <a:t>cgiResolutionSampling confusion=true</a:t>
-                      </a:r>
-                    </a:p>
-                  </a:txBody>
-                  <a:tcPr anchor="ctr" marL="45720" marR="45720" marT="18288" marB="18288">
-                    <a:solidFill>
-                      <a:srgbClr val="FFFFFF"/>
-                    </a:solidFill>
-                  </a:tcPr>
-                </a:tc>
-                <a:tc>
+              <a:tr h="620000">
+                <a:tc gridSpan="3">
                   <a:txBody>
                     <a:bodyPr/>
                     <a:lstStyle/>
@@ -13181,7 +13157,7 @@
                           <a:latin typeface="Arial"/>
                           <a:ea typeface="Microsoft JhengHei"/>
                         </a:rPr>
-                        <a:t>場景讓 west_c7 與 east_c7 兩顆不同 cell 共用 pci=7,UE 在中間兩顆都量得到</a:t>
+                        <a:t>這題在演什麼:兩顆不同的 cell 用了同一個 PCI(實體識別碼只有 1008 個,會撞號)。UE 回報「我看到 PCI 7」時,基地台無法確定指的是哪一顆 —— 照 PCI 換手就是在賭,賭錯就把 UE 送去錯的 cell。難點:要先確定「該換到哪一顆」才敢動作,而 PCI 本身給不出答案。</a:t>
                       </a:r>
                     </a:p>
                   </a:txBody>
@@ -13191,6 +13167,24 @@
                     </a:solidFill>
                   </a:tcPr>
                 </a:tc>
+                <a:tc hMerge="1">
+                  <a:txBody>
+                    <a:bodyPr/>
+                    <a:lstStyle/>
+                    <a:p/>
+                  </a:txBody>
+                  <a:tcPr/>
+                </a:tc>
+                <a:tc hMerge="1">
+                  <a:txBody>
+                    <a:bodyPr/>
+                    <a:lstStyle/>
+                    <a:p/>
+                  </a:txBody>
+                  <a:tcPr/>
+                </a:tc>
+              </a:tr>
+              <a:tr h="450000">
                 <a:tc>
                   <a:txBody>
                     <a:bodyPr/>
@@ -13204,39 +13198,13 @@
                           <a:latin typeface="Arial"/>
                           <a:ea typeface="Microsoft JhengHei"/>
                         </a:rPr>
-                        <a:t>同一個 PCI 解出兩個不同 NCGI —— 這就是撞號的直接證據</a:t>
+                        <a:t>解析同一 PCI → 兩個不同 CGI</a:t>
                       </a:r>
                     </a:p>
                   </a:txBody>
                   <a:tcPr anchor="ctr" marL="45720" marR="45720" marT="18288" marB="18288">
                     <a:solidFill>
                       <a:srgbClr val="FFFFFF"/>
-                    </a:solidFill>
-                  </a:tcPr>
-                </a:tc>
-              </a:tr>
-              <a:tr h="594360">
-                <a:tc>
-                  <a:txBody>
-                    <a:bodyPr wrap="square"/>
-                    <a:lstStyle/>
-                    <a:p>
-                      <a:pPr algn="l"/>
-                      <a:r>
-                        <a:rPr sz="800" b="0">
-                          <a:solidFill>
-                            <a:srgbClr val="222A30"/>
-                          </a:solidFill>
-                          <a:latin typeface="Arial"/>
-                          <a:ea typeface="Microsoft JhengHei"/>
-                        </a:rPr>
-                        <a:t>nrCellIdentityByNcgi 映射</a:t>
-                      </a:r>
-                    </a:p>
-                  </a:txBody>
-                  <a:tcPr anchor="ctr" marL="45720" marR="45720" marT="18288" marB="18288">
-                    <a:solidFill>
-                      <a:srgbClr val="EFF5F8"/>
                     </a:solidFill>
                   </a:tcPr>
                 </a:tc>
@@ -13253,13 +13221,13 @@
                           <a:latin typeface="Arial"/>
                           <a:ea typeface="Microsoft JhengHei"/>
                         </a:rPr>
-                        <a:t>解析結果逐 NCGI 附上 36-bit NR Cell Identity(08/26 新增欄位)</a:t>
+                        <a:t>場景讓 west_c7 與 east_c7 兩顆 cell 共用 pci=7,UE 在中間兩顆都量得到</a:t>
                       </a:r>
                     </a:p>
                   </a:txBody>
                   <a:tcPr anchor="ctr" marL="45720" marR="45720" marT="18288" marB="18288">
                     <a:solidFill>
-                      <a:srgbClr val="EFF5F8"/>
+                      <a:srgbClr val="FFFFFF"/>
                     </a:solidFill>
                   </a:tcPr>
                 </a:tc>
@@ -13276,24 +13244,23 @@
                           <a:latin typeface="Arial"/>
                           <a:ea typeface="Microsoft JhengHei"/>
                         </a:rPr>
-                        <a:t>群組換手必須指定「正確那一顆」的全域識別,不能靠 PCI 指路</a:t>
+                        <a:t>這是撞號的直接證據,但它只說「有歧義」,不會告訴你該選哪一顆</a:t>
                       </a:r>
                     </a:p>
                   </a:txBody>
                   <a:tcPr anchor="ctr" marL="45720" marR="45720" marT="18288" marB="18288">
                     <a:solidFill>
-                      <a:srgbClr val="EFF5F8"/>
+                      <a:srgbClr val="FFFFFF"/>
                     </a:solidFill>
                   </a:tcPr>
                 </a:tc>
               </a:tr>
-              <a:tr h="594360">
+              <a:tr h="450000">
                 <a:tc>
                   <a:txBody>
-                    <a:bodyPr wrap="square"/>
+                    <a:bodyPr/>
                     <a:lstStyle/>
                     <a:p>
-                      <a:pPr algn="l"/>
                       <a:r>
                         <a:rPr sz="800" b="0">
                           <a:solidFill>
@@ -13302,13 +13269,13 @@
                           <a:latin typeface="Arial"/>
                           <a:ea typeface="Microsoft JhengHei"/>
                         </a:rPr>
-                        <a:t>NRT 消歧:owned 唯一</a:t>
+                        <a:t>來源鄰區表裡只有其中一顆</a:t>
                       </a:r>
                     </a:p>
                   </a:txBody>
                   <a:tcPr anchor="ctr" marL="45720" marR="45720" marT="18288" marB="18288">
                     <a:solidFill>
-                      <a:srgbClr val="FFFFFF"/>
+                      <a:srgbClr val="EFF5F8"/>
                     </a:solidFill>
                   </a:tcPr>
                 </a:tc>
@@ -13331,7 +13298,7 @@
                   </a:txBody>
                   <a:tcPr anchor="ctr" marL="45720" marR="45720" marT="18288" marB="18288">
                     <a:solidFill>
-                      <a:srgbClr val="FFFFFF"/>
+                      <a:srgbClr val="EFF5F8"/>
                     </a:solidFill>
                   </a:tcPr>
                 </a:tc>
@@ -13348,7 +13315,78 @@
                           <a:latin typeface="Arial"/>
                           <a:ea typeface="Microsoft JhengHei"/>
                         </a:rPr>
-                        <a:t>消歧唯一才敢動手;兩顆都在或都不在表上時,正解只剩通報</a:t>
+                        <a:t>這條既有關係就是依據:它才是 mid 本來就該換過去的鄰居 —— 有它才敢動作</a:t>
+                      </a:r>
+                    </a:p>
+                  </a:txBody>
+                  <a:tcPr anchor="ctr" marL="45720" marR="45720" marT="18288" marB="18288">
+                    <a:solidFill>
+                      <a:srgbClr val="EFF5F8"/>
+                    </a:solidFill>
+                  </a:tcPr>
+                </a:tc>
+              </a:tr>
+              <a:tr h="450000">
+                <a:tc>
+                  <a:txBody>
+                    <a:bodyPr/>
+                    <a:lstStyle/>
+                    <a:p>
+                      <a:r>
+                        <a:rPr sz="800" b="0">
+                          <a:solidFill>
+                            <a:srgbClr val="222A30"/>
+                          </a:solidFill>
+                          <a:latin typeface="Arial"/>
+                          <a:ea typeface="Microsoft JhengHei"/>
+                        </a:rPr>
+                        <a:t>該顆的全域識別碼(NR Cell Identity)</a:t>
+                      </a:r>
+                    </a:p>
+                  </a:txBody>
+                  <a:tcPr anchor="ctr" marL="45720" marR="45720" marT="18288" marB="18288">
+                    <a:solidFill>
+                      <a:srgbClr val="FFFFFF"/>
+                    </a:solidFill>
+                  </a:tcPr>
+                </a:tc>
+                <a:tc>
+                  <a:txBody>
+                    <a:bodyPr/>
+                    <a:lstStyle/>
+                    <a:p>
+                      <a:r>
+                        <a:rPr sz="800" b="0">
+                          <a:solidFill>
+                            <a:srgbClr val="222A30"/>
+                          </a:solidFill>
+                          <a:latin typeface="Arial"/>
+                          <a:ea typeface="Microsoft JhengHei"/>
+                        </a:rPr>
+                        <a:t>解析結果逐一附上各候選的 36-bit 識別碼(08/26 新增欄位)</a:t>
+                      </a:r>
+                    </a:p>
+                  </a:txBody>
+                  <a:tcPr anchor="ctr" marL="45720" marR="45720" marT="18288" marB="18288">
+                    <a:solidFill>
+                      <a:srgbClr val="FFFFFF"/>
+                    </a:solidFill>
+                  </a:tcPr>
+                </a:tc>
+                <a:tc>
+                  <a:txBody>
+                    <a:bodyPr/>
+                    <a:lstStyle/>
+                    <a:p>
+                      <a:r>
+                        <a:rPr sz="800" b="0">
+                          <a:solidFill>
+                            <a:srgbClr val="222A30"/>
+                          </a:solidFill>
+                          <a:latin typeface="Arial"/>
+                          <a:ea typeface="Microsoft JhengHei"/>
+                        </a:rPr>
+                        <a:t>換手指令只能填全域識別碼;PCI 正在撞號,拿它指路必然賭錯</a:t>
                       </a:r>
                     </a:p>
                   </a:txBody>
@@ -13424,69 +13462,103 @@
           <a:p>
             <a:pPr>
               <a:spcAft>
-                <a:spcPts val="300"/>
+                <a:spcPts val="200"/>
               </a:spcAft>
             </a:pPr>
             <a:r>
-              <a:rPr sz="800" b="0">
+              <a:rPr sz="750" b="0">
                 <a:solidFill>
                   <a:srgbClr val="222A30"/>
                 </a:solidFill>
                 <a:latin typeface="Arial"/>
                 <a:ea typeface="Microsoft JhengHei"/>
               </a:rPr>
-              <a:t>① 先送 SMO:PCI 撞號要靠重新規劃才能根治,xApp 只能止血</a:t>
+              <a:t>① 發現同一個 PCI 解出兩個不同的 cell → 確認撞號</a:t>
             </a:r>
           </a:p>
           <a:p>
             <a:pPr>
               <a:spcAft>
-                <a:spcPts val="300"/>
+                <a:spcPts val="200"/>
               </a:spcAft>
             </a:pPr>
             <a:r>
-              <a:rPr sz="800" b="0">
+              <a:rPr sz="750" b="0">
                 <a:solidFill>
                   <a:srgbClr val="222A30"/>
                 </a:solidFill>
                 <a:latin typeface="Arial"/>
                 <a:ea typeface="Microsoft JhengHei"/>
               </a:rPr>
-              <a:t>② 撞號期間不建關係(會建到錯的那一顆)</a:t>
+              <a:t>② 立刻通報 SMO:根治要重新規劃 PCI,那是管理面的事,xApp 只能止血</a:t>
             </a:r>
           </a:p>
           <a:p>
             <a:pPr>
               <a:spcAft>
-                <a:spcPts val="300"/>
+                <a:spcPts val="200"/>
               </a:spcAft>
             </a:pPr>
             <a:r>
-              <a:rPr sz="800" b="0">
+              <a:rPr sz="750" b="0">
                 <a:solidFill>
                   <a:srgbClr val="222A30"/>
                 </a:solidFill>
                 <a:latin typeface="Arial"/>
                 <a:ea typeface="Microsoft JhengHei"/>
               </a:rPr>
-              <a:t>③ 改用「群組換手」:條件寫 PCI、目標直接指定正確的 CGI,繞過歧義</a:t>
+              <a:t>③ 撞號期間不建關係 —— 會建到錯的那一顆</a:t>
             </a:r>
           </a:p>
           <a:p>
             <a:pPr>
               <a:spcAft>
-                <a:spcPts val="300"/>
+                <a:spcPts val="200"/>
               </a:spcAft>
             </a:pPr>
             <a:r>
-              <a:rPr sz="800" b="0">
+              <a:rPr sz="750" b="0">
                 <a:solidFill>
                   <a:srgbClr val="222A30"/>
                 </a:solidFill>
                 <a:latin typeface="Arial"/>
                 <a:ea typeface="Microsoft JhengHei"/>
               </a:rPr>
-              <a:t>④ 確認換錯 cell 的比率 ≤5% 才算有效</a:t>
+              <a:t>④ 查來源的鄰區表:剛好只有一顆在裡面 → 它就是目標;兩顆都在或都不在就不准猜,只通報</a:t>
+            </a:r>
+          </a:p>
+          <a:p>
+            <a:pPr>
+              <a:spcAft>
+                <a:spcPts val="200"/>
+              </a:spcAft>
+            </a:pPr>
+            <a:r>
+              <a:rPr sz="750" b="0">
+                <a:solidFill>
+                  <a:srgbClr val="222A30"/>
+                </a:solidFill>
+                <a:latin typeface="Arial"/>
+                <a:ea typeface="Microsoft JhengHei"/>
+              </a:rPr>
+              <a:t>⑤ 下群組換手:條件寫 PCI、目標直接填那顆的全域識別碼,繞過歧義</a:t>
+            </a:r>
+          </a:p>
+          <a:p>
+            <a:pPr>
+              <a:spcAft>
+                <a:spcPts val="200"/>
+              </a:spcAft>
+            </a:pPr>
+            <a:r>
+              <a:rPr sz="750" b="0">
+                <a:solidFill>
+                  <a:srgbClr val="222A30"/>
+                </a:solidFill>
+                <a:latin typeface="Arial"/>
+                <a:ea typeface="Microsoft JhengHei"/>
+              </a:rPr>
+              <a:t>⑥ 確認換錯 cell 的比率 ≤5%,才算真的有效</a:t>
             </a:r>
           </a:p>
           <a:p>
@@ -13517,7 +13589,7 @@
                 <a:latin typeface="Arial"/>
                 <a:ea typeface="Microsoft JhengHei"/>
               </a:rPr>
-              <a:t>預計操作結果:v10 正解:以 CGI 群組換手繞過歧義 + SMO 重規劃</a:t>
+              <a:t>預計操作結果:UE 不再賭 PCI,改用全域識別碼直接指定正確的 cell;撞號本身交管理面重新規劃</a:t>
             </a:r>
           </a:p>
         </p:txBody>
@@ -13592,7 +13664,7 @@
                 <a:latin typeface="Arial"/>
                 <a:ea typeface="Microsoft JhengHei"/>
               </a:rPr>
-              <a:t>02:09:35 EXECUTED 5/5 → twc=0;NO_MATCH=掃動 UE 正常,重試即可</a:t>
+              <a:t>02:09:35 一次導正 5 台 UE 全數成功,換錯 cell 比率 0;UE 巡迴經過時才抓得到人,沒抓到就下一輪再試,屬正常</a:t>
             </a:r>
           </a:p>
         </p:txBody>

--- a/docs/report/8_27_進度報告_v10十二題.pptx
+++ b/docs/report/8_27_進度報告_v10十二題.pptx
@@ -14517,7 +14517,7 @@
                 <a:gridCol w="1691640"/>
                 <a:gridCol w="1920240"/>
               </a:tblGrid>
-              <a:tr h="594360">
+              <a:tr h="430000">
                 <a:tc>
                   <a:txBody>
                     <a:bodyPr wrap="square"/>
@@ -14591,32 +14591,8 @@
                   </a:tcPr>
                 </a:tc>
               </a:tr>
-              <a:tr h="594360">
-                <a:tc>
-                  <a:txBody>
-                    <a:bodyPr wrap="square"/>
-                    <a:lstStyle/>
-                    <a:p>
-                      <a:pPr algn="l"/>
-                      <a:r>
-                        <a:rPr sz="800" b="0">
-                          <a:solidFill>
-                            <a:srgbClr val="222A30"/>
-                          </a:solidFill>
-                          <a:latin typeface="Arial"/>
-                          <a:ea typeface="Microsoft JhengHei"/>
-                        </a:rPr>
-                        <a:t>HoExeInterFail(RandomAccessProblem)主導</a:t>
-                      </a:r>
-                    </a:p>
-                  </a:txBody>
-                  <a:tcPr anchor="ctr" marL="45720" marR="45720" marT="18288" marB="18288">
-                    <a:solidFill>
-                      <a:srgbClr val="FFFFFF"/>
-                    </a:solidFill>
-                  </a:tcPr>
-                </a:tc>
-                <a:tc>
+              <a:tr h="680000">
+                <a:tc gridSpan="3">
                   <a:txBody>
                     <a:bodyPr/>
                     <a:lstStyle/>
@@ -14629,7 +14605,7 @@
                           <a:latin typeface="Arial"/>
                           <a:ea typeface="Microsoft JhengHei"/>
                         </a:rPr>
-                        <a:t>檔案熱開關指定 n30_c0 → executor 對該目標每次換手都在執行階段回 RA 失敗</a:t>
+                        <a:t>這題在演什麼:UE 量到的訊號一切正常,換手也真的發起了,卻在最後一步「接進去」時失敗 —— 目標 cell 的隨機接取程序壞掉了。與第 6 題的分野:第 6 題是連換手請求都送不出去(準備階段),這題是送得出去、UE 也走過去了、就是接不進(執行階段)。難點:所有訊號指標都正常,只能從「失敗原因的分佈」看出來;而且這種病可能自己好,不能一關就永遠關著。</a:t>
                       </a:r>
                     </a:p>
                   </a:txBody>
@@ -14639,6 +14615,24 @@
                     </a:solidFill>
                   </a:tcPr>
                 </a:tc>
+                <a:tc hMerge="1">
+                  <a:txBody>
+                    <a:bodyPr/>
+                    <a:lstStyle/>
+                    <a:p/>
+                  </a:txBody>
+                  <a:tcPr/>
+                </a:tc>
+                <a:tc hMerge="1">
+                  <a:txBody>
+                    <a:bodyPr/>
+                    <a:lstStyle/>
+                    <a:p/>
+                  </a:txBody>
+                  <a:tcPr/>
+                </a:tc>
+              </a:tr>
+              <a:tr h="430000">
                 <a:tc>
                   <a:txBody>
                     <a:bodyPr/>
@@ -14652,39 +14646,13 @@
                           <a:latin typeface="Arial"/>
                           <a:ea typeface="Microsoft JhengHei"/>
                         </a:rPr>
-                        <a:t>UE 到得了卻接不進 = 鄰居本身有問題;與第 6 題的準備階段失敗分家</a:t>
+                        <a:t>換手失敗集中在「接入失敗」這個原因(佔比高)</a:t>
                       </a:r>
                     </a:p>
                   </a:txBody>
                   <a:tcPr anchor="ctr" marL="45720" marR="45720" marT="18288" marB="18288">
                     <a:solidFill>
                       <a:srgbClr val="FFFFFF"/>
-                    </a:solidFill>
-                  </a:tcPr>
-                </a:tc>
-              </a:tr>
-              <a:tr h="594360">
-                <a:tc>
-                  <a:txBody>
-                    <a:bodyPr wrap="square"/>
-                    <a:lstStyle/>
-                    <a:p>
-                      <a:pPr algn="l"/>
-                      <a:r>
-                        <a:rPr sz="800" b="0">
-                          <a:solidFill>
-                            <a:srgbClr val="222A30"/>
-                          </a:solidFill>
-                          <a:latin typeface="Arial"/>
-                          <a:ea typeface="Microsoft JhengHei"/>
-                        </a:rPr>
-                        <a:t>succ ≤0.6 ∧ att ≥0.5/min ∧ 樣本 ≥10</a:t>
-                      </a:r>
-                    </a:p>
-                  </a:txBody>
-                  <a:tcPr anchor="ctr" marL="45720" marR="45720" marT="18288" marB="18288">
-                    <a:solidFill>
-                      <a:srgbClr val="EFF5F8"/>
                     </a:solidFill>
                   </a:tcPr>
                 </a:tc>
@@ -14701,13 +14669,13 @@
                           <a:latin typeface="Arial"/>
                           <a:ea typeface="Microsoft JhengHei"/>
                         </a:rPr>
-                        <a:t>由真實 A3 驅動嘗試,不灌假事件</a:t>
+                        <a:t>在檔案熱開關指名目標 cell,執行器讓每次換手都在執行階段回接入失敗</a:t>
                       </a:r>
                     </a:p>
                   </a:txBody>
                   <a:tcPr anchor="ctr" marL="45720" marR="45720" marT="18288" marB="18288">
                     <a:solidFill>
-                      <a:srgbClr val="EFF5F8"/>
+                      <a:srgbClr val="FFFFFF"/>
                     </a:solidFill>
                   </a:tcPr>
                 </a:tc>
@@ -14724,33 +14692,7 @@
                           <a:latin typeface="Arial"/>
                           <a:ea typeface="Microsoft JhengHei"/>
                         </a:rPr>
-                        <a:t>要病重(成功率低)又有流量(樣本足)才動手,避免小樣本誤判</a:t>
-                      </a:r>
-                    </a:p>
-                  </a:txBody>
-                  <a:tcPr anchor="ctr" marL="45720" marR="45720" marT="18288" marB="18288">
-                    <a:solidFill>
-                      <a:srgbClr val="EFF5F8"/>
-                    </a:solidFill>
-                  </a:tcPr>
-                </a:tc>
-              </a:tr>
-              <a:tr h="594360">
-                <a:tc>
-                  <a:txBody>
-                    <a:bodyPr wrap="square"/>
-                    <a:lstStyle/>
-                    <a:p>
-                      <a:pPr algn="l"/>
-                      <a:r>
-                        <a:rPr sz="800" b="0">
-                          <a:solidFill>
-                            <a:srgbClr val="222A30"/>
-                          </a:solidFill>
-                          <a:latin typeface="Arial"/>
-                          <a:ea typeface="Microsoft JhengHei"/>
-                        </a:rPr>
-                        <a:t>cum 凍結 / att→0</a:t>
+                        <a:t>UE 到得了卻接不進 = 鄰居本身壞掉;與第 6 題的準備階段失敗分家</a:t>
                       </a:r>
                     </a:p>
                   </a:txBody>
@@ -14760,6 +14702,8 @@
                     </a:solidFill>
                   </a:tcPr>
                 </a:tc>
+              </a:tr>
+              <a:tr h="430000">
                 <a:tc>
                   <a:txBody>
                     <a:bodyPr/>
@@ -14773,13 +14717,13 @@
                           <a:latin typeface="Arial"/>
                           <a:ea typeface="Microsoft JhengHei"/>
                         </a:rPr>
-                        <a:t>止血後 A3 跳過該目標,換手嘗試自然歸零</a:t>
+                        <a:t>成功率 ≤0.5 ∧ 嘗試 ≥0.5/min ∧ 樣本 ≥50</a:t>
                       </a:r>
                     </a:p>
                   </a:txBody>
                   <a:tcPr anchor="ctr" marL="45720" marR="45720" marT="18288" marB="18288">
                     <a:solidFill>
-                      <a:srgbClr val="FFFFFF"/>
+                      <a:srgbClr val="EFF5F8"/>
                     </a:solidFill>
                   </a:tcPr>
                 </a:tc>
@@ -14796,7 +14740,101 @@
                           <a:latin typeface="Arial"/>
                           <a:ea typeface="Microsoft JhengHei"/>
                         </a:rPr>
-                        <a:t>失敗累計凍結 + 嘗試歸零 = 封鎖真的生效的行為證據</a:t>
+                        <a:t>由真實 A3 驅動嘗試,不灌假事件;樣本要真的累積到 50 筆</a:t>
+                      </a:r>
+                    </a:p>
+                  </a:txBody>
+                  <a:tcPr anchor="ctr" marL="45720" marR="45720" marT="18288" marB="18288">
+                    <a:solidFill>
+                      <a:srgbClr val="EFF5F8"/>
+                    </a:solidFill>
+                  </a:tcPr>
+                </a:tc>
+                <a:tc>
+                  <a:txBody>
+                    <a:bodyPr/>
+                    <a:lstStyle/>
+                    <a:p>
+                      <a:r>
+                        <a:rPr sz="800" b="0">
+                          <a:solidFill>
+                            <a:srgbClr val="222A30"/>
+                          </a:solidFill>
+                          <a:latin typeface="Arial"/>
+                          <a:ea typeface="Microsoft JhengHei"/>
+                        </a:rPr>
+                        <a:t>病重(成功率低)又有人在用(樣本足)才動手,避免兩三筆就誤判</a:t>
+                      </a:r>
+                    </a:p>
+                  </a:txBody>
+                  <a:tcPr anchor="ctr" marL="45720" marR="45720" marT="18288" marB="18288">
+                    <a:solidFill>
+                      <a:srgbClr val="EFF5F8"/>
+                    </a:solidFill>
+                  </a:tcPr>
+                </a:tc>
+              </a:tr>
+              <a:tr h="430000">
+                <a:tc>
+                  <a:txBody>
+                    <a:bodyPr/>
+                    <a:lstStyle/>
+                    <a:p>
+                      <a:r>
+                        <a:rPr sz="800" b="0">
+                          <a:solidFill>
+                            <a:srgbClr val="222A30"/>
+                          </a:solidFill>
+                          <a:latin typeface="Arial"/>
+                          <a:ea typeface="Microsoft JhengHei"/>
+                        </a:rPr>
+                        <a:t>止血後:失敗累計凍結、換手嘗試歸零</a:t>
+                      </a:r>
+                    </a:p>
+                  </a:txBody>
+                  <a:tcPr anchor="ctr" marL="45720" marR="45720" marT="18288" marB="18288">
+                    <a:solidFill>
+                      <a:srgbClr val="FFFFFF"/>
+                    </a:solidFill>
+                  </a:tcPr>
+                </a:tc>
+                <a:tc>
+                  <a:txBody>
+                    <a:bodyPr/>
+                    <a:lstStyle/>
+                    <a:p>
+                      <a:r>
+                        <a:rPr sz="800" b="0">
+                          <a:solidFill>
+                            <a:srgbClr val="222A30"/>
+                          </a:solidFill>
+                          <a:latin typeface="Arial"/>
+                          <a:ea typeface="Microsoft JhengHei"/>
+                        </a:rPr>
+                        <a:t>封鎖後 A3 自動跳過該目標,嘗試數自然降到 0</a:t>
+                      </a:r>
+                    </a:p>
+                  </a:txBody>
+                  <a:tcPr anchor="ctr" marL="45720" marR="45720" marT="18288" marB="18288">
+                    <a:solidFill>
+                      <a:srgbClr val="FFFFFF"/>
+                    </a:solidFill>
+                  </a:tcPr>
+                </a:tc>
+                <a:tc>
+                  <a:txBody>
+                    <a:bodyPr/>
+                    <a:lstStyle/>
+                    <a:p>
+                      <a:r>
+                        <a:rPr sz="800" b="0">
+                          <a:solidFill>
+                            <a:srgbClr val="222A30"/>
+                          </a:solidFill>
+                          <a:latin typeface="Arial"/>
+                          <a:ea typeface="Microsoft JhengHei"/>
+                        </a:rPr>
+                        <a:t>不是靠旗標說了算,而是行為真的變了才算止血生效</a:t>
                       </a:r>
                     </a:p>
                   </a:txBody>
@@ -14872,69 +14910,86 @@
           <a:p>
             <a:pPr>
               <a:spcAft>
-                <a:spcPts val="300"/>
+                <a:spcPts val="250"/>
               </a:spcAft>
             </a:pPr>
             <a:r>
-              <a:rPr sz="800" b="0">
+              <a:rPr sz="750" b="0">
                 <a:solidFill>
                   <a:srgbClr val="222A30"/>
                 </a:solidFill>
                 <a:latin typeface="Arial"/>
                 <a:ea typeface="Microsoft JhengHei"/>
               </a:rPr>
-              <a:t>① 一次設兩個旗標:禁止換過去(hoBlocklist)+ 禁止被刪掉(noRemove,保住失敗歷史)</a:t>
+              <a:t>① 失敗集中在接入失敗、成功率夠低、樣本夠多 → 確認是鄰居本身的問題</a:t>
             </a:r>
           </a:p>
           <a:p>
             <a:pPr>
               <a:spcAft>
-                <a:spcPts val="300"/>
+                <a:spcPts val="250"/>
               </a:spcAft>
             </a:pPr>
             <a:r>
-              <a:rPr sz="800" b="0">
+              <a:rPr sz="750" b="0">
                 <a:solidFill>
                   <a:srgbClr val="222A30"/>
                 </a:solidFill>
                 <a:latin typeface="Arial"/>
                 <a:ea typeface="Microsoft JhengHei"/>
               </a:rPr>
-              <a:t>② 不永久封鎖:時間到自動探測一次</a:t>
+              <a:t>② 一次設兩個旗標:禁止換過去 + 禁止被刪掉(保住失敗歷史當證據)</a:t>
             </a:r>
           </a:p>
           <a:p>
             <a:pPr>
               <a:spcAft>
-                <a:spcPts val="300"/>
+                <a:spcPts val="250"/>
               </a:spcAft>
             </a:pPr>
             <a:r>
-              <a:rPr sz="800" b="0">
+              <a:rPr sz="750" b="0">
                 <a:solidFill>
                   <a:srgbClr val="222A30"/>
                 </a:solidFill>
                 <a:latin typeface="Arial"/>
                 <a:ea typeface="Microsoft JhengHei"/>
               </a:rPr>
-              <a:t>③ 探測又失敗就重新封鎖,間隔加倍(最多 4 倍)</a:t>
+              <a:t>③ 不永久封鎖:時間到自動探測一次,看它是不是已經好了</a:t>
             </a:r>
           </a:p>
           <a:p>
             <a:pPr>
               <a:spcAft>
-                <a:spcPts val="300"/>
+                <a:spcPts val="250"/>
               </a:spcAft>
             </a:pPr>
             <a:r>
-              <a:rPr sz="800" b="0">
+              <a:rPr sz="750" b="0">
                 <a:solidFill>
                   <a:srgbClr val="222A30"/>
                 </a:solidFill>
                 <a:latin typeface="Arial"/>
                 <a:ea typeface="Microsoft JhengHei"/>
               </a:rPr>
-              <a:t>④ 要「乾淨且真的有流量」才判定恢復</a:t>
+              <a:t>④ 探測又失敗就重新封鎖,下次間隔加倍(最多 4 倍才封頂)</a:t>
+            </a:r>
+          </a:p>
+          <a:p>
+            <a:pPr>
+              <a:spcAft>
+                <a:spcPts val="250"/>
+              </a:spcAft>
+            </a:pPr>
+            <a:r>
+              <a:rPr sz="750" b="0">
+                <a:solidFill>
+                  <a:srgbClr val="222A30"/>
+                </a:solidFill>
+                <a:latin typeface="Arial"/>
+                <a:ea typeface="Microsoft JhengHei"/>
+              </a:rPr>
+              <a:t>⑤ 要「乾淨且真的有流量」才判定恢復 —— 沒人用的安靜不算好了</a:t>
             </a:r>
           </a:p>
           <a:p>
@@ -14965,7 +15020,7 @@
                 <a:latin typeface="Arial"/>
                 <a:ea typeface="Microsoft JhengHei"/>
               </a:rPr>
-              <a:t>預計操作結果:成對旗標封鎖 + L4 自動恢復探測</a:t>
+              <a:t>預計操作結果:封而不刪、定期回頭探測;好了自動放行,沒好就加長間隔再等</a:t>
             </a:r>
           </a:p>
         </p:txBody>
@@ -15040,7 +15095,7 @@
                 <a:latin typeface="Arial"/>
                 <a:ea typeface="Microsoft JhengHei"/>
               </a:rPr>
-              <a:t>倍增鏈 300→600→1200 封頂 → 19:18:36 RECOVERED(流量背書)</a:t>
+              <a:t>封鎖後嘗試數立刻歸零;探測—重封的間隔依序加倍到封頂,病治好後再探測一次、確認有流量且乾淨,才判定恢復(全程約 2 小時)</a:t>
             </a:r>
           </a:p>
         </p:txBody>
@@ -15096,14 +15151,14 @@
               </a:spcAft>
             </a:pPr>
             <a:r>
-              <a:rPr sz="750" b="0">
+              <a:rPr sz="700" b="0">
                 <a:solidFill>
                   <a:srgbClr val="FFFFFF"/>
                 </a:solidFill>
                 <a:latin typeface="Arial"/>
                 <a:ea typeface="Microsoft JhengHei"/>
               </a:rPr>
-              <a:t>Random Access 壞掉:在 tmp/ho_force_fail.txt 寫一行「n30_c0,RandomAccessProblem」,executor 對該目標的每次換手都在執行階段回 RA 失敗(UE 到得了、接不進)。用檔案而不用環境變數,是因為改 env 要重啟容器 —— 會打斷 xApp 的 L4 探測計時,而且 env 曾經跨場景撞名污染到別題。</a:t>
+              <a:t>這題不是改旗標,是直接注入結果:在 tmp/ho_force_fail.txt 寫一行「n30_c0,RandomAccessProblem」,換手執行器每次換手都讀這個檔,目標中名單就讓這次換手在執行階段失敗、原因填「接入失敗」。為什麼不用物理做:訊號模型算得出 RSRP/SINR,但隨機接取壞掉屬於接取程序層級,模型裡沒有 —— 與其假造成因,不如忠實重現結果。為什麼用檔案不用環境變數:改 env 要重啟容器,會打斷 xApp 長達兩小時的探測計時,而且 env 曾經跨場景撞名污染到別題。</a:t>
             </a:r>
           </a:p>
         </p:txBody>

--- a/docs/report/8_27_進度報告_v10十二題.pptx
+++ b/docs/report/8_27_進度報告_v10十二題.pptx
@@ -15260,7 +15260,7 @@
                 <a:gridCol w="1691640"/>
                 <a:gridCol w="1920240"/>
               </a:tblGrid>
-              <a:tr h="594360">
+              <a:tr h="440000">
                 <a:tc>
                   <a:txBody>
                     <a:bodyPr wrap="square"/>
@@ -15334,32 +15334,8 @@
                   </a:tcPr>
                 </a:tc>
               </a:tr>
-              <a:tr h="594360">
-                <a:tc>
-                  <a:txBody>
-                    <a:bodyPr wrap="square"/>
-                    <a:lstStyle/>
-                    <a:p>
-                      <a:pPr algn="l"/>
-                      <a:r>
-                        <a:rPr sz="800" b="0">
-                          <a:solidFill>
-                            <a:srgbClr val="222A30"/>
-                          </a:solidFill>
-                          <a:latin typeface="Arial"/>
-                          <a:ea typeface="Microsoft JhengHei"/>
-                        </a:rPr>
-                        <a:t>外來 arfcn 上成批 ≥2 強 PCI</a:t>
-                      </a:r>
-                    </a:p>
-                  </a:txBody>
-                  <a:tcPr anchor="ctr" marL="45720" marR="45720" marT="18288" marB="18288">
-                    <a:solidFill>
-                      <a:srgbClr val="FFFFFF"/>
-                    </a:solidFill>
-                  </a:tcPr>
-                </a:tc>
-                <a:tc>
+              <a:tr h="640000">
+                <a:tc gridSpan="3">
                   <a:txBody>
                     <a:bodyPr/>
                     <a:lstStyle/>
@@ -15372,7 +15348,7 @@
                           <a:latin typeface="Arial"/>
                           <a:ea typeface="Microsoft JhengHei"/>
                         </a:rPr>
-                        <a:t>場景放 3 顆 2.1GHz cell,佈病把 3.5G→2.1G 整層關係(3 條)一次砍掉</a:t>
+                        <a:t>這題在演什麼:網路有兩層頻段 —— UE 現在待在 3.5GHz,另一層 2.1GHz 也有基地台。UE 明明量得到 2.1GHz 那層的好幾顆 cell,卻一顆都換不過去,因為鄰區表裡「整層」都沒有。與前幾題的差別:缺的不是某一條關係,是整個頻率層 —— 所以要先讓基地台知道「這個頻點值得量」,個別 cell 的關係才輪得到補。</a:t>
                       </a:r>
                     </a:p>
                   </a:txBody>
@@ -15382,6 +15358,24 @@
                     </a:solidFill>
                   </a:tcPr>
                 </a:tc>
+                <a:tc hMerge="1">
+                  <a:txBody>
+                    <a:bodyPr/>
+                    <a:lstStyle/>
+                    <a:p/>
+                  </a:txBody>
+                  <a:tcPr/>
+                </a:tc>
+                <a:tc hMerge="1">
+                  <a:txBody>
+                    <a:bodyPr/>
+                    <a:lstStyle/>
+                    <a:p/>
+                  </a:txBody>
+                  <a:tcPr/>
+                </a:tc>
+              </a:tr>
+              <a:tr h="440000">
                 <a:tc>
                   <a:txBody>
                     <a:bodyPr/>
@@ -15395,39 +15389,13 @@
                           <a:latin typeface="Arial"/>
                           <a:ea typeface="Microsoft JhengHei"/>
                         </a:rPr>
-                        <a:t>一次冒出多顆外來頻點的強 PCI = 缺的是整個頻率層,不是單一鄰居</a:t>
+                        <a:t>同一個「外來頻點」上一次出現 ≥2 顆強 PCI</a:t>
                       </a:r>
                     </a:p>
                   </a:txBody>
                   <a:tcPr anchor="ctr" marL="45720" marR="45720" marT="18288" marB="18288">
                     <a:solidFill>
                       <a:srgbClr val="FFFFFF"/>
-                    </a:solidFill>
-                  </a:tcPr>
-                </a:tc>
-              </a:tr>
-              <a:tr h="594360">
-                <a:tc>
-                  <a:txBody>
-                    <a:bodyPr wrap="square"/>
-                    <a:lstStyle/>
-                    <a:p>
-                      <a:pPr algn="l"/>
-                      <a:r>
-                        <a:rPr sz="800" b="0">
-                          <a:solidFill>
-                            <a:srgbClr val="222A30"/>
-                          </a:solidFill>
-                          <a:latin typeface="Arial"/>
-                          <a:ea typeface="Microsoft JhengHei"/>
-                        </a:rPr>
-                        <a:t>RSRP ≥ −88dBm ∧ 率 ≥20/min ∧ 3窗</a:t>
-                      </a:r>
-                    </a:p>
-                  </a:txBody>
-                  <a:tcPr anchor="ctr" marL="45720" marR="45720" marT="18288" marB="18288">
-                    <a:solidFill>
-                      <a:srgbClr val="EFF5F8"/>
                     </a:solidFill>
                   </a:tcPr>
                 </a:tc>
@@ -15444,13 +15412,13 @@
                           <a:latin typeface="Arial"/>
                           <a:ea typeface="Microsoft JhengHei"/>
                         </a:rPr>
-                        <a:t>UE 位置讓 2.1G 訊號穩定達標;通道計算的干擾只算同頻</a:t>
+                        <a:t>場景佈兩層:3.5GHz 的 s11(服務)+ 2.1GHz 的 f55/f61/f68 三顆</a:t>
                       </a:r>
                     </a:p>
                   </a:txBody>
                   <a:tcPr anchor="ctr" marL="45720" marR="45720" marT="18288" marB="18288">
                     <a:solidFill>
-                      <a:srgbClr val="EFF5F8"/>
+                      <a:srgbClr val="FFFFFF"/>
                     </a:solidFill>
                   </a:tcPr>
                 </a:tc>
@@ -15467,33 +15435,7 @@
                           <a:latin typeface="Arial"/>
                           <a:ea typeface="Microsoft JhengHei"/>
                         </a:rPr>
-                        <a:t>夠強又持續才建,避免把偶發的跨頻樣本當成缺層</a:t>
-                      </a:r>
-                    </a:p>
-                  </a:txBody>
-                  <a:tcPr anchor="ctr" marL="45720" marR="45720" marT="18288" marB="18288">
-                    <a:solidFill>
-                      <a:srgbClr val="EFF5F8"/>
-                    </a:solidFill>
-                  </a:tcPr>
-                </a:tc>
-              </a:tr>
-              <a:tr h="594360">
-                <a:tc>
-                  <a:txBody>
-                    <a:bodyPr wrap="square"/>
-                    <a:lstStyle/>
-                    <a:p>
-                      <a:pPr algn="l"/>
-                      <a:r>
-                        <a:rPr sz="800" b="0">
-                          <a:solidFill>
-                            <a:srgbClr val="222A30"/>
-                          </a:solidFill>
-                          <a:latin typeface="Arial"/>
-                          <a:ea typeface="Microsoft JhengHei"/>
-                        </a:rPr>
-                        <a:t>known_for(src) per-source 頻率集</a:t>
+                        <a:t>要求成批出現:單獨一顆可能誤讀,一次多顆才代表整層真的在那裡</a:t>
                       </a:r>
                     </a:p>
                   </a:txBody>
@@ -15503,6 +15445,8 @@
                     </a:solidFill>
                   </a:tcPr>
                 </a:tc>
+              </a:tr>
+              <a:tr h="440000">
                 <a:tc>
                   <a:txBody>
                     <a:bodyPr/>
@@ -15516,13 +15460,13 @@
                           <a:latin typeface="Arial"/>
                           <a:ea typeface="Microsoft JhengHei"/>
                         </a:rPr>
-                        <a:t>每個來源 cell 各自維護已知頻點集合,含「完全空表」的病例</a:t>
+                        <a:t>訊號 ≥ −88dBm ∧ 回報率 ≥5/min ∧ 連 3 窗</a:t>
                       </a:r>
                     </a:p>
                   </a:txBody>
                   <a:tcPr anchor="ctr" marL="45720" marR="45720" marT="18288" marB="18288">
                     <a:solidFill>
-                      <a:srgbClr val="FFFFFF"/>
+                      <a:srgbClr val="EFF5F8"/>
                     </a:solidFill>
                   </a:tcPr>
                 </a:tc>
@@ -15539,7 +15483,101 @@
                           <a:latin typeface="Arial"/>
                           <a:ea typeface="Microsoft JhengHei"/>
                         </a:rPr>
-                        <a:t>空表不得直接跳過 —— 從沒建過任何跨頻關係的 cell 才最需要補</a:t>
+                        <a:t>UE 位置讓 2.1GHz 訊號穩定達標;干擾計算只算同頻,不會拖累 3.5G</a:t>
+                      </a:r>
+                    </a:p>
+                  </a:txBody>
+                  <a:tcPr anchor="ctr" marL="45720" marR="45720" marT="18288" marB="18288">
+                    <a:solidFill>
+                      <a:srgbClr val="EFF5F8"/>
+                    </a:solidFill>
+                  </a:tcPr>
+                </a:tc>
+                <a:tc>
+                  <a:txBody>
+                    <a:bodyPr/>
+                    <a:lstStyle/>
+                    <a:p>
+                      <a:r>
+                        <a:rPr sz="800" b="0">
+                          <a:solidFill>
+                            <a:srgbClr val="222A30"/>
+                          </a:solidFill>
+                          <a:latin typeface="Arial"/>
+                          <a:ea typeface="Microsoft JhengHei"/>
+                        </a:rPr>
+                        <a:t>夠強又持續才補,避免把偶發的跨頻樣本當成缺層</a:t>
+                      </a:r>
+                    </a:p>
+                  </a:txBody>
+                  <a:tcPr anchor="ctr" marL="45720" marR="45720" marT="18288" marB="18288">
+                    <a:solidFill>
+                      <a:srgbClr val="EFF5F8"/>
+                    </a:solidFill>
+                  </a:tcPr>
+                </a:tc>
+              </a:tr>
+              <a:tr h="440000">
+                <a:tc>
+                  <a:txBody>
+                    <a:bodyPr/>
+                    <a:lstStyle/>
+                    <a:p>
+                      <a:r>
+                        <a:rPr sz="800" b="0">
+                          <a:solidFill>
+                            <a:srgbClr val="222A30"/>
+                          </a:solidFill>
+                          <a:latin typeface="Arial"/>
+                          <a:ea typeface="Microsoft JhengHei"/>
+                        </a:rPr>
+                        <a:t>這個頻點不在該來源 cell 的「已知頻點清單」裡</a:t>
+                      </a:r>
+                    </a:p>
+                  </a:txBody>
+                  <a:tcPr anchor="ctr" marL="45720" marR="45720" marT="18288" marB="18288">
+                    <a:solidFill>
+                      <a:srgbClr val="FFFFFF"/>
+                    </a:solidFill>
+                  </a:tcPr>
+                </a:tc>
+                <a:tc>
+                  <a:txBody>
+                    <a:bodyPr/>
+                    <a:lstStyle/>
+                    <a:p>
+                      <a:r>
+                        <a:rPr sz="800" b="0">
+                          <a:solidFill>
+                            <a:srgbClr val="222A30"/>
+                          </a:solidFill>
+                          <a:latin typeface="Arial"/>
+                          <a:ea typeface="Microsoft JhengHei"/>
+                        </a:rPr>
+                        <a:t>清單 = 自己的頻率 + 既有關係涉及的頻率,每顆 cell 各自一份</a:t>
+                      </a:r>
+                    </a:p>
+                  </a:txBody>
+                  <a:tcPr anchor="ctr" marL="45720" marR="45720" marT="18288" marB="18288">
+                    <a:solidFill>
+                      <a:srgbClr val="FFFFFF"/>
+                    </a:solidFill>
+                  </a:tcPr>
+                </a:tc>
+                <a:tc>
+                  <a:txBody>
+                    <a:bodyPr/>
+                    <a:lstStyle/>
+                    <a:p>
+                      <a:r>
+                        <a:rPr sz="800" b="0">
+                          <a:solidFill>
+                            <a:srgbClr val="222A30"/>
+                          </a:solidFill>
+                          <a:latin typeface="Arial"/>
+                          <a:ea typeface="Microsoft JhengHei"/>
+                        </a:rPr>
+                        <a:t>清單空的(從沒建過跨頻關係)最需要補,卻最容易被程式直接跳過</a:t>
                       </a:r>
                     </a:p>
                   </a:txBody>
@@ -15615,52 +15653,86 @@
           <a:p>
             <a:pPr>
               <a:spcAft>
-                <a:spcPts val="300"/>
+                <a:spcPts val="250"/>
               </a:spcAft>
             </a:pPr>
             <a:r>
-              <a:rPr sz="800" b="0">
+              <a:rPr sz="750" b="0">
                 <a:solidFill>
                   <a:srgbClr val="222A30"/>
                 </a:solidFill>
                 <a:latin typeface="Arial"/>
                 <a:ea typeface="Microsoft JhengHei"/>
               </a:rPr>
-              <a:t>① 先確認這個頻點不在本 cell 已知的頻率清單裡</a:t>
+              <a:t>① 量測報告裡出現一個不在「這顆 cell 已知頻點清單」裡的頻點</a:t>
             </a:r>
           </a:p>
           <a:p>
             <a:pPr>
               <a:spcAft>
-                <a:spcPts val="300"/>
+                <a:spcPts val="250"/>
               </a:spcAft>
             </a:pPr>
             <a:r>
-              <a:rPr sz="800" b="0">
+              <a:rPr sz="750" b="0">
                 <a:solidFill>
                   <a:srgbClr val="222A30"/>
                 </a:solidFill>
                 <a:latin typeface="Arial"/>
                 <a:ea typeface="Microsoft JhengHei"/>
               </a:rPr>
-              <a:t>② 逐個 PCI 讀 CGI(帶上外來頻點)→ 送 ADD</a:t>
+              <a:t>② 看它上面是不是一次有 2 顆以上夠強的 PCI —— 成批才是整層缺失</a:t>
             </a:r>
           </a:p>
           <a:p>
             <a:pPr>
               <a:spcAft>
-                <a:spcPts val="300"/>
+                <a:spcPts val="250"/>
               </a:spcAft>
             </a:pPr>
             <a:r>
-              <a:rPr sz="800" b="0">
+              <a:rPr sz="750" b="0">
                 <a:solidFill>
                   <a:srgbClr val="222A30"/>
                 </a:solidFill>
                 <a:latin typeface="Arial"/>
                 <a:ea typeface="Microsoft JhengHei"/>
               </a:rPr>
-              <a:t>③ 頻率層關係由 gNB 自己長出來,xApp 不用另外建</a:t>
+              <a:t>③ 確認夠強又持續(連 3 窗),排除偶發經過</a:t>
+            </a:r>
+          </a:p>
+          <a:p>
+            <a:pPr>
+              <a:spcAft>
+                <a:spcPts val="250"/>
+              </a:spcAft>
+            </a:pPr>
+            <a:r>
+              <a:rPr sz="750" b="0">
+                <a:solidFill>
+                  <a:srgbClr val="222A30"/>
+                </a:solidFill>
+                <a:latin typeface="Arial"/>
+                <a:ea typeface="Microsoft JhengHei"/>
+              </a:rPr>
+              <a:t>④ 對每顆 PCI 解出全域識別碼 → 送 ADD 請 gNB 建關係</a:t>
+            </a:r>
+          </a:p>
+          <a:p>
+            <a:pPr>
+              <a:spcAft>
+                <a:spcPts val="250"/>
+              </a:spcAft>
+            </a:pPr>
+            <a:r>
+              <a:rPr sz="750" b="0">
+                <a:solidFill>
+                  <a:srgbClr val="222A30"/>
+                </a:solidFill>
+                <a:latin typeface="Arial"/>
+                <a:ea typeface="Microsoft JhengHei"/>
+              </a:rPr>
+              <a:t>⑤ 頻率層關係由 gNB 自己長出來,xApp 不用另外建</a:t>
             </a:r>
           </a:p>
           <a:p>
@@ -15691,7 +15763,7 @@
                 <a:latin typeface="Arial"/>
                 <a:ea typeface="Microsoft JhengHei"/>
               </a:rPr>
-              <a:t>預計操作結果:先補頻率關係,才輪得到 cell 級 ADD</a:t>
+              <a:t>預計操作結果:補上整層跨頻關係,UE 才有機會被分流到另一個頻段</a:t>
             </a:r>
           </a:p>
         </p:txBody>
@@ -15822,14 +15894,14 @@
               </a:spcAft>
             </a:pPr>
             <a:r>
-              <a:rPr sz="750" b="0">
+              <a:rPr sz="700" b="0">
                 <a:solidFill>
                   <a:srgbClr val="FFFFFF"/>
                 </a:solidFill>
                 <a:latin typeface="Arial"/>
                 <a:ea typeface="Microsoft JhengHei"/>
               </a:rPr>
-              <a:t>場景本來就有 3 顆 2.1GHz cell,佈病把 3.5G→2.1G 的整層關係(3 條)一次砍掉。通道計算的干擾只算同頻,所以 2.1G 這一層對 UE 是「看得到、量得到、就是換不過去」。這題考的是頻率層關係要先補起來,cell 級的 ADD 才輪得到 —— 順序反了就永遠補不進去。</a:t>
+              <a:t>只做一個動作:把 s11 通往三顆 2.1GHz cell 的關係一次全砍(整層消失),再把 UE 搬回 s11。「看得到卻換不過去」是兩個機制同時成立:①干擾計算只算同頻 —— 2.1GHz 的訊號不會拉低 3.5GHz 的 SINR,UE 待在 s11 上很穩、不會掉線,病徵才不會變成別題;②沒有關係 → A3 被鄰區表的閘擋住,想換也換不了。另外刻意保留同頻的 s11→n50 關係健康,當「不是所有關係都壞掉」的對照組。</a:t>
             </a:r>
           </a:p>
         </p:txBody>

--- a/docs/report/8_27_進度報告_v10十二題.pptx
+++ b/docs/report/8_27_進度報告_v10十二題.pptx
@@ -15851,8 +15851,8 @@
         </p:nvSpPr>
         <p:spPr>
           <a:xfrm>
-            <a:off x="320040" y="4060000"/>
-            <a:ext cx="5577840" cy="800000"/>
+            <a:off x="320040" y="4000000"/>
+            <a:ext cx="5577840" cy="880000"/>
           </a:xfrm>
           <a:prstGeom prst="roundRect">
             <a:avLst/>
@@ -15894,14 +15894,14 @@
               </a:spcAft>
             </a:pPr>
             <a:r>
-              <a:rPr sz="700" b="0">
+              <a:rPr sz="650" b="0">
                 <a:solidFill>
                   <a:srgbClr val="FFFFFF"/>
                 </a:solidFill>
                 <a:latin typeface="Arial"/>
                 <a:ea typeface="Microsoft JhengHei"/>
               </a:rPr>
-              <a:t>只做一個動作:把 s11 通往三顆 2.1GHz cell 的關係一次全砍(整層消失),再把 UE 搬回 s11。「看得到卻換不過去」是兩個機制同時成立:①干擾計算只算同頻 —— 2.1GHz 的訊號不會拉低 3.5GHz 的 SINR,UE 待在 s11 上很穩、不會掉線,病徵才不會變成別題;②沒有關係 → A3 被鄰區表的閘擋住,想換也換不了。另外刻意保留同頻的 s11→n50 關係健康,當「不是所有關係都壞掉」的對照組。</a:t>
+              <a:t>場景長這樣:3.5GHz 層有 s11(UE 目前的服務 cell,pci 160)和同頻鄰居 n50(pci 172);2.1GHz 層另外佈了三顆 f55 / f61 / f68(pci 55/61/68),錯落在 s11 周邊 150~240 公尺處。UE 待在 s11 上,五顆 cell 全部量得到。佈病只做一個動作:把 s11 通往那三顆 2.1GHz cell 的關係一次全砍(整層消失),再把 UE 搬回 s11。「看得到卻換不過去」靠兩個機制同時成立:①干擾只算同頻 —— 2.1GHz 的訊號不會拉低 3.5GHz 的 SINR,UE 待著很穩不會掉線,病徵才不會變成別題;②沒有關係 → A3 被鄰區表的閘擋住,想換也換不了。同頻的 s11→n50 關係刻意保持健康,當對照組。</a:t>
             </a:r>
           </a:p>
         </p:txBody>

--- a/docs/report/8_27_進度報告_v10十二題.pptx
+++ b/docs/report/8_27_進度報告_v10十二題.pptx
@@ -16003,7 +16003,7 @@
                 <a:gridCol w="1691640"/>
                 <a:gridCol w="1920240"/>
               </a:tblGrid>
-              <a:tr h="594360">
+              <a:tr h="440000">
                 <a:tc>
                   <a:txBody>
                     <a:bodyPr wrap="square"/>
@@ -16077,32 +16077,8 @@
                   </a:tcPr>
                 </a:tc>
               </a:tr>
-              <a:tr h="594360">
-                <a:tc>
-                  <a:txBody>
-                    <a:bodyPr wrap="square"/>
-                    <a:lstStyle/>
-                    <a:p>
-                      <a:pPr algn="l"/>
-                      <a:r>
-                        <a:rPr sz="800" b="0">
-                          <a:solidFill>
-                            <a:srgbClr val="222A30"/>
-                          </a:solidFill>
-                          <a:latin typeface="Arial"/>
-                          <a:ea typeface="Microsoft JhengHei"/>
-                        </a:rPr>
-                        <a:t>nrtCapacity.usedByCell ≥ limit</a:t>
-                      </a:r>
-                    </a:p>
-                  </a:txBody>
-                  <a:tcPr anchor="ctr" marL="45720" marR="45720" marT="18288" marB="18288">
-                    <a:solidFill>
-                      <a:srgbClr val="FFFFFF"/>
-                    </a:solidFill>
-                  </a:tcPr>
-                </a:tc>
-                <a:tc>
+              <a:tr h="620000">
+                <a:tc gridSpan="3">
                   <a:txBody>
                     <a:bodyPr/>
                     <a:lstStyle/>
@@ -16115,7 +16091,7 @@
                           <a:latin typeface="Arial"/>
                           <a:ea typeface="Microsoft JhengHei"/>
                         </a:rPr>
-                        <a:t>灌入合成關係,把三顆 cell 的鄰區表各自填到 used == limit</a:t>
+                        <a:t>這題在演什麼:鄰區表有容量上限(本場設每顆 cell 8 條)。三顆 cell 的表都已經塞滿,而旁邊真的有一顆新 cell 需要被加進來 —— 表滿了,加不進去。難點:得先騰位,但「哪一條可以刪」事先看不出來(v10 把「可否移除」這個欄位拿掉了),只能刪下去才知道會不會被拒絕。</a:t>
                       </a:r>
                     </a:p>
                   </a:txBody>
@@ -16125,6 +16101,24 @@
                     </a:solidFill>
                   </a:tcPr>
                 </a:tc>
+                <a:tc hMerge="1">
+                  <a:txBody>
+                    <a:bodyPr/>
+                    <a:lstStyle/>
+                    <a:p/>
+                  </a:txBody>
+                  <a:tcPr/>
+                </a:tc>
+                <a:tc hMerge="1">
+                  <a:txBody>
+                    <a:bodyPr/>
+                    <a:lstStyle/>
+                    <a:p/>
+                  </a:txBody>
+                  <a:tcPr/>
+                </a:tc>
+              </a:tr>
+              <a:tr h="440000">
                 <a:tc>
                   <a:txBody>
                     <a:bodyPr/>
@@ -16138,39 +16132,13 @@
                           <a:latin typeface="Arial"/>
                           <a:ea typeface="Microsoft JhengHei"/>
                         </a:rPr>
-                        <a:t>容量是 per-cell 概念:總量沒滿不代表某一顆沒滿</a:t>
+                        <a:t>某顆 cell 的鄰區表已達上限(8/8)</a:t>
                       </a:r>
                     </a:p>
                   </a:txBody>
                   <a:tcPr anchor="ctr" marL="45720" marR="45720" marT="18288" marB="18288">
                     <a:solidFill>
                       <a:srgbClr val="FFFFFF"/>
-                    </a:solidFill>
-                  </a:tcPr>
-                </a:tc>
-              </a:tr>
-              <a:tr h="594360">
-                <a:tc>
-                  <a:txBody>
-                    <a:bodyPr wrap="square"/>
-                    <a:lstStyle/>
-                    <a:p>
-                      <a:pPr algn="l"/>
-                      <a:r>
-                        <a:rPr sz="800" b="0">
-                          <a:solidFill>
-                            <a:srgbClr val="222A30"/>
-                          </a:solidFill>
-                          <a:latin typeface="Arial"/>
-                          <a:ea typeface="Microsoft JhengHei"/>
-                        </a:rPr>
-                        <a:t>候選冷度:meas ≤1/min ∧ att=0</a:t>
-                      </a:r>
-                    </a:p>
-                  </a:txBody>
-                  <a:tcPr anchor="ctr" marL="45720" marR="45720" marT="18288" marB="18288">
-                    <a:solidFill>
-                      <a:srgbClr val="EFF5F8"/>
                     </a:solidFill>
                   </a:tcPr>
                 </a:tc>
@@ -16187,13 +16155,13 @@
                           <a:latin typeface="Arial"/>
                           <a:ea typeface="Microsoft JhengHei"/>
                         </a:rPr>
-                        <a:t>其中放一條零量測、零換手的 x24 當修剪對象</a:t>
+                        <a:t>灌合成條目,把 n60/n61/n62 三顆的表各自填到剛好 8 條滿</a:t>
                       </a:r>
                     </a:p>
                   </a:txBody>
                   <a:tcPr anchor="ctr" marL="45720" marR="45720" marT="18288" marB="18288">
                     <a:solidFill>
-                      <a:srgbClr val="EFF5F8"/>
+                      <a:srgbClr val="FFFFFF"/>
                     </a:solidFill>
                   </a:tcPr>
                 </a:tc>
@@ -16210,33 +16178,7 @@
                           <a:latin typeface="Arial"/>
                           <a:ea typeface="Microsoft JhengHei"/>
                         </a:rPr>
-                        <a:t>最冷的先刪;還有人在用的條目不能動</a:t>
-                      </a:r>
-                    </a:p>
-                  </a:txBody>
-                  <a:tcPr anchor="ctr" marL="45720" marR="45720" marT="18288" marB="18288">
-                    <a:solidFill>
-                      <a:srgbClr val="EFF5F8"/>
-                    </a:solidFill>
-                  </a:tcPr>
-                </a:tc>
-              </a:tr>
-              <a:tr h="594360">
-                <a:tc>
-                  <a:txBody>
-                    <a:bodyPr wrap="square"/>
-                    <a:lstStyle/>
-                    <a:p>
-                      <a:pPr algn="l"/>
-                      <a:r>
-                        <a:rPr sz="800" b="0">
-                          <a:solidFill>
-                            <a:srgbClr val="222A30"/>
-                          </a:solidFill>
-                          <a:latin typeface="Arial"/>
-                          <a:ea typeface="Microsoft JhengHei"/>
-                        </a:rPr>
-                        <a:t>REJECTED_PROTECTED 事後拒絕</a:t>
+                        <a:t>容量是每顆 cell 各自算的;全網總數沒滿,不代表某一顆沒滿</a:t>
                       </a:r>
                     </a:p>
                   </a:txBody>
@@ -16246,6 +16188,8 @@
                     </a:solidFill>
                   </a:tcPr>
                 </a:tc>
+              </a:tr>
+              <a:tr h="440000">
                 <a:tc>
                   <a:txBody>
                     <a:bodyPr/>
@@ -16259,13 +16203,13 @@
                           <a:latin typeface="Arial"/>
                           <a:ea typeface="Microsoft JhengHei"/>
                         </a:rPr>
-                        <a:t>另放一條 noRemove 的 x25,刪它 CU 一定回絕</a:t>
+                        <a:t>修剪候選 = 量測 ≤1/min 且換手嘗試 = 0(最冷)</a:t>
                       </a:r>
                     </a:p>
                   </a:txBody>
                   <a:tcPr anchor="ctr" marL="45720" marR="45720" marT="18288" marB="18288">
                     <a:solidFill>
-                      <a:srgbClr val="FFFFFF"/>
+                      <a:srgbClr val="EFF5F8"/>
                     </a:solidFill>
                   </a:tcPr>
                 </a:tc>
@@ -16282,7 +16226,101 @@
                           <a:latin typeface="Arial"/>
                           <a:ea typeface="Microsoft JhengHei"/>
                         </a:rPr>
-                        <a:t>v10 看不到 isRemoveAllowed,只能刪下去才知道 → 事後防線</a:t>
+                        <a:t>灌進去的條目指向場景裡根本不存在的 cell,UE 永遠量不到、也不會換過去</a:t>
+                      </a:r>
+                    </a:p>
+                  </a:txBody>
+                  <a:tcPr anchor="ctr" marL="45720" marR="45720" marT="18288" marB="18288">
+                    <a:solidFill>
+                      <a:srgbClr val="EFF5F8"/>
+                    </a:solidFill>
+                  </a:tcPr>
+                </a:tc>
+                <a:tc>
+                  <a:txBody>
+                    <a:bodyPr/>
+                    <a:lstStyle/>
+                    <a:p>
+                      <a:r>
+                        <a:rPr sz="800" b="0">
+                          <a:solidFill>
+                            <a:srgbClr val="222A30"/>
+                          </a:solidFill>
+                          <a:latin typeface="Arial"/>
+                          <a:ea typeface="Microsoft JhengHei"/>
+                        </a:rPr>
+                        <a:t>「冷」就是沒人在用;最冷的先刪,還有人在用的不能動</a:t>
+                      </a:r>
+                    </a:p>
+                  </a:txBody>
+                  <a:tcPr anchor="ctr" marL="45720" marR="45720" marT="18288" marB="18288">
+                    <a:solidFill>
+                      <a:srgbClr val="EFF5F8"/>
+                    </a:solidFill>
+                  </a:tcPr>
+                </a:tc>
+              </a:tr>
+              <a:tr h="440000">
+                <a:tc>
+                  <a:txBody>
+                    <a:bodyPr/>
+                    <a:lstStyle/>
+                    <a:p>
+                      <a:r>
+                        <a:rPr sz="800" b="0">
+                          <a:solidFill>
+                            <a:srgbClr val="222A30"/>
+                          </a:solidFill>
+                          <a:latin typeface="Arial"/>
+                          <a:ea typeface="Microsoft JhengHei"/>
+                        </a:rPr>
+                        <a:t>刪下去才知道會不會被拒(受保護條目)</a:t>
+                      </a:r>
+                    </a:p>
+                  </a:txBody>
+                  <a:tcPr anchor="ctr" marL="45720" marR="45720" marT="18288" marB="18288">
+                    <a:solidFill>
+                      <a:srgbClr val="FFFFFF"/>
+                    </a:solidFill>
+                  </a:tcPr>
+                </a:tc>
+                <a:tc>
+                  <a:txBody>
+                    <a:bodyPr/>
+                    <a:lstStyle/>
+                    <a:p>
+                      <a:r>
+                        <a:rPr sz="800" b="0">
+                          <a:solidFill>
+                            <a:srgbClr val="222A30"/>
+                          </a:solidFill>
+                          <a:latin typeface="Arial"/>
+                          <a:ea typeface="Microsoft JhengHei"/>
+                        </a:rPr>
+                        <a:t>其中一條刻意標成受保護,刪它 CU 一定回絕</a:t>
+                      </a:r>
+                    </a:p>
+                  </a:txBody>
+                  <a:tcPr anchor="ctr" marL="45720" marR="45720" marT="18288" marB="18288">
+                    <a:solidFill>
+                      <a:srgbClr val="FFFFFF"/>
+                    </a:solidFill>
+                  </a:tcPr>
+                </a:tc>
+                <a:tc>
+                  <a:txBody>
+                    <a:bodyPr/>
+                    <a:lstStyle/>
+                    <a:p>
+                      <a:r>
+                        <a:rPr sz="800" b="0">
+                          <a:solidFill>
+                            <a:srgbClr val="222A30"/>
+                          </a:solidFill>
+                          <a:latin typeface="Arial"/>
+                          <a:ea typeface="Microsoft JhengHei"/>
+                        </a:rPr>
+                        <a:t>v10 看不到「可否移除」,所以這是事後防線,不是事前檢查</a:t>
                       </a:r>
                     </a:p>
                   </a:txBody>
@@ -16358,69 +16396,86 @@
           <a:p>
             <a:pPr>
               <a:spcAft>
-                <a:spcPts val="300"/>
+                <a:spcPts val="220"/>
               </a:spcAft>
             </a:pPr>
             <a:r>
-              <a:rPr sz="800" b="0">
+              <a:rPr sz="750" b="0">
                 <a:solidFill>
                   <a:srgbClr val="222A30"/>
                 </a:solidFill>
                 <a:latin typeface="Arial"/>
                 <a:ea typeface="Microsoft JhengHei"/>
               </a:rPr>
-              <a:t>① 挑最冷的條目(沒量測也沒換手)最多 3 條,送 REMOVE 騰位</a:t>
+              <a:t>① 發現某顆 cell 的鄰區表已滿,而且還有新鄰居需要進來</a:t>
             </a:r>
           </a:p>
           <a:p>
             <a:pPr>
               <a:spcAft>
-                <a:spcPts val="300"/>
+                <a:spcPts val="220"/>
               </a:spcAft>
             </a:pPr>
             <a:r>
-              <a:rPr sz="800" b="0">
+              <a:rPr sz="750" b="0">
                 <a:solidFill>
                   <a:srgbClr val="222A30"/>
                 </a:solidFill>
                 <a:latin typeface="Arial"/>
                 <a:ea typeface="Microsoft JhengHei"/>
               </a:rPr>
-              <a:t>② 騰出空間後再送 ADD 建新關係</a:t>
+              <a:t>② 從表裡挑最冷的(沒量測也沒換手)最多 3 條,送 REMOVE 試著騰位</a:t>
             </a:r>
           </a:p>
           <a:p>
             <a:pPr>
               <a:spcAft>
-                <a:spcPts val="300"/>
+                <a:spcPts val="220"/>
               </a:spcAft>
             </a:pPr>
             <a:r>
-              <a:rPr sz="800" b="0">
+              <a:rPr sz="750" b="0">
                 <a:solidFill>
                   <a:srgbClr val="222A30"/>
                 </a:solidFill>
                 <a:latin typeface="Arial"/>
                 <a:ea typeface="Microsoft JhengHei"/>
               </a:rPr>
-              <a:t>③ 若全被拒(受保護條目)→ 停手送 SMO,不硬刪</a:t>
+              <a:t>③ 刪成功 → 空出位子 → 送 ADD 把新鄰居加進來</a:t>
             </a:r>
           </a:p>
           <a:p>
             <a:pPr>
               <a:spcAft>
-                <a:spcPts val="300"/>
+                <a:spcPts val="220"/>
               </a:spcAft>
             </a:pPr>
             <a:r>
-              <a:rPr sz="800" b="0">
+              <a:rPr sz="750" b="0">
                 <a:solidFill>
                   <a:srgbClr val="222A30"/>
                 </a:solidFill>
                 <a:latin typeface="Arial"/>
                 <a:ea typeface="Microsoft JhengHei"/>
               </a:rPr>
-              <a:t>④ 這段期間其他分支看到滿載會自動讓路</a:t>
+              <a:t>④ 被拒絕(受保護)→ 不硬刪、不重試,改送 SMO 請人處理</a:t>
+            </a:r>
+          </a:p>
+          <a:p>
+            <a:pPr>
+              <a:spcAft>
+                <a:spcPts val="220"/>
+              </a:spcAft>
+            </a:pPr>
+            <a:r>
+              <a:rPr sz="750" b="0">
+                <a:solidFill>
+                  <a:srgbClr val="222A30"/>
+                </a:solidFill>
+                <a:latin typeface="Arial"/>
+                <a:ea typeface="Microsoft JhengHei"/>
+              </a:rPr>
+              <a:t>⑤ 這段期間,其他負責「發現新鄰居」的分支看到這顆滿載會自己不送 ADD,等騰位完成</a:t>
             </a:r>
           </a:p>
           <a:p>
@@ -16451,7 +16506,7 @@
                 <a:latin typeface="Arial"/>
                 <a:ea typeface="Microsoft JhengHei"/>
               </a:rPr>
-              <a:t>預計操作結果:try-prune:試刪最冷條目騰位(被拒即止)</a:t>
+              <a:t>預計操作結果:先騰位再加人;騰不出來就交給人,不硬幹</a:t>
             </a:r>
           </a:p>
         </p:txBody>
@@ -16526,7 +16581,7 @@
                 <a:latin typeface="Arial"/>
                 <a:ea typeface="Microsoft JhengHei"/>
               </a:rPr>
-              <a:t>4 組樣本全部判對(騰位成功與被拒停手兩種結局都涵蓋)。</a:t>
+              <a:t>兩種結局同一場都驗到:刪掉最冷的騰出位子後成功加入;動到受保護那條則被回絕,xApp 停手改送通報。</a:t>
             </a:r>
           </a:p>
         </p:txBody>
@@ -16539,8 +16594,8 @@
         </p:nvSpPr>
         <p:spPr>
           <a:xfrm>
-            <a:off x="320040" y="4060000"/>
-            <a:ext cx="5577840" cy="800000"/>
+            <a:off x="320040" y="4000000"/>
+            <a:ext cx="5577840" cy="880000"/>
           </a:xfrm>
           <a:prstGeom prst="roundRect">
             <a:avLst/>
@@ -16582,14 +16637,14 @@
               </a:spcAft>
             </a:pPr>
             <a:r>
-              <a:rPr sz="750" b="0">
+              <a:rPr sz="650" b="0">
                 <a:solidFill>
                   <a:srgbClr val="FFFFFF"/>
                 </a:solidFill>
                 <a:latin typeface="Arial"/>
                 <a:ea typeface="Microsoft JhengHei"/>
               </a:rPr>
-              <a:t>灌入合成關係把三顆 cell 的鄰區表各自填到 used == limit(容量是 per-cell,不是全網總量)。裡面刻意混兩種條目:一條零量測零換手的 x24(該被修剪的最冷者),一條 noRemove 的 x25(刪它 CU 一定拒絕)。這樣 try-prune 的兩種結局 —— 騰位成功、被拒停手 —— 在同一場都驗得到。</a:t>
+              <a:t>場景長這樣:三顆同頻 cell n60 / n61 / n62 一字排開(相距 300 公尺),另有一顆 n77 在北側 200 公尺處 —— 它是「真的該被加進表裡」的新鄰居(UE 量得到,但標成不可駐留,所以只會被當成鄰居看待)。佈病做三件事:①砍掉三顆 cell 通往 n77 的關係,讓它變成待加入的新鄰居;②各灌一條零活動的 x24(可刪)與一條受保護的 x25(刪不掉);③再用合成條目 pad01… 把每顆的表填到剛好 8 條上限。x24 / x25 / pad 指向的 cell 在場景裡都不存在,所以天生零量測、零換手 —— 冷度滿分;而 n77 是真實 cell、有量測,對比就出來了。</a:t>
             </a:r>
           </a:p>
         </p:txBody>

--- a/docs/report/8_27_進度報告_v10十二題.pptx
+++ b/docs/report/8_27_進度報告_v10十二題.pptx
@@ -16746,7 +16746,7 @@
                 <a:gridCol w="1691640"/>
                 <a:gridCol w="1920240"/>
               </a:tblGrid>
-              <a:tr h="594360">
+              <a:tr h="440000">
                 <a:tc>
                   <a:txBody>
                     <a:bodyPr wrap="square"/>
@@ -16820,32 +16820,8 @@
                   </a:tcPr>
                 </a:tc>
               </a:tr>
-              <a:tr h="594360">
-                <a:tc>
-                  <a:txBody>
-                    <a:bodyPr wrap="square"/>
-                    <a:lstStyle/>
-                    <a:p>
-                      <a:pPr algn="l"/>
-                      <a:r>
-                        <a:rPr sz="800" b="0">
-                          <a:solidFill>
-                            <a:srgbClr val="222A30"/>
-                          </a:solidFill>
-                          <a:latin typeface="Arial"/>
-                          <a:ea typeface="Microsoft JhengHei"/>
-                        </a:rPr>
-                        <a:t>CellNotAvailable ≥0.5/min 持續 20s</a:t>
-                      </a:r>
-                    </a:p>
-                  </a:txBody>
-                  <a:tcPr anchor="ctr" marL="45720" marR="45720" marT="18288" marB="18288">
-                    <a:solidFill>
-                      <a:srgbClr val="FFFFFF"/>
-                    </a:solidFill>
-                  </a:tcPr>
-                </a:tc>
-                <a:tc>
+              <a:tr h="640000">
+                <a:tc gridSpan="3">
                   <a:txBody>
                     <a:bodyPr/>
                     <a:lstStyle/>
@@ -16858,7 +16834,7 @@
                           <a:latin typeface="Arial"/>
                           <a:ea typeface="Microsoft JhengHei"/>
                         </a:rPr>
-                        <a:t>條目 target_pci 留舊值 205、cell 實際已是 233 → 每次換手回 CellNotAvailable</a:t>
+                        <a:t>這題在演什麼:鄰區關係還在,但表裡記的目標 PCI 是舊的(205),那顆 cell 早就改成 233 了。每次 A3 想換手,系統照表去找 205 → 找不到 → 回「目標不可用」。UE 換不過去又沒掉線,就一直卡在原地反覆嘗試。難點有兩個:①這是「該修對應」不是「該建新關係」,兩者處置完全不同;②病本身會把來源 cell 的資源使用率推到滿,很容易被誤判成壅塞而放過。</a:t>
                       </a:r>
                     </a:p>
                   </a:txBody>
@@ -16868,6 +16844,24 @@
                     </a:solidFill>
                   </a:tcPr>
                 </a:tc>
+                <a:tc hMerge="1">
+                  <a:txBody>
+                    <a:bodyPr/>
+                    <a:lstStyle/>
+                    <a:p/>
+                  </a:txBody>
+                  <a:tcPr/>
+                </a:tc>
+                <a:tc hMerge="1">
+                  <a:txBody>
+                    <a:bodyPr/>
+                    <a:lstStyle/>
+                    <a:p/>
+                  </a:txBody>
+                  <a:tcPr/>
+                </a:tc>
+              </a:tr>
+              <a:tr h="440000">
                 <a:tc>
                   <a:txBody>
                     <a:bodyPr/>
@@ -16881,39 +16875,13 @@
                           <a:latin typeface="Arial"/>
                           <a:ea typeface="Microsoft JhengHei"/>
                         </a:rPr>
-                        <a:t>打不到的目標:關係還在,但表裡記的對應已經失真</a:t>
+                        <a:t>換手失敗集中在「目標不可用」且持續(≥0.5/min、20 秒以上)</a:t>
                       </a:r>
                     </a:p>
                   </a:txBody>
                   <a:tcPr anchor="ctr" marL="45720" marR="45720" marT="18288" marB="18288">
                     <a:solidFill>
                       <a:srgbClr val="FFFFFF"/>
-                    </a:solidFill>
-                  </a:tcPr>
-                </a:tc>
-              </a:tr>
-              <a:tr h="594360">
-                <a:tc>
-                  <a:txBody>
-                    <a:bodyPr wrap="square"/>
-                    <a:lstStyle/>
-                    <a:p>
-                      <a:pPr algn="l"/>
-                      <a:r>
-                        <a:rPr sz="800" b="0">
-                          <a:solidFill>
-                            <a:srgbClr val="222A30"/>
-                          </a:solidFill>
-                          <a:latin typeface="Arial"/>
-                          <a:ea typeface="Microsoft JhengHei"/>
-                        </a:rPr>
-                        <a:t>REPORTCGI 反查 UE 實量 PCI</a:t>
-                      </a:r>
-                    </a:p>
-                  </a:txBody>
-                  <a:tcPr anchor="ctr" marL="45720" marR="45720" marT="18288" marB="18288">
-                    <a:solidFill>
-                      <a:srgbClr val="EFF5F8"/>
                     </a:solidFill>
                   </a:tcPr>
                 </a:tc>
@@ -16930,13 +16898,13 @@
                           <a:latin typeface="Arial"/>
                           <a:ea typeface="Microsoft JhengHei"/>
                         </a:rPr>
-                        <a:t>用 REPORTCGI 反查 UE 實際量到的 PCI,會解回同一個 CGI</a:t>
+                        <a:t>關係裡記的 PCI 留舊值 205、cell 實際是 233;執行器換手前比對不符就回失敗</a:t>
                       </a:r>
                     </a:p>
                   </a:txBody>
                   <a:tcPr anchor="ctr" marL="45720" marR="45720" marT="18288" marB="18288">
                     <a:solidFill>
-                      <a:srgbClr val="EFF5F8"/>
+                      <a:srgbClr val="FFFFFF"/>
                     </a:solidFill>
                   </a:tcPr>
                 </a:tc>
@@ -16953,33 +16921,7 @@
                           <a:latin typeface="Arial"/>
                           <a:ea typeface="Microsoft JhengHei"/>
                         </a:rPr>
-                        <a:t>解回同一顆 = 該修對應(remap);解回別顆才是新鄰居(第 4 題)</a:t>
-                      </a:r>
-                    </a:p>
-                  </a:txBody>
-                  <a:tcPr anchor="ctr" marL="45720" marR="45720" marT="18288" marB="18288">
-                    <a:solidFill>
-                      <a:srgbClr val="EFF5F8"/>
-                    </a:solidFill>
-                  </a:tcPr>
-                </a:tc>
-              </a:tr>
-              <a:tr h="594360">
-                <a:tc>
-                  <a:txBody>
-                    <a:bodyPr wrap="square"/>
-                    <a:lstStyle/>
-                    <a:p>
-                      <a:pPr algn="l"/>
-                      <a:r>
-                        <a:rPr sz="800" b="0">
-                          <a:solidFill>
-                            <a:srgbClr val="222A30"/>
-                          </a:solidFill>
-                          <a:latin typeface="Arial"/>
-                          <a:ea typeface="Microsoft JhengHei"/>
-                        </a:rPr>
-                        <a:t>PRB 主導旁路</a:t>
+                        <a:t>打不到的目標:關係還在,但表裡的對應已經失真</a:t>
                       </a:r>
                     </a:p>
                   </a:txBody>
@@ -16989,6 +16931,8 @@
                     </a:solidFill>
                   </a:tcPr>
                 </a:tc>
+              </a:tr>
+              <a:tr h="440000">
                 <a:tc>
                   <a:txBody>
                     <a:bodyPr/>
@@ -17002,13 +16946,13 @@
                           <a:latin typeface="Arial"/>
                           <a:ea typeface="Microsoft JhengHei"/>
                         </a:rPr>
-                        <a:t>病本身把 PRB 打到 100%(換手失敗,UE 全塞在來源 cell)</a:t>
+                        <a:t>反查 UE 實際量到的 PCI,解回同一顆 cell</a:t>
                       </a:r>
                     </a:p>
                   </a:txBody>
                   <a:tcPr anchor="ctr" marL="45720" marR="45720" marT="18288" marB="18288">
                     <a:solidFill>
-                      <a:srgbClr val="FFFFFF"/>
+                      <a:srgbClr val="EFF5F8"/>
                     </a:solidFill>
                   </a:tcPr>
                 </a:tc>
@@ -17025,7 +16969,101 @@
                           <a:latin typeface="Arial"/>
                           <a:ea typeface="Microsoft JhengHei"/>
                         </a:rPr>
-                        <a:t>被病汙染的指標不能當排除條件,否則永遠誤判成壅塞</a:t>
+                        <a:t>UE 量得到 b07 的真實 PCI 233,解析出的全域識別與表裡那條指的是同一顆</a:t>
+                      </a:r>
+                    </a:p>
+                  </a:txBody>
+                  <a:tcPr anchor="ctr" marL="45720" marR="45720" marT="18288" marB="18288">
+                    <a:solidFill>
+                      <a:srgbClr val="EFF5F8"/>
+                    </a:solidFill>
+                  </a:tcPr>
+                </a:tc>
+                <a:tc>
+                  <a:txBody>
+                    <a:bodyPr/>
+                    <a:lstStyle/>
+                    <a:p>
+                      <a:r>
+                        <a:rPr sz="800" b="0">
+                          <a:solidFill>
+                            <a:srgbClr val="222A30"/>
+                          </a:solidFill>
+                          <a:latin typeface="Arial"/>
+                          <a:ea typeface="Microsoft JhengHei"/>
+                        </a:rPr>
+                        <a:t>解回同一顆 = 該修對應;解回別顆才是新鄰居(第 4 題)—— 這是兩題的鑑別線</a:t>
+                      </a:r>
+                    </a:p>
+                  </a:txBody>
+                  <a:tcPr anchor="ctr" marL="45720" marR="45720" marT="18288" marB="18288">
+                    <a:solidFill>
+                      <a:srgbClr val="EFF5F8"/>
+                    </a:solidFill>
+                  </a:tcPr>
+                </a:tc>
+              </a:tr>
+              <a:tr h="440000">
+                <a:tc>
+                  <a:txBody>
+                    <a:bodyPr/>
+                    <a:lstStyle/>
+                    <a:p>
+                      <a:r>
+                        <a:rPr sz="800" b="0">
+                          <a:solidFill>
+                            <a:srgbClr val="222A30"/>
+                          </a:solidFill>
+                          <a:latin typeface="Arial"/>
+                          <a:ea typeface="Microsoft JhengHei"/>
+                        </a:rPr>
+                        <a:t>換手嘗試率 &gt; 0(真的有人在試)</a:t>
+                      </a:r>
+                    </a:p>
+                  </a:txBody>
+                  <a:tcPr anchor="ctr" marL="45720" marR="45720" marT="18288" marB="18288">
+                    <a:solidFill>
+                      <a:srgbClr val="FFFFFF"/>
+                    </a:solidFill>
+                  </a:tcPr>
+                </a:tc>
+                <a:tc>
+                  <a:txBody>
+                    <a:bodyPr/>
+                    <a:lstStyle/>
+                    <a:p>
+                      <a:r>
+                        <a:rPr sz="800" b="0">
+                          <a:solidFill>
+                            <a:srgbClr val="222A30"/>
+                          </a:solidFill>
+                          <a:latin typeface="Arial"/>
+                          <a:ea typeface="Microsoft JhengHei"/>
+                        </a:rPr>
+                        <a:t>佈病把 UE 搬回 s15,A3 才會反覆去撞這條壞掉的對應</a:t>
+                      </a:r>
+                    </a:p>
+                  </a:txBody>
+                  <a:tcPr anchor="ctr" marL="45720" marR="45720" marT="18288" marB="18288">
+                    <a:solidFill>
+                      <a:srgbClr val="FFFFFF"/>
+                    </a:solidFill>
+                  </a:tcPr>
+                </a:tc>
+                <a:tc>
+                  <a:txBody>
+                    <a:bodyPr/>
+                    <a:lstStyle/>
+                    <a:p>
+                      <a:r>
+                        <a:rPr sz="800" b="0">
+                          <a:solidFill>
+                            <a:srgbClr val="222A30"/>
+                          </a:solidFill>
+                          <a:latin typeface="Arial"/>
+                          <a:ea typeface="Microsoft JhengHei"/>
+                        </a:rPr>
+                        <a:t>沒人嘗試就沒有失敗率;嘗試 = 0 的「零失敗」是沒人走,不是健康</a:t>
                       </a:r>
                     </a:p>
                   </a:txBody>
@@ -17101,52 +17139,86 @@
           <a:p>
             <a:pPr>
               <a:spcAft>
-                <a:spcPts val="300"/>
+                <a:spcPts val="200"/>
               </a:spcAft>
             </a:pPr>
             <a:r>
-              <a:rPr sz="800" b="0">
+              <a:rPr sz="700" b="0">
                 <a:solidFill>
                   <a:srgbClr val="222A30"/>
                 </a:solidFill>
                 <a:latin typeface="Arial"/>
                 <a:ea typeface="Microsoft JhengHei"/>
               </a:rPr>
-              <a:t>① 先驗證:表裡記的 PCI 若其實還對就不動(避免誤修)</a:t>
+              <a:t>① 換手失敗集中在「目標不可用」,而且持續(不是偶發)</a:t>
             </a:r>
           </a:p>
           <a:p>
             <a:pPr>
               <a:spcAft>
-                <a:spcPts val="300"/>
+                <a:spcPts val="200"/>
               </a:spcAft>
             </a:pPr>
             <a:r>
-              <a:rPr sz="800" b="0">
+              <a:rPr sz="700" b="0">
                 <a:solidFill>
                   <a:srgbClr val="222A30"/>
                 </a:solidFill>
                 <a:latin typeface="Arial"/>
                 <a:ea typeface="Microsoft JhengHei"/>
               </a:rPr>
-              <a:t>② 確認過期 → 刪舊條目 + 建正確的新條目,同一步完成不留空窗</a:t>
+              <a:t>② 先驗證再動手:反查 UE 實際量到的 PCI,表裡記的若其實還對就不動(避免誤修)</a:t>
             </a:r>
           </a:p>
           <a:p>
             <a:pPr>
               <a:spcAft>
-                <a:spcPts val="300"/>
+                <a:spcPts val="200"/>
               </a:spcAft>
             </a:pPr>
             <a:r>
-              <a:rPr sz="800" b="0">
+              <a:rPr sz="700" b="0">
                 <a:solidFill>
                   <a:srgbClr val="222A30"/>
                 </a:solidFill>
                 <a:latin typeface="Arial"/>
                 <a:ea typeface="Microsoft JhengHei"/>
               </a:rPr>
-              <a:t>③ 看換手失敗率消退確認修好</a:t>
+              <a:t>③ 確認是同一顆 cell 換了 PCI → 刪舊條目 + 建正確的新條目,同一步完成不留空窗</a:t>
+            </a:r>
+          </a:p>
+          <a:p>
+            <a:pPr>
+              <a:spcAft>
+                <a:spcPts val="200"/>
+              </a:spcAft>
+            </a:pPr>
+            <a:r>
+              <a:rPr sz="700" b="0">
+                <a:solidFill>
+                  <a:srgbClr val="222A30"/>
+                </a:solidFill>
+                <a:latin typeface="Arial"/>
+                <a:ea typeface="Microsoft JhengHei"/>
+              </a:rPr>
+              <a:t>④ 別被資源使用率騙了:換手一直失敗會讓 UE 全塞在來源 cell、把使用率推到滿 —— 那是病的結果不是原因,不得拿它當「這是壅塞、不是鄰區問題」的排除理由</a:t>
+            </a:r>
+          </a:p>
+          <a:p>
+            <a:pPr>
+              <a:spcAft>
+                <a:spcPts val="200"/>
+              </a:spcAft>
+            </a:pPr>
+            <a:r>
+              <a:rPr sz="700" b="0">
+                <a:solidFill>
+                  <a:srgbClr val="222A30"/>
+                </a:solidFill>
+                <a:latin typeface="Arial"/>
+                <a:ea typeface="Microsoft JhengHei"/>
+              </a:rPr>
+              <a:t>⑤ 看失敗率消退、換手成功恢復,才算修好</a:t>
             </a:r>
           </a:p>
           <a:p>
@@ -17177,7 +17249,7 @@
                 <a:latin typeface="Arial"/>
                 <a:ea typeface="Microsoft JhengHei"/>
               </a:rPr>
-              <a:t>預計操作結果:REMOVE+ADD 原子重指到正確 PCI</a:t>
+              <a:t>預計操作結果:把對應改正(刪舊+建新同一步完成),換手立刻恢復</a:t>
             </a:r>
           </a:p>
         </p:txBody>
@@ -17252,7 +17324,7 @@
                 <a:latin typeface="Arial"/>
                 <a:ea typeface="Microsoft JhengHei"/>
               </a:rPr>
-              <a:t>03:14:56 同秒重指 → pci=233、CNA 歸零、SUCC 恢復</a:t>
+              <a:t>刪舊條目與建新條目在同一秒完成(不留空窗);對應改正後失敗歸零、換手成功率回升</a:t>
             </a:r>
           </a:p>
         </p:txBody>
@@ -17265,8 +17337,8 @@
         </p:nvSpPr>
         <p:spPr>
           <a:xfrm>
-            <a:off x="320040" y="4060000"/>
-            <a:ext cx="5577840" cy="800000"/>
+            <a:off x="320040" y="4000000"/>
+            <a:ext cx="5577840" cy="880000"/>
           </a:xfrm>
           <a:prstGeom prst="roundRect">
             <a:avLst/>
@@ -17308,14 +17380,14 @@
               </a:spcAft>
             </a:pPr>
             <a:r>
-              <a:rPr sz="750" b="0">
+              <a:rPr sz="650" b="0">
                 <a:solidFill>
                   <a:srgbClr val="FFFFFF"/>
                 </a:solidFill>
                 <a:latin typeface="Arial"/>
                 <a:ea typeface="Microsoft JhengHei"/>
               </a:rPr>
-              <a:t>Neighbor 還在,但表裡的資訊過期:只把條目的 target_pci 改成舊值 205,而 cell 實際 pci 已經是 233。executor 換手前比對兩者不符,直接回 CellNotAvailable。UE 必須先搬回 s15,A3 才會反覆去撞這條壞掉的對應;不搬的話 att=0、病徵長不出來 —— 這是坑 1 的教訓。</a:t>
+              <a:t>場景長這樣:兩顆同頻 cell,s15(pci 200)在西、b07(pci 233)在東,相距 300 公尺。UE 在 s15 這側 15 公尺的小範圍來回 —— 訊號好到足以觸發 A3 去換 b07,又不會掉線(A3 門檻刻意調低到 1.0/0.5dB,讓觸發窗落在不會 RLF 的安全區)。佈病只改一個欄位:把 s15→b07 這條關係裡記的目標 PCI 改成舊值 205。執行器換手前會比對「表裡的 PCI」與「cell 實際的 PCI」,不符就回目標不可用 —— 這個比對是真的在算,不是我們填答案。另外必須把 UE 搬回 s15:先跑劇本時 A3 早就趁關係還正常把 UE 換去 b07 了,不搬回來就沒人會去撞這條壞掉的對應,嘗試率 = 0、病徵長不出來(坑 1)。</a:t>
             </a:r>
           </a:p>
         </p:txBody>

--- a/docs/report/8_27_進度報告_v10十二題.pptx
+++ b/docs/report/8_27_進度報告_v10十二題.pptx
@@ -17489,7 +17489,7 @@
                 <a:gridCol w="1691640"/>
                 <a:gridCol w="1920240"/>
               </a:tblGrid>
-              <a:tr h="594360">
+              <a:tr h="450000">
                 <a:tc>
                   <a:txBody>
                     <a:bodyPr wrap="square"/>
@@ -17563,32 +17563,8 @@
                   </a:tcPr>
                 </a:tc>
               </a:tr>
-              <a:tr h="594360">
-                <a:tc>
-                  <a:txBody>
-                    <a:bodyPr wrap="square"/>
-                    <a:lstStyle/>
-                    <a:p>
-                      <a:pPr algn="l"/>
-                      <a:r>
-                        <a:rPr sz="800" b="0">
-                          <a:solidFill>
-                            <a:srgbClr val="222A30"/>
-                          </a:solidFill>
-                          <a:latin typeface="Arial"/>
-                          <a:ea typeface="Microsoft JhengHei"/>
-                        </a:rPr>
-                        <a:t>measSampleRate=0 ∧ att=0 同步</a:t>
-                      </a:r>
-                    </a:p>
-                  </a:txBody>
-                  <a:tcPr anchor="ctr" marL="45720" marR="45720" marT="18288" marB="18288">
-                    <a:solidFill>
-                      <a:srgbClr val="FFFFFF"/>
-                    </a:solidFill>
-                  </a:tcPr>
-                </a:tc>
-                <a:tc>
+              <a:tr h="600000">
+                <a:tc gridSpan="3">
                   <a:txBody>
                     <a:bodyPr/>
                     <a:lstStyle/>
@@ -17601,7 +17577,7 @@
                           <a:latin typeface="Arial"/>
                           <a:ea typeface="Microsoft JhengHei"/>
                         </a:rPr>
-                        <a:t>建 ghost 條目 main→dead_c0,目標 cell 根本不存在 → 兩項天生同時為零</a:t>
+                        <a:t>這題在演什麼:鄰區表裡留著一條「沒人在用」的關係 —— 對面那顆 cell 可能已經拆站、搬走或改組態。它不會造成故障,但佔著容量上限的一格,而且會誤導後續判斷。難點:怎麼確定「真的沒人用」而不是「剛好這陣子沒人經過」?卷面的答案是:兩個訊號同時為零、而且要連續夠久。</a:t>
                       </a:r>
                     </a:p>
                   </a:txBody>
@@ -17611,6 +17587,24 @@
                     </a:solidFill>
                   </a:tcPr>
                 </a:tc>
+                <a:tc hMerge="1">
+                  <a:txBody>
+                    <a:bodyPr/>
+                    <a:lstStyle/>
+                    <a:p/>
+                  </a:txBody>
+                  <a:tcPr/>
+                </a:tc>
+                <a:tc hMerge="1">
+                  <a:txBody>
+                    <a:bodyPr/>
+                    <a:lstStyle/>
+                    <a:p/>
+                  </a:txBody>
+                  <a:tcPr/>
+                </a:tc>
+              </a:tr>
+              <a:tr h="450000">
                 <a:tc>
                   <a:txBody>
                     <a:bodyPr/>
@@ -17624,39 +17618,13 @@
                           <a:latin typeface="Arial"/>
                           <a:ea typeface="Microsoft JhengHei"/>
                         </a:rPr>
-                        <a:t>雙歸零才回收;只有一項為零可能只是暫時沒人走那個方向</a:t>
+                        <a:t>量測樣本率 = 0 且 換手嘗試率 = 0(兩個同時)</a:t>
                       </a:r>
                     </a:p>
                   </a:txBody>
                   <a:tcPr anchor="ctr" marL="45720" marR="45720" marT="18288" marB="18288">
                     <a:solidFill>
                       <a:srgbClr val="FFFFFF"/>
-                    </a:solidFill>
-                  </a:tcPr>
-                </a:tc>
-              </a:tr>
-              <a:tr h="594360">
-                <a:tc>
-                  <a:txBody>
-                    <a:bodyPr wrap="square"/>
-                    <a:lstStyle/>
-                    <a:p>
-                      <a:pPr algn="l"/>
-                      <a:r>
-                        <a:rPr sz="800" b="0">
-                          <a:solidFill>
-                            <a:srgbClr val="222A30"/>
-                          </a:solidFill>
-                          <a:latin typeface="Arial"/>
-                          <a:ea typeface="Microsoft JhengHei"/>
-                        </a:rPr>
-                        <a:t>持續 21600s(6h;測試壓縮 300s)</a:t>
-                      </a:r>
-                    </a:p>
-                  </a:txBody>
-                  <a:tcPr anchor="ctr" marL="45720" marR="45720" marT="18288" marB="18288">
-                    <a:solidFill>
-                      <a:srgbClr val="EFF5F8"/>
                     </a:solidFill>
                   </a:tcPr>
                 </a:tc>
@@ -17673,13 +17641,13 @@
                           <a:latin typeface="Arial"/>
                           <a:ea typeface="Microsoft JhengHei"/>
                         </a:rPr>
-                        <a:t>另留 main→tmp_c0 當單零對照:量得到,但沒人換過去</a:t>
+                        <a:t>建一條指向場景裡不存在的 cell 的關係,UE 永遠量不到、也不會換過去</a:t>
                       </a:r>
                     </a:p>
                   </a:txBody>
                   <a:tcPr anchor="ctr" marL="45720" marR="45720" marT="18288" marB="18288">
                     <a:solidFill>
-                      <a:srgbClr val="EFF5F8"/>
+                      <a:srgbClr val="FFFFFF"/>
                     </a:solidFill>
                   </a:tcPr>
                 </a:tc>
@@ -17696,33 +17664,7 @@
                           <a:latin typeface="Arial"/>
                           <a:ea typeface="Microsoft JhengHei"/>
                         </a:rPr>
-                        <a:t>單零不刪 —— 卷面把「單訊號歸零就刪」明列為典型錯誤</a:t>
-                      </a:r>
-                    </a:p>
-                  </a:txBody>
-                  <a:tcPr anchor="ctr" marL="45720" marR="45720" marT="18288" marB="18288">
-                    <a:solidFill>
-                      <a:srgbClr val="EFF5F8"/>
-                    </a:solidFill>
-                  </a:tcPr>
-                </a:tc>
-              </a:tr>
-              <a:tr h="594360">
-                <a:tc>
-                  <a:txBody>
-                    <a:bodyPr wrap="square"/>
-                    <a:lstStyle/>
-                    <a:p>
-                      <a:pPr algn="l"/>
-                      <a:r>
-                        <a:rPr sz="800" b="0">
-                          <a:solidFill>
-                            <a:srgbClr val="222A30"/>
-                          </a:solidFill>
-                          <a:latin typeface="Arial"/>
-                          <a:ea typeface="Microsoft JhengHei"/>
-                        </a:rPr>
-                        <a:t>REMOVE_REJECTED 事件(wire)</a:t>
+                        <a:t>只有一個為零不算:量測 0 可能只是這方向沒人量到,換手 0 可能只是最近沒人換</a:t>
                       </a:r>
                     </a:p>
                   </a:txBody>
@@ -17732,6 +17674,8 @@
                     </a:solidFill>
                   </a:tcPr>
                 </a:tc>
+              </a:tr>
+              <a:tr h="450000">
                 <a:tc>
                   <a:txBody>
                     <a:bodyPr/>
@@ -17745,13 +17689,13 @@
                           <a:latin typeface="Arial"/>
                           <a:ea typeface="Microsoft JhengHei"/>
                         </a:rPr>
-                        <a:t>再建一條 protected 條目,REMOVE 下去 CU 必定拒絕</a:t>
+                        <a:t>持續滿整個窗口:正式 6 小時(測試壓成 5 分鐘)</a:t>
                       </a:r>
                     </a:p>
                   </a:txBody>
                   <a:tcPr anchor="ctr" marL="45720" marR="45720" marT="18288" marB="18288">
                     <a:solidFill>
-                      <a:srgbClr val="FFFFFF"/>
+                      <a:srgbClr val="EFF5F8"/>
                     </a:solidFill>
                   </a:tcPr>
                 </a:tc>
@@ -17768,7 +17712,101 @@
                           <a:latin typeface="Arial"/>
                           <a:ea typeface="Microsoft JhengHei"/>
                         </a:rPr>
-                        <a:t>拒絕事件是 xApp 重啟後重建「不再重試」帳本的唯一料源</a:t>
+                        <a:t>測試時把窗口 env 壓成 300 秒,判斷邏輯完全一樣,只是不用等 6 小時</a:t>
+                      </a:r>
+                    </a:p>
+                  </a:txBody>
+                  <a:tcPr anchor="ctr" marL="45720" marR="45720" marT="18288" marB="18288">
+                    <a:solidFill>
+                      <a:srgbClr val="EFF5F8"/>
+                    </a:solidFill>
+                  </a:tcPr>
+                </a:tc>
+                <a:tc>
+                  <a:txBody>
+                    <a:bodyPr/>
+                    <a:lstStyle/>
+                    <a:p>
+                      <a:r>
+                        <a:rPr sz="800" b="0">
+                          <a:solidFill>
+                            <a:srgbClr val="222A30"/>
+                          </a:solidFill>
+                          <a:latin typeface="Arial"/>
+                          <a:ea typeface="Microsoft JhengHei"/>
+                        </a:rPr>
+                        <a:t>6 小時是防手抖:半夜或人少的路段安靜十分鐘很正常,久到 6 小時才算數</a:t>
+                      </a:r>
+                    </a:p>
+                  </a:txBody>
+                  <a:tcPr anchor="ctr" marL="45720" marR="45720" marT="18288" marB="18288">
+                    <a:solidFill>
+                      <a:srgbClr val="EFF5F8"/>
+                    </a:solidFill>
+                  </a:tcPr>
+                </a:tc>
+              </a:tr>
+              <a:tr h="450000">
+                <a:tc>
+                  <a:txBody>
+                    <a:bodyPr/>
+                    <a:lstStyle/>
+                    <a:p>
+                      <a:r>
+                        <a:rPr sz="800" b="0">
+                          <a:solidFill>
+                            <a:srgbClr val="222A30"/>
+                          </a:solidFill>
+                          <a:latin typeface="Arial"/>
+                          <a:ea typeface="Microsoft JhengHei"/>
+                        </a:rPr>
+                        <a:t>刪不掉時,拒絕訊息要真的送到 RIC 那邊</a:t>
+                      </a:r>
+                    </a:p>
+                  </a:txBody>
+                  <a:tcPr anchor="ctr" marL="45720" marR="45720" marT="18288" marB="18288">
+                    <a:solidFill>
+                      <a:srgbClr val="FFFFFF"/>
+                    </a:solidFill>
+                  </a:tcPr>
+                </a:tc>
+                <a:tc>
+                  <a:txBody>
+                    <a:bodyPr/>
+                    <a:lstStyle/>
+                    <a:p>
+                      <a:r>
+                        <a:rPr sz="800" b="0">
+                          <a:solidFill>
+                            <a:srgbClr val="222A30"/>
+                          </a:solidFill>
+                          <a:latin typeface="Arial"/>
+                          <a:ea typeface="Microsoft JhengHei"/>
+                        </a:rPr>
+                        <a:t>另建一條標成受保護的關係,xApp 來刪時 CU 一定回絕並送出「刪除被拒」事件</a:t>
+                      </a:r>
+                    </a:p>
+                  </a:txBody>
+                  <a:tcPr anchor="ctr" marL="45720" marR="45720" marT="18288" marB="18288">
+                    <a:solidFill>
+                      <a:srgbClr val="FFFFFF"/>
+                    </a:solidFill>
+                  </a:tcPr>
+                </a:tc>
+                <a:tc>
+                  <a:txBody>
+                    <a:bodyPr/>
+                    <a:lstStyle/>
+                    <a:p>
+                      <a:r>
+                        <a:rPr sz="800" b="0">
+                          <a:solidFill>
+                            <a:srgbClr val="222A30"/>
+                          </a:solidFill>
+                          <a:latin typeface="Arial"/>
+                          <a:ea typeface="Microsoft JhengHei"/>
+                        </a:rPr>
+                        <a:t>v10 看不到「可否移除」,只能刪下去才知道;xApp 重開機後也靠這個事件想起「這條刪不掉」</a:t>
                       </a:r>
                     </a:p>
                   </a:txBody>
@@ -17844,52 +17882,103 @@
           <a:p>
             <a:pPr>
               <a:spcAft>
-                <a:spcPts val="300"/>
+                <a:spcPts val="180"/>
               </a:spcAft>
             </a:pPr>
             <a:r>
-              <a:rPr sz="800" b="0">
+              <a:rPr sz="700" b="0">
                 <a:solidFill>
                   <a:srgbClr val="222A30"/>
                 </a:solidFill>
                 <a:latin typeface="Arial"/>
                 <a:ea typeface="Microsoft JhengHei"/>
               </a:rPr>
-              <a:t>① 量測與換手嘗試「同時為零」且持續滿窗,才送 REMOVE 回收</a:t>
+              <a:t>① 找出量測與換手嘗試同時為零的關係</a:t>
             </a:r>
           </a:p>
           <a:p>
             <a:pPr>
               <a:spcAft>
-                <a:spcPts val="300"/>
+                <a:spcPts val="180"/>
               </a:spcAft>
             </a:pPr>
             <a:r>
-              <a:rPr sz="800" b="0">
+              <a:rPr sz="700" b="0">
                 <a:solidFill>
                   <a:srgbClr val="222A30"/>
                 </a:solidFill>
                 <a:latin typeface="Arial"/>
                 <a:ea typeface="Microsoft JhengHei"/>
               </a:rPr>
-              <a:t>② 被拒(受保護)= 記進「不再重試」帳本 + 送 SMO,絕不重複下手</a:t>
+              <a:t>② 確認它連續滿整個窗口都是零 —— 中間只要動過一次,計時重來</a:t>
             </a:r>
           </a:p>
           <a:p>
             <a:pPr>
               <a:spcAft>
-                <a:spcPts val="300"/>
+                <a:spcPts val="180"/>
               </a:spcAft>
             </a:pPr>
             <a:r>
-              <a:rPr sz="800" b="0">
+              <a:rPr sz="700" b="0">
                 <a:solidFill>
                   <a:srgbClr val="222A30"/>
                 </a:solidFill>
                 <a:latin typeface="Arial"/>
                 <a:ea typeface="Microsoft JhengHei"/>
               </a:rPr>
-              <a:t>③ 重啟後靠事件流把帳本補回來,不會忘記自己做過什麼</a:t>
+              <a:t>③ 資料缺漏不等於零:沒回報的窗不能當成 0 起算</a:t>
+            </a:r>
+          </a:p>
+          <a:p>
+            <a:pPr>
+              <a:spcAft>
+                <a:spcPts val="180"/>
+              </a:spcAft>
+            </a:pPr>
+            <a:r>
+              <a:rPr sz="700" b="0">
+                <a:solidFill>
+                  <a:srgbClr val="222A30"/>
+                </a:solidFill>
+                <a:latin typeface="Arial"/>
+                <a:ea typeface="Microsoft JhengHei"/>
+              </a:rPr>
+              <a:t>④ 送 REMOVE 回收這條關係</a:t>
+            </a:r>
+          </a:p>
+          <a:p>
+            <a:pPr>
+              <a:spcAft>
+                <a:spcPts val="180"/>
+              </a:spcAft>
+            </a:pPr>
+            <a:r>
+              <a:rPr sz="700" b="0">
+                <a:solidFill>
+                  <a:srgbClr val="222A30"/>
+                </a:solidFill>
+                <a:latin typeface="Arial"/>
+                <a:ea typeface="Microsoft JhengHei"/>
+              </a:rPr>
+              <a:t>⑤ 被回絕(受保護)→ 記進「不再重試」名單 + 送 SMO 請人處理,絕不重複下手</a:t>
+            </a:r>
+          </a:p>
+          <a:p>
+            <a:pPr>
+              <a:spcAft>
+                <a:spcPts val="180"/>
+              </a:spcAft>
+            </a:pPr>
+            <a:r>
+              <a:rPr sz="700" b="0">
+                <a:solidFill>
+                  <a:srgbClr val="222A30"/>
+                </a:solidFill>
+                <a:latin typeface="Arial"/>
+                <a:ea typeface="Microsoft JhengHei"/>
+              </a:rPr>
+              <a:t>⑥ 重開機後靠「刪除被拒」事件把名單補回來,不會忘記自己試過</a:t>
             </a:r>
           </a:p>
           <a:p>
@@ -17920,7 +18009,7 @@
                 <a:latin typeface="Arial"/>
                 <a:ea typeface="Microsoft JhengHei"/>
               </a:rPr>
-              <a:t>預計操作結果:雙歸零滿窗才回收;判準是使用量不是年齡</a:t>
+              <a:t>預計操作結果:把真正沒人用的關係回收,騰出容量;刪不掉的交給人,不重複騷擾</a:t>
             </a:r>
           </a:p>
         </p:txBody>
@@ -17995,7 +18084,7 @@
                 <a:latin typeface="Arial"/>
                 <a:ea typeface="Microsoft JhengHei"/>
               </a:rPr>
-              <a:t>四型矩陣:乾淨 REMOVED / 拒後零重發 / 單零不誤刪 / 活躍不碰</a:t>
+              <a:t>三種條目同一場驗完:該回收的被刪掉、受保護的被回絕且不再重試、單訊號歸零的沒被誤刪</a:t>
             </a:r>
           </a:p>
         </p:txBody>
@@ -18008,8 +18097,8 @@
         </p:nvSpPr>
         <p:spPr>
           <a:xfrm>
-            <a:off x="320040" y="4060000"/>
-            <a:ext cx="5577840" cy="800000"/>
+            <a:off x="320040" y="3990000"/>
+            <a:ext cx="5577840" cy="890000"/>
           </a:xfrm>
           <a:prstGeom prst="roundRect">
             <a:avLst/>
@@ -18051,14 +18140,14 @@
               </a:spcAft>
             </a:pPr>
             <a:r>
-              <a:rPr sz="750" b="0">
+              <a:rPr sz="650" b="0">
                 <a:solidFill>
                   <a:srgbClr val="FFFFFF"/>
                 </a:solidFill>
                 <a:latin typeface="Arial"/>
                 <a:ea typeface="Microsoft JhengHei"/>
               </a:rPr>
-              <a:t>建 ghost 條目 main→dead_c0:目標 cell 根本不存在,所以量測與換手嘗試天生同時為零。另外建 main→old_c0 並標 protected(驗 REMOVE 被拒的路徑),再留 main→tmp_c0 當單零對照(量得到但沒人換過去,不得誤刪)。三種條目同場,回收判準的三種結局才驗得完整。</a:t>
+              <a:t>場景長這樣:main(pci 10)與 keep(pci 40)相距 300 公尺,UE 在兩者之間來回穿越 —— 這兩顆之間的關係一直有真實換手,是「活躍」對照組。另有一顆 tmp 在北側 260 公尺處。佈病建三種條目讓三種結局都驗得到:①main→dead:目標 cell 在場景裡根本不存在,所以量測與換手天生同時為零 —— 這是該被回收的殭屍;②main→old:同樣是空的,但標成受保護,刪它一定被回絕 —— 驗拒絕路徑;③main→tmp:UE 量得到 tmp(所以量測不是零)但沒人換過去(換手是零)—— 這是「單訊號歸零」的對照組,誤刪它就是踩到卷面點名的典型錯誤。</a:t>
             </a:r>
           </a:p>
         </p:txBody>

--- a/docs/report/8_27_進度報告_v10十二題.pptx
+++ b/docs/report/8_27_進度報告_v10十二題.pptx
@@ -18249,7 +18249,7 @@
                 <a:gridCol w="1691640"/>
                 <a:gridCol w="1920240"/>
               </a:tblGrid>
-              <a:tr h="594360">
+              <a:tr h="440000">
                 <a:tc>
                   <a:txBody>
                     <a:bodyPr wrap="square"/>
@@ -18323,32 +18323,8 @@
                   </a:tcPr>
                 </a:tc>
               </a:tr>
-              <a:tr h="594360">
-                <a:tc>
-                  <a:txBody>
-                    <a:bodyPr wrap="square"/>
-                    <a:lstStyle/>
-                    <a:p>
-                      <a:pPr algn="l"/>
-                      <a:r>
-                        <a:rPr sz="800" b="0">
-                          <a:solidFill>
-                            <a:srgbClr val="222A30"/>
-                          </a:solidFill>
-                          <a:latin typeface="Arial"/>
-                          <a:ea typeface="Microsoft JhengHei"/>
-                        </a:rPr>
-                        <a:t>量測強(≥10/min,≥−95dBm)</a:t>
-                      </a:r>
-                    </a:p>
-                  </a:txBody>
-                  <a:tcPr anchor="ctr" marL="45720" marR="45720" marT="18288" marB="18288">
-                    <a:solidFill>
-                      <a:srgbClr val="FFFFFF"/>
-                    </a:solidFill>
-                  </a:tcPr>
-                </a:tc>
-                <a:tc>
+              <a:tr h="620000">
+                <a:tc gridSpan="3">
                   <a:txBody>
                     <a:bodyPr/>
                     <a:lstStyle/>
@@ -18361,7 +18337,7 @@
                           <a:latin typeface="Arial"/>
                           <a:ea typeface="Microsoft JhengHei"/>
                         </a:rPr>
-                        <a:t>兩條關係的量測都很強(UE 就在旁邊,需求真實存在)</a:t>
+                        <a:t>這題在演什麼:有兩條關係都被「封鎖」了(禁止當換手目標)。一條是有道理的 —— 它以前正常服務過,後來一直接入失敗才被封;另一條沒道理 —— 從來沒服務成功過、也沒有任何失敗紀錄,可能是誤操作或舊組態殘留。難點:v10 規定封鎖旗標在 E2 上「看不到」,所以無法直接比對旗標,只能從行為訊號反推哪一條封得沒道理、該解開。</a:t>
                       </a:r>
                     </a:p>
                   </a:txBody>
@@ -18371,6 +18347,24 @@
                     </a:solidFill>
                   </a:tcPr>
                 </a:tc>
+                <a:tc hMerge="1">
+                  <a:txBody>
+                    <a:bodyPr/>
+                    <a:lstStyle/>
+                    <a:p/>
+                  </a:txBody>
+                  <a:tcPr/>
+                </a:tc>
+                <a:tc hMerge="1">
+                  <a:txBody>
+                    <a:bodyPr/>
+                    <a:lstStyle/>
+                    <a:p/>
+                  </a:txBody>
+                  <a:tcPr/>
+                </a:tc>
+              </a:tr>
+              <a:tr h="440000">
                 <a:tc>
                   <a:txBody>
                     <a:bodyPr/>
@@ -18384,39 +18378,13 @@
                           <a:latin typeface="Arial"/>
                           <a:ea typeface="Microsoft JhengHei"/>
                         </a:rPr>
-                        <a:t>先要「有人想去」,才談得上是不是被擋住</a:t>
+                        <a:t>量測很強(≥10/min、≥−95dBm)</a:t>
                       </a:r>
                     </a:p>
                   </a:txBody>
                   <a:tcPr anchor="ctr" marL="45720" marR="45720" marT="18288" marB="18288">
                     <a:solidFill>
                       <a:srgbClr val="FFFFFF"/>
-                    </a:solidFill>
-                  </a:tcPr>
-                </a:tc>
-              </a:tr>
-              <a:tr h="594360">
-                <a:tc>
-                  <a:txBody>
-                    <a:bodyPr wrap="square"/>
-                    <a:lstStyle/>
-                    <a:p>
-                      <a:pPr algn="l"/>
-                      <a:r>
-                        <a:rPr sz="800" b="0">
-                          <a:solidFill>
-                            <a:srgbClr val="222A30"/>
-                          </a:solidFill>
-                          <a:latin typeface="Arial"/>
-                          <a:ea typeface="Microsoft JhengHei"/>
-                        </a:rPr>
-                        <a:t>att ≡ 0 ∧ hoValidated=false</a:t>
-                      </a:r>
-                    </a:p>
-                  </a:txBody>
-                  <a:tcPr anchor="ctr" marL="45720" marR="45720" marT="18288" marB="18288">
-                    <a:solidFill>
-                      <a:srgbClr val="EFF5F8"/>
                     </a:solidFill>
                   </a:tcPr>
                 </a:tc>
@@ -18433,13 +18401,13 @@
                           <a:latin typeface="Arial"/>
                           <a:ea typeface="Microsoft JhengHei"/>
                         </a:rPr>
-                        <a:t>兩條的旗標設成一模一樣,差別只造在 hoValidated 與失敗史</a:t>
+                        <a:t>UE 就在旁邊來回,對兩顆目標都量得清清楚楚</a:t>
                       </a:r>
                     </a:p>
                   </a:txBody>
                   <a:tcPr anchor="ctr" marL="45720" marR="45720" marT="18288" marB="18288">
                     <a:solidFill>
-                      <a:srgbClr val="EFF5F8"/>
+                      <a:srgbClr val="FFFFFF"/>
                     </a:solidFill>
                   </a:tcPr>
                 </a:tc>
@@ -18456,33 +18424,7 @@
                           <a:latin typeface="Arial"/>
                           <a:ea typeface="Microsoft JhengHei"/>
                         </a:rPr>
-                        <a:t>旗標在 E2 看不到,只能靠行為訊號分辨哪一條該修</a:t>
-                      </a:r>
-                    </a:p>
-                  </a:txBody>
-                  <a:tcPr anchor="ctr" marL="45720" marR="45720" marT="18288" marB="18288">
-                    <a:solidFill>
-                      <a:srgbClr val="EFF5F8"/>
-                    </a:solidFill>
-                  </a:tcPr>
-                </a:tc>
-              </a:tr>
-              <a:tr h="594360">
-                <a:tc>
-                  <a:txBody>
-                    <a:bodyPr wrap="square"/>
-                    <a:lstStyle/>
-                    <a:p>
-                      <a:pPr algn="l"/>
-                      <a:r>
-                        <a:rPr sz="800" b="0">
-                          <a:solidFill>
-                            <a:srgbClr val="222A30"/>
-                          </a:solidFill>
-                          <a:latin typeface="Arial"/>
-                          <a:ea typeface="Microsoft JhengHei"/>
-                        </a:rPr>
-                        <a:t>cum = 0(無失敗史)</a:t>
+                        <a:t>訊號①:有人想去 —— 沒有需求的話,被封鎖也無所謂,不值得動</a:t>
                       </a:r>
                     </a:p>
                   </a:txBody>
@@ -18492,6 +18434,8 @@
                     </a:solidFill>
                   </a:tcPr>
                 </a:tc>
+              </a:tr>
+              <a:tr h="440000">
                 <a:tc>
                   <a:txBody>
                     <a:bodyPr/>
@@ -18505,13 +18449,13 @@
                           <a:latin typeface="Arial"/>
                           <a:ea typeface="Microsoft JhengHei"/>
                         </a:rPr>
-                        <a:t>n80 注入 40 筆歷史 RA 失敗;d02 一筆都沒有</a:t>
+                        <a:t>換手嘗試 ≡ 0,且從未成功服務過</a:t>
                       </a:r>
                     </a:p>
                   </a:txBody>
                   <a:tcPr anchor="ctr" marL="45720" marR="45720" marT="18288" marB="18288">
                     <a:solidFill>
-                      <a:srgbClr val="FFFFFF"/>
+                      <a:srgbClr val="EFF5F8"/>
                     </a:solidFill>
                   </a:tcPr>
                 </a:tc>
@@ -18528,7 +18472,101 @@
                           <a:latin typeface="Arial"/>
                           <a:ea typeface="Microsoft JhengHei"/>
                         </a:rPr>
-                        <a:t>有失敗史 = 正當封鎖(不動);沒有 = 無據封鎖(該修)</a:t>
+                        <a:t>兩條關係都設成封鎖,A3 直接跳過,所以一次嘗試都不會發生</a:t>
+                      </a:r>
+                    </a:p>
+                  </a:txBody>
+                  <a:tcPr anchor="ctr" marL="45720" marR="45720" marT="18288" marB="18288">
+                    <a:solidFill>
+                      <a:srgbClr val="EFF5F8"/>
+                    </a:solidFill>
+                  </a:tcPr>
+                </a:tc>
+                <a:tc>
+                  <a:txBody>
+                    <a:bodyPr/>
+                    <a:lstStyle/>
+                    <a:p>
+                      <a:r>
+                        <a:rPr sz="800" b="0">
+                          <a:solidFill>
+                            <a:srgbClr val="222A30"/>
+                          </a:solidFill>
+                          <a:latin typeface="Arial"/>
+                          <a:ea typeface="Microsoft JhengHei"/>
+                        </a:rPr>
+                        <a:t>訊號②③:有需求卻連試都沒試 → 被擋在換手發起之前</a:t>
+                      </a:r>
+                    </a:p>
+                  </a:txBody>
+                  <a:tcPr anchor="ctr" marL="45720" marR="45720" marT="18288" marB="18288">
+                    <a:solidFill>
+                      <a:srgbClr val="EFF5F8"/>
+                    </a:solidFill>
+                  </a:tcPr>
+                </a:tc>
+              </a:tr>
+              <a:tr h="440000">
+                <a:tc>
+                  <a:txBody>
+                    <a:bodyPr/>
+                    <a:lstStyle/>
+                    <a:p>
+                      <a:r>
+                        <a:rPr sz="800" b="0">
+                          <a:solidFill>
+                            <a:srgbClr val="222A30"/>
+                          </a:solidFill>
+                          <a:latin typeface="Arial"/>
+                          <a:ea typeface="Microsoft JhengHei"/>
+                        </a:rPr>
+                        <a:t>過去的失敗紀錄:一條有 40 筆,一條 0 筆</a:t>
+                      </a:r>
+                    </a:p>
+                  </a:txBody>
+                  <a:tcPr anchor="ctr" marL="45720" marR="45720" marT="18288" marB="18288">
+                    <a:solidFill>
+                      <a:srgbClr val="FFFFFF"/>
+                    </a:solidFill>
+                  </a:tcPr>
+                </a:tc>
+                <a:tc>
+                  <a:txBody>
+                    <a:bodyPr/>
+                    <a:lstStyle/>
+                    <a:p>
+                      <a:r>
+                        <a:rPr sz="800" b="0">
+                          <a:solidFill>
+                            <a:srgbClr val="222A30"/>
+                          </a:solidFill>
+                          <a:latin typeface="Arial"/>
+                          <a:ea typeface="Microsoft JhengHei"/>
+                        </a:rPr>
+                        <a:t>替其中一條灌 40 筆 6 小時前的接入失敗事件,另一條刻意一筆都不給</a:t>
+                      </a:r>
+                    </a:p>
+                  </a:txBody>
+                  <a:tcPr anchor="ctr" marL="45720" marR="45720" marT="18288" marB="18288">
+                    <a:solidFill>
+                      <a:srgbClr val="FFFFFF"/>
+                    </a:solidFill>
+                  </a:tcPr>
+                </a:tc>
+                <a:tc>
+                  <a:txBody>
+                    <a:bodyPr/>
+                    <a:lstStyle/>
+                    <a:p>
+                      <a:r>
+                        <a:rPr sz="800" b="0">
+                          <a:solidFill>
+                            <a:srgbClr val="222A30"/>
+                          </a:solidFill>
+                          <a:latin typeface="Arial"/>
+                          <a:ea typeface="Microsoft JhengHei"/>
+                        </a:rPr>
+                        <a:t>訊號④:有失敗史 = 因為它壞了才封(正當);沒有 = 封得沒依據(該解開)</a:t>
                       </a:r>
                     </a:p>
                   </a:txBody>
@@ -18604,52 +18642,86 @@
           <a:p>
             <a:pPr>
               <a:spcAft>
-                <a:spcPts val="300"/>
+                <a:spcPts val="200"/>
               </a:spcAft>
             </a:pPr>
             <a:r>
-              <a:rPr sz="800" b="0">
+              <a:rPr sz="720" b="0">
                 <a:solidFill>
                   <a:srgbClr val="222A30"/>
                 </a:solidFill>
                 <a:latin typeface="Arial"/>
                 <a:ea typeface="Microsoft JhengHei"/>
               </a:rPr>
-              <a:t>① 旗標在 E2 看不到,只能從行為推論是不是被無故封鎖</a:t>
+              <a:t>① 旗標在 E2 看不到,只能從行為訊號反推是不是被無故封鎖</a:t>
             </a:r>
           </a:p>
           <a:p>
             <a:pPr>
               <a:spcAft>
-                <a:spcPts val="300"/>
+                <a:spcPts val="200"/>
               </a:spcAft>
             </a:pPr>
             <a:r>
-              <a:rPr sz="800" b="0">
+              <a:rPr sz="720" b="0">
                 <a:solidFill>
                   <a:srgbClr val="222A30"/>
                 </a:solidFill>
                 <a:latin typeface="Arial"/>
                 <a:ea typeface="Microsoft JhengHei"/>
               </a:rPr>
-              <a:t>② 判定「無據」→ 成對解除 + 告警 + 確認 UE 真的開始走</a:t>
+              <a:t>② 四個訊號同時成立(量測強、沒人試、從未服務成功、沒有失敗史)→ 判定「封得沒依據」</a:t>
             </a:r>
           </a:p>
           <a:p>
             <a:pPr>
               <a:spcAft>
-                <a:spcPts val="300"/>
+                <a:spcPts val="200"/>
               </a:spcAft>
             </a:pPr>
             <a:r>
-              <a:rPr sz="800" b="0">
+              <a:rPr sz="720" b="0">
                 <a:solidFill>
                   <a:srgbClr val="222A30"/>
                 </a:solidFill>
                 <a:latin typeface="Arial"/>
                 <a:ea typeface="Microsoft JhengHei"/>
               </a:rPr>
-              <a:t>③ 判定「正當」(有失敗歷史)→ 看過就好,不動、也不告警</a:t>
+              <a:t>③ 成對解除封鎖 + 發告警,並確認 UE 真的開始走這條路</a:t>
+            </a:r>
+          </a:p>
+          <a:p>
+            <a:pPr>
+              <a:spcAft>
+                <a:spcPts val="200"/>
+              </a:spcAft>
+            </a:pPr>
+            <a:r>
+              <a:rPr sz="720" b="0">
+                <a:solidFill>
+                  <a:srgbClr val="222A30"/>
+                </a:solidFill>
+                <a:latin typeface="Arial"/>
+                <a:ea typeface="Microsoft JhengHei"/>
+              </a:rPr>
+              <a:t>④ 有失敗史那條 → 判定「封得有依據」→ 看過就好,不動、也不告警</a:t>
+            </a:r>
+          </a:p>
+          <a:p>
+            <a:pPr>
+              <a:spcAft>
+                <a:spcPts val="200"/>
+              </a:spcAft>
+            </a:pPr>
+            <a:r>
+              <a:rPr sz="720" b="0">
+                <a:solidFill>
+                  <a:srgbClr val="222A30"/>
+                </a:solidFill>
+                <a:latin typeface="Arial"/>
+                <a:ea typeface="Microsoft JhengHei"/>
+              </a:rPr>
+              <a:t>⑤ 剛建立的新關係天生就符合四個訊號(還沒人用過)—— 要給寬限期,不能當成被封鎖</a:t>
             </a:r>
           </a:p>
           <a:p>
@@ -18680,7 +18752,7 @@
                 <a:latin typeface="Arial"/>
                 <a:ea typeface="Microsoft JhengHei"/>
               </a:rPr>
-              <a:t>預計操作結果:由四項行為訊號推論,只修無據、不碰正當</a:t>
+              <a:t>預計操作結果:只解開沒依據的那條,有失敗史的不碰;新生關係給寬限,不誤判</a:t>
             </a:r>
           </a:p>
         </p:txBody>
@@ -18755,7 +18827,7 @@
                 <a:latin typeface="Arial"/>
                 <a:ea typeface="Microsoft JhengHei"/>
               </a:rPr>
-              <a:t>正當封鎖不動、無據封鎖修復,兩種都判對;hoValidated 欄位已修好,誤判成因排除</a:t>
+              <a:t>兩種都判對:沒依據的被解開、有依據的沒被動;hoValidated 欄位今日修好後,誤判成因也排除了</a:t>
             </a:r>
           </a:p>
         </p:txBody>
@@ -18768,8 +18840,8 @@
         </p:nvSpPr>
         <p:spPr>
           <a:xfrm>
-            <a:off x="320040" y="4060000"/>
-            <a:ext cx="5577840" cy="800000"/>
+            <a:off x="320040" y="3990000"/>
+            <a:ext cx="5577840" cy="890000"/>
           </a:xfrm>
           <a:prstGeom prst="roundRect">
             <a:avLst/>
@@ -18811,14 +18883,14 @@
               </a:spcAft>
             </a:pPr>
             <a:r>
-              <a:rPr sz="750" b="0">
+              <a:rPr sz="640" b="0">
                 <a:solidFill>
                   <a:srgbClr val="FFFFFF"/>
                 </a:solidFill>
                 <a:latin typeface="Arial"/>
                 <a:ea typeface="Microsoft JhengHei"/>
               </a:rPr>
-              <a:t>兩條關係的旗標設成一模一樣(hoBlocklist+xnBlocklist),差別只造在行為訊號:n80 注入 40 筆歷史 RA 失敗事件並標 hoValidated=true(曾經正常服務過);d02 零失敗史、hoValidated=false。因為 v10 規定旗標在 E2 不可觀測,xApp 只能靠這些行為訊號分辨哪一條該修、哪一條不能碰。</a:t>
+              <a:t>場景長這樣:s19(pci 240)在中間,UE 在它周邊 ±60 公尺來回;d02(pci 251)在東側 250 公尺、n80(pci 260)在西北 680 公尺處,兩顆 UE 都量得到。佈病的關鍵是「兩條關係的旗標必須一模一樣」—— 都設成封鎖(禁止換手 + 禁止刪除),否則 xApp 只要比對旗標就分得出來,題目就不成立了。差別只造在行為訊號:n80 那條標成「曾經正常服務過」並灌進 40 筆 6 小時前的接入失敗事件(所以它是因為壞了才被封);d02 那條則是「從未服務成功」且一筆失敗紀錄都沒有(所以沒人知道為什麼封它)。最後把 UE 搬回 s19,量測強度才存在 —— 有需求卻零嘗試,矛盾才浮得出來。</a:t>
             </a:r>
           </a:p>
         </p:txBody>

--- a/docs/report/8_27_進度報告_v10十二題.pptx
+++ b/docs/report/8_27_進度報告_v10十二題.pptx
@@ -13198,7 +13198,7 @@
                           <a:latin typeface="Arial"/>
                           <a:ea typeface="Microsoft JhengHei"/>
                         </a:rPr>
-                        <a:t>解析同一 PCI → 兩個不同 CGI</a:t>
+                        <a:t>解析同一 PCI → 得到兩個不同的 cell</a:t>
                       </a:r>
                     </a:p>
                   </a:txBody>
@@ -13490,7 +13490,7 @@
                 <a:latin typeface="Arial"/>
                 <a:ea typeface="Microsoft JhengHei"/>
               </a:rPr>
-              <a:t>② 立刻通報 SMO:根治要重新規劃 PCI,那是管理面的事,xApp 只能止血</a:t>
+              <a:t>② 立刻通報管理面:根治要重新規劃 PCI,那不是 xApp 的職權,它只能止血</a:t>
             </a:r>
           </a:p>
           <a:p>
@@ -13677,8 +13677,8 @@
         </p:nvSpPr>
         <p:spPr>
           <a:xfrm>
-            <a:off x="320040" y="4060000"/>
-            <a:ext cx="5577840" cy="800000"/>
+            <a:off x="320040" y="3990000"/>
+            <a:ext cx="5577840" cy="890000"/>
           </a:xfrm>
           <a:prstGeom prst="roundRect">
             <a:avLst/>
@@ -13720,14 +13720,14 @@
               </a:spcAft>
             </a:pPr>
             <a:r>
-              <a:rPr sz="750" b="0">
+              <a:rPr sz="640" b="0">
                 <a:solidFill>
                   <a:srgbClr val="FFFFFF"/>
                 </a:solidFill>
                 <a:latin typeface="Arial"/>
                 <a:ea typeface="Microsoft JhengHei"/>
               </a:rPr>
-              <a:t>撞號直接寫在場景裡:west_c7 與 east_c7 兩顆不同 cell 給同一個 pci=7,UE 在中間的 mid_c0 上兩顆都量得到。佈病再把 mid 的表只留 east(刪掉 west),造出「owned 唯一」—— 這是 xApp 敢下群組換手的前提。若兩顆都在或都不在表上,正解就只剩通報,不得猜。</a:t>
+              <a:t>場景長這樣:mid(pci 0)在中間,west_c7 與 east_c7 分別在西、東各 350 公尺處,兩顆共用 pci=7;5 台 UE 沿 ±400 公尺東西掃越,三顆全部量得到。撞號直接寫在場景裡:west_c7 與 east_c7 兩顆不同 cell 給同一個 pci=7,UE 在中間的 mid_c0 上兩顆都量得到。佈病再把 mid 的表只留 east(刪掉 west),造出「owned 唯一」—— 這是 xApp 敢下群組換手的前提。若兩顆都在或都不在表上,正解就只剩通報,不得猜。</a:t>
             </a:r>
           </a:p>
         </p:txBody>
@@ -13829,7 +13829,7 @@
                 <a:gridCol w="1691640"/>
                 <a:gridCol w="1920240"/>
               </a:tblGrid>
-              <a:tr h="594360">
+              <a:tr h="450000">
                 <a:tc>
                   <a:txBody>
                     <a:bodyPr wrap="square"/>
@@ -13903,32 +13903,8 @@
                   </a:tcPr>
                 </a:tc>
               </a:tr>
-              <a:tr h="594360">
-                <a:tc>
-                  <a:txBody>
-                    <a:bodyPr wrap="square"/>
-                    <a:lstStyle/>
-                    <a:p>
-                      <a:pPr algn="l"/>
-                      <a:r>
-                        <a:rPr sz="800" b="0">
-                          <a:solidFill>
-                            <a:srgbClr val="222A30"/>
-                          </a:solidFill>
-                          <a:latin typeface="Arial"/>
-                          <a:ea typeface="Microsoft JhengHei"/>
-                        </a:rPr>
-                        <a:t>HoPrepInterFail(TXnRELOCprepExpiry)佔比 ≥0.8</a:t>
-                      </a:r>
-                    </a:p>
-                  </a:txBody>
-                  <a:tcPr anchor="ctr" marL="45720" marR="45720" marT="18288" marB="18288">
-                    <a:solidFill>
-                      <a:srgbClr val="FFFFFF"/>
-                    </a:solidFill>
-                  </a:tcPr>
-                </a:tc>
-                <a:tc>
+              <a:tr h="600000">
+                <a:tc gridSpan="3">
                   <a:txBody>
                     <a:bodyPr/>
                     <a:lstStyle/>
@@ -13941,7 +13917,7 @@
                           <a:latin typeface="Arial"/>
                           <a:ea typeface="Microsoft JhengHei"/>
                         </a:rPr>
-                        <a:t>關係與量測全部正常,只把 xn_x2_established 改成 false</a:t>
+                        <a:t>這題在演什麼:關係在、訊號正常,但兩個基地台之間的 Xn 傳輸沒接上 —— 換手請求連送都送不出去,UE 只能困在原地。難點:xApp 修不了 Xn(那是管理面的職權),它只能先止血、通報,然後等人修好;而且「修好了」不能只看旗標,要看換手成功率真的回升。</a:t>
                       </a:r>
                     </a:p>
                   </a:txBody>
@@ -13951,6 +13927,24 @@
                     </a:solidFill>
                   </a:tcPr>
                 </a:tc>
+                <a:tc hMerge="1">
+                  <a:txBody>
+                    <a:bodyPr/>
+                    <a:lstStyle/>
+                    <a:p/>
+                  </a:txBody>
+                  <a:tcPr/>
+                </a:tc>
+                <a:tc hMerge="1">
+                  <a:txBody>
+                    <a:bodyPr/>
+                    <a:lstStyle/>
+                    <a:p/>
+                  </a:txBody>
+                  <a:tcPr/>
+                </a:tc>
+              </a:tr>
+              <a:tr h="450000">
                 <a:tc>
                   <a:txBody>
                     <a:bodyPr/>
@@ -13964,39 +13958,13 @@
                           <a:latin typeface="Arial"/>
                           <a:ea typeface="Microsoft JhengHei"/>
                         </a:rPr>
-                        <a:t>連 Handover Request 都送不出去 = 傳輸層問題,不是鄰居本身壞掉</a:t>
+                        <a:t>換手失敗集中在「準備階段逾時」</a:t>
                       </a:r>
                     </a:p>
                   </a:txBody>
                   <a:tcPr anchor="ctr" marL="45720" marR="45720" marT="18288" marB="18288">
                     <a:solidFill>
                       <a:srgbClr val="FFFFFF"/>
-                    </a:solidFill>
-                  </a:tcPr>
-                </a:tc>
-              </a:tr>
-              <a:tr h="594360">
-                <a:tc>
-                  <a:txBody>
-                    <a:bodyPr wrap="square"/>
-                    <a:lstStyle/>
-                    <a:p>
-                      <a:pPr algn="l"/>
-                      <a:r>
-                        <a:rPr sz="800" b="0">
-                          <a:solidFill>
-                            <a:srgbClr val="222A30"/>
-                          </a:solidFill>
-                          <a:latin typeface="Arial"/>
-                          <a:ea typeface="Microsoft JhengHei"/>
-                        </a:rPr>
-                        <a:t>xnX2Established = false / true</a:t>
-                      </a:r>
-                    </a:p>
-                  </a:txBody>
-                  <a:tcPr anchor="ctr" marL="45720" marR="45720" marT="18288" marB="18288">
-                    <a:solidFill>
-                      <a:srgbClr val="EFF5F8"/>
                     </a:solidFill>
                   </a:tcPr>
                 </a:tc>
@@ -14013,13 +13981,13 @@
                           <a:latin typeface="Arial"/>
                           <a:ea typeface="Microsoft JhengHei"/>
                         </a:rPr>
-                        <a:t>旗標 false 造病、CASE=q6_restore 改回 true 代表管理面把 Xn 接好</a:t>
+                        <a:t>關係留著,只把「Xn 傳輸已建立」改成否</a:t>
                       </a:r>
                     </a:p>
                   </a:txBody>
                   <a:tcPr anchor="ctr" marL="45720" marR="45720" marT="18288" marB="18288">
                     <a:solidFill>
-                      <a:srgbClr val="EFF5F8"/>
+                      <a:srgbClr val="FFFFFF"/>
                     </a:solidFill>
                   </a:tcPr>
                 </a:tc>
@@ -14036,33 +14004,7 @@
                           <a:latin typeface="Arial"/>
                           <a:ea typeface="Microsoft JhengHei"/>
                         </a:rPr>
-                        <a:t>旗標只是止血與解除的觸發訊號,本身不能當恢復證據</a:t>
-                      </a:r>
-                    </a:p>
-                  </a:txBody>
-                  <a:tcPr anchor="ctr" marL="45720" marR="45720" marT="18288" marB="18288">
-                    <a:solidFill>
-                      <a:srgbClr val="EFF5F8"/>
-                    </a:solidFill>
-                  </a:tcPr>
-                </a:tc>
-              </a:tr>
-              <a:tr h="594360">
-                <a:tc>
-                  <a:txBody>
-                    <a:bodyPr wrap="square"/>
-                    <a:lstStyle/>
-                    <a:p>
-                      <a:pPr algn="l"/>
-                      <a:r>
-                        <a:rPr sz="800" b="0">
-                          <a:solidFill>
-                            <a:srgbClr val="222A30"/>
-                          </a:solidFill>
-                          <a:latin typeface="Arial"/>
-                          <a:ea typeface="Microsoft JhengHei"/>
-                        </a:rPr>
-                        <a:t>succ_last50 ≥ 0.9</a:t>
+                        <a:t>連換手請求都送不出去 = 傳輸層問題,不是鄰居本身壞(與第 7 題的分野)</a:t>
                       </a:r>
                     </a:p>
                   </a:txBody>
@@ -14072,6 +14014,8 @@
                     </a:solidFill>
                   </a:tcPr>
                 </a:tc>
+              </a:tr>
+              <a:tr h="450000">
                 <a:tc>
                   <a:txBody>
                     <a:bodyPr/>
@@ -14085,13 +14029,13 @@
                           <a:latin typeface="Arial"/>
                           <a:ea typeface="Microsoft JhengHei"/>
                         </a:rPr>
-                        <a:t>修好後 A3 恢復,成功率由真實換手一筆一筆累積起來</a:t>
+                        <a:t>Xn 傳輸狀態:未建立 → 已建立</a:t>
                       </a:r>
                     </a:p>
                   </a:txBody>
                   <a:tcPr anchor="ctr" marL="45720" marR="45720" marT="18288" marB="18288">
                     <a:solidFill>
-                      <a:srgbClr val="FFFFFF"/>
+                      <a:srgbClr val="EFF5F8"/>
                     </a:solidFill>
                   </a:tcPr>
                 </a:tc>
@@ -14108,7 +14052,101 @@
                           <a:latin typeface="Arial"/>
                           <a:ea typeface="Microsoft JhengHei"/>
                         </a:rPr>
-                        <a:t>行為回升才算恢復;UE 靜止不動造成的「零失敗」不算數</a:t>
+                        <a:t>佈病改成未建立;劇本在你們止血後自己改回已建立(免人工)</a:t>
+                      </a:r>
+                    </a:p>
+                  </a:txBody>
+                  <a:tcPr anchor="ctr" marL="45720" marR="45720" marT="18288" marB="18288">
+                    <a:solidFill>
+                      <a:srgbClr val="EFF5F8"/>
+                    </a:solidFill>
+                  </a:tcPr>
+                </a:tc>
+                <a:tc>
+                  <a:txBody>
+                    <a:bodyPr/>
+                    <a:lstStyle/>
+                    <a:p>
+                      <a:r>
+                        <a:rPr sz="800" b="0">
+                          <a:solidFill>
+                            <a:srgbClr val="222A30"/>
+                          </a:solidFill>
+                          <a:latin typeface="Arial"/>
+                          <a:ea typeface="Microsoft JhengHei"/>
+                        </a:rPr>
+                        <a:t>這只是止血與解除的觸發訊號,本身不能當恢復的證據</a:t>
+                      </a:r>
+                    </a:p>
+                  </a:txBody>
+                  <a:tcPr anchor="ctr" marL="45720" marR="45720" marT="18288" marB="18288">
+                    <a:solidFill>
+                      <a:srgbClr val="EFF5F8"/>
+                    </a:solidFill>
+                  </a:tcPr>
+                </a:tc>
+              </a:tr>
+              <a:tr h="450000">
+                <a:tc>
+                  <a:txBody>
+                    <a:bodyPr/>
+                    <a:lstStyle/>
+                    <a:p>
+                      <a:r>
+                        <a:rPr sz="800" b="0">
+                          <a:solidFill>
+                            <a:srgbClr val="222A30"/>
+                          </a:solidFill>
+                          <a:latin typeface="Arial"/>
+                          <a:ea typeface="Microsoft JhengHei"/>
+                        </a:rPr>
+                        <a:t>換手成功率回到 0.9 以上</a:t>
+                      </a:r>
+                    </a:p>
+                  </a:txBody>
+                  <a:tcPr anchor="ctr" marL="45720" marR="45720" marT="18288" marB="18288">
+                    <a:solidFill>
+                      <a:srgbClr val="FFFFFF"/>
+                    </a:solidFill>
+                  </a:tcPr>
+                </a:tc>
+                <a:tc>
+                  <a:txBody>
+                    <a:bodyPr/>
+                    <a:lstStyle/>
+                    <a:p>
+                      <a:r>
+                        <a:rPr sz="800" b="0">
+                          <a:solidFill>
+                            <a:srgbClr val="222A30"/>
+                          </a:solidFill>
+                          <a:latin typeface="Arial"/>
+                          <a:ea typeface="Microsoft JhengHei"/>
+                        </a:rPr>
+                        <a:t>修好後 A3 恢復,成功率靠真實換手一筆筆把舊失敗沖出滾動窗</a:t>
+                      </a:r>
+                    </a:p>
+                  </a:txBody>
+                  <a:tcPr anchor="ctr" marL="45720" marR="45720" marT="18288" marB="18288">
+                    <a:solidFill>
+                      <a:srgbClr val="FFFFFF"/>
+                    </a:solidFill>
+                  </a:tcPr>
+                </a:tc>
+                <a:tc>
+                  <a:txBody>
+                    <a:bodyPr/>
+                    <a:lstStyle/>
+                    <a:p>
+                      <a:r>
+                        <a:rPr sz="800" b="0">
+                          <a:solidFill>
+                            <a:srgbClr val="222A30"/>
+                          </a:solidFill>
+                          <a:latin typeface="Arial"/>
+                          <a:ea typeface="Microsoft JhengHei"/>
+                        </a:rPr>
+                        <a:t>行為回升才算恢復;UE 靜止造成的「零失敗」不算數</a:t>
                       </a:r>
                     </a:p>
                   </a:txBody>
@@ -14184,69 +14222,86 @@
           <a:p>
             <a:pPr>
               <a:spcAft>
-                <a:spcPts val="300"/>
+                <a:spcPts val="220"/>
               </a:spcAft>
             </a:pPr>
             <a:r>
-              <a:rPr sz="800" b="0">
+              <a:rPr sz="750" b="0">
                 <a:solidFill>
                   <a:srgbClr val="222A30"/>
                 </a:solidFill>
                 <a:latin typeface="Arial"/>
                 <a:ea typeface="Microsoft JhengHei"/>
               </a:rPr>
-              <a:t>① 設 xnBlocklist:關係留著,但禁止拿它當換手目標(止血,不拆線)</a:t>
+              <a:t>① 失敗集中在準備階段 → 判斷是傳輸層問題,不是鄰居壞掉</a:t>
             </a:r>
           </a:p>
           <a:p>
             <a:pPr>
               <a:spcAft>
-                <a:spcPts val="300"/>
+                <a:spcPts val="220"/>
               </a:spcAft>
             </a:pPr>
             <a:r>
-              <a:rPr sz="800" b="0">
+              <a:rPr sz="750" b="0">
                 <a:solidFill>
                   <a:srgbClr val="222A30"/>
                 </a:solidFill>
                 <a:latin typeface="Arial"/>
                 <a:ea typeface="Microsoft JhengHei"/>
               </a:rPr>
-              <a:t>② Xn 是管理面的事,xApp 修不了 → 送 SMO 請人修</a:t>
+              <a:t>② 設 xnBlocklist:關係留著,但禁止拿它當換手目標(止血,不拆線)</a:t>
             </a:r>
           </a:p>
           <a:p>
             <a:pPr>
               <a:spcAft>
-                <a:spcPts val="300"/>
+                <a:spcPts val="220"/>
               </a:spcAft>
             </a:pPr>
             <a:r>
-              <a:rPr sz="800" b="0">
+              <a:rPr sz="750" b="0">
                 <a:solidFill>
                   <a:srgbClr val="222A30"/>
                 </a:solidFill>
                 <a:latin typeface="Arial"/>
                 <a:ea typeface="Microsoft JhengHei"/>
               </a:rPr>
-              <a:t>③ 看到 Xn 恢復就解除封鎖</a:t>
+              <a:t>③ Xn 屬管理面職權,xApp 修不了 → 通報請人處理</a:t>
             </a:r>
           </a:p>
           <a:p>
             <a:pPr>
               <a:spcAft>
-                <a:spcPts val="300"/>
+                <a:spcPts val="220"/>
               </a:spcAft>
             </a:pPr>
             <a:r>
-              <a:rPr sz="800" b="0">
+              <a:rPr sz="750" b="0">
                 <a:solidFill>
                   <a:srgbClr val="222A30"/>
                 </a:solidFill>
                 <a:latin typeface="Arial"/>
                 <a:ea typeface="Microsoft JhengHei"/>
               </a:rPr>
-              <a:t>④ 用「換手成功率回升」證明真的好了 —— 旗標本身不算證據</a:t>
+              <a:t>④ 觀測到 Xn 恢復 → 解除封鎖</a:t>
+            </a:r>
+          </a:p>
+          <a:p>
+            <a:pPr>
+              <a:spcAft>
+                <a:spcPts val="220"/>
+              </a:spcAft>
+            </a:pPr>
+            <a:r>
+              <a:rPr sz="750" b="0">
+                <a:solidFill>
+                  <a:srgbClr val="222A30"/>
+                </a:solidFill>
+                <a:latin typeface="Arial"/>
+                <a:ea typeface="Microsoft JhengHei"/>
+              </a:rPr>
+              <a:t>⑤ 用「換手成功率回升」證明真的好了 —— 旗標本身不算證據</a:t>
             </a:r>
           </a:p>
           <a:p>
@@ -14277,7 +14332,7 @@
                 <a:latin typeface="Arial"/>
                 <a:ea typeface="Microsoft JhengHei"/>
               </a:rPr>
-              <a:t>預計操作結果:止血 → 等修復 → 行為證明恢復(三段)</a:t>
+              <a:t>預計操作結果:止血 → 通報請人修 → 修好後自行解除,並用行為確認</a:t>
             </a:r>
           </a:p>
         </p:txBody>
@@ -14352,7 +14407,7 @@
                 <a:latin typeface="Arial"/>
                 <a:ea typeface="Microsoft JhengHei"/>
               </a:rPr>
-              <a:t>SET(att 5→0)→ CLEAR → 17:07:10 RECOVERED succ=0.9</a:t>
+              <a:t>設旗標止血(換手嘗試 5→0)→ 解除 → 17:07:10 判定恢復(成功率 0.9)</a:t>
             </a:r>
           </a:p>
         </p:txBody>
@@ -14365,8 +14420,8 @@
         </p:nvSpPr>
         <p:spPr>
           <a:xfrm>
-            <a:off x="320040" y="4060000"/>
-            <a:ext cx="5577840" cy="800000"/>
+            <a:off x="320040" y="3990000"/>
+            <a:ext cx="5577840" cy="890000"/>
           </a:xfrm>
           <a:prstGeom prst="roundRect">
             <a:avLst/>
@@ -14408,14 +14463,14 @@
               </a:spcAft>
             </a:pPr>
             <a:r>
-              <a:rPr sz="750" b="0">
+              <a:rPr sz="650" b="0">
                 <a:solidFill>
                   <a:srgbClr val="FFFFFF"/>
                 </a:solidFill>
                 <a:latin typeface="Arial"/>
                 <a:ea typeface="Microsoft JhengHei"/>
               </a:rPr>
-              <a:t>關係、量測、UE 全部正常,只把 xn_x2_established 改成 false。換手 executor 一看 Xn 沒通,就在準備階段回 TXnRELOCprepExpiry —— 連 Handover Request 都送不出去,這正是與第 7 題(執行階段 RA 失敗)的鑑別線。修復用 CASE=q6_restore 把旗標改回 true,代表管理面已把 Xn 接好。</a:t>
+              <a:t>場景長這樣:s07(pci 150,UE 的服務 cell)、n30(pci 160,健康對照)、n33(pci 175)三顆,UE 在 s07 周邊活動。佈病只改一個欄位:s07→n33 這條關係的「Xn 傳輸已建立」改成否。換手執行器一看沒有 Xn,就在準備階段回逾時 —— 連 Handover Request 都送不出去,這是與第 7 題(送得出去卻接不進)的鑑別線。修復由劇本自己完成:等到觀測到 xApp 設上 xnBlocklist,再等 300 秒(代表維運排程時間),就把 Xn 改回已建立,全程不需要人介入。</a:t>
             </a:r>
           </a:p>
         </p:txBody>
@@ -15108,8 +15163,8 @@
         </p:nvSpPr>
         <p:spPr>
           <a:xfrm>
-            <a:off x="320040" y="4060000"/>
-            <a:ext cx="5577840" cy="800000"/>
+            <a:off x="320040" y="3990000"/>
+            <a:ext cx="5577840" cy="890000"/>
           </a:xfrm>
           <a:prstGeom prst="roundRect">
             <a:avLst/>
@@ -15151,14 +15206,14 @@
               </a:spcAft>
             </a:pPr>
             <a:r>
-              <a:rPr sz="700" b="0">
+              <a:rPr sz="640" b="0">
                 <a:solidFill>
                   <a:srgbClr val="FFFFFF"/>
                 </a:solidFill>
                 <a:latin typeface="Arial"/>
                 <a:ea typeface="Microsoft JhengHei"/>
               </a:rPr>
-              <a:t>這題不是改旗標,是直接注入結果:在 tmp/ho_force_fail.txt 寫一行「n30_c0,RandomAccessProblem」,換手執行器每次換手都讀這個檔,目標中名單就讓這次換手在執行階段失敗、原因填「接入失敗」。為什麼不用物理做:訊號模型算得出 RSRP/SINR,但隨機接取壞掉屬於接取程序層級,模型裡沒有 —— 與其假造成因,不如忠實重現結果。為什麼用檔案不用環境變數:改 env 要重啟容器,會打斷 xApp 長達兩小時的探測計時,而且 env 曾經跨場景撞名污染到別題。</a:t>
+              <a:t>場景長這樣:src(pci 20)與 nbr(pci 30)相距 300 公尺,alt(pci 40)在西側 300 公尺當備援;5 台 UE 在 src-nbr 之間穿越,注入目標是 nbr。這題不是改旗標,是直接注入結果:在 tmp/ho_force_fail.txt 寫一行「n30_c0,RandomAccessProblem」,換手執行器每次換手都讀這個檔,目標中名單就讓這次換手在執行階段失敗、原因填「接入失敗」。為什麼不用物理做:訊號模型算得出 RSRP/SINR,但隨機接取壞掉屬於接取程序層級,模型裡沒有 —— 與其假造成因,不如忠實重現結果。為什麼用檔案不用環境變數:改 env 要重啟容器,會打斷 xApp 長達兩小時的探測計時,而且 env 曾經跨場景撞名污染到別題。</a:t>
             </a:r>
           </a:p>
         </p:txBody>
@@ -15715,7 +15770,7 @@
                 <a:latin typeface="Arial"/>
                 <a:ea typeface="Microsoft JhengHei"/>
               </a:rPr>
-              <a:t>④ 對每顆 PCI 解出全域識別碼 → 送 ADD 請 gNB 建關係</a:t>
+              <a:t>④ 對每顆 PCI 解出全域識別碼 → 請基地台建立關係</a:t>
             </a:r>
           </a:p>
           <a:p>
@@ -15975,7 +16030,7 @@
                 <a:latin typeface="Arial"/>
                 <a:ea typeface="Microsoft JhengHei"/>
               </a:rPr>
-              <a:t>目前可以模擬的場景|第九題 NRT 容量</a:t>
+              <a:t>目前可以模擬的場景|第九題 鄰區表容量</a:t>
             </a:r>
           </a:p>
         </p:txBody>
@@ -16424,7 +16479,7 @@
                 <a:latin typeface="Arial"/>
                 <a:ea typeface="Microsoft JhengHei"/>
               </a:rPr>
-              <a:t>② 從表裡挑最冷的(沒量測也沒換手)最多 3 條,送 REMOVE 試著騰位</a:t>
+              <a:t>② 從表裡挑最冷的(沒量測也沒換手)最多 3 條,試著刪掉騰位</a:t>
             </a:r>
           </a:p>
           <a:p>
@@ -16441,7 +16496,7 @@
                 <a:latin typeface="Arial"/>
                 <a:ea typeface="Microsoft JhengHei"/>
               </a:rPr>
-              <a:t>③ 刪成功 → 空出位子 → 送 ADD 把新鄰居加進來</a:t>
+              <a:t>③ 刪成功 → 空出位子 → 把新鄰居加進來</a:t>
             </a:r>
           </a:p>
           <a:p>
@@ -16458,7 +16513,7 @@
                 <a:latin typeface="Arial"/>
                 <a:ea typeface="Microsoft JhengHei"/>
               </a:rPr>
-              <a:t>④ 被拒絕(受保護)→ 不硬刪、不重試,改送 SMO 請人處理</a:t>
+              <a:t>④ 被拒絕(受保護)→ 不硬刪、不重試,改通報請人處理</a:t>
             </a:r>
           </a:p>
           <a:p>
@@ -16475,7 +16530,7 @@
                 <a:latin typeface="Arial"/>
                 <a:ea typeface="Microsoft JhengHei"/>
               </a:rPr>
-              <a:t>⑤ 這段期間,其他負責「發現新鄰居」的分支看到這顆滿載會自己不送 ADD,等騰位完成</a:t>
+              <a:t>⑤ 這段期間,其他負責「發現新鄰居」的判斷看到這顆滿載會自己不動作,等騰位完成</a:t>
             </a:r>
           </a:p>
           <a:p>
@@ -17944,7 +17999,7 @@
                 <a:latin typeface="Arial"/>
                 <a:ea typeface="Microsoft JhengHei"/>
               </a:rPr>
-              <a:t>④ 送 REMOVE 回收這條關係</a:t>
+              <a:t>④ 送出刪除請求,回收這條關係</a:t>
             </a:r>
           </a:p>
           <a:p>
@@ -17961,7 +18016,7 @@
                 <a:latin typeface="Arial"/>
                 <a:ea typeface="Microsoft JhengHei"/>
               </a:rPr>
-              <a:t>⑤ 被回絕(受保護)→ 記進「不再重試」名單 + 送 SMO 請人處理,絕不重複下手</a:t>
+              <a:t>⑤ 被回絕(受保護)→ 記進「不再重試」名單 + 通報請人處理,絕不重複下手</a:t>
             </a:r>
           </a:p>
           <a:p>
@@ -18827,7 +18882,7 @@
                 <a:latin typeface="Arial"/>
                 <a:ea typeface="Microsoft JhengHei"/>
               </a:rPr>
-              <a:t>兩種都判對:沒依據的被解開、有依據的沒被動;hoValidated 欄位今日修好後,誤判成因也排除了</a:t>
+              <a:t>兩種都判對:沒依據的被解開、有依據的沒被動;「曾成功服務過」這個欄位今日修好後,誤判成因也排除了</a:t>
             </a:r>
           </a:p>
         </p:txBody>
@@ -19703,7 +19758,7 @@
                           <a:latin typeface="Arial"/>
                           <a:ea typeface="Microsoft JhengHei"/>
                         </a:rPr>
-                        <a:t>解析 CGI 後補建關係,RLF 歸零</a:t>
+                        <a:t>解出全域識別碼後補建關係,掉線歸零</a:t>
                       </a:r>
                     </a:p>
                   </a:txBody>
@@ -19801,7 +19856,7 @@
                           <a:latin typeface="Arial"/>
                           <a:ea typeface="Microsoft JhengHei"/>
                         </a:rPr>
-                        <a:t>同樣缺關係,但 UE 還沒掉線 —— 只能從量測面發現(落後 serving ≤6dB 卻查無)</a:t>
+                        <a:t>同樣缺關係,但 UE 還沒掉線 —— 只能從量測面發現(落後 服務訊號 ≤6dB 卻查無)</a:t>
                       </a:r>
                     </a:p>
                   </a:txBody>
@@ -19923,7 +19978,7 @@
                           <a:latin typeface="Arial"/>
                           <a:ea typeface="Microsoft JhengHei"/>
                         </a:rPr>
-                        <a:t>UE 在覆蓋極邊緣、旁邊有明顯更好的 cell 卻不在 NRT;該處人少,樣本天生稀疏</a:t>
+                        <a:t>UE 在覆蓋極邊緣、旁邊有明顯更好的 cell 卻不在鄰區表;該處人少,樣本天生稀疏</a:t>
                       </a:r>
                     </a:p>
                   </a:txBody>
@@ -19947,7 +20002,7 @@
                           <a:latin typeface="Arial"/>
                           <a:ea typeface="Microsoft JhengHei"/>
                         </a:rPr>
-                        <a:t>xApp 改看「比 serving 好 ≥10dB 且連 3 窗」而非樣本量 → 解析 CGI → 請 gNB 補關係</a:t>
+                        <a:t>xApp 改看「比服務 cell 好 ≥10dB 且連 3 窗」而非樣本量 → 解出識別碼 → 請基地台補關係</a:t>
                       </a:r>
                     </a:p>
                   </a:txBody>
@@ -20045,7 +20100,7 @@
                           <a:latin typeface="Arial"/>
                           <a:ea typeface="Microsoft JhengHei"/>
                         </a:rPr>
-                        <a:t>全新 NCGI 出現,任何關係都不指向它</a:t>
+                        <a:t>出現一顆全新的 cell,任何關係都不指向它</a:t>
                       </a:r>
                     </a:p>
                   </a:txBody>
@@ -20167,7 +20222,7 @@
                           <a:latin typeface="Arial"/>
                           <a:ea typeface="Microsoft JhengHei"/>
                         </a:rPr>
-                        <a:t>兩顆不同 NCGI 共用同一 PCI,按 PCI 換手必賭錯</a:t>
+                        <a:t>兩顆不同的 cell 共用同一 PCI,按 PCI 換手必賭錯</a:t>
                       </a:r>
                     </a:p>
                   </a:txBody>
@@ -20191,7 +20246,7 @@
                           <a:latin typeface="Arial"/>
                           <a:ea typeface="Microsoft JhengHei"/>
                         </a:rPr>
-                        <a:t>v10 正解:以 CGI 群組換手繞過歧義 + SMO 重規劃</a:t>
+                        <a:t>v10 正解:用全域識別碼做群組換手繞過歧義 + 通報重新規劃</a:t>
                       </a:r>
                     </a:p>
                   </a:txBody>
@@ -20435,7 +20490,7 @@
                           <a:latin typeface="Arial"/>
                           <a:ea typeface="Microsoft JhengHei"/>
                         </a:rPr>
-                        <a:t>成對旗標封鎖 + L4 自動恢復探測</a:t>
+                        <a:t>成對旗標封鎖 + 定期回頭探測(不永久封鎖)</a:t>
                       </a:r>
                     </a:p>
                   </a:txBody>
@@ -20557,7 +20612,7 @@
                           <a:latin typeface="Arial"/>
                           <a:ea typeface="Microsoft JhengHei"/>
                         </a:rPr>
-                        <a:t>先補頻率關係,才輪得到 cell 級 ADD</a:t>
+                        <a:t>先補頻率層關係,才輪得到個別 cell 的關係</a:t>
                       </a:r>
                     </a:p>
                   </a:txBody>
@@ -20631,7 +20686,7 @@
                           <a:latin typeface="Arial"/>
                           <a:ea typeface="Microsoft JhengHei"/>
                         </a:rPr>
-                        <a:t>NRT 容量</a:t>
+                        <a:t>鄰區表容量</a:t>
                       </a:r>
                     </a:p>
                   </a:txBody>
@@ -20655,7 +20710,7 @@
                           <a:latin typeface="Arial"/>
                           <a:ea typeface="Microsoft JhengHei"/>
                         </a:rPr>
-                        <a:t>NRT 滿載,新關係加不進來</a:t>
+                        <a:t>鄰區表滿載,新關係加不進來</a:t>
                       </a:r>
                     </a:p>
                   </a:txBody>
@@ -20801,7 +20856,7 @@
                           <a:latin typeface="Arial"/>
                           <a:ea typeface="Microsoft JhengHei"/>
                         </a:rPr>
-                        <a:t>REMOVE+ADD 原子重指到正確 PCI</a:t>
+                        <a:t>刪舊條目+建新條目,同一步重指到正確 PCI</a:t>
                       </a:r>
                     </a:p>
                   </a:txBody>
@@ -21424,7 +21479,7 @@
                           <a:latin typeface="Arial"/>
                           <a:ea typeface="Microsoft JhengHei"/>
                         </a:rPr>
-                        <a:t>A3 想換手卻被 NRT 閘擋下 → 訊號續弱到 T310 逾時 → 宣告 RLF → 就近重建到對向 cell</a:t>
+                        <a:t>A3 想換手卻被鄰區表的閘擋下 → 訊號續弱到 T310 逾時 → 宣告 RLF → 就近重建到對向 cell</a:t>
                       </a:r>
                     </a:p>
                   </a:txBody>
@@ -21473,7 +21528,7 @@
                           <a:latin typeface="Arial"/>
                           <a:ea typeface="Microsoft JhengHei"/>
                         </a:rPr>
-                        <a:t>bySourceCell 來源歸屬</a:t>
+                        <a:t>來源歸屬(每筆量測記下當下的服務 cell)</a:t>
                       </a:r>
                     </a:p>
                   </a:txBody>
@@ -21496,7 +21551,7 @@
                           <a:latin typeface="Arial"/>
                           <a:ea typeface="Microsoft JhengHei"/>
                         </a:rPr>
-                        <a:t>每筆回報記下「當下」的 serving cell(08/26 改為量測當時,不是查詢當下)</a:t>
+                        <a:t>每筆回報記下「當下」的 服務 cell(08/26 改為量測當時,不是查詢當下)</a:t>
                       </a:r>
                     </a:p>
                   </a:txBody>
@@ -21519,7 +21574,7 @@
                           <a:latin typeface="Arial"/>
                           <a:ea typeface="Microsoft JhengHei"/>
                         </a:rPr>
-                        <a:t>缺鄰要補在「來源→目標」這條有向邊上;沒有來源歸屬只知道有人掉線,不知道該對哪顆 cell 下 ADD</a:t>
+                        <a:t>缺鄰要補在「來源→目標」這條有向邊上;沒有來源歸屬只知道有人掉線,不知道該對哪顆 cell 補關係</a:t>
                       </a:r>
                     </a:p>
                   </a:txBody>
@@ -21545,7 +21600,7 @@
                           <a:latin typeface="Arial"/>
                           <a:ea typeface="Microsoft JhengHei"/>
                         </a:rPr>
-                        <a:t>NRT 查無該關係</a:t>
+                        <a:t>鄰區表查無該關係</a:t>
                       </a:r>
                     </a:p>
                   </a:txBody>
@@ -21712,7 +21767,7 @@
                 <a:latin typeface="Arial"/>
                 <a:ea typeface="Microsoft JhengHei"/>
               </a:rPr>
-              <a:t>③ REPORTCGI 請 gNB 叫 UE 讀系統資訊,解出全域識別 CGI,唯一才採信</a:t>
+              <a:t>③ 請基地台叫 UE 去讀目標的系統資訊、解出全域識別碼,唯一才採信</a:t>
             </a:r>
           </a:p>
           <a:p>
@@ -21729,7 +21784,7 @@
                 <a:latin typeface="Arial"/>
                 <a:ea typeface="Microsoft JhengHei"/>
               </a:rPr>
-              <a:t>④ 送 ADD 請 gNB 在「來源 cell」補這條關係(反向由對方 gNB 自建)</a:t>
+              <a:t>④ 請基地台在「來源 cell」補這條關係(反向由對方基地台自建)</a:t>
             </a:r>
           </a:p>
           <a:p>
@@ -21746,7 +21801,7 @@
                 <a:latin typeface="Arial"/>
                 <a:ea typeface="Microsoft JhengHei"/>
               </a:rPr>
-              <a:t>⑤ 等 NRT 回讀確認 → A3 接手換手、掉線重建歸零 = 行為確認</a:t>
+              <a:t>⑤ 等鄰區表回讀確認 → A3 接手換手、掉線重建歸零 = 行為確認</a:t>
             </a:r>
           </a:p>
           <a:p>
@@ -21852,7 +21907,7 @@
                 <a:latin typeface="Arial"/>
                 <a:ea typeface="Microsoft JhengHei"/>
               </a:rPr>
-              <a:t>乾淨重跑:03:24:36 ADD → A3 SUCC 4/0 → RLF 歸零</a:t>
+              <a:t>乾淨重跑:03:24:36 補上關係 → A3 換手成功 4 次 0 失敗 → 掉線歸零</a:t>
             </a:r>
           </a:p>
         </p:txBody>
@@ -21865,8 +21920,8 @@
         </p:nvSpPr>
         <p:spPr>
           <a:xfrm>
-            <a:off x="320040" y="4060000"/>
-            <a:ext cx="5577840" cy="800000"/>
+            <a:off x="320040" y="3990000"/>
+            <a:ext cx="5577840" cy="890000"/>
           </a:xfrm>
           <a:prstGeom prst="roundRect">
             <a:avLst/>
@@ -21908,14 +21963,14 @@
               </a:spcAft>
             </a:pPr>
             <a:r>
-              <a:rPr sz="750" b="0">
+              <a:rPr sz="640" b="0">
                 <a:solidFill>
                   <a:srgbClr val="FFFFFF"/>
                 </a:solidFill>
                 <a:latin typeface="Arial"/>
                 <a:ea typeface="Microsoft JhengHei"/>
               </a:rPr>
-              <a:t>佈病只做一件事:把 NRT 裡 src→nbr 那一條刪掉。關鍵是 sim 的 A3 有 NRT 閘(ANR_REQUIRE_NRT)—— 表上沒有這條關係就不准換手,UE 只能一路撐到訊號低於 Qout、T310 逾時宣告 RLF,再就近重建到對向 cell。所以「掉線重建」不是另外注入的,是缺關係的必然結果,xApp 才有重建統計可以反推缺了哪一條。</a:t>
+              <a:t>場景長這樣:src(pci 20)與 nbr(pci 30)相距 300 公尺同頻,5 台 UE 以約 40km/h 在兩者之間來回穿越邊界。佈病只做一件事:把鄰區表裡 src→nbr 那一條刪掉。關鍵是模擬器的 A3 有一道「鄰區表閘門」—— 表上沒有這條關係就不准換手,UE 只能一路撐到訊號低於掉線門檻、T310 逾時宣告 RLF,再就近重建到對向 cell。所以「掉線重建」不是另外注入的,是缺關係的必然結果,xApp 才有重建統計可以反推缺了哪一條。</a:t>
             </a:r>
           </a:p>
         </p:txBody>
@@ -22237,7 +22292,7 @@
                           <a:latin typeface="Arial"/>
                           <a:ea typeface="Microsoft JhengHei"/>
                         </a:rPr>
-                        <a:t>落後 serving ≤ 6dB(換手等效門檻內)</a:t>
+                        <a:t>比服務 cell 弱不到 6dB(已達該換手的程度)</a:t>
                       </a:r>
                     </a:p>
                   </a:txBody>
@@ -22260,7 +22315,7 @@
                           <a:latin typeface="Arial"/>
                           <a:ea typeface="Microsoft JhengHei"/>
                         </a:rPr>
-                        <a:t>UE 位置由 PathSolver 逐點實測挑出:鄰區逼近 serving 但 SINR 仍 ≥ −2,不會掉線</a:t>
+                        <a:t>UE 位置由 PathSolver 逐點實測挑出:鄰區訊號逼近服務 cell 但 SINR 仍 ≥ −2,不會掉線</a:t>
                       </a:r>
                     </a:p>
                   </a:txBody>
@@ -22355,7 +22410,7 @@
                           <a:latin typeface="Arial"/>
                           <a:ea typeface="Microsoft JhengHei"/>
                         </a:rPr>
-                        <a:t>單一窗口撞到不算數,要連續多窗才排除雜訊(卷面 L4 持續性要求)</a:t>
+                        <a:t>單一窗口撞到不算數,要連續多窗才排除雜訊(卷面的持續性要求)</a:t>
                       </a:r>
                     </a:p>
                   </a:txBody>
@@ -22381,7 +22436,7 @@
                           <a:latin typeface="Arial"/>
                           <a:ea typeface="Microsoft JhengHei"/>
                         </a:rPr>
-                        <a:t>NRT 查無;既有關係要否決須有具名失敗</a:t>
+                        <a:t>鄰區表查無;既有關係要否決須有具名失敗</a:t>
                       </a:r>
                     </a:p>
                   </a:txBody>
@@ -22514,7 +22569,7 @@
                 <a:latin typeface="Arial"/>
                 <a:ea typeface="Microsoft JhengHei"/>
               </a:rPr>
-              <a:t>① 量測面掃描:哪顆 cell 落後 serving ≤6dB 又夠強夠久(不必等掉線)</a:t>
+              <a:t>① 量測面掃描:哪顆 cell 落後 服務訊號 ≤6dB 又夠強夠久(不必等掉線)</a:t>
             </a:r>
           </a:p>
           <a:p>
@@ -22548,7 +22603,7 @@
                 <a:latin typeface="Arial"/>
                 <a:ea typeface="Microsoft JhengHei"/>
               </a:rPr>
-              <a:t>③ 開著 → 解析 CGI(抽樣 5 次一致)→ 送 ADD 請 gNB 建關係</a:t>
+              <a:t>③ 開著 → 解出全域識別碼(抽樣 5 次一致)→ 請基地台建立關係</a:t>
             </a:r>
           </a:p>
           <a:p>
@@ -22565,7 +22620,7 @@
                 <a:latin typeface="Arial"/>
                 <a:ea typeface="Microsoft JhengHei"/>
               </a:rPr>
-              <a:t>④ 關著 → 只偵測不寫入,改送 SMO 請管理面建立(停用 ≠ 禁止改 NRT)</a:t>
+              <a:t>④ 關著 → 只偵測不寫入,改通報請管理面建立(停用 ≠ 禁止改鄰區表)</a:t>
             </a:r>
           </a:p>
           <a:p>
@@ -22701,8 +22756,8 @@
         </p:nvSpPr>
         <p:spPr>
           <a:xfrm>
-            <a:off x="320040" y="4060000"/>
-            <a:ext cx="5577840" cy="800000"/>
+            <a:off x="320040" y="3990000"/>
+            <a:ext cx="5577840" cy="890000"/>
           </a:xfrm>
           <a:prstGeom prst="roundRect">
             <a:avLst/>
@@ -22744,14 +22799,14 @@
               </a:spcAft>
             </a:pPr>
             <a:r>
-              <a:rPr sz="750" b="0">
+              <a:rPr sz="640" b="0">
                 <a:solidFill>
                   <a:srgbClr val="FFFFFF"/>
                 </a:solidFill>
                 <a:latin typeface="Arial"/>
                 <a:ea typeface="Microsoft JhengHei"/>
               </a:rPr>
-              <a:t>同樣是剪掉關係,難的是位置:要讓鄰區訊號逼近 serving(進入換手等效門檻)卻又不能讓 UE 掉線,否則就退化成第 1 題。用 PathSolver 逐點實測挑出 gap≈0.1dB、SINR≥−2 的窄窗,再讓 5 台 UE 沿邊界來回維持樣本。自由空間公式在這裡估不準(兩天線主瓣重疊同一走廊),一定要實測。</a:t>
+              <a:t>場景長這樣:s25(pci 133)在中間,n35(pci 135)在東側 400 公尺、n37(pci 137)在西側 300 公尺;UE 在 s25 東側的窄帶內活動。同樣是剪掉關係,難的是位置:要讓鄰區訊號逼近 服務訊號(進入換手等效門檻)卻又不能讓 UE 掉線,否則就退化成第 1 題。用 PathSolver 逐點實測挑出 gap≈0.1dB、SINR≥−2 的窄窗,再讓 5 台 UE 沿邊界來回維持樣本。自由空間公式在這裡估不準(兩天線主瓣重疊同一走廊),一定要實測。</a:t>
             </a:r>
           </a:p>
         </p:txBody>
@@ -23228,7 +23283,7 @@
                           <a:latin typeface="Arial"/>
                           <a:ea typeface="Microsoft JhengHei"/>
                         </a:rPr>
-                        <a:t>✅ RECOVERED succ=0.9</a:t>
+                        <a:t>✅ 判定恢復(成功率 0.9)</a:t>
                       </a:r>
                     </a:p>
                   </a:txBody>
@@ -23254,7 +23309,7 @@
                           <a:latin typeface="Arial"/>
                           <a:ea typeface="Microsoft JhengHei"/>
                         </a:rPr>
-                        <a:t>Q7 有害鄰居:成對旗標 + L4 探測/倍增/封頂</a:t>
+                        <a:t>Q7 有害鄰居:成對旗標 + 探測/間隔倍增/封頂</a:t>
                       </a:r>
                     </a:p>
                   </a:txBody>
@@ -23376,7 +23431,7 @@
                           <a:latin typeface="Arial"/>
                           <a:ea typeface="Microsoft JhengHei"/>
                         </a:rPr>
-                        <a:t>✅ EXECUTED 5/5、twc=0</a:t>
+                        <a:t>✅ 5 台全數導正、換錯 cell 比率 0</a:t>
                       </a:r>
                     </a:p>
                   </a:txBody>
@@ -23524,7 +23579,7 @@
                           <a:latin typeface="Arial"/>
                           <a:ea typeface="Microsoft JhengHei"/>
                         </a:rPr>
-                        <a:t>✅ ADD→RLF 歸零 / 原子重指</a:t>
+                        <a:t>✅ 補關係後掉線歸零 / 原子重指</a:t>
                       </a:r>
                     </a:p>
                   </a:txBody>
@@ -24396,7 +24451,7 @@
                           <a:latin typeface="Arial"/>
                           <a:ea typeface="Microsoft JhengHei"/>
                         </a:rPr>
-                        <a:t>servingRsrp 中位 ≤ −105dBm</a:t>
+                        <a:t>服務 cell 訊號中位 ≤ −105dBm</a:t>
                       </a:r>
                     </a:p>
                   </a:txBody>
@@ -24419,7 +24474,7 @@
                           <a:latin typeface="Arial"/>
                           <a:ea typeface="Microsoft JhengHei"/>
                         </a:rPr>
-                        <a:t>UE 停在 s28 天線零陷內的深邊緣點,live 實測 serving −107.5dBm</a:t>
+                        <a:t>UE 停在 s28 天線零陷內的深邊緣點,live 實測 服務訊號 −107.5dBm</a:t>
                       </a:r>
                     </a:p>
                   </a:txBody>
@@ -24442,7 +24497,7 @@
                           <a:latin typeface="Arial"/>
                           <a:ea typeface="Microsoft JhengHei"/>
                         </a:rPr>
-                        <a:t>「深邊緣」定義在 serving 絕對值,不是距離遠近;拉距離拉不出來,靠場型零陷做到</a:t>
+                        <a:t>「深邊緣」定義在服務訊號的絕對值,不是距離遠近;拉距離拉不出來,靠場型零陷做到</a:t>
                       </a:r>
                     </a:p>
                   </a:txBody>
@@ -24468,7 +24523,7 @@
                           <a:latin typeface="Arial"/>
                           <a:ea typeface="Microsoft JhengHei"/>
                         </a:rPr>
-                        <a:t>相對增益 ≥10dB(鄰區 − 同報 serving)</a:t>
+                        <a:t>相對增益 ≥10dB(鄰區 − 同報 服務訊號)</a:t>
                       </a:r>
                     </a:p>
                   </a:txBody>
@@ -24491,7 +24546,7 @@
                           <a:latin typeface="Arial"/>
                           <a:ea typeface="Microsoft JhengHei"/>
                         </a:rPr>
-                        <a:t>n91 佈在 UE 的 45° 側 → −87.8dBm,較 serving 高 +19.8dB(卷面 +18.5)</a:t>
+                        <a:t>n91 佈在 UE 的 45° 側 → −87.8dBm,較 服務訊號 高 +19.8dB(卷面 +18.5)</a:t>
                       </a:r>
                     </a:p>
                   </a:txBody>
@@ -24514,7 +24569,7 @@
                           <a:latin typeface="Arial"/>
                           <a:ea typeface="Microsoft JhengHei"/>
                         </a:rPr>
-                        <a:t>判準改看相對增益:絕對值再低,只要比 serving 好 10dB 就值得建關係</a:t>
+                        <a:t>判準改看相對增益:絕對值再低,只要比服務 cell 好 10dB 就值得建關係</a:t>
                       </a:r>
                     </a:p>
                   </a:txBody>
@@ -24672,7 +24727,7 @@
                 <a:latin typeface="Arial"/>
                 <a:ea typeface="Microsoft JhengHei"/>
               </a:rPr>
-              <a:t>① 每 5 分鐘算一次:鄰區 RSRP − 同報 serving = 相對增益</a:t>
+              <a:t>① 每 5 分鐘算一次:鄰區訊號 − 同一份報告的服務訊號 = 相對增益</a:t>
             </a:r>
           </a:p>
           <a:p>
@@ -24689,7 +24744,7 @@
                 <a:latin typeface="Arial"/>
                 <a:ea typeface="Microsoft JhengHei"/>
               </a:rPr>
-              <a:t>② 連 3 個窗都成立才動手(serving ≤−105、增益 ≥10dB、NRT 查無)</a:t>
+              <a:t>② 連 3 個窗都成立才動手(服務訊號 ≤−105、增益 ≥10dB、鄰區表查無)</a:t>
             </a:r>
           </a:p>
           <a:p>
@@ -24706,7 +24761,7 @@
                 <a:latin typeface="Arial"/>
                 <a:ea typeface="Microsoft JhengHei"/>
               </a:rPr>
-              <a:t>③ REPORTCGI 請 gNB 叫 UE 讀目標系統資訊解出 CGI,抽樣 3 次一致才採信</a:t>
+              <a:t>③ 請基地台叫 UE 讀目標系統資訊、解出全域識別碼,抽樣 3 次一致才採信</a:t>
             </a:r>
           </a:p>
           <a:p>
@@ -24723,7 +24778,7 @@
                 <a:latin typeface="Arial"/>
                 <a:ea typeface="Microsoft JhengHei"/>
               </a:rPr>
-              <a:t>④ 送 ADD 請 gNB 建關係(xApp 不自己寫 NRT),等 NRT 回讀確認</a:t>
+              <a:t>④ 請基地台建立關係(xApp 不自己寫鄰區表),等鄰區表回讀確認</a:t>
             </a:r>
           </a:p>
           <a:p>
@@ -24846,7 +24901,7 @@
                 <a:latin typeface="Arial"/>
                 <a:ea typeface="Microsoft JhengHei"/>
               </a:rPr>
-              <a:t>依卷面重佈後實測:serving −107.5dBm ✓、相對增益 +19.8dB ✓;xApp 已認出並補上關係</a:t>
+              <a:t>依卷面重佈後實測:服務訊號 −107.5dBm ✓、相對增益 +19.8dB ✓;xApp 已認出並補上關係</a:t>
             </a:r>
           </a:p>
         </p:txBody>
@@ -24859,8 +24914,8 @@
         </p:nvSpPr>
         <p:spPr>
           <a:xfrm>
-            <a:off x="320040" y="4060000"/>
-            <a:ext cx="5577840" cy="800000"/>
+            <a:off x="320040" y="3990000"/>
+            <a:ext cx="5577840" cy="890000"/>
           </a:xfrm>
           <a:prstGeom prst="roundRect">
             <a:avLst/>
@@ -24902,14 +24957,14 @@
               </a:spcAft>
             </a:pPr>
             <a:r>
-              <a:rPr sz="750" b="0">
+              <a:rPr sz="640" b="0">
                 <a:solidFill>
                   <a:srgbClr val="FFFFFF"/>
                 </a:solidFill>
                 <a:latin typeface="Arial"/>
                 <a:ea typeface="Microsoft JhengHei"/>
               </a:rPr>
-              <a:t>依卷面重佈(08/26):不動 TX 功率,改用天線場型與幾何。s28 的場型零陷在 ±z 方向,把 UE 停在 (0,−420) 就得到 serving −107.5dBm 的深邊緣;n51/n52 排在同一條 z 軸更遠處,比 serving 還弱,才不會用 A3 把 UE 拉走或搶走駐留;n91 擺在 45° 側取得 +19.8dB 相對增益。n91 另標 cellBarred,否則 UE 一 RLF 就重建過去,深邊緣狀態當場消失。</a:t>
+              <a:t>場景長這樣:s28(服務 cell)在中央,n51 / n52 是兩顆既有的健康鄰居,n91(pci 209)是缺的那一條;UE 停在 s28 天線訊號凹陷的方向上(南北向),所以離得不遠、訊號卻很弱。依卷面重佈(08/26):不動發射功率,改用天線場型與幾何 —— UE 停在該處實測服務訊號 −107.5dBm 的深邊緣;n51 / n52 排在同一條軸線更遠處(−115 / −119dBm,比服務 cell 還弱,不會把 UE 拉走也不會搶走駐留);n91 擺在 45 度側,取得 +19.8dB 的相對增益。n91 另標成不可駐留,否則 UE 一掉線就重建過去,深邊緣狀態當場消失。</a:t>
             </a:r>
           </a:p>
         </p:txBody>
@@ -25141,7 +25196,7 @@
                           <a:latin typeface="Arial"/>
                           <a:ea typeface="Microsoft JhengHei"/>
                         </a:rPr>
-                        <a:t>NRT 全表查無的 (pci,arfcn)</a:t>
+                        <a:t>整張鄰區表都查不到的 (PCI, 頻點)</a:t>
                       </a:r>
                     </a:p>
                   </a:txBody>
@@ -25285,7 +25340,7 @@
                           <a:latin typeface="Arial"/>
                           <a:ea typeface="Microsoft JhengHei"/>
                         </a:rPr>
-                        <a:t>既有關係 succ ≥0.95</a:t>
+                        <a:t>既有關係成功率 ≥0.95</a:t>
                       </a:r>
                     </a:p>
                   </a:txBody>
@@ -25469,7 +25524,7 @@
                 <a:latin typeface="Arial"/>
                 <a:ea typeface="Microsoft JhengHei"/>
               </a:rPr>
-              <a:t>④ REPORTCGI 解出 CGI,抽樣 2 次一致才採信(不一致=撞號,改走第 5 題)</a:t>
+              <a:t>④ 請基地台叫 UE 讀出全域識別碼,抽樣 2 次一致才採信(不一致=撞號,改走第 5 題)</a:t>
             </a:r>
           </a:p>
           <a:p>
@@ -25486,7 +25541,7 @@
                 <a:latin typeface="Arial"/>
                 <a:ea typeface="Microsoft JhengHei"/>
               </a:rPr>
-              <a:t>⑤ 送 ADD 請 gNB 建單向關係(反向由對方 gNB 自建),等 NRT 回讀確認</a:t>
+              <a:t>⑤ 請基地台建立單向關係(反向由對方基地台自建),等鄰區表回讀確認</a:t>
             </a:r>
           </a:p>
           <a:p>
@@ -25517,7 +25572,7 @@
                 <a:latin typeface="Arial"/>
                 <a:ea typeface="Microsoft JhengHei"/>
               </a:rPr>
-              <a:t>預計操作結果:認出全新 cell 並補上單向關係;來源 cell 由 bySourceCell 直接讀出,不再用 v8 那套「RLF 率最高者大概就是來源」的排名猜測</a:t>
+              <a:t>預計操作結果:認出全新 cell 並補上單向關係;來源 cell 由量測的來源歸屬直接讀出,不再用 v8 那套「RLF 率最高者大概就是來源」的排名猜測</a:t>
             </a:r>
           </a:p>
         </p:txBody>
@@ -25605,8 +25660,8 @@
         </p:nvSpPr>
         <p:spPr>
           <a:xfrm>
-            <a:off x="320040" y="4060000"/>
-            <a:ext cx="5577840" cy="800000"/>
+            <a:off x="320040" y="3990000"/>
+            <a:ext cx="5577840" cy="890000"/>
           </a:xfrm>
           <a:prstGeom prst="roundRect">
             <a:avLst/>
@@ -25648,14 +25703,14 @@
               </a:spcAft>
             </a:pPr>
             <a:r>
-              <a:rPr sz="750" b="0">
+              <a:rPr sz="640" b="0">
                 <a:solidFill>
                   <a:srgbClr val="FFFFFF"/>
                 </a:solidFill>
                 <a:latin typeface="Arial"/>
                 <a:ea typeface="Microsoft JhengHei"/>
               </a:rPr>
-              <a:t>場景多放一顆 unk_c0(pci 301),並確保沒有任何關係指向它 —— cell 真的存在、UE 量得到、CGI 也解得出來,唯獨表上查無。與第 1 題的差別在於這顆是全新的,不是既有關係被刪掉;所以 xApp 必須先確認它不在任何既有 targets 裡,才不會把既有病誤判成新鄰居。</a:t>
+              <a:t>場景長這樣:s01(pci 101)為服務 cell,unk(pci 301)在東側 150 公尺,另有 n02 / n03 兩顆既有健康鄰居在西側;UE 橫越整條走廊。場景多放一顆 unk_c0(pci 301),並確保沒有任何關係指向它 —— cell 真的存在、UE 量得到、全域識別碼也解得出來,唯獨表上查無。與第 1 題的差別在於這顆是全新的,不是既有關係被刪掉;所以 xApp 必須先確認它不在任何既有 targets 裡,才不會把既有病誤判成新鄰居。</a:t>
             </a:r>
           </a:p>
         </p:txBody>

--- a/docs/report/8_27_進度報告_v10十二題.pptx
+++ b/docs/report/8_27_進度報告_v10十二題.pptx
@@ -13072,10 +13072,9 @@
               <a:tr h="450000">
                 <a:tc>
                   <a:txBody>
-                    <a:bodyPr wrap="square"/>
+                    <a:bodyPr/>
                     <a:lstStyle/>
                     <a:p>
-                      <a:pPr algn="ctr"/>
                       <a:r>
                         <a:rPr sz="900" b="1">
                           <a:solidFill>
@@ -13084,7 +13083,7 @@
                           <a:latin typeface="Arial"/>
                           <a:ea typeface="Microsoft JhengHei"/>
                         </a:rPr>
-                        <a:t>指標名稱(門檻)</a:t>
+                        <a:t>觀測指標(門檻)</a:t>
                       </a:r>
                     </a:p>
                   </a:txBody>
@@ -13096,10 +13095,9 @@
                 </a:tc>
                 <a:tc>
                   <a:txBody>
-                    <a:bodyPr wrap="square"/>
+                    <a:bodyPr/>
                     <a:lstStyle/>
                     <a:p>
-                      <a:pPr algn="ctr"/>
                       <a:r>
                         <a:rPr sz="900" b="1">
                           <a:solidFill>
@@ -13108,7 +13106,7 @@
                           <a:latin typeface="Arial"/>
                           <a:ea typeface="Microsoft JhengHei"/>
                         </a:rPr>
-                        <a:t>指標模擬方式</a:t>
+                        <a:t>怎麼模擬出來</a:t>
                       </a:r>
                     </a:p>
                   </a:txBody>
@@ -13120,10 +13118,9 @@
                 </a:tc>
                 <a:tc>
                   <a:txBody>
-                    <a:bodyPr wrap="square"/>
+                    <a:bodyPr/>
                     <a:lstStyle/>
                     <a:p>
-                      <a:pPr algn="ctr"/>
                       <a:r>
                         <a:rPr sz="900" b="1">
                           <a:solidFill>
@@ -13132,7 +13129,7 @@
                           <a:latin typeface="Arial"/>
                           <a:ea typeface="Microsoft JhengHei"/>
                         </a:rPr>
-                        <a:t>指標意義</a:t>
+                        <a:t>代表什麼意思</a:t>
                       </a:r>
                     </a:p>
                   </a:txBody>
@@ -13191,14 +13188,14 @@
                     <a:lstStyle/>
                     <a:p>
                       <a:r>
-                        <a:rPr sz="800" b="0">
+                        <a:rPr sz="850" b="0">
                           <a:solidFill>
                             <a:srgbClr val="222A30"/>
                           </a:solidFill>
                           <a:latin typeface="Arial"/>
                           <a:ea typeface="Microsoft JhengHei"/>
                         </a:rPr>
-                        <a:t>解析同一 PCI → 得到兩個不同的 cell</a:t>
+                        <a:t>同一 PCI 解出兩顆不同 cell</a:t>
                       </a:r>
                     </a:p>
                   </a:txBody>
@@ -13214,14 +13211,14 @@
                     <a:lstStyle/>
                     <a:p>
                       <a:r>
-                        <a:rPr sz="800" b="0">
+                        <a:rPr sz="850" b="0">
                           <a:solidFill>
                             <a:srgbClr val="222A30"/>
                           </a:solidFill>
                           <a:latin typeface="Arial"/>
                           <a:ea typeface="Microsoft JhengHei"/>
                         </a:rPr>
-                        <a:t>場景讓 west_c7 與 east_c7 兩顆 cell 共用 pci=7,UE 在中間兩顆都量得到</a:t>
+                        <a:t>場景讓兩顆共用 pci=7</a:t>
                       </a:r>
                     </a:p>
                   </a:txBody>
@@ -13237,14 +13234,14 @@
                     <a:lstStyle/>
                     <a:p>
                       <a:r>
-                        <a:rPr sz="800" b="0">
+                        <a:rPr sz="850" b="0">
                           <a:solidFill>
                             <a:srgbClr val="222A30"/>
                           </a:solidFill>
                           <a:latin typeface="Arial"/>
                           <a:ea typeface="Microsoft JhengHei"/>
                         </a:rPr>
-                        <a:t>這是撞號的直接證據,但它只說「有歧義」,不會告訴你該選哪一顆</a:t>
+                        <a:t>撞號的直接證據</a:t>
                       </a:r>
                     </a:p>
                   </a:txBody>
@@ -13262,14 +13259,14 @@
                     <a:lstStyle/>
                     <a:p>
                       <a:r>
-                        <a:rPr sz="800" b="0">
+                        <a:rPr sz="850" b="0">
                           <a:solidFill>
                             <a:srgbClr val="222A30"/>
                           </a:solidFill>
                           <a:latin typeface="Arial"/>
                           <a:ea typeface="Microsoft JhengHei"/>
                         </a:rPr>
-                        <a:t>來源鄰區表裡只有其中一顆</a:t>
+                        <a:t>來源表裡只有其中一顆</a:t>
                       </a:r>
                     </a:p>
                   </a:txBody>
@@ -13285,14 +13282,14 @@
                     <a:lstStyle/>
                     <a:p>
                       <a:r>
-                        <a:rPr sz="800" b="0">
+                        <a:rPr sz="850" b="0">
                           <a:solidFill>
                             <a:srgbClr val="222A30"/>
                           </a:solidFill>
                           <a:latin typeface="Arial"/>
                           <a:ea typeface="Microsoft JhengHei"/>
                         </a:rPr>
-                        <a:t>佈病把來源 mid_c0 的表只留 east 一條(刪掉 west)</a:t>
+                        <a:t>刪掉 mid→west 那一條</a:t>
                       </a:r>
                     </a:p>
                   </a:txBody>
@@ -13308,14 +13305,14 @@
                     <a:lstStyle/>
                     <a:p>
                       <a:r>
-                        <a:rPr sz="800" b="0">
+                        <a:rPr sz="850" b="0">
                           <a:solidFill>
                             <a:srgbClr val="222A30"/>
                           </a:solidFill>
                           <a:latin typeface="Arial"/>
                           <a:ea typeface="Microsoft JhengHei"/>
                         </a:rPr>
-                        <a:t>這條既有關係就是依據:它才是 mid 本來就該換過去的鄰居 —— 有它才敢動作</a:t>
+                        <a:t>有依據才敢指定目標</a:t>
                       </a:r>
                     </a:p>
                   </a:txBody>
@@ -13333,14 +13330,14 @@
                     <a:lstStyle/>
                     <a:p>
                       <a:r>
-                        <a:rPr sz="800" b="0">
+                        <a:rPr sz="850" b="0">
                           <a:solidFill>
                             <a:srgbClr val="222A30"/>
                           </a:solidFill>
                           <a:latin typeface="Arial"/>
                           <a:ea typeface="Microsoft JhengHei"/>
                         </a:rPr>
-                        <a:t>該顆的全域識別碼(NR Cell Identity)</a:t>
+                        <a:t>該顆的全域識別碼</a:t>
                       </a:r>
                     </a:p>
                   </a:txBody>
@@ -13356,14 +13353,14 @@
                     <a:lstStyle/>
                     <a:p>
                       <a:r>
-                        <a:rPr sz="800" b="0">
+                        <a:rPr sz="850" b="0">
                           <a:solidFill>
                             <a:srgbClr val="222A30"/>
                           </a:solidFill>
                           <a:latin typeface="Arial"/>
                           <a:ea typeface="Microsoft JhengHei"/>
                         </a:rPr>
-                        <a:t>解析結果逐一附上各候選的 36-bit 識別碼(08/26 新增欄位)</a:t>
+                        <a:t>解析結果逐顆附上識別碼</a:t>
                       </a:r>
                     </a:p>
                   </a:txBody>
@@ -13379,14 +13376,14 @@
                     <a:lstStyle/>
                     <a:p>
                       <a:r>
-                        <a:rPr sz="800" b="0">
+                        <a:rPr sz="850" b="0">
                           <a:solidFill>
                             <a:srgbClr val="222A30"/>
                           </a:solidFill>
                           <a:latin typeface="Arial"/>
                           <a:ea typeface="Microsoft JhengHei"/>
                         </a:rPr>
-                        <a:t>換手指令只能填全域識別碼;PCI 正在撞號,拿它指路必然賭錯</a:t>
+                        <a:t>換手指令只能填識別碼</a:t>
                       </a:r>
                     </a:p>
                   </a:txBody>
@@ -13832,10 +13829,9 @@
               <a:tr h="450000">
                 <a:tc>
                   <a:txBody>
-                    <a:bodyPr wrap="square"/>
+                    <a:bodyPr/>
                     <a:lstStyle/>
                     <a:p>
-                      <a:pPr algn="ctr"/>
                       <a:r>
                         <a:rPr sz="900" b="1">
                           <a:solidFill>
@@ -13844,7 +13840,7 @@
                           <a:latin typeface="Arial"/>
                           <a:ea typeface="Microsoft JhengHei"/>
                         </a:rPr>
-                        <a:t>指標名稱(門檻)</a:t>
+                        <a:t>觀測指標(門檻)</a:t>
                       </a:r>
                     </a:p>
                   </a:txBody>
@@ -13856,10 +13852,9 @@
                 </a:tc>
                 <a:tc>
                   <a:txBody>
-                    <a:bodyPr wrap="square"/>
+                    <a:bodyPr/>
                     <a:lstStyle/>
                     <a:p>
-                      <a:pPr algn="ctr"/>
                       <a:r>
                         <a:rPr sz="900" b="1">
                           <a:solidFill>
@@ -13868,7 +13863,7 @@
                           <a:latin typeface="Arial"/>
                           <a:ea typeface="Microsoft JhengHei"/>
                         </a:rPr>
-                        <a:t>指標模擬方式</a:t>
+                        <a:t>怎麼模擬出來</a:t>
                       </a:r>
                     </a:p>
                   </a:txBody>
@@ -13880,10 +13875,9 @@
                 </a:tc>
                 <a:tc>
                   <a:txBody>
-                    <a:bodyPr wrap="square"/>
+                    <a:bodyPr/>
                     <a:lstStyle/>
                     <a:p>
-                      <a:pPr algn="ctr"/>
                       <a:r>
                         <a:rPr sz="900" b="1">
                           <a:solidFill>
@@ -13892,7 +13886,7 @@
                           <a:latin typeface="Arial"/>
                           <a:ea typeface="Microsoft JhengHei"/>
                         </a:rPr>
-                        <a:t>指標意義</a:t>
+                        <a:t>代表什麼意思</a:t>
                       </a:r>
                     </a:p>
                   </a:txBody>
@@ -13951,14 +13945,14 @@
                     <a:lstStyle/>
                     <a:p>
                       <a:r>
-                        <a:rPr sz="800" b="0">
+                        <a:rPr sz="850" b="0">
                           <a:solidFill>
                             <a:srgbClr val="222A30"/>
                           </a:solidFill>
                           <a:latin typeface="Arial"/>
                           <a:ea typeface="Microsoft JhengHei"/>
                         </a:rPr>
-                        <a:t>換手失敗集中在「準備階段逾時」</a:t>
+                        <a:t>準備階段逾時佔多數</a:t>
                       </a:r>
                     </a:p>
                   </a:txBody>
@@ -13974,14 +13968,14 @@
                     <a:lstStyle/>
                     <a:p>
                       <a:r>
-                        <a:rPr sz="800" b="0">
+                        <a:rPr sz="850" b="0">
                           <a:solidFill>
                             <a:srgbClr val="222A30"/>
                           </a:solidFill>
                           <a:latin typeface="Arial"/>
                           <a:ea typeface="Microsoft JhengHei"/>
                         </a:rPr>
-                        <a:t>關係留著,只把「Xn 傳輸已建立」改成否</a:t>
+                        <a:t>把「Xn 已建立」改成否</a:t>
                       </a:r>
                     </a:p>
                   </a:txBody>
@@ -13997,14 +13991,14 @@
                     <a:lstStyle/>
                     <a:p>
                       <a:r>
-                        <a:rPr sz="800" b="0">
+                        <a:rPr sz="850" b="0">
                           <a:solidFill>
                             <a:srgbClr val="222A30"/>
                           </a:solidFill>
                           <a:latin typeface="Arial"/>
                           <a:ea typeface="Microsoft JhengHei"/>
                         </a:rPr>
-                        <a:t>連換手請求都送不出去 = 傳輸層問題,不是鄰居本身壞(與第 7 題的分野)</a:t>
+                        <a:t>請求送不出去 = 傳輸層問題</a:t>
                       </a:r>
                     </a:p>
                   </a:txBody>
@@ -14022,14 +14016,14 @@
                     <a:lstStyle/>
                     <a:p>
                       <a:r>
-                        <a:rPr sz="800" b="0">
+                        <a:rPr sz="850" b="0">
                           <a:solidFill>
                             <a:srgbClr val="222A30"/>
                           </a:solidFill>
                           <a:latin typeface="Arial"/>
                           <a:ea typeface="Microsoft JhengHei"/>
                         </a:rPr>
-                        <a:t>Xn 傳輸狀態:未建立 → 已建立</a:t>
+                        <a:t>Xn 狀態:未建立 → 已建立</a:t>
                       </a:r>
                     </a:p>
                   </a:txBody>
@@ -14045,14 +14039,14 @@
                     <a:lstStyle/>
                     <a:p>
                       <a:r>
-                        <a:rPr sz="800" b="0">
+                        <a:rPr sz="850" b="0">
                           <a:solidFill>
                             <a:srgbClr val="222A30"/>
                           </a:solidFill>
                           <a:latin typeface="Arial"/>
                           <a:ea typeface="Microsoft JhengHei"/>
                         </a:rPr>
-                        <a:t>佈病改成未建立;劇本在你們止血後自己改回已建立(免人工)</a:t>
+                        <a:t>劇本在止血後自動改回</a:t>
                       </a:r>
                     </a:p>
                   </a:txBody>
@@ -14068,14 +14062,14 @@
                     <a:lstStyle/>
                     <a:p>
                       <a:r>
-                        <a:rPr sz="800" b="0">
+                        <a:rPr sz="850" b="0">
                           <a:solidFill>
                             <a:srgbClr val="222A30"/>
                           </a:solidFill>
                           <a:latin typeface="Arial"/>
                           <a:ea typeface="Microsoft JhengHei"/>
                         </a:rPr>
-                        <a:t>這只是止血與解除的觸發訊號,本身不能當恢復的證據</a:t>
+                        <a:t>只是觸發訊號,不是恢復證據</a:t>
                       </a:r>
                     </a:p>
                   </a:txBody>
@@ -14093,14 +14087,14 @@
                     <a:lstStyle/>
                     <a:p>
                       <a:r>
-                        <a:rPr sz="800" b="0">
+                        <a:rPr sz="850" b="0">
                           <a:solidFill>
                             <a:srgbClr val="222A30"/>
                           </a:solidFill>
                           <a:latin typeface="Arial"/>
                           <a:ea typeface="Microsoft JhengHei"/>
                         </a:rPr>
-                        <a:t>換手成功率回到 0.9 以上</a:t>
+                        <a:t>換手成功率回到 ≥0.9</a:t>
                       </a:r>
                     </a:p>
                   </a:txBody>
@@ -14116,14 +14110,14 @@
                     <a:lstStyle/>
                     <a:p>
                       <a:r>
-                        <a:rPr sz="800" b="0">
+                        <a:rPr sz="850" b="0">
                           <a:solidFill>
                             <a:srgbClr val="222A30"/>
                           </a:solidFill>
                           <a:latin typeface="Arial"/>
                           <a:ea typeface="Microsoft JhengHei"/>
                         </a:rPr>
-                        <a:t>修好後 A3 恢復,成功率靠真實換手一筆筆把舊失敗沖出滾動窗</a:t>
+                        <a:t>修好後靠真實換手累積</a:t>
                       </a:r>
                     </a:p>
                   </a:txBody>
@@ -14139,14 +14133,14 @@
                     <a:lstStyle/>
                     <a:p>
                       <a:r>
-                        <a:rPr sz="800" b="0">
+                        <a:rPr sz="850" b="0">
                           <a:solidFill>
                             <a:srgbClr val="222A30"/>
                           </a:solidFill>
                           <a:latin typeface="Arial"/>
                           <a:ea typeface="Microsoft JhengHei"/>
                         </a:rPr>
-                        <a:t>行為回升才算恢復;UE 靜止造成的「零失敗」不算數</a:t>
+                        <a:t>行為回升才算恢復</a:t>
                       </a:r>
                     </a:p>
                   </a:txBody>
@@ -14575,10 +14569,9 @@
               <a:tr h="430000">
                 <a:tc>
                   <a:txBody>
-                    <a:bodyPr wrap="square"/>
+                    <a:bodyPr/>
                     <a:lstStyle/>
                     <a:p>
-                      <a:pPr algn="ctr"/>
                       <a:r>
                         <a:rPr sz="900" b="1">
                           <a:solidFill>
@@ -14587,7 +14580,7 @@
                           <a:latin typeface="Arial"/>
                           <a:ea typeface="Microsoft JhengHei"/>
                         </a:rPr>
-                        <a:t>指標名稱(門檻)</a:t>
+                        <a:t>觀測指標(門檻)</a:t>
                       </a:r>
                     </a:p>
                   </a:txBody>
@@ -14599,10 +14592,9 @@
                 </a:tc>
                 <a:tc>
                   <a:txBody>
-                    <a:bodyPr wrap="square"/>
+                    <a:bodyPr/>
                     <a:lstStyle/>
                     <a:p>
-                      <a:pPr algn="ctr"/>
                       <a:r>
                         <a:rPr sz="900" b="1">
                           <a:solidFill>
@@ -14611,7 +14603,7 @@
                           <a:latin typeface="Arial"/>
                           <a:ea typeface="Microsoft JhengHei"/>
                         </a:rPr>
-                        <a:t>指標模擬方式</a:t>
+                        <a:t>怎麼模擬出來</a:t>
                       </a:r>
                     </a:p>
                   </a:txBody>
@@ -14623,10 +14615,9 @@
                 </a:tc>
                 <a:tc>
                   <a:txBody>
-                    <a:bodyPr wrap="square"/>
+                    <a:bodyPr/>
                     <a:lstStyle/>
                     <a:p>
-                      <a:pPr algn="ctr"/>
                       <a:r>
                         <a:rPr sz="900" b="1">
                           <a:solidFill>
@@ -14635,7 +14626,7 @@
                           <a:latin typeface="Arial"/>
                           <a:ea typeface="Microsoft JhengHei"/>
                         </a:rPr>
-                        <a:t>指標意義</a:t>
+                        <a:t>代表什麼意思</a:t>
                       </a:r>
                     </a:p>
                   </a:txBody>
@@ -14694,14 +14685,14 @@
                     <a:lstStyle/>
                     <a:p>
                       <a:r>
-                        <a:rPr sz="800" b="0">
+                        <a:rPr sz="850" b="0">
                           <a:solidFill>
                             <a:srgbClr val="222A30"/>
                           </a:solidFill>
                           <a:latin typeface="Arial"/>
                           <a:ea typeface="Microsoft JhengHei"/>
                         </a:rPr>
-                        <a:t>換手失敗集中在「接入失敗」這個原因(佔比高)</a:t>
+                        <a:t>接入失敗佔多數</a:t>
                       </a:r>
                     </a:p>
                   </a:txBody>
@@ -14717,14 +14708,14 @@
                     <a:lstStyle/>
                     <a:p>
                       <a:r>
-                        <a:rPr sz="800" b="0">
+                        <a:rPr sz="850" b="0">
                           <a:solidFill>
                             <a:srgbClr val="222A30"/>
                           </a:solidFill>
                           <a:latin typeface="Arial"/>
                           <a:ea typeface="Microsoft JhengHei"/>
                         </a:rPr>
-                        <a:t>在檔案熱開關指名目標 cell,執行器讓每次換手都在執行階段回接入失敗</a:t>
+                        <a:t>檔案開關讓該目標一律失敗</a:t>
                       </a:r>
                     </a:p>
                   </a:txBody>
@@ -14740,14 +14731,14 @@
                     <a:lstStyle/>
                     <a:p>
                       <a:r>
-                        <a:rPr sz="800" b="0">
+                        <a:rPr sz="850" b="0">
                           <a:solidFill>
                             <a:srgbClr val="222A30"/>
                           </a:solidFill>
                           <a:latin typeface="Arial"/>
                           <a:ea typeface="Microsoft JhengHei"/>
                         </a:rPr>
-                        <a:t>UE 到得了卻接不進 = 鄰居本身壞掉;與第 6 題的準備階段失敗分家</a:t>
+                        <a:t>UE 到得了卻接不進</a:t>
                       </a:r>
                     </a:p>
                   </a:txBody>
@@ -14765,14 +14756,14 @@
                     <a:lstStyle/>
                     <a:p>
                       <a:r>
-                        <a:rPr sz="800" b="0">
+                        <a:rPr sz="850" b="0">
                           <a:solidFill>
                             <a:srgbClr val="222A30"/>
                           </a:solidFill>
                           <a:latin typeface="Arial"/>
                           <a:ea typeface="Microsoft JhengHei"/>
                         </a:rPr>
-                        <a:t>成功率 ≤0.5 ∧ 嘗試 ≥0.5/min ∧ 樣本 ≥50</a:t>
+                        <a:t>成功率 ≤0.5、≥0.5/min、樣本 ≥50</a:t>
                       </a:r>
                     </a:p>
                   </a:txBody>
@@ -14788,14 +14779,14 @@
                     <a:lstStyle/>
                     <a:p>
                       <a:r>
-                        <a:rPr sz="800" b="0">
+                        <a:rPr sz="850" b="0">
                           <a:solidFill>
                             <a:srgbClr val="222A30"/>
                           </a:solidFill>
                           <a:latin typeface="Arial"/>
                           <a:ea typeface="Microsoft JhengHei"/>
                         </a:rPr>
-                        <a:t>由真實 A3 驅動嘗試,不灌假事件;樣本要真的累積到 50 筆</a:t>
+                        <a:t>真實 A3 驅動,不灌假事件</a:t>
                       </a:r>
                     </a:p>
                   </a:txBody>
@@ -14811,14 +14802,14 @@
                     <a:lstStyle/>
                     <a:p>
                       <a:r>
-                        <a:rPr sz="800" b="0">
+                        <a:rPr sz="850" b="0">
                           <a:solidFill>
                             <a:srgbClr val="222A30"/>
                           </a:solidFill>
                           <a:latin typeface="Arial"/>
                           <a:ea typeface="Microsoft JhengHei"/>
                         </a:rPr>
-                        <a:t>病重(成功率低)又有人在用(樣本足)才動手,避免兩三筆就誤判</a:t>
+                        <a:t>病重又有人在用才動手</a:t>
                       </a:r>
                     </a:p>
                   </a:txBody>
@@ -14836,14 +14827,14 @@
                     <a:lstStyle/>
                     <a:p>
                       <a:r>
-                        <a:rPr sz="800" b="0">
+                        <a:rPr sz="850" b="0">
                           <a:solidFill>
                             <a:srgbClr val="222A30"/>
                           </a:solidFill>
                           <a:latin typeface="Arial"/>
                           <a:ea typeface="Microsoft JhengHei"/>
                         </a:rPr>
-                        <a:t>止血後:失敗累計凍結、換手嘗試歸零</a:t>
+                        <a:t>止血後嘗試率 → 0</a:t>
                       </a:r>
                     </a:p>
                   </a:txBody>
@@ -14859,14 +14850,14 @@
                     <a:lstStyle/>
                     <a:p>
                       <a:r>
-                        <a:rPr sz="800" b="0">
+                        <a:rPr sz="850" b="0">
                           <a:solidFill>
                             <a:srgbClr val="222A30"/>
                           </a:solidFill>
                           <a:latin typeface="Arial"/>
                           <a:ea typeface="Microsoft JhengHei"/>
                         </a:rPr>
-                        <a:t>封鎖後 A3 自動跳過該目標,嘗試數自然降到 0</a:t>
+                        <a:t>封鎖後 A3 自動跳過該目標</a:t>
                       </a:r>
                     </a:p>
                   </a:txBody>
@@ -14882,14 +14873,14 @@
                     <a:lstStyle/>
                     <a:p>
                       <a:r>
-                        <a:rPr sz="800" b="0">
+                        <a:rPr sz="850" b="0">
                           <a:solidFill>
                             <a:srgbClr val="222A30"/>
                           </a:solidFill>
                           <a:latin typeface="Arial"/>
                           <a:ea typeface="Microsoft JhengHei"/>
                         </a:rPr>
-                        <a:t>不是靠旗標說了算,而是行為真的變了才算止血生效</a:t>
+                        <a:t>行為變了才算止血生效</a:t>
                       </a:r>
                     </a:p>
                   </a:txBody>
@@ -15318,10 +15309,9 @@
               <a:tr h="440000">
                 <a:tc>
                   <a:txBody>
-                    <a:bodyPr wrap="square"/>
+                    <a:bodyPr/>
                     <a:lstStyle/>
                     <a:p>
-                      <a:pPr algn="ctr"/>
                       <a:r>
                         <a:rPr sz="900" b="1">
                           <a:solidFill>
@@ -15330,7 +15320,7 @@
                           <a:latin typeface="Arial"/>
                           <a:ea typeface="Microsoft JhengHei"/>
                         </a:rPr>
-                        <a:t>指標名稱(門檻)</a:t>
+                        <a:t>觀測指標(門檻)</a:t>
                       </a:r>
                     </a:p>
                   </a:txBody>
@@ -15342,10 +15332,9 @@
                 </a:tc>
                 <a:tc>
                   <a:txBody>
-                    <a:bodyPr wrap="square"/>
+                    <a:bodyPr/>
                     <a:lstStyle/>
                     <a:p>
-                      <a:pPr algn="ctr"/>
                       <a:r>
                         <a:rPr sz="900" b="1">
                           <a:solidFill>
@@ -15354,7 +15343,7 @@
                           <a:latin typeface="Arial"/>
                           <a:ea typeface="Microsoft JhengHei"/>
                         </a:rPr>
-                        <a:t>指標模擬方式</a:t>
+                        <a:t>怎麼模擬出來</a:t>
                       </a:r>
                     </a:p>
                   </a:txBody>
@@ -15366,10 +15355,9 @@
                 </a:tc>
                 <a:tc>
                   <a:txBody>
-                    <a:bodyPr wrap="square"/>
+                    <a:bodyPr/>
                     <a:lstStyle/>
                     <a:p>
-                      <a:pPr algn="ctr"/>
                       <a:r>
                         <a:rPr sz="900" b="1">
                           <a:solidFill>
@@ -15378,7 +15366,7 @@
                           <a:latin typeface="Arial"/>
                           <a:ea typeface="Microsoft JhengHei"/>
                         </a:rPr>
-                        <a:t>指標意義</a:t>
+                        <a:t>代表什麼意思</a:t>
                       </a:r>
                     </a:p>
                   </a:txBody>
@@ -15437,14 +15425,14 @@
                     <a:lstStyle/>
                     <a:p>
                       <a:r>
-                        <a:rPr sz="800" b="0">
+                        <a:rPr sz="850" b="0">
                           <a:solidFill>
                             <a:srgbClr val="222A30"/>
                           </a:solidFill>
                           <a:latin typeface="Arial"/>
                           <a:ea typeface="Microsoft JhengHei"/>
                         </a:rPr>
-                        <a:t>同一個「外來頻點」上一次出現 ≥2 顆強 PCI</a:t>
+                        <a:t>外來頻點上 ≥2 顆強 PCI</a:t>
                       </a:r>
                     </a:p>
                   </a:txBody>
@@ -15460,14 +15448,14 @@
                     <a:lstStyle/>
                     <a:p>
                       <a:r>
-                        <a:rPr sz="800" b="0">
+                        <a:rPr sz="850" b="0">
                           <a:solidFill>
                             <a:srgbClr val="222A30"/>
                           </a:solidFill>
                           <a:latin typeface="Arial"/>
                           <a:ea typeface="Microsoft JhengHei"/>
                         </a:rPr>
-                        <a:t>場景佈兩層:3.5GHz 的 s11(服務)+ 2.1GHz 的 f55/f61/f68 三顆</a:t>
+                        <a:t>另佈 3 顆 2.1GHz 的 cell</a:t>
                       </a:r>
                     </a:p>
                   </a:txBody>
@@ -15483,14 +15471,14 @@
                     <a:lstStyle/>
                     <a:p>
                       <a:r>
-                        <a:rPr sz="800" b="0">
+                        <a:rPr sz="850" b="0">
                           <a:solidFill>
                             <a:srgbClr val="222A30"/>
                           </a:solidFill>
                           <a:latin typeface="Arial"/>
                           <a:ea typeface="Microsoft JhengHei"/>
                         </a:rPr>
-                        <a:t>要求成批出現:單獨一顆可能誤讀,一次多顆才代表整層真的在那裡</a:t>
+                        <a:t>成批出現 = 整層缺失</a:t>
                       </a:r>
                     </a:p>
                   </a:txBody>
@@ -15508,14 +15496,14 @@
                     <a:lstStyle/>
                     <a:p>
                       <a:r>
-                        <a:rPr sz="800" b="0">
+                        <a:rPr sz="850" b="0">
                           <a:solidFill>
                             <a:srgbClr val="222A30"/>
                           </a:solidFill>
                           <a:latin typeface="Arial"/>
                           <a:ea typeface="Microsoft JhengHei"/>
                         </a:rPr>
-                        <a:t>訊號 ≥ −88dBm ∧ 回報率 ≥5/min ∧ 連 3 窗</a:t>
+                        <a:t>≥−88dBm、≥5/min、連 3 窗</a:t>
                       </a:r>
                     </a:p>
                   </a:txBody>
@@ -15531,14 +15519,14 @@
                     <a:lstStyle/>
                     <a:p>
                       <a:r>
-                        <a:rPr sz="800" b="0">
+                        <a:rPr sz="850" b="0">
                           <a:solidFill>
                             <a:srgbClr val="222A30"/>
                           </a:solidFill>
                           <a:latin typeface="Arial"/>
                           <a:ea typeface="Microsoft JhengHei"/>
                         </a:rPr>
-                        <a:t>UE 位置讓 2.1GHz 訊號穩定達標;干擾計算只算同頻,不會拖累 3.5G</a:t>
+                        <a:t>干擾只算同頻,不拖累服務層</a:t>
                       </a:r>
                     </a:p>
                   </a:txBody>
@@ -15554,14 +15542,14 @@
                     <a:lstStyle/>
                     <a:p>
                       <a:r>
-                        <a:rPr sz="800" b="0">
+                        <a:rPr sz="850" b="0">
                           <a:solidFill>
                             <a:srgbClr val="222A30"/>
                           </a:solidFill>
                           <a:latin typeface="Arial"/>
                           <a:ea typeface="Microsoft JhengHei"/>
                         </a:rPr>
-                        <a:t>夠強又持續才補,避免把偶發的跨頻樣本當成缺層</a:t>
+                        <a:t>夠強又夠久才補</a:t>
                       </a:r>
                     </a:p>
                   </a:txBody>
@@ -15579,14 +15567,14 @@
                     <a:lstStyle/>
                     <a:p>
                       <a:r>
-                        <a:rPr sz="800" b="0">
+                        <a:rPr sz="850" b="0">
                           <a:solidFill>
                             <a:srgbClr val="222A30"/>
                           </a:solidFill>
                           <a:latin typeface="Arial"/>
                           <a:ea typeface="Microsoft JhengHei"/>
                         </a:rPr>
-                        <a:t>這個頻點不在該來源 cell 的「已知頻點清單」裡</a:t>
+                        <a:t>不在該 cell 的已知頻點清單</a:t>
                       </a:r>
                     </a:p>
                   </a:txBody>
@@ -15602,14 +15590,14 @@
                     <a:lstStyle/>
                     <a:p>
                       <a:r>
-                        <a:rPr sz="800" b="0">
+                        <a:rPr sz="850" b="0">
                           <a:solidFill>
                             <a:srgbClr val="222A30"/>
                           </a:solidFill>
                           <a:latin typeface="Arial"/>
                           <a:ea typeface="Microsoft JhengHei"/>
                         </a:rPr>
-                        <a:t>清單 = 自己的頻率 + 既有關係涉及的頻率,每顆 cell 各自一份</a:t>
+                        <a:t>清單 = 自己 + 既有關係的頻率</a:t>
                       </a:r>
                     </a:p>
                   </a:txBody>
@@ -15625,14 +15613,14 @@
                     <a:lstStyle/>
                     <a:p>
                       <a:r>
-                        <a:rPr sz="800" b="0">
+                        <a:rPr sz="850" b="0">
                           <a:solidFill>
                             <a:srgbClr val="222A30"/>
                           </a:solidFill>
                           <a:latin typeface="Arial"/>
                           <a:ea typeface="Microsoft JhengHei"/>
                         </a:rPr>
-                        <a:t>清單空的(從沒建過跨頻關係)最需要補,卻最容易被程式直接跳過</a:t>
+                        <a:t>清單空的那顆最需要補</a:t>
                       </a:r>
                     </a:p>
                   </a:txBody>
@@ -16061,10 +16049,9 @@
               <a:tr h="440000">
                 <a:tc>
                   <a:txBody>
-                    <a:bodyPr wrap="square"/>
+                    <a:bodyPr/>
                     <a:lstStyle/>
                     <a:p>
-                      <a:pPr algn="ctr"/>
                       <a:r>
                         <a:rPr sz="900" b="1">
                           <a:solidFill>
@@ -16073,7 +16060,7 @@
                           <a:latin typeface="Arial"/>
                           <a:ea typeface="Microsoft JhengHei"/>
                         </a:rPr>
-                        <a:t>指標名稱(門檻)</a:t>
+                        <a:t>觀測指標(門檻)</a:t>
                       </a:r>
                     </a:p>
                   </a:txBody>
@@ -16085,10 +16072,9 @@
                 </a:tc>
                 <a:tc>
                   <a:txBody>
-                    <a:bodyPr wrap="square"/>
+                    <a:bodyPr/>
                     <a:lstStyle/>
                     <a:p>
-                      <a:pPr algn="ctr"/>
                       <a:r>
                         <a:rPr sz="900" b="1">
                           <a:solidFill>
@@ -16097,7 +16083,7 @@
                           <a:latin typeface="Arial"/>
                           <a:ea typeface="Microsoft JhengHei"/>
                         </a:rPr>
-                        <a:t>指標模擬方式</a:t>
+                        <a:t>怎麼模擬出來</a:t>
                       </a:r>
                     </a:p>
                   </a:txBody>
@@ -16109,10 +16095,9 @@
                 </a:tc>
                 <a:tc>
                   <a:txBody>
-                    <a:bodyPr wrap="square"/>
+                    <a:bodyPr/>
                     <a:lstStyle/>
                     <a:p>
-                      <a:pPr algn="ctr"/>
                       <a:r>
                         <a:rPr sz="900" b="1">
                           <a:solidFill>
@@ -16121,7 +16106,7 @@
                           <a:latin typeface="Arial"/>
                           <a:ea typeface="Microsoft JhengHei"/>
                         </a:rPr>
-                        <a:t>指標意義</a:t>
+                        <a:t>代表什麼意思</a:t>
                       </a:r>
                     </a:p>
                   </a:txBody>
@@ -16180,14 +16165,14 @@
                     <a:lstStyle/>
                     <a:p>
                       <a:r>
-                        <a:rPr sz="800" b="0">
+                        <a:rPr sz="850" b="0">
                           <a:solidFill>
                             <a:srgbClr val="222A30"/>
                           </a:solidFill>
                           <a:latin typeface="Arial"/>
                           <a:ea typeface="Microsoft JhengHei"/>
                         </a:rPr>
-                        <a:t>某顆 cell 的鄰區表已達上限(8/8)</a:t>
+                        <a:t>鄰區表已達上限 8/8</a:t>
                       </a:r>
                     </a:p>
                   </a:txBody>
@@ -16203,14 +16188,14 @@
                     <a:lstStyle/>
                     <a:p>
                       <a:r>
-                        <a:rPr sz="800" b="0">
+                        <a:rPr sz="850" b="0">
                           <a:solidFill>
                             <a:srgbClr val="222A30"/>
                           </a:solidFill>
                           <a:latin typeface="Arial"/>
                           <a:ea typeface="Microsoft JhengHei"/>
                         </a:rPr>
-                        <a:t>灌合成條目,把 n60/n61/n62 三顆的表各自填到剛好 8 條滿</a:t>
+                        <a:t>灌合成條目把三顆填滿</a:t>
                       </a:r>
                     </a:p>
                   </a:txBody>
@@ -16226,14 +16211,14 @@
                     <a:lstStyle/>
                     <a:p>
                       <a:r>
-                        <a:rPr sz="800" b="0">
+                        <a:rPr sz="850" b="0">
                           <a:solidFill>
                             <a:srgbClr val="222A30"/>
                           </a:solidFill>
                           <a:latin typeface="Arial"/>
                           <a:ea typeface="Microsoft JhengHei"/>
                         </a:rPr>
-                        <a:t>容量是每顆 cell 各自算的;全網總數沒滿,不代表某一顆沒滿</a:t>
+                        <a:t>容量是每顆 cell 各自算</a:t>
                       </a:r>
                     </a:p>
                   </a:txBody>
@@ -16251,14 +16236,14 @@
                     <a:lstStyle/>
                     <a:p>
                       <a:r>
-                        <a:rPr sz="800" b="0">
+                        <a:rPr sz="850" b="0">
                           <a:solidFill>
                             <a:srgbClr val="222A30"/>
                           </a:solidFill>
                           <a:latin typeface="Arial"/>
                           <a:ea typeface="Microsoft JhengHei"/>
                         </a:rPr>
-                        <a:t>修剪候選 = 量測 ≤1/min 且換手嘗試 = 0(最冷)</a:t>
+                        <a:t>最冷條目:≤1/min 且零換手</a:t>
                       </a:r>
                     </a:p>
                   </a:txBody>
@@ -16274,14 +16259,14 @@
                     <a:lstStyle/>
                     <a:p>
                       <a:r>
-                        <a:rPr sz="800" b="0">
+                        <a:rPr sz="850" b="0">
                           <a:solidFill>
                             <a:srgbClr val="222A30"/>
                           </a:solidFill>
                           <a:latin typeface="Arial"/>
                           <a:ea typeface="Microsoft JhengHei"/>
                         </a:rPr>
-                        <a:t>灌進去的條目指向場景裡根本不存在的 cell,UE 永遠量不到、也不會換過去</a:t>
+                        <a:t>條目指向不存在的 cell</a:t>
                       </a:r>
                     </a:p>
                   </a:txBody>
@@ -16297,14 +16282,14 @@
                     <a:lstStyle/>
                     <a:p>
                       <a:r>
-                        <a:rPr sz="800" b="0">
+                        <a:rPr sz="850" b="0">
                           <a:solidFill>
                             <a:srgbClr val="222A30"/>
                           </a:solidFill>
                           <a:latin typeface="Arial"/>
                           <a:ea typeface="Microsoft JhengHei"/>
                         </a:rPr>
-                        <a:t>「冷」就是沒人在用;最冷的先刪,還有人在用的不能動</a:t>
+                        <a:t>沒人在用的先刪</a:t>
                       </a:r>
                     </a:p>
                   </a:txBody>
@@ -16322,14 +16307,14 @@
                     <a:lstStyle/>
                     <a:p>
                       <a:r>
-                        <a:rPr sz="800" b="0">
+                        <a:rPr sz="850" b="0">
                           <a:solidFill>
                             <a:srgbClr val="222A30"/>
                           </a:solidFill>
                           <a:latin typeface="Arial"/>
                           <a:ea typeface="Microsoft JhengHei"/>
                         </a:rPr>
-                        <a:t>刪下去才知道會不會被拒(受保護條目)</a:t>
+                        <a:t>刪除被拒(受保護條目)</a:t>
                       </a:r>
                     </a:p>
                   </a:txBody>
@@ -16345,14 +16330,14 @@
                     <a:lstStyle/>
                     <a:p>
                       <a:r>
-                        <a:rPr sz="800" b="0">
+                        <a:rPr sz="850" b="0">
                           <a:solidFill>
                             <a:srgbClr val="222A30"/>
                           </a:solidFill>
                           <a:latin typeface="Arial"/>
                           <a:ea typeface="Microsoft JhengHei"/>
                         </a:rPr>
-                        <a:t>其中一條刻意標成受保護,刪它 CU 一定回絕</a:t>
+                        <a:t>另放一條標成受保護的</a:t>
                       </a:r>
                     </a:p>
                   </a:txBody>
@@ -16368,14 +16353,14 @@
                     <a:lstStyle/>
                     <a:p>
                       <a:r>
-                        <a:rPr sz="800" b="0">
+                        <a:rPr sz="850" b="0">
                           <a:solidFill>
                             <a:srgbClr val="222A30"/>
                           </a:solidFill>
                           <a:latin typeface="Arial"/>
                           <a:ea typeface="Microsoft JhengHei"/>
                         </a:rPr>
-                        <a:t>v10 看不到「可否移除」,所以這是事後防線,不是事前檢查</a:t>
+                        <a:t>事後防線 —— 事前看不出來</a:t>
                       </a:r>
                     </a:p>
                   </a:txBody>
@@ -16804,10 +16789,9 @@
               <a:tr h="440000">
                 <a:tc>
                   <a:txBody>
-                    <a:bodyPr wrap="square"/>
+                    <a:bodyPr/>
                     <a:lstStyle/>
                     <a:p>
-                      <a:pPr algn="ctr"/>
                       <a:r>
                         <a:rPr sz="900" b="1">
                           <a:solidFill>
@@ -16816,7 +16800,7 @@
                           <a:latin typeface="Arial"/>
                           <a:ea typeface="Microsoft JhengHei"/>
                         </a:rPr>
-                        <a:t>指標名稱(門檻)</a:t>
+                        <a:t>觀測指標(門檻)</a:t>
                       </a:r>
                     </a:p>
                   </a:txBody>
@@ -16828,10 +16812,9 @@
                 </a:tc>
                 <a:tc>
                   <a:txBody>
-                    <a:bodyPr wrap="square"/>
+                    <a:bodyPr/>
                     <a:lstStyle/>
                     <a:p>
-                      <a:pPr algn="ctr"/>
                       <a:r>
                         <a:rPr sz="900" b="1">
                           <a:solidFill>
@@ -16840,7 +16823,7 @@
                           <a:latin typeface="Arial"/>
                           <a:ea typeface="Microsoft JhengHei"/>
                         </a:rPr>
-                        <a:t>指標模擬方式</a:t>
+                        <a:t>怎麼模擬出來</a:t>
                       </a:r>
                     </a:p>
                   </a:txBody>
@@ -16852,10 +16835,9 @@
                 </a:tc>
                 <a:tc>
                   <a:txBody>
-                    <a:bodyPr wrap="square"/>
+                    <a:bodyPr/>
                     <a:lstStyle/>
                     <a:p>
-                      <a:pPr algn="ctr"/>
                       <a:r>
                         <a:rPr sz="900" b="1">
                           <a:solidFill>
@@ -16864,7 +16846,7 @@
                           <a:latin typeface="Arial"/>
                           <a:ea typeface="Microsoft JhengHei"/>
                         </a:rPr>
-                        <a:t>指標意義</a:t>
+                        <a:t>代表什麼意思</a:t>
                       </a:r>
                     </a:p>
                   </a:txBody>
@@ -16923,14 +16905,14 @@
                     <a:lstStyle/>
                     <a:p>
                       <a:r>
-                        <a:rPr sz="800" b="0">
+                        <a:rPr sz="850" b="0">
                           <a:solidFill>
                             <a:srgbClr val="222A30"/>
                           </a:solidFill>
                           <a:latin typeface="Arial"/>
                           <a:ea typeface="Microsoft JhengHei"/>
                         </a:rPr>
-                        <a:t>換手失敗集中在「目標不可用」且持續(≥0.5/min、20 秒以上)</a:t>
+                        <a:t>目標不可用 ≥0.5/min 且持續</a:t>
                       </a:r>
                     </a:p>
                   </a:txBody>
@@ -16946,14 +16928,14 @@
                     <a:lstStyle/>
                     <a:p>
                       <a:r>
-                        <a:rPr sz="800" b="0">
+                        <a:rPr sz="850" b="0">
                           <a:solidFill>
                             <a:srgbClr val="222A30"/>
                           </a:solidFill>
                           <a:latin typeface="Arial"/>
                           <a:ea typeface="Microsoft JhengHei"/>
                         </a:rPr>
-                        <a:t>關係裡記的 PCI 留舊值 205、cell 實際是 233;執行器換手前比對不符就回失敗</a:t>
+                        <a:t>條目留舊 PCI 205,實際是 233</a:t>
                       </a:r>
                     </a:p>
                   </a:txBody>
@@ -16969,14 +16951,14 @@
                     <a:lstStyle/>
                     <a:p>
                       <a:r>
-                        <a:rPr sz="800" b="0">
+                        <a:rPr sz="850" b="0">
                           <a:solidFill>
                             <a:srgbClr val="222A30"/>
                           </a:solidFill>
                           <a:latin typeface="Arial"/>
                           <a:ea typeface="Microsoft JhengHei"/>
                         </a:rPr>
-                        <a:t>打不到的目標:關係還在,但表裡的對應已經失真</a:t>
+                        <a:t>打不到的目標</a:t>
                       </a:r>
                     </a:p>
                   </a:txBody>
@@ -16994,14 +16976,14 @@
                     <a:lstStyle/>
                     <a:p>
                       <a:r>
-                        <a:rPr sz="800" b="0">
+                        <a:rPr sz="850" b="0">
                           <a:solidFill>
                             <a:srgbClr val="222A30"/>
                           </a:solidFill>
                           <a:latin typeface="Arial"/>
                           <a:ea typeface="Microsoft JhengHei"/>
                         </a:rPr>
-                        <a:t>反查 UE 實際量到的 PCI,解回同一顆 cell</a:t>
+                        <a:t>反查後解回同一顆 cell</a:t>
                       </a:r>
                     </a:p>
                   </a:txBody>
@@ -17017,14 +16999,14 @@
                     <a:lstStyle/>
                     <a:p>
                       <a:r>
-                        <a:rPr sz="800" b="0">
+                        <a:rPr sz="850" b="0">
                           <a:solidFill>
                             <a:srgbClr val="222A30"/>
                           </a:solidFill>
                           <a:latin typeface="Arial"/>
                           <a:ea typeface="Microsoft JhengHei"/>
                         </a:rPr>
-                        <a:t>UE 量得到 b07 的真實 PCI 233,解析出的全域識別與表裡那條指的是同一顆</a:t>
+                        <a:t>UE 量得到它真實的 PCI</a:t>
                       </a:r>
                     </a:p>
                   </a:txBody>
@@ -17040,14 +17022,14 @@
                     <a:lstStyle/>
                     <a:p>
                       <a:r>
-                        <a:rPr sz="800" b="0">
+                        <a:rPr sz="850" b="0">
                           <a:solidFill>
                             <a:srgbClr val="222A30"/>
                           </a:solidFill>
                           <a:latin typeface="Arial"/>
                           <a:ea typeface="Microsoft JhengHei"/>
                         </a:rPr>
-                        <a:t>解回同一顆 = 該修對應;解回別顆才是新鄰居(第 4 題)—— 這是兩題的鑑別線</a:t>
+                        <a:t>該修對應,不是新鄰居</a:t>
                       </a:r>
                     </a:p>
                   </a:txBody>
@@ -17065,14 +17047,14 @@
                     <a:lstStyle/>
                     <a:p>
                       <a:r>
-                        <a:rPr sz="800" b="0">
+                        <a:rPr sz="850" b="0">
                           <a:solidFill>
                             <a:srgbClr val="222A30"/>
                           </a:solidFill>
                           <a:latin typeface="Arial"/>
                           <a:ea typeface="Microsoft JhengHei"/>
                         </a:rPr>
-                        <a:t>換手嘗試率 &gt; 0(真的有人在試)</a:t>
+                        <a:t>換手嘗試率 &gt; 0</a:t>
                       </a:r>
                     </a:p>
                   </a:txBody>
@@ -17088,14 +17070,14 @@
                     <a:lstStyle/>
                     <a:p>
                       <a:r>
-                        <a:rPr sz="800" b="0">
+                        <a:rPr sz="850" b="0">
                           <a:solidFill>
                             <a:srgbClr val="222A30"/>
                           </a:solidFill>
                           <a:latin typeface="Arial"/>
                           <a:ea typeface="Microsoft JhengHei"/>
                         </a:rPr>
-                        <a:t>佈病把 UE 搬回 s15,A3 才會反覆去撞這條壞掉的對應</a:t>
+                        <a:t>UE 搬回 s15 反覆去撞</a:t>
                       </a:r>
                     </a:p>
                   </a:txBody>
@@ -17111,14 +17093,14 @@
                     <a:lstStyle/>
                     <a:p>
                       <a:r>
-                        <a:rPr sz="800" b="0">
+                        <a:rPr sz="850" b="0">
                           <a:solidFill>
                             <a:srgbClr val="222A30"/>
                           </a:solidFill>
                           <a:latin typeface="Arial"/>
                           <a:ea typeface="Microsoft JhengHei"/>
                         </a:rPr>
-                        <a:t>沒人嘗試就沒有失敗率;嘗試 = 0 的「零失敗」是沒人走,不是健康</a:t>
+                        <a:t>沒人試就沒有失敗率可言</a:t>
                       </a:r>
                     </a:p>
                   </a:txBody>
@@ -17547,10 +17529,9 @@
               <a:tr h="450000">
                 <a:tc>
                   <a:txBody>
-                    <a:bodyPr wrap="square"/>
+                    <a:bodyPr/>
                     <a:lstStyle/>
                     <a:p>
-                      <a:pPr algn="ctr"/>
                       <a:r>
                         <a:rPr sz="900" b="1">
                           <a:solidFill>
@@ -17559,7 +17540,7 @@
                           <a:latin typeface="Arial"/>
                           <a:ea typeface="Microsoft JhengHei"/>
                         </a:rPr>
-                        <a:t>指標名稱(門檻)</a:t>
+                        <a:t>觀測指標(門檻)</a:t>
                       </a:r>
                     </a:p>
                   </a:txBody>
@@ -17571,10 +17552,9 @@
                 </a:tc>
                 <a:tc>
                   <a:txBody>
-                    <a:bodyPr wrap="square"/>
+                    <a:bodyPr/>
                     <a:lstStyle/>
                     <a:p>
-                      <a:pPr algn="ctr"/>
                       <a:r>
                         <a:rPr sz="900" b="1">
                           <a:solidFill>
@@ -17583,7 +17563,7 @@
                           <a:latin typeface="Arial"/>
                           <a:ea typeface="Microsoft JhengHei"/>
                         </a:rPr>
-                        <a:t>指標模擬方式</a:t>
+                        <a:t>怎麼模擬出來</a:t>
                       </a:r>
                     </a:p>
                   </a:txBody>
@@ -17595,10 +17575,9 @@
                 </a:tc>
                 <a:tc>
                   <a:txBody>
-                    <a:bodyPr wrap="square"/>
+                    <a:bodyPr/>
                     <a:lstStyle/>
                     <a:p>
-                      <a:pPr algn="ctr"/>
                       <a:r>
                         <a:rPr sz="900" b="1">
                           <a:solidFill>
@@ -17607,7 +17586,7 @@
                           <a:latin typeface="Arial"/>
                           <a:ea typeface="Microsoft JhengHei"/>
                         </a:rPr>
-                        <a:t>指標意義</a:t>
+                        <a:t>代表什麼意思</a:t>
                       </a:r>
                     </a:p>
                   </a:txBody>
@@ -17666,14 +17645,14 @@
                     <a:lstStyle/>
                     <a:p>
                       <a:r>
-                        <a:rPr sz="800" b="0">
+                        <a:rPr sz="850" b="0">
                           <a:solidFill>
                             <a:srgbClr val="222A30"/>
                           </a:solidFill>
                           <a:latin typeface="Arial"/>
                           <a:ea typeface="Microsoft JhengHei"/>
                         </a:rPr>
-                        <a:t>量測樣本率 = 0 且 換手嘗試率 = 0(兩個同時)</a:t>
+                        <a:t>量測與換手同時為 0</a:t>
                       </a:r>
                     </a:p>
                   </a:txBody>
@@ -17689,14 +17668,14 @@
                     <a:lstStyle/>
                     <a:p>
                       <a:r>
-                        <a:rPr sz="800" b="0">
+                        <a:rPr sz="850" b="0">
                           <a:solidFill>
                             <a:srgbClr val="222A30"/>
                           </a:solidFill>
                           <a:latin typeface="Arial"/>
                           <a:ea typeface="Microsoft JhengHei"/>
                         </a:rPr>
-                        <a:t>建一條指向場景裡不存在的 cell 的關係,UE 永遠量不到、也不會換過去</a:t>
+                        <a:t>條目指向不存在的 cell</a:t>
                       </a:r>
                     </a:p>
                   </a:txBody>
@@ -17712,14 +17691,14 @@
                     <a:lstStyle/>
                     <a:p>
                       <a:r>
-                        <a:rPr sz="800" b="0">
+                        <a:rPr sz="850" b="0">
                           <a:solidFill>
                             <a:srgbClr val="222A30"/>
                           </a:solidFill>
                           <a:latin typeface="Arial"/>
                           <a:ea typeface="Microsoft JhengHei"/>
                         </a:rPr>
-                        <a:t>只有一個為零不算:量測 0 可能只是這方向沒人量到,換手 0 可能只是最近沒人換</a:t>
+                        <a:t>雙歸零才算真的沒人用</a:t>
                       </a:r>
                     </a:p>
                   </a:txBody>
@@ -17737,14 +17716,14 @@
                     <a:lstStyle/>
                     <a:p>
                       <a:r>
-                        <a:rPr sz="800" b="0">
+                        <a:rPr sz="850" b="0">
                           <a:solidFill>
                             <a:srgbClr val="222A30"/>
                           </a:solidFill>
                           <a:latin typeface="Arial"/>
                           <a:ea typeface="Microsoft JhengHei"/>
                         </a:rPr>
-                        <a:t>持續滿整個窗口:正式 6 小時(測試壓成 5 分鐘)</a:t>
+                        <a:t>持續滿窗:6 小時(測試 5 分)</a:t>
                       </a:r>
                     </a:p>
                   </a:txBody>
@@ -17760,14 +17739,14 @@
                     <a:lstStyle/>
                     <a:p>
                       <a:r>
-                        <a:rPr sz="800" b="0">
+                        <a:rPr sz="850" b="0">
                           <a:solidFill>
                             <a:srgbClr val="222A30"/>
                           </a:solidFill>
                           <a:latin typeface="Arial"/>
                           <a:ea typeface="Microsoft JhengHei"/>
                         </a:rPr>
-                        <a:t>測試時把窗口 env 壓成 300 秒,判斷邏輯完全一樣,只是不用等 6 小時</a:t>
+                        <a:t>測試壓縮設定,判斷邏輯不變</a:t>
                       </a:r>
                     </a:p>
                   </a:txBody>
@@ -17783,14 +17762,14 @@
                     <a:lstStyle/>
                     <a:p>
                       <a:r>
-                        <a:rPr sz="800" b="0">
+                        <a:rPr sz="850" b="0">
                           <a:solidFill>
                             <a:srgbClr val="222A30"/>
                           </a:solidFill>
                           <a:latin typeface="Arial"/>
                           <a:ea typeface="Microsoft JhengHei"/>
                         </a:rPr>
-                        <a:t>6 小時是防手抖:半夜或人少的路段安靜十分鐘很正常,久到 6 小時才算數</a:t>
+                        <a:t>防手抖:短暫安靜很正常</a:t>
                       </a:r>
                     </a:p>
                   </a:txBody>
@@ -17808,14 +17787,14 @@
                     <a:lstStyle/>
                     <a:p>
                       <a:r>
-                        <a:rPr sz="800" b="0">
+                        <a:rPr sz="850" b="0">
                           <a:solidFill>
                             <a:srgbClr val="222A30"/>
                           </a:solidFill>
                           <a:latin typeface="Arial"/>
                           <a:ea typeface="Microsoft JhengHei"/>
                         </a:rPr>
-                        <a:t>刪不掉時,拒絕訊息要真的送到 RIC 那邊</a:t>
+                        <a:t>刪除被拒的通知要送到 RIC</a:t>
                       </a:r>
                     </a:p>
                   </a:txBody>
@@ -17831,14 +17810,14 @@
                     <a:lstStyle/>
                     <a:p>
                       <a:r>
-                        <a:rPr sz="800" b="0">
+                        <a:rPr sz="850" b="0">
                           <a:solidFill>
                             <a:srgbClr val="222A30"/>
                           </a:solidFill>
                           <a:latin typeface="Arial"/>
                           <a:ea typeface="Microsoft JhengHei"/>
                         </a:rPr>
-                        <a:t>另建一條標成受保護的關係,xApp 來刪時 CU 一定回絕並送出「刪除被拒」事件</a:t>
+                        <a:t>另建一條受保護的條目</a:t>
                       </a:r>
                     </a:p>
                   </a:txBody>
@@ -17854,14 +17833,14 @@
                     <a:lstStyle/>
                     <a:p>
                       <a:r>
-                        <a:rPr sz="800" b="0">
+                        <a:rPr sz="850" b="0">
                           <a:solidFill>
                             <a:srgbClr val="222A30"/>
                           </a:solidFill>
                           <a:latin typeface="Arial"/>
                           <a:ea typeface="Microsoft JhengHei"/>
                         </a:rPr>
-                        <a:t>v10 看不到「可否移除」,只能刪下去才知道;xApp 重開機後也靠這個事件想起「這條刪不掉」</a:t>
+                        <a:t>對方重開機靠它想起刪不掉</a:t>
                       </a:r>
                     </a:p>
                   </a:txBody>
@@ -18307,10 +18286,9 @@
               <a:tr h="440000">
                 <a:tc>
                   <a:txBody>
-                    <a:bodyPr wrap="square"/>
+                    <a:bodyPr/>
                     <a:lstStyle/>
                     <a:p>
-                      <a:pPr algn="ctr"/>
                       <a:r>
                         <a:rPr sz="900" b="1">
                           <a:solidFill>
@@ -18319,7 +18297,7 @@
                           <a:latin typeface="Arial"/>
                           <a:ea typeface="Microsoft JhengHei"/>
                         </a:rPr>
-                        <a:t>指標名稱(門檻)</a:t>
+                        <a:t>觀測指標(門檻)</a:t>
                       </a:r>
                     </a:p>
                   </a:txBody>
@@ -18331,10 +18309,9 @@
                 </a:tc>
                 <a:tc>
                   <a:txBody>
-                    <a:bodyPr wrap="square"/>
+                    <a:bodyPr/>
                     <a:lstStyle/>
                     <a:p>
-                      <a:pPr algn="ctr"/>
                       <a:r>
                         <a:rPr sz="900" b="1">
                           <a:solidFill>
@@ -18343,7 +18320,7 @@
                           <a:latin typeface="Arial"/>
                           <a:ea typeface="Microsoft JhengHei"/>
                         </a:rPr>
-                        <a:t>指標模擬方式</a:t>
+                        <a:t>怎麼模擬出來</a:t>
                       </a:r>
                     </a:p>
                   </a:txBody>
@@ -18355,10 +18332,9 @@
                 </a:tc>
                 <a:tc>
                   <a:txBody>
-                    <a:bodyPr wrap="square"/>
+                    <a:bodyPr/>
                     <a:lstStyle/>
                     <a:p>
-                      <a:pPr algn="ctr"/>
                       <a:r>
                         <a:rPr sz="900" b="1">
                           <a:solidFill>
@@ -18367,7 +18343,7 @@
                           <a:latin typeface="Arial"/>
                           <a:ea typeface="Microsoft JhengHei"/>
                         </a:rPr>
-                        <a:t>指標意義</a:t>
+                        <a:t>代表什麼意思</a:t>
                       </a:r>
                     </a:p>
                   </a:txBody>
@@ -18426,14 +18402,14 @@
                     <a:lstStyle/>
                     <a:p>
                       <a:r>
-                        <a:rPr sz="800" b="0">
+                        <a:rPr sz="850" b="0">
                           <a:solidFill>
                             <a:srgbClr val="222A30"/>
                           </a:solidFill>
                           <a:latin typeface="Arial"/>
                           <a:ea typeface="Microsoft JhengHei"/>
                         </a:rPr>
-                        <a:t>量測很強(≥10/min、≥−95dBm)</a:t>
+                        <a:t>量測強:≥10/min、≥−95dBm</a:t>
                       </a:r>
                     </a:p>
                   </a:txBody>
@@ -18449,14 +18425,14 @@
                     <a:lstStyle/>
                     <a:p>
                       <a:r>
-                        <a:rPr sz="800" b="0">
+                        <a:rPr sz="850" b="0">
                           <a:solidFill>
                             <a:srgbClr val="222A30"/>
                           </a:solidFill>
                           <a:latin typeface="Arial"/>
                           <a:ea typeface="Microsoft JhengHei"/>
                         </a:rPr>
-                        <a:t>UE 就在旁邊來回,對兩顆目標都量得清清楚楚</a:t>
+                        <a:t>UE 就在旁邊來回</a:t>
                       </a:r>
                     </a:p>
                   </a:txBody>
@@ -18472,14 +18448,14 @@
                     <a:lstStyle/>
                     <a:p>
                       <a:r>
-                        <a:rPr sz="800" b="0">
+                        <a:rPr sz="850" b="0">
                           <a:solidFill>
                             <a:srgbClr val="222A30"/>
                           </a:solidFill>
                           <a:latin typeface="Arial"/>
                           <a:ea typeface="Microsoft JhengHei"/>
                         </a:rPr>
-                        <a:t>訊號①:有人想去 —— 沒有需求的話,被封鎖也無所謂,不值得動</a:t>
+                        <a:t>訊號①:有人想去</a:t>
                       </a:r>
                     </a:p>
                   </a:txBody>
@@ -18497,14 +18473,14 @@
                     <a:lstStyle/>
                     <a:p>
                       <a:r>
-                        <a:rPr sz="800" b="0">
+                        <a:rPr sz="850" b="0">
                           <a:solidFill>
                             <a:srgbClr val="222A30"/>
                           </a:solidFill>
                           <a:latin typeface="Arial"/>
                           <a:ea typeface="Microsoft JhengHei"/>
                         </a:rPr>
-                        <a:t>換手嘗試 ≡ 0,且從未成功服務過</a:t>
+                        <a:t>嘗試 ≡ 0 且從未成功服務過</a:t>
                       </a:r>
                     </a:p>
                   </a:txBody>
@@ -18520,14 +18496,14 @@
                     <a:lstStyle/>
                     <a:p>
                       <a:r>
-                        <a:rPr sz="800" b="0">
+                        <a:rPr sz="850" b="0">
                           <a:solidFill>
                             <a:srgbClr val="222A30"/>
                           </a:solidFill>
                           <a:latin typeface="Arial"/>
                           <a:ea typeface="Microsoft JhengHei"/>
                         </a:rPr>
-                        <a:t>兩條關係都設成封鎖,A3 直接跳過,所以一次嘗試都不會發生</a:t>
+                        <a:t>兩條關係都設成封鎖</a:t>
                       </a:r>
                     </a:p>
                   </a:txBody>
@@ -18543,14 +18519,14 @@
                     <a:lstStyle/>
                     <a:p>
                       <a:r>
-                        <a:rPr sz="800" b="0">
+                        <a:rPr sz="850" b="0">
                           <a:solidFill>
                             <a:srgbClr val="222A30"/>
                           </a:solidFill>
                           <a:latin typeface="Arial"/>
                           <a:ea typeface="Microsoft JhengHei"/>
                         </a:rPr>
-                        <a:t>訊號②③:有需求卻連試都沒試 → 被擋在換手發起之前</a:t>
+                        <a:t>訊號②③:連試都沒試</a:t>
                       </a:r>
                     </a:p>
                   </a:txBody>
@@ -18568,14 +18544,14 @@
                     <a:lstStyle/>
                     <a:p>
                       <a:r>
-                        <a:rPr sz="800" b="0">
+                        <a:rPr sz="850" b="0">
                           <a:solidFill>
                             <a:srgbClr val="222A30"/>
                           </a:solidFill>
                           <a:latin typeface="Arial"/>
                           <a:ea typeface="Microsoft JhengHei"/>
                         </a:rPr>
-                        <a:t>過去的失敗紀錄:一條有 40 筆,一條 0 筆</a:t>
+                        <a:t>過去失敗:一條 40 筆、一條 0 筆</a:t>
                       </a:r>
                     </a:p>
                   </a:txBody>
@@ -18591,14 +18567,14 @@
                     <a:lstStyle/>
                     <a:p>
                       <a:r>
-                        <a:rPr sz="800" b="0">
+                        <a:rPr sz="850" b="0">
                           <a:solidFill>
                             <a:srgbClr val="222A30"/>
                           </a:solidFill>
                           <a:latin typeface="Arial"/>
                           <a:ea typeface="Microsoft JhengHei"/>
                         </a:rPr>
-                        <a:t>替其中一條灌 40 筆 6 小時前的接入失敗事件,另一條刻意一筆都不給</a:t>
+                        <a:t>替其中一條灌歷史失敗事件</a:t>
                       </a:r>
                     </a:p>
                   </a:txBody>
@@ -18614,14 +18590,14 @@
                     <a:lstStyle/>
                     <a:p>
                       <a:r>
-                        <a:rPr sz="800" b="0">
+                        <a:rPr sz="850" b="0">
                           <a:solidFill>
                             <a:srgbClr val="222A30"/>
                           </a:solidFill>
                           <a:latin typeface="Arial"/>
                           <a:ea typeface="Microsoft JhengHei"/>
                         </a:rPr>
-                        <a:t>訊號④:有失敗史 = 因為它壞了才封(正當);沒有 = 封得沒依據(該解開)</a:t>
+                        <a:t>訊號④:有史=正當,無史=無據</a:t>
                       </a:r>
                     </a:p>
                   </a:txBody>
@@ -21329,10 +21305,9 @@
               <a:tr h="450000">
                 <a:tc>
                   <a:txBody>
-                    <a:bodyPr wrap="square"/>
+                    <a:bodyPr/>
                     <a:lstStyle/>
                     <a:p>
-                      <a:pPr algn="ctr"/>
                       <a:r>
                         <a:rPr sz="900" b="1">
                           <a:solidFill>
@@ -21341,7 +21316,7 @@
                           <a:latin typeface="Arial"/>
                           <a:ea typeface="Microsoft JhengHei"/>
                         </a:rPr>
-                        <a:t>指標名稱(門檻)</a:t>
+                        <a:t>觀測指標(門檻)</a:t>
                       </a:r>
                     </a:p>
                   </a:txBody>
@@ -21353,10 +21328,9 @@
                 </a:tc>
                 <a:tc>
                   <a:txBody>
-                    <a:bodyPr wrap="square"/>
+                    <a:bodyPr/>
                     <a:lstStyle/>
                     <a:p>
-                      <a:pPr algn="ctr"/>
                       <a:r>
                         <a:rPr sz="900" b="1">
                           <a:solidFill>
@@ -21365,7 +21339,7 @@
                           <a:latin typeface="Arial"/>
                           <a:ea typeface="Microsoft JhengHei"/>
                         </a:rPr>
-                        <a:t>指標模擬方式</a:t>
+                        <a:t>怎麼模擬出來</a:t>
                       </a:r>
                     </a:p>
                   </a:txBody>
@@ -21377,10 +21351,9 @@
                 </a:tc>
                 <a:tc>
                   <a:txBody>
-                    <a:bodyPr wrap="square"/>
+                    <a:bodyPr/>
                     <a:lstStyle/>
                     <a:p>
-                      <a:pPr algn="ctr"/>
                       <a:r>
                         <a:rPr sz="900" b="1">
                           <a:solidFill>
@@ -21389,7 +21362,7 @@
                           <a:latin typeface="Arial"/>
                           <a:ea typeface="Microsoft JhengHei"/>
                         </a:rPr>
-                        <a:t>指標意義</a:t>
+                        <a:t>代表什麼意思</a:t>
                       </a:r>
                     </a:p>
                   </a:txBody>
@@ -21444,19 +21417,18 @@
               <a:tr h="450000">
                 <a:tc>
                   <a:txBody>
-                    <a:bodyPr wrap="square"/>
+                    <a:bodyPr/>
                     <a:lstStyle/>
                     <a:p>
-                      <a:pPr algn="l"/>
                       <a:r>
-                        <a:rPr sz="800" b="0">
+                        <a:rPr sz="850" b="0">
                           <a:solidFill>
                             <a:srgbClr val="222A30"/>
                           </a:solidFill>
                           <a:latin typeface="Arial"/>
                           <a:ea typeface="Microsoft JhengHei"/>
                         </a:rPr>
-                        <a:t>reestabInboundByPreviousPci ≥0.2/min</a:t>
+                        <a:t>重建回流率 ≥0.2/min</a:t>
                       </a:r>
                     </a:p>
                   </a:txBody>
@@ -21472,14 +21444,14 @@
                     <a:lstStyle/>
                     <a:p>
                       <a:r>
-                        <a:rPr sz="800" b="0">
+                        <a:rPr sz="850" b="0">
                           <a:solidFill>
                             <a:srgbClr val="222A30"/>
                           </a:solidFill>
                           <a:latin typeface="Arial"/>
                           <a:ea typeface="Microsoft JhengHei"/>
                         </a:rPr>
-                        <a:t>A3 想換手卻被鄰區表的閘擋下 → 訊號續弱到 T310 逾時 → 宣告 RLF → 就近重建到對向 cell</a:t>
+                        <a:t>剪掉關係 → A3 被擋 → UE 掉線重建</a:t>
                       </a:r>
                     </a:p>
                   </a:txBody>
@@ -21495,14 +21467,14 @@
                     <a:lstStyle/>
                     <a:p>
                       <a:r>
-                        <a:rPr sz="800" b="0">
+                        <a:rPr sz="850" b="0">
                           <a:solidFill>
                             <a:srgbClr val="222A30"/>
                           </a:solidFill>
                           <a:latin typeface="Arial"/>
                           <a:ea typeface="Microsoft JhengHei"/>
                         </a:rPr>
-                        <a:t>從同一個 pci 大量重建進來 = 那個方向本來就該有換手路徑;證據落在目標側</a:t>
+                        <a:t>換手失敗的回流證據(在目標側)</a:t>
                       </a:r>
                     </a:p>
                   </a:txBody>
@@ -21516,19 +21488,18 @@
               <a:tr h="450000">
                 <a:tc>
                   <a:txBody>
-                    <a:bodyPr wrap="square"/>
+                    <a:bodyPr/>
                     <a:lstStyle/>
                     <a:p>
-                      <a:pPr algn="l"/>
                       <a:r>
-                        <a:rPr sz="800" b="0">
+                        <a:rPr sz="850" b="0">
                           <a:solidFill>
                             <a:srgbClr val="222A30"/>
                           </a:solidFill>
                           <a:latin typeface="Arial"/>
                           <a:ea typeface="Microsoft JhengHei"/>
                         </a:rPr>
-                        <a:t>來源歸屬(每筆量測記下當下的服務 cell)</a:t>
+                        <a:t>重建/量測的來源 cell</a:t>
                       </a:r>
                     </a:p>
                   </a:txBody>
@@ -21544,14 +21515,14 @@
                     <a:lstStyle/>
                     <a:p>
                       <a:r>
-                        <a:rPr sz="800" b="0">
+                        <a:rPr sz="850" b="0">
                           <a:solidFill>
                             <a:srgbClr val="222A30"/>
                           </a:solidFill>
                           <a:latin typeface="Arial"/>
                           <a:ea typeface="Microsoft JhengHei"/>
                         </a:rPr>
-                        <a:t>每筆回報記下「當下」的 服務 cell(08/26 改為量測當時,不是查詢當下)</a:t>
+                        <a:t>每筆回報記下當下的服務 cell</a:t>
                       </a:r>
                     </a:p>
                   </a:txBody>
@@ -21567,14 +21538,14 @@
                     <a:lstStyle/>
                     <a:p>
                       <a:r>
-                        <a:rPr sz="800" b="0">
+                        <a:rPr sz="850" b="0">
                           <a:solidFill>
                             <a:srgbClr val="222A30"/>
                           </a:solidFill>
                           <a:latin typeface="Arial"/>
                           <a:ea typeface="Microsoft JhengHei"/>
                         </a:rPr>
-                        <a:t>缺鄰要補在「來源→目標」這條有向邊上;沒有來源歸屬只知道有人掉線,不知道該對哪顆 cell 補關係</a:t>
+                        <a:t>知道該幫哪一顆補關係</a:t>
                       </a:r>
                     </a:p>
                   </a:txBody>
@@ -21588,19 +21559,18 @@
               <a:tr h="450000">
                 <a:tc>
                   <a:txBody>
-                    <a:bodyPr wrap="square"/>
+                    <a:bodyPr/>
                     <a:lstStyle/>
                     <a:p>
-                      <a:pPr algn="l"/>
                       <a:r>
-                        <a:rPr sz="800" b="0">
+                        <a:rPr sz="850" b="0">
                           <a:solidFill>
                             <a:srgbClr val="222A30"/>
                           </a:solidFill>
                           <a:latin typeface="Arial"/>
                           <a:ea typeface="Microsoft JhengHei"/>
                         </a:rPr>
-                        <a:t>鄰區表查無該關係</a:t>
+                        <a:t>鄰區表查無此關係</a:t>
                       </a:r>
                     </a:p>
                   </a:txBody>
@@ -21616,14 +21586,14 @@
                     <a:lstStyle/>
                     <a:p>
                       <a:r>
-                        <a:rPr sz="800" b="0">
+                        <a:rPr sz="850" b="0">
                           <a:solidFill>
                             <a:srgbClr val="222A30"/>
                           </a:solidFill>
                           <a:latin typeface="Arial"/>
                           <a:ea typeface="Microsoft JhengHei"/>
                         </a:rPr>
-                        <a:t>佈病把 src→nbr 條目從表上刪掉;兩端 cell 與量測全部正常</a:t>
+                        <a:t>佈病直接刪掉這一條</a:t>
                       </a:r>
                     </a:p>
                   </a:txBody>
@@ -21639,14 +21609,14 @@
                     <a:lstStyle/>
                     <a:p>
                       <a:r>
-                        <a:rPr sz="800" b="0">
+                        <a:rPr sz="850" b="0">
                           <a:solidFill>
                             <a:srgbClr val="222A30"/>
                           </a:solidFill>
                           <a:latin typeface="Arial"/>
                           <a:ea typeface="Microsoft JhengHei"/>
                         </a:rPr>
-                        <a:t>訊號夠強且持續、表上卻查無 —— 這就是卷面分類一的判準本身</a:t>
+                        <a:t>缺漏鄰區的定義本身</a:t>
                       </a:r>
                     </a:p>
                   </a:txBody>
@@ -22165,10 +22135,9 @@
               <a:tr h="450000">
                 <a:tc>
                   <a:txBody>
-                    <a:bodyPr wrap="square"/>
+                    <a:bodyPr/>
                     <a:lstStyle/>
                     <a:p>
-                      <a:pPr algn="ctr"/>
                       <a:r>
                         <a:rPr sz="900" b="1">
                           <a:solidFill>
@@ -22177,7 +22146,7 @@
                           <a:latin typeface="Arial"/>
                           <a:ea typeface="Microsoft JhengHei"/>
                         </a:rPr>
-                        <a:t>指標名稱(門檻)</a:t>
+                        <a:t>觀測指標(門檻)</a:t>
                       </a:r>
                     </a:p>
                   </a:txBody>
@@ -22189,10 +22158,9 @@
                 </a:tc>
                 <a:tc>
                   <a:txBody>
-                    <a:bodyPr wrap="square"/>
+                    <a:bodyPr/>
                     <a:lstStyle/>
                     <a:p>
-                      <a:pPr algn="ctr"/>
                       <a:r>
                         <a:rPr sz="900" b="1">
                           <a:solidFill>
@@ -22201,7 +22169,7 @@
                           <a:latin typeface="Arial"/>
                           <a:ea typeface="Microsoft JhengHei"/>
                         </a:rPr>
-                        <a:t>指標模擬方式</a:t>
+                        <a:t>怎麼模擬出來</a:t>
                       </a:r>
                     </a:p>
                   </a:txBody>
@@ -22213,10 +22181,9 @@
                 </a:tc>
                 <a:tc>
                   <a:txBody>
-                    <a:bodyPr wrap="square"/>
+                    <a:bodyPr/>
                     <a:lstStyle/>
                     <a:p>
-                      <a:pPr algn="ctr"/>
                       <a:r>
                         <a:rPr sz="900" b="1">
                           <a:solidFill>
@@ -22225,7 +22192,7 @@
                           <a:latin typeface="Arial"/>
                           <a:ea typeface="Microsoft JhengHei"/>
                         </a:rPr>
-                        <a:t>指標意義</a:t>
+                        <a:t>代表什麼意思</a:t>
                       </a:r>
                     </a:p>
                   </a:txBody>
@@ -22280,19 +22247,18 @@
               <a:tr h="450000">
                 <a:tc>
                   <a:txBody>
-                    <a:bodyPr wrap="square"/>
+                    <a:bodyPr/>
                     <a:lstStyle/>
                     <a:p>
-                      <a:pPr algn="l"/>
                       <a:r>
-                        <a:rPr sz="800" b="0">
+                        <a:rPr sz="850" b="0">
                           <a:solidFill>
                             <a:srgbClr val="222A30"/>
                           </a:solidFill>
                           <a:latin typeface="Arial"/>
                           <a:ea typeface="Microsoft JhengHei"/>
                         </a:rPr>
-                        <a:t>比服務 cell 弱不到 6dB(已達該換手的程度)</a:t>
+                        <a:t>與服務 cell 差距 ≤6dB</a:t>
                       </a:r>
                     </a:p>
                   </a:txBody>
@@ -22308,14 +22274,14 @@
                     <a:lstStyle/>
                     <a:p>
                       <a:r>
-                        <a:rPr sz="800" b="0">
+                        <a:rPr sz="850" b="0">
                           <a:solidFill>
                             <a:srgbClr val="222A30"/>
                           </a:solidFill>
                           <a:latin typeface="Arial"/>
                           <a:ea typeface="Microsoft JhengHei"/>
                         </a:rPr>
-                        <a:t>UE 位置由 PathSolver 逐點實測挑出:鄰區訊號逼近服務 cell 但 SINR 仍 ≥ −2,不會掉線</a:t>
+                        <a:t>UE 位置實測落在此窄帶</a:t>
                       </a:r>
                     </a:p>
                   </a:txBody>
@@ -22331,14 +22297,14 @@
                     <a:lstStyle/>
                     <a:p>
                       <a:r>
-                        <a:rPr sz="800" b="0">
+                        <a:rPr sz="850" b="0">
                           <a:solidFill>
                             <a:srgbClr val="222A30"/>
                           </a:solidFill>
                           <a:latin typeface="Arial"/>
                           <a:ea typeface="Microsoft JhengHei"/>
                         </a:rPr>
-                        <a:t>「該換卻沒得換」的訊號差;落在換手等效門檻內才算真候選</a:t>
+                        <a:t>已達「該換手」的程度</a:t>
                       </a:r>
                     </a:p>
                   </a:txBody>
@@ -22352,19 +22318,18 @@
               <a:tr h="450000">
                 <a:tc>
                   <a:txBody>
-                    <a:bodyPr wrap="square"/>
+                    <a:bodyPr/>
                     <a:lstStyle/>
                     <a:p>
-                      <a:pPr algn="l"/>
                       <a:r>
-                        <a:rPr sz="800" b="0">
+                        <a:rPr sz="850" b="0">
                           <a:solidFill>
                             <a:srgbClr val="222A30"/>
                           </a:solidFill>
                           <a:latin typeface="Arial"/>
                           <a:ea typeface="Microsoft JhengHei"/>
                         </a:rPr>
-                        <a:t>RSRP ≥ −85dBm ∧ 率 ≥5/min ∧ 連 3 窗</a:t>
+                        <a:t>≥−85dBm、≥5/min、連 3 窗</a:t>
                       </a:r>
                     </a:p>
                   </a:txBody>
@@ -22380,14 +22345,14 @@
                     <a:lstStyle/>
                     <a:p>
                       <a:r>
-                        <a:rPr sz="800" b="0">
+                        <a:rPr sz="850" b="0">
                           <a:solidFill>
                             <a:srgbClr val="222A30"/>
                           </a:solidFill>
                           <a:latin typeface="Arial"/>
                           <a:ea typeface="Microsoft JhengHei"/>
                         </a:rPr>
-                        <a:t>5 台 UE 沿邊界來回,量測持續進來而非偶發經過</a:t>
+                        <a:t>5 台 UE 沿邊界來回</a:t>
                       </a:r>
                     </a:p>
                   </a:txBody>
@@ -22403,14 +22368,14 @@
                     <a:lstStyle/>
                     <a:p>
                       <a:r>
-                        <a:rPr sz="800" b="0">
+                        <a:rPr sz="850" b="0">
                           <a:solidFill>
                             <a:srgbClr val="222A30"/>
                           </a:solidFill>
                           <a:latin typeface="Arial"/>
                           <a:ea typeface="Microsoft JhengHei"/>
                         </a:rPr>
-                        <a:t>單一窗口撞到不算數,要連續多窗才排除雜訊(卷面的持續性要求)</a:t>
+                        <a:t>夠強又夠久,排除雜訊</a:t>
                       </a:r>
                     </a:p>
                   </a:txBody>
@@ -22424,19 +22389,18 @@
               <a:tr h="450000">
                 <a:tc>
                   <a:txBody>
-                    <a:bodyPr wrap="square"/>
+                    <a:bodyPr/>
                     <a:lstStyle/>
                     <a:p>
-                      <a:pPr algn="l"/>
                       <a:r>
-                        <a:rPr sz="800" b="0">
+                        <a:rPr sz="850" b="0">
                           <a:solidFill>
                             <a:srgbClr val="222A30"/>
                           </a:solidFill>
                           <a:latin typeface="Arial"/>
                           <a:ea typeface="Microsoft JhengHei"/>
                         </a:rPr>
-                        <a:t>鄰區表查無;既有關係要否決須有具名失敗</a:t>
+                        <a:t>鄰區表查無;既有關係無失敗史</a:t>
                       </a:r>
                     </a:p>
                   </a:txBody>
@@ -22452,14 +22416,14 @@
                     <a:lstStyle/>
                     <a:p>
                       <a:r>
-                        <a:rPr sz="800" b="0">
+                        <a:rPr sz="850" b="0">
                           <a:solidFill>
                             <a:srgbClr val="222A30"/>
                           </a:solidFill>
                           <a:latin typeface="Arial"/>
                           <a:ea typeface="Microsoft JhengHei"/>
                         </a:rPr>
-                        <a:t>佈病剪掉 s25→n35,其餘既有關係維持健康高成功率</a:t>
+                        <a:t>剪掉 s25→n35,其餘維持健康</a:t>
                       </a:r>
                     </a:p>
                   </a:txBody>
@@ -22475,14 +22439,14 @@
                     <a:lstStyle/>
                     <a:p>
                       <a:r>
-                        <a:rPr sz="800" b="0">
+                        <a:rPr sz="850" b="0">
                           <a:solidFill>
                             <a:srgbClr val="222A30"/>
                           </a:solidFill>
                           <a:latin typeface="Arial"/>
                           <a:ea typeface="Microsoft JhengHei"/>
                         </a:rPr>
-                        <a:t>只有「有具名失敗的既有關係」才可否決建關係;單純沒人用不構成否決理由</a:t>
+                        <a:t>要否決須有具名失敗當證據</a:t>
                       </a:r>
                     </a:p>
                   </a:txBody>
@@ -24325,10 +24289,9 @@
               <a:tr h="450000">
                 <a:tc>
                   <a:txBody>
-                    <a:bodyPr wrap="square"/>
+                    <a:bodyPr/>
                     <a:lstStyle/>
                     <a:p>
-                      <a:pPr algn="ctr"/>
                       <a:r>
                         <a:rPr sz="900" b="1">
                           <a:solidFill>
@@ -24337,7 +24300,7 @@
                           <a:latin typeface="Arial"/>
                           <a:ea typeface="Microsoft JhengHei"/>
                         </a:rPr>
-                        <a:t>指標名稱(門檻)</a:t>
+                        <a:t>觀測指標(門檻)</a:t>
                       </a:r>
                     </a:p>
                   </a:txBody>
@@ -24349,10 +24312,9 @@
                 </a:tc>
                 <a:tc>
                   <a:txBody>
-                    <a:bodyPr wrap="square"/>
+                    <a:bodyPr/>
                     <a:lstStyle/>
                     <a:p>
-                      <a:pPr algn="ctr"/>
                       <a:r>
                         <a:rPr sz="900" b="1">
                           <a:solidFill>
@@ -24361,7 +24323,7 @@
                           <a:latin typeface="Arial"/>
                           <a:ea typeface="Microsoft JhengHei"/>
                         </a:rPr>
-                        <a:t>指標模擬方式</a:t>
+                        <a:t>怎麼模擬出來</a:t>
                       </a:r>
                     </a:p>
                   </a:txBody>
@@ -24373,10 +24335,9 @@
                 </a:tc>
                 <a:tc>
                   <a:txBody>
-                    <a:bodyPr wrap="square"/>
+                    <a:bodyPr/>
                     <a:lstStyle/>
                     <a:p>
-                      <a:pPr algn="ctr"/>
                       <a:r>
                         <a:rPr sz="900" b="1">
                           <a:solidFill>
@@ -24385,7 +24346,7 @@
                           <a:latin typeface="Arial"/>
                           <a:ea typeface="Microsoft JhengHei"/>
                         </a:rPr>
-                        <a:t>指標意義</a:t>
+                        <a:t>代表什麼意思</a:t>
                       </a:r>
                     </a:p>
                   </a:txBody>
@@ -24444,14 +24405,14 @@
                     <a:lstStyle/>
                     <a:p>
                       <a:r>
-                        <a:rPr sz="800" b="0">
+                        <a:rPr sz="850" b="0">
                           <a:solidFill>
                             <a:srgbClr val="222A30"/>
                           </a:solidFill>
                           <a:latin typeface="Arial"/>
                           <a:ea typeface="Microsoft JhengHei"/>
                         </a:rPr>
-                        <a:t>服務 cell 訊號中位 ≤ −105dBm</a:t>
+                        <a:t>服務訊號中位 ≤−105dBm</a:t>
                       </a:r>
                     </a:p>
                   </a:txBody>
@@ -24467,14 +24428,14 @@
                     <a:lstStyle/>
                     <a:p>
                       <a:r>
-                        <a:rPr sz="800" b="0">
+                        <a:rPr sz="850" b="0">
                           <a:solidFill>
                             <a:srgbClr val="222A30"/>
                           </a:solidFill>
                           <a:latin typeface="Arial"/>
                           <a:ea typeface="Microsoft JhengHei"/>
                         </a:rPr>
-                        <a:t>UE 停在 s28 天線零陷內的深邊緣點,live 實測 服務訊號 −107.5dBm</a:t>
+                        <a:t>UE 停在天線凹陷處(實測 −107.5)</a:t>
                       </a:r>
                     </a:p>
                   </a:txBody>
@@ -24490,14 +24451,14 @@
                     <a:lstStyle/>
                     <a:p>
                       <a:r>
-                        <a:rPr sz="800" b="0">
+                        <a:rPr sz="850" b="0">
                           <a:solidFill>
                             <a:srgbClr val="222A30"/>
                           </a:solidFill>
                           <a:latin typeface="Arial"/>
                           <a:ea typeface="Microsoft JhengHei"/>
                         </a:rPr>
-                        <a:t>「深邊緣」定義在服務訊號的絕對值,不是距離遠近;拉距離拉不出來,靠場型零陷做到</a:t>
+                        <a:t>深邊緣的定義:看絕對值</a:t>
                       </a:r>
                     </a:p>
                   </a:txBody>
@@ -24511,19 +24472,18 @@
               <a:tr h="450000">
                 <a:tc>
                   <a:txBody>
-                    <a:bodyPr wrap="square"/>
+                    <a:bodyPr/>
                     <a:lstStyle/>
                     <a:p>
-                      <a:pPr algn="l"/>
                       <a:r>
-                        <a:rPr sz="800" b="0">
+                        <a:rPr sz="850" b="0">
                           <a:solidFill>
                             <a:srgbClr val="222A30"/>
                           </a:solidFill>
                           <a:latin typeface="Arial"/>
                           <a:ea typeface="Microsoft JhengHei"/>
                         </a:rPr>
-                        <a:t>相對增益 ≥10dB(鄰區 − 同報 服務訊號)</a:t>
+                        <a:t>相對增益 ≥10dB</a:t>
                       </a:r>
                     </a:p>
                   </a:txBody>
@@ -24539,14 +24499,14 @@
                     <a:lstStyle/>
                     <a:p>
                       <a:r>
-                        <a:rPr sz="800" b="0">
+                        <a:rPr sz="850" b="0">
                           <a:solidFill>
                             <a:srgbClr val="222A30"/>
                           </a:solidFill>
                           <a:latin typeface="Arial"/>
                           <a:ea typeface="Microsoft JhengHei"/>
                         </a:rPr>
-                        <a:t>n91 佈在 UE 的 45° 側 → −87.8dBm,較 服務訊號 高 +19.8dB(卷面 +18.5)</a:t>
+                        <a:t>n91 佈在 45 度側(實測 +19.8dB)</a:t>
                       </a:r>
                     </a:p>
                   </a:txBody>
@@ -24562,14 +24522,14 @@
                     <a:lstStyle/>
                     <a:p>
                       <a:r>
-                        <a:rPr sz="800" b="0">
+                        <a:rPr sz="850" b="0">
                           <a:solidFill>
                             <a:srgbClr val="222A30"/>
                           </a:solidFill>
                           <a:latin typeface="Arial"/>
                           <a:ea typeface="Microsoft JhengHei"/>
                         </a:rPr>
-                        <a:t>判準改看相對增益:絕對值再低,只要比服務 cell 好 10dB 就值得建關係</a:t>
+                        <a:t>絕對值再低,比服務好就值得建</a:t>
                       </a:r>
                     </a:p>
                   </a:txBody>
@@ -24587,14 +24547,14 @@
                     <a:lstStyle/>
                     <a:p>
                       <a:r>
-                        <a:rPr sz="800" b="0">
+                        <a:rPr sz="850" b="0">
                           <a:solidFill>
                             <a:srgbClr val="222A30"/>
                           </a:solidFill>
                           <a:latin typeface="Arial"/>
                           <a:ea typeface="Microsoft JhengHei"/>
                         </a:rPr>
-                        <a:t>樣本稀疏(簽名,不作判準)</a:t>
+                        <a:t>樣本稀疏(僅為簽名)</a:t>
                       </a:r>
                     </a:p>
                   </a:txBody>
@@ -24610,14 +24570,14 @@
                     <a:lstStyle/>
                     <a:p>
                       <a:r>
-                        <a:rPr sz="800" b="0">
+                        <a:rPr sz="850" b="0">
                           <a:solidFill>
                             <a:srgbClr val="222A30"/>
                           </a:solidFill>
                           <a:latin typeface="Arial"/>
                           <a:ea typeface="Microsoft JhengHei"/>
                         </a:rPr>
-                        <a:t>本場實測 140/min;要做出卷面的 0.6/min 需 UE 只偶爾經過,與持續窗互斥</a:t>
+                        <a:t>本場 140/min,未做到卷面 0.6</a:t>
                       </a:r>
                     </a:p>
                   </a:txBody>
@@ -24633,14 +24593,14 @@
                     <a:lstStyle/>
                     <a:p>
                       <a:r>
-                        <a:rPr sz="800" b="0">
+                        <a:rPr sz="850" b="0">
                           <a:solidFill>
                             <a:srgbClr val="222A30"/>
                           </a:solidFill>
                           <a:latin typeface="Arial"/>
                           <a:ea typeface="Microsoft JhengHei"/>
                         </a:rPr>
-                        <a:t>卷面明列「以量能門檻過濾」為典型錯誤 —— 稀疏不得作為駁回理由</a:t>
+                        <a:t>稀疏不得當作駁回理由</a:t>
                       </a:r>
                     </a:p>
                   </a:txBody>
@@ -25069,10 +25029,9 @@
               <a:tr h="450000">
                 <a:tc>
                   <a:txBody>
-                    <a:bodyPr wrap="square"/>
+                    <a:bodyPr/>
                     <a:lstStyle/>
                     <a:p>
-                      <a:pPr algn="ctr"/>
                       <a:r>
                         <a:rPr sz="900" b="1">
                           <a:solidFill>
@@ -25081,7 +25040,7 @@
                           <a:latin typeface="Arial"/>
                           <a:ea typeface="Microsoft JhengHei"/>
                         </a:rPr>
-                        <a:t>指標名稱(門檻)</a:t>
+                        <a:t>觀測指標(門檻)</a:t>
                       </a:r>
                     </a:p>
                   </a:txBody>
@@ -25093,10 +25052,9 @@
                 </a:tc>
                 <a:tc>
                   <a:txBody>
-                    <a:bodyPr wrap="square"/>
+                    <a:bodyPr/>
                     <a:lstStyle/>
                     <a:p>
-                      <a:pPr algn="ctr"/>
                       <a:r>
                         <a:rPr sz="900" b="1">
                           <a:solidFill>
@@ -25105,7 +25063,7 @@
                           <a:latin typeface="Arial"/>
                           <a:ea typeface="Microsoft JhengHei"/>
                         </a:rPr>
-                        <a:t>指標模擬方式</a:t>
+                        <a:t>怎麼模擬出來</a:t>
                       </a:r>
                     </a:p>
                   </a:txBody>
@@ -25117,10 +25075,9 @@
                 </a:tc>
                 <a:tc>
                   <a:txBody>
-                    <a:bodyPr wrap="square"/>
+                    <a:bodyPr/>
                     <a:lstStyle/>
                     <a:p>
-                      <a:pPr algn="ctr"/>
                       <a:r>
                         <a:rPr sz="900" b="1">
                           <a:solidFill>
@@ -25129,7 +25086,7 @@
                           <a:latin typeface="Arial"/>
                           <a:ea typeface="Microsoft JhengHei"/>
                         </a:rPr>
-                        <a:t>指標意義</a:t>
+                        <a:t>代表什麼意思</a:t>
                       </a:r>
                     </a:p>
                   </a:txBody>
@@ -25184,19 +25141,18 @@
               <a:tr h="450000">
                 <a:tc>
                   <a:txBody>
-                    <a:bodyPr wrap="square"/>
+                    <a:bodyPr/>
                     <a:lstStyle/>
                     <a:p>
-                      <a:pPr algn="l"/>
                       <a:r>
-                        <a:rPr sz="800" b="0">
+                        <a:rPr sz="850" b="0">
                           <a:solidFill>
                             <a:srgbClr val="222A30"/>
                           </a:solidFill>
                           <a:latin typeface="Arial"/>
                           <a:ea typeface="Microsoft JhengHei"/>
                         </a:rPr>
-                        <a:t>整張鄰區表都查不到的 (PCI, 頻點)</a:t>
+                        <a:t>整張鄰區表查無此 (PCI, 頻點)</a:t>
                       </a:r>
                     </a:p>
                   </a:txBody>
@@ -25212,14 +25168,14 @@
                     <a:lstStyle/>
                     <a:p>
                       <a:r>
-                        <a:rPr sz="800" b="0">
+                        <a:rPr sz="850" b="0">
                           <a:solidFill>
                             <a:srgbClr val="222A30"/>
                           </a:solidFill>
                           <a:latin typeface="Arial"/>
                           <a:ea typeface="Microsoft JhengHei"/>
                         </a:rPr>
-                        <a:t>場景多放一顆 unk_c0(pci 301),且不建任何指向它的關係</a:t>
+                        <a:t>新增一顆 cell 且不建任何關係</a:t>
                       </a:r>
                     </a:p>
                   </a:txBody>
@@ -25235,14 +25191,14 @@
                     <a:lstStyle/>
                     <a:p>
                       <a:r>
-                        <a:rPr sz="800" b="0">
+                        <a:rPr sz="850" b="0">
                           <a:solidFill>
                             <a:srgbClr val="222A30"/>
                           </a:solidFill>
                           <a:latin typeface="Arial"/>
                           <a:ea typeface="Microsoft JhengHei"/>
                         </a:rPr>
-                        <a:t>「全表查無」才算新面孔;只要出現在既有 targets 裡就不是這題</a:t>
+                        <a:t>全新面孔的定義</a:t>
                       </a:r>
                     </a:p>
                   </a:txBody>
@@ -25256,19 +25212,18 @@
               <a:tr h="450000">
                 <a:tc>
                   <a:txBody>
-                    <a:bodyPr wrap="square"/>
+                    <a:bodyPr/>
                     <a:lstStyle/>
                     <a:p>
-                      <a:pPr algn="l"/>
                       <a:r>
-                        <a:rPr sz="800" b="0">
+                        <a:rPr sz="850" b="0">
                           <a:solidFill>
                             <a:srgbClr val="222A30"/>
                           </a:solidFill>
                           <a:latin typeface="Arial"/>
                           <a:ea typeface="Microsoft JhengHei"/>
                         </a:rPr>
-                        <a:t>率 ≥5/min ∧ RSRP ≥ −100dBm ∧ 連 2 窗</a:t>
+                        <a:t>≥−100dBm、≥5/min、連 2 窗</a:t>
                       </a:r>
                     </a:p>
                   </a:txBody>
@@ -25284,14 +25239,14 @@
                     <a:lstStyle/>
                     <a:p>
                       <a:r>
-                        <a:rPr sz="800" b="0">
+                        <a:rPr sz="850" b="0">
                           <a:solidFill>
                             <a:srgbClr val="222A30"/>
                           </a:solidFill>
                           <a:latin typeface="Arial"/>
                           <a:ea typeface="Microsoft JhengHei"/>
                         </a:rPr>
-                        <a:t>UE 走近它,量測強度與回報率穩定達標(門檻 08/26 由 30 改回卷面的 5/min)</a:t>
+                        <a:t>UE 走近它,量測穩定達標</a:t>
                       </a:r>
                     </a:p>
                   </a:txBody>
@@ -25307,14 +25262,14 @@
                     <a:lstStyle/>
                     <a:p>
                       <a:r>
-                        <a:rPr sz="800" b="0">
+                        <a:rPr sz="850" b="0">
                           <a:solidFill>
                             <a:srgbClr val="222A30"/>
                           </a:solidFill>
                           <a:latin typeface="Arial"/>
                           <a:ea typeface="Microsoft JhengHei"/>
                         </a:rPr>
-                        <a:t>夠強又持續才值得建,避免把偶發雜訊當成新鄰居</a:t>
+                        <a:t>夠強又夠久才建,排除雜訊</a:t>
                       </a:r>
                     </a:p>
                   </a:txBody>
@@ -25328,12 +25283,11 @@
               <a:tr h="450000">
                 <a:tc>
                   <a:txBody>
-                    <a:bodyPr wrap="square"/>
+                    <a:bodyPr/>
                     <a:lstStyle/>
                     <a:p>
-                      <a:pPr algn="l"/>
                       <a:r>
-                        <a:rPr sz="800" b="0">
+                        <a:rPr sz="850" b="0">
                           <a:solidFill>
                             <a:srgbClr val="222A30"/>
                           </a:solidFill>
@@ -25356,14 +25310,14 @@
                     <a:lstStyle/>
                     <a:p>
                       <a:r>
-                        <a:rPr sz="800" b="0">
+                        <a:rPr sz="850" b="0">
                           <a:solidFill>
                             <a:srgbClr val="222A30"/>
                           </a:solidFill>
                           <a:latin typeface="Arial"/>
                           <a:ea typeface="Microsoft JhengHei"/>
                         </a:rPr>
-                        <a:t>其餘既有關係維持高成功率,不注入任何失敗</a:t>
+                        <a:t>其餘關係不注入任何失敗</a:t>
                       </a:r>
                     </a:p>
                   </a:txBody>
@@ -25379,14 +25333,14 @@
                     <a:lstStyle/>
                     <a:p>
                       <a:r>
-                        <a:rPr sz="800" b="0">
+                        <a:rPr sz="850" b="0">
                           <a:solidFill>
                             <a:srgbClr val="222A30"/>
                           </a:solidFill>
                           <a:latin typeface="Arial"/>
                           <a:ea typeface="Microsoft JhengHei"/>
                         </a:rPr>
-                        <a:t>排除「其實是既有關係壞掉」的可能;結果型 KPI 不可單獨當根因</a:t>
+                        <a:t>排除「其實是既有關係壞掉」</a:t>
                       </a:r>
                     </a:p>
                   </a:txBody>

--- a/docs/report/8_27_進度報告_v10十二題.pptx
+++ b/docs/report/8_27_進度報告_v10十二題.pptx
@@ -13674,8 +13674,8 @@
         </p:nvSpPr>
         <p:spPr>
           <a:xfrm>
-            <a:off x="320040" y="3990000"/>
-            <a:ext cx="5577840" cy="890000"/>
+            <a:off x="320040" y="4080000"/>
+            <a:ext cx="5577840" cy="740000"/>
           </a:xfrm>
           <a:prstGeom prst="roundRect">
             <a:avLst/>
@@ -13717,14 +13717,14 @@
               </a:spcAft>
             </a:pPr>
             <a:r>
-              <a:rPr sz="640" b="0">
+              <a:rPr sz="800" b="0">
                 <a:solidFill>
                   <a:srgbClr val="FFFFFF"/>
                 </a:solidFill>
                 <a:latin typeface="Arial"/>
                 <a:ea typeface="Microsoft JhengHei"/>
               </a:rPr>
-              <a:t>場景長這樣:mid(pci 0)在中間,west_c7 與 east_c7 分別在西、東各 350 公尺處,兩顆共用 pci=7;5 台 UE 沿 ±400 公尺東西掃越,三顆全部量得到。撞號直接寫在場景裡:west_c7 與 east_c7 兩顆不同 cell 給同一個 pci=7,UE 在中間的 mid_c0 上兩顆都量得到。佈病再把 mid 的表只留 east(刪掉 west),造出「owned 唯一」—— 這是 xApp 敢下群組換手的前提。若兩顆都在或都不在表上,正解就只剩通報,不得猜。</a:t>
+              <a:t>場景:mid 在中間,west 與 east 各在兩側 350 公尺、共用 pci=7。佈病:把 mid 的表只留 east 一條,造出「只有一顆在表裡」的消歧前提。</a:t>
             </a:r>
           </a:p>
         </p:txBody>
@@ -14414,8 +14414,8 @@
         </p:nvSpPr>
         <p:spPr>
           <a:xfrm>
-            <a:off x="320040" y="3990000"/>
-            <a:ext cx="5577840" cy="890000"/>
+            <a:off x="320040" y="4080000"/>
+            <a:ext cx="5577840" cy="740000"/>
           </a:xfrm>
           <a:prstGeom prst="roundRect">
             <a:avLst/>
@@ -14457,14 +14457,14 @@
               </a:spcAft>
             </a:pPr>
             <a:r>
-              <a:rPr sz="650" b="0">
+              <a:rPr sz="800" b="0">
                 <a:solidFill>
                   <a:srgbClr val="FFFFFF"/>
                 </a:solidFill>
                 <a:latin typeface="Arial"/>
                 <a:ea typeface="Microsoft JhengHei"/>
               </a:rPr>
-              <a:t>場景長這樣:s07(pci 150,UE 的服務 cell)、n30(pci 160,健康對照)、n33(pci 175)三顆,UE 在 s07 周邊活動。佈病只改一個欄位:s07→n33 這條關係的「Xn 傳輸已建立」改成否。換手執行器一看沒有 Xn,就在準備階段回逾時 —— 連 Handover Request 都送不出去,這是與第 7 題(送得出去卻接不進)的鑑別線。修復由劇本自己完成:等到觀測到 xApp 設上 xnBlocklist,再等 300 秒(代表維運排程時間),就把 Xn 改回已建立,全程不需要人介入。</a:t>
+              <a:t>場景:s07 為服務 cell,n33 是問題鄰居。佈病:只把「Xn 已建立」改成否,換手在準備階段就逾時。修復由劇本自己完成:等 xApp 止血後 300 秒改回。</a:t>
             </a:r>
           </a:p>
         </p:txBody>
@@ -15154,8 +15154,8 @@
         </p:nvSpPr>
         <p:spPr>
           <a:xfrm>
-            <a:off x="320040" y="3990000"/>
-            <a:ext cx="5577840" cy="890000"/>
+            <a:off x="320040" y="4080000"/>
+            <a:ext cx="5577840" cy="740000"/>
           </a:xfrm>
           <a:prstGeom prst="roundRect">
             <a:avLst/>
@@ -15197,14 +15197,14 @@
               </a:spcAft>
             </a:pPr>
             <a:r>
-              <a:rPr sz="640" b="0">
+              <a:rPr sz="800" b="0">
                 <a:solidFill>
                   <a:srgbClr val="FFFFFF"/>
                 </a:solidFill>
                 <a:latin typeface="Arial"/>
                 <a:ea typeface="Microsoft JhengHei"/>
               </a:rPr>
-              <a:t>場景長這樣:src(pci 20)與 nbr(pci 30)相距 300 公尺,alt(pci 40)在西側 300 公尺當備援;5 台 UE 在 src-nbr 之間穿越,注入目標是 nbr。這題不是改旗標,是直接注入結果:在 tmp/ho_force_fail.txt 寫一行「n30_c0,RandomAccessProblem」,換手執行器每次換手都讀這個檔,目標中名單就讓這次換手在執行階段失敗、原因填「接入失敗」。為什麼不用物理做:訊號模型算得出 RSRP/SINR,但隨機接取壞掉屬於接取程序層級,模型裡沒有 —— 與其假造成因,不如忠實重現結果。為什麼用檔案不用環境變數:改 env 要重啟容器,會打斷 xApp 長達兩小時的探測計時,而且 env 曾經跨場景撞名污染到別題。</a:t>
+              <a:t>場景:src 與 nbr 相距 300 公尺,UE 在 src 側慢速來回。佈病:用檔案開關讓換到 nbr 的一律在執行階段失敗 —— 不是改旗標,是直接注入結果(訊號模型做不出接取失敗)。</a:t>
             </a:r>
           </a:p>
         </p:txBody>
@@ -15894,8 +15894,8 @@
         </p:nvSpPr>
         <p:spPr>
           <a:xfrm>
-            <a:off x="320040" y="4000000"/>
-            <a:ext cx="5577840" cy="880000"/>
+            <a:off x="320040" y="4080000"/>
+            <a:ext cx="5577840" cy="740000"/>
           </a:xfrm>
           <a:prstGeom prst="roundRect">
             <a:avLst/>
@@ -15937,14 +15937,14 @@
               </a:spcAft>
             </a:pPr>
             <a:r>
-              <a:rPr sz="650" b="0">
+              <a:rPr sz="800" b="0">
                 <a:solidFill>
                   <a:srgbClr val="FFFFFF"/>
                 </a:solidFill>
                 <a:latin typeface="Arial"/>
                 <a:ea typeface="Microsoft JhengHei"/>
               </a:rPr>
-              <a:t>場景長這樣:3.5GHz 層有 s11(UE 目前的服務 cell,pci 160)和同頻鄰居 n50(pci 172);2.1GHz 層另外佈了三顆 f55 / f61 / f68(pci 55/61/68),錯落在 s11 周邊 150~240 公尺處。UE 待在 s11 上,五顆 cell 全部量得到。佈病只做一個動作:把 s11 通往那三顆 2.1GHz cell 的關係一次全砍(整層消失),再把 UE 搬回 s11。「看得到卻換不過去」靠兩個機制同時成立:①干擾只算同頻 —— 2.1GHz 的訊號不會拉低 3.5GHz 的 SINR,UE 待著很穩不會掉線,病徵才不會變成別題;②沒有關係 → A3 被鄰區表的閘擋住,想換也換不了。同頻的 s11→n50 關係刻意保持健康,當對照組。</a:t>
+              <a:t>場景:3.5GHz 的 s11 服務 UE,另一層 2.1GHz 有三顆 cell。佈病:把 s11 通往那三顆的關係一次全砍。干擾只算同頻,所以 UE 看得到、不掉線、就是換不過去。</a:t>
             </a:r>
           </a:p>
         </p:txBody>
@@ -16634,8 +16634,8 @@
         </p:nvSpPr>
         <p:spPr>
           <a:xfrm>
-            <a:off x="320040" y="4000000"/>
-            <a:ext cx="5577840" cy="880000"/>
+            <a:off x="320040" y="4080000"/>
+            <a:ext cx="5577840" cy="740000"/>
           </a:xfrm>
           <a:prstGeom prst="roundRect">
             <a:avLst/>
@@ -16677,14 +16677,14 @@
               </a:spcAft>
             </a:pPr>
             <a:r>
-              <a:rPr sz="650" b="0">
+              <a:rPr sz="800" b="0">
                 <a:solidFill>
                   <a:srgbClr val="FFFFFF"/>
                 </a:solidFill>
                 <a:latin typeface="Arial"/>
                 <a:ea typeface="Microsoft JhengHei"/>
               </a:rPr>
-              <a:t>場景長這樣:三顆同頻 cell n60 / n61 / n62 一字排開(相距 300 公尺),另有一顆 n77 在北側 200 公尺處 —— 它是「真的該被加進表裡」的新鄰居(UE 量得到,但標成不可駐留,所以只會被當成鄰居看待)。佈病做三件事:①砍掉三顆 cell 通往 n77 的關係,讓它變成待加入的新鄰居;②各灌一條零活動的 x24(可刪)與一條受保護的 x25(刪不掉);③再用合成條目 pad01… 把每顆的表填到剛好 8 條上限。x24 / x25 / pad 指向的 cell 在場景裡都不存在,所以天生零量測、零換手 —— 冷度滿分;而 n77 是真實 cell、有量測,對比就出來了。</a:t>
+              <a:t>場景:三顆 cell 一字排開,另有一顆 n77 該被加進表裡。佈病:灌合成條目把三顆的表填到上限 8,其中一條零活動(可刪)、一條受保護(刪不掉)。</a:t>
             </a:r>
           </a:p>
         </p:txBody>
@@ -17374,8 +17374,8 @@
         </p:nvSpPr>
         <p:spPr>
           <a:xfrm>
-            <a:off x="320040" y="4000000"/>
-            <a:ext cx="5577840" cy="880000"/>
+            <a:off x="320040" y="4080000"/>
+            <a:ext cx="5577840" cy="740000"/>
           </a:xfrm>
           <a:prstGeom prst="roundRect">
             <a:avLst/>
@@ -17417,14 +17417,14 @@
               </a:spcAft>
             </a:pPr>
             <a:r>
-              <a:rPr sz="650" b="0">
+              <a:rPr sz="800" b="0">
                 <a:solidFill>
                   <a:srgbClr val="FFFFFF"/>
                 </a:solidFill>
                 <a:latin typeface="Arial"/>
                 <a:ea typeface="Microsoft JhengHei"/>
               </a:rPr>
-              <a:t>場景長這樣:兩顆同頻 cell,s15(pci 200)在西、b07(pci 233)在東,相距 300 公尺。UE 在 s15 這側 15 公尺的小範圍來回 —— 訊號好到足以觸發 A3 去換 b07,又不會掉線(A3 門檻刻意調低到 1.0/0.5dB,讓觸發窗落在不會 RLF 的安全區)。佈病只改一個欄位:把 s15→b07 這條關係裡記的目標 PCI 改成舊值 205。執行器換手前會比對「表裡的 PCI」與「cell 實際的 PCI」,不符就回目標不可用 —— 這個比對是真的在算,不是我們填答案。另外必須把 UE 搬回 s15:先跑劇本時 A3 早就趁關係還正常把 UE 換去 b07 了,不搬回來就沒人會去撞這條壞掉的對應,嘗試率 = 0、病徵長不出來(坑 1)。</a:t>
+              <a:t>場景:s15 與 b07 相距 300 公尺,UE 在 s15 側小範圍來回。佈病:把條目裡記的 PCI 改成舊值 205(實際是 233),換手前比對不符就失敗;UE 要搬回 s15 才有人去撞。</a:t>
             </a:r>
           </a:p>
         </p:txBody>
@@ -18131,8 +18131,8 @@
         </p:nvSpPr>
         <p:spPr>
           <a:xfrm>
-            <a:off x="320040" y="3990000"/>
-            <a:ext cx="5577840" cy="890000"/>
+            <a:off x="320040" y="4080000"/>
+            <a:ext cx="5577840" cy="740000"/>
           </a:xfrm>
           <a:prstGeom prst="roundRect">
             <a:avLst/>
@@ -18174,14 +18174,14 @@
               </a:spcAft>
             </a:pPr>
             <a:r>
-              <a:rPr sz="650" b="0">
+              <a:rPr sz="800" b="0">
                 <a:solidFill>
                   <a:srgbClr val="FFFFFF"/>
                 </a:solidFill>
                 <a:latin typeface="Arial"/>
                 <a:ea typeface="Microsoft JhengHei"/>
               </a:rPr>
-              <a:t>場景長這樣:main(pci 10)與 keep(pci 40)相距 300 公尺,UE 在兩者之間來回穿越 —— 這兩顆之間的關係一直有真實換手,是「活躍」對照組。另有一顆 tmp 在北側 260 公尺處。佈病建三種條目讓三種結局都驗得到:①main→dead:目標 cell 在場景裡根本不存在,所以量測與換手天生同時為零 —— 這是該被回收的殭屍;②main→old:同樣是空的,但標成受保護,刪它一定被回絕 —— 驗拒絕路徑;③main→tmp:UE 量得到 tmp(所以量測不是零)但沒人換過去(換手是零)—— 這是「單訊號歸零」的對照組,誤刪它就是踩到卷面點名的典型錯誤。</a:t>
+              <a:t>場景:main 與 keep 之間有真實換手當對照。佈病:建三種條目 —— 指向不存在 cell 的(該回收)、受保護的(刪不掉)、有量測但沒換手的(不得誤刪)。</a:t>
             </a:r>
           </a:p>
         </p:txBody>
@@ -18871,8 +18871,8 @@
         </p:nvSpPr>
         <p:spPr>
           <a:xfrm>
-            <a:off x="320040" y="3990000"/>
-            <a:ext cx="5577840" cy="890000"/>
+            <a:off x="320040" y="4080000"/>
+            <a:ext cx="5577840" cy="740000"/>
           </a:xfrm>
           <a:prstGeom prst="roundRect">
             <a:avLst/>
@@ -18914,14 +18914,14 @@
               </a:spcAft>
             </a:pPr>
             <a:r>
-              <a:rPr sz="640" b="0">
+              <a:rPr sz="800" b="0">
                 <a:solidFill>
                   <a:srgbClr val="FFFFFF"/>
                 </a:solidFill>
                 <a:latin typeface="Arial"/>
                 <a:ea typeface="Microsoft JhengHei"/>
               </a:rPr>
-              <a:t>場景長這樣:s19(pci 240)在中間,UE 在它周邊 ±60 公尺來回;d02(pci 251)在東側 250 公尺、n80(pci 260)在西北 680 公尺處,兩顆 UE 都量得到。佈病的關鍵是「兩條關係的旗標必須一模一樣」—— 都設成封鎖(禁止換手 + 禁止刪除),否則 xApp 只要比對旗標就分得出來,題目就不成立了。差別只造在行為訊號:n80 那條標成「曾經正常服務過」並灌進 40 筆 6 小時前的接入失敗事件(所以它是因為壞了才被封);d02 那條則是「從未服務成功」且一筆失敗紀錄都沒有(所以沒人知道為什麼封它)。最後把 UE 搬回 s19,量測強度才存在 —— 有需求卻零嘗試,矛盾才浮得出來。</a:t>
+              <a:t>場景:s19 為服務 cell,d02 與 n80 都量得到。佈病:兩條關係的旗標設成一模一樣,差別只造在行為 —— n80 灌 40 筆歷史失敗,d02 一筆都沒有。</a:t>
             </a:r>
           </a:p>
         </p:txBody>
@@ -21890,8 +21890,8 @@
         </p:nvSpPr>
         <p:spPr>
           <a:xfrm>
-            <a:off x="320040" y="3990000"/>
-            <a:ext cx="5577840" cy="890000"/>
+            <a:off x="320040" y="4080000"/>
+            <a:ext cx="5577840" cy="740000"/>
           </a:xfrm>
           <a:prstGeom prst="roundRect">
             <a:avLst/>
@@ -21933,14 +21933,14 @@
               </a:spcAft>
             </a:pPr>
             <a:r>
-              <a:rPr sz="640" b="0">
+              <a:rPr sz="800" b="0">
                 <a:solidFill>
                   <a:srgbClr val="FFFFFF"/>
                 </a:solidFill>
                 <a:latin typeface="Arial"/>
                 <a:ea typeface="Microsoft JhengHei"/>
               </a:rPr>
-              <a:t>場景長這樣:src(pci 20)與 nbr(pci 30)相距 300 公尺同頻,5 台 UE 以約 40km/h 在兩者之間來回穿越邊界。佈病只做一件事:把鄰區表裡 src→nbr 那一條刪掉。關鍵是模擬器的 A3 有一道「鄰區表閘門」—— 表上沒有這條關係就不准換手,UE 只能一路撐到訊號低於掉線門檻、T310 逾時宣告 RLF,再就近重建到對向 cell。所以「掉線重建」不是另外注入的,是缺關係的必然結果,xApp 才有重建統計可以反推缺了哪一條。</a:t>
+              <a:t>場景:src 與 nbr 相距 300 公尺,UE 來回穿越邊界。佈病:把鄰區表裡 src→nbr 那一條刪掉。A3 有鄰區表閘門,沒關係就不准換手 —— UE 只能撐到掉線再重建。</a:t>
             </a:r>
           </a:p>
         </p:txBody>
@@ -22720,8 +22720,8 @@
         </p:nvSpPr>
         <p:spPr>
           <a:xfrm>
-            <a:off x="320040" y="3990000"/>
-            <a:ext cx="5577840" cy="890000"/>
+            <a:off x="320040" y="4080000"/>
+            <a:ext cx="5577840" cy="740000"/>
           </a:xfrm>
           <a:prstGeom prst="roundRect">
             <a:avLst/>
@@ -22763,14 +22763,14 @@
               </a:spcAft>
             </a:pPr>
             <a:r>
-              <a:rPr sz="640" b="0">
+              <a:rPr sz="800" b="0">
                 <a:solidFill>
                   <a:srgbClr val="FFFFFF"/>
                 </a:solidFill>
                 <a:latin typeface="Arial"/>
                 <a:ea typeface="Microsoft JhengHei"/>
               </a:rPr>
-              <a:t>場景長這樣:s25(pci 133)在中間,n35(pci 135)在東側 400 公尺、n37(pci 137)在西側 300 公尺;UE 在 s25 東側的窄帶內活動。同樣是剪掉關係,難的是位置:要讓鄰區訊號逼近 服務訊號(進入換手等效門檻)卻又不能讓 UE 掉線,否則就退化成第 1 題。用 PathSolver 逐點實測挑出 gap≈0.1dB、SINR≥−2 的窄窗,再讓 5 台 UE 沿邊界來回維持樣本。自由空間公式在這裡估不準(兩天線主瓣重疊同一走廊),一定要實測。</a:t>
+              <a:t>場景:s25 在中間,n35 在東側 400 公尺。佈病:剪掉 s25→n35。難在 UE 位置 —— 要讓鄰區訊號逼近卻又不掉線,靠 PathSolver 逐點實測挑出窄帶。</a:t>
             </a:r>
           </a:p>
         </p:txBody>
@@ -24874,8 +24874,8 @@
         </p:nvSpPr>
         <p:spPr>
           <a:xfrm>
-            <a:off x="320040" y="3990000"/>
-            <a:ext cx="5577840" cy="890000"/>
+            <a:off x="320040" y="4080000"/>
+            <a:ext cx="5577840" cy="740000"/>
           </a:xfrm>
           <a:prstGeom prst="roundRect">
             <a:avLst/>
@@ -24917,14 +24917,14 @@
               </a:spcAft>
             </a:pPr>
             <a:r>
-              <a:rPr sz="640" b="0">
+              <a:rPr sz="800" b="0">
                 <a:solidFill>
                   <a:srgbClr val="FFFFFF"/>
                 </a:solidFill>
                 <a:latin typeface="Arial"/>
                 <a:ea typeface="Microsoft JhengHei"/>
               </a:rPr>
-              <a:t>場景長這樣:s28(服務 cell)在中央,n51 / n52 是兩顆既有的健康鄰居,n91(pci 209)是缺的那一條;UE 停在 s28 天線訊號凹陷的方向上(南北向),所以離得不遠、訊號卻很弱。依卷面重佈(08/26):不動發射功率,改用天線場型與幾何 —— UE 停在該處實測服務訊號 −107.5dBm 的深邊緣;n51 / n52 排在同一條軸線更遠處(−115 / −119dBm,比服務 cell 還弱,不會把 UE 拉走也不會搶走駐留);n91 擺在 45 度側,取得 +19.8dB 的相對增益。n91 另標成不可駐留,否則 UE 一掉線就重建過去,深邊緣狀態當場消失。</a:t>
+              <a:t>場景:UE 停在 s28 天線訊號凹陷的方向,實測服務訊號 −107.5dBm。佈病:剪掉 s28→n91,並把 n91 標成不可駐留 —— 否則 UE 一掉線就重建過去,深邊緣狀態消失。</a:t>
             </a:r>
           </a:p>
         </p:txBody>
@@ -25614,8 +25614,8 @@
         </p:nvSpPr>
         <p:spPr>
           <a:xfrm>
-            <a:off x="320040" y="3990000"/>
-            <a:ext cx="5577840" cy="890000"/>
+            <a:off x="320040" y="4080000"/>
+            <a:ext cx="5577840" cy="740000"/>
           </a:xfrm>
           <a:prstGeom prst="roundRect">
             <a:avLst/>
@@ -25657,14 +25657,14 @@
               </a:spcAft>
             </a:pPr>
             <a:r>
-              <a:rPr sz="640" b="0">
+              <a:rPr sz="800" b="0">
                 <a:solidFill>
                   <a:srgbClr val="FFFFFF"/>
                 </a:solidFill>
                 <a:latin typeface="Arial"/>
                 <a:ea typeface="Microsoft JhengHei"/>
               </a:rPr>
-              <a:t>場景長這樣:s01(pci 101)為服務 cell,unk(pci 301)在東側 150 公尺,另有 n02 / n03 兩顆既有健康鄰居在西側;UE 橫越整條走廊。場景多放一顆 unk_c0(pci 301),並確保沒有任何關係指向它 —— cell 真的存在、UE 量得到、全域識別碼也解得出來,唯獨表上查無。與第 1 題的差別在於這顆是全新的,不是既有關係被刪掉;所以 xApp 必須先確認它不在任何既有 targets 裡,才不會把既有病誤判成新鄰居。</a:t>
+              <a:t>場景:s01 為服務 cell,unk 在東側 150 公尺。佈病:讓 unk 存在但不建任何指向它的關係 —— cell 真的在、UE 量得到,唯獨表上查無。</a:t>
             </a:r>
           </a:p>
         </p:txBody>

--- a/docs/report/8_27_進度報告_v10十二題.pptx
+++ b/docs/report/8_27_進度報告_v10十二題.pptx
@@ -13055,7 +13055,7 @@
           <p:nvPr/>
         </p:nvGraphicFramePr>
         <p:xfrm>
-          <a:off x="320040" y="1600200"/>
+          <a:off x="320040" y="1830000"/>
           <a:ext cx="5577840" cy="2377440"/>
         </p:xfrm>
         <a:graphic>
@@ -13069,7 +13069,7 @@
                 <a:gridCol w="1691640"/>
                 <a:gridCol w="1920240"/>
               </a:tblGrid>
-              <a:tr h="450000">
+              <a:tr h="520000">
                 <a:tc>
                   <a:txBody>
                     <a:bodyPr/>
@@ -13140,48 +13140,7 @@
                   </a:tcPr>
                 </a:tc>
               </a:tr>
-              <a:tr h="620000">
-                <a:tc gridSpan="3">
-                  <a:txBody>
-                    <a:bodyPr/>
-                    <a:lstStyle/>
-                    <a:p>
-                      <a:r>
-                        <a:rPr sz="800" b="0">
-                          <a:solidFill>
-                            <a:srgbClr val="222A30"/>
-                          </a:solidFill>
-                          <a:latin typeface="Arial"/>
-                          <a:ea typeface="Microsoft JhengHei"/>
-                        </a:rPr>
-                        <a:t>這題在演什麼:兩顆不同的 cell 用了同一個 PCI(實體識別碼只有 1008 個,會撞號)。UE 回報「我看到 PCI 7」時,基地台無法確定指的是哪一顆 —— 照 PCI 換手就是在賭,賭錯就把 UE 送去錯的 cell。難點:要先確定「該換到哪一顆」才敢動作,而 PCI 本身給不出答案。</a:t>
-                      </a:r>
-                    </a:p>
-                  </a:txBody>
-                  <a:tcPr anchor="ctr" marL="45720" marR="45720" marT="18288" marB="18288">
-                    <a:solidFill>
-                      <a:srgbClr val="FFFFFF"/>
-                    </a:solidFill>
-                  </a:tcPr>
-                </a:tc>
-                <a:tc hMerge="1">
-                  <a:txBody>
-                    <a:bodyPr/>
-                    <a:lstStyle/>
-                    <a:p/>
-                  </a:txBody>
-                  <a:tcPr/>
-                </a:tc>
-                <a:tc hMerge="1">
-                  <a:txBody>
-                    <a:bodyPr/>
-                    <a:lstStyle/>
-                    <a:p/>
-                  </a:txBody>
-                  <a:tcPr/>
-                </a:tc>
-              </a:tr>
-              <a:tr h="450000">
+              <a:tr h="520000">
                 <a:tc>
                   <a:txBody>
                     <a:bodyPr/>
@@ -13252,7 +13211,7 @@
                   </a:tcPr>
                 </a:tc>
               </a:tr>
-              <a:tr h="450000">
+              <a:tr h="520000">
                 <a:tc>
                   <a:txBody>
                     <a:bodyPr/>
@@ -13323,7 +13282,7 @@
                   </a:tcPr>
                 </a:tc>
               </a:tr>
-              <a:tr h="450000">
+              <a:tr h="520000">
                 <a:tc>
                   <a:txBody>
                     <a:bodyPr/>
@@ -13729,6 +13688,50 @@
           </a:p>
         </p:txBody>
       </p:sp>
+      <p:sp>
+        <p:nvSpPr>
+          <p:cNvPr id="8" name="StoryLine"/>
+          <p:cNvSpPr txBox="1"/>
+          <p:nvPr/>
+        </p:nvSpPr>
+        <p:spPr>
+          <a:xfrm>
+            <a:off x="320040" y="1415000"/>
+            <a:ext cx="5577840" cy="400000"/>
+          </a:xfrm>
+          <a:prstGeom prst="rect">
+            <a:avLst/>
+          </a:prstGeom>
+          <a:noFill/>
+        </p:spPr>
+        <p:txBody>
+          <a:bodyPr rtlCol="0" anchor="ctr" wrap="square" lIns="0" rIns="0" tIns="0" bIns="0"/>
+          <a:lstStyle/>
+          <a:p>
+            <a:pPr/>
+            <a:r>
+              <a:rPr sz="750" b="1">
+                <a:solidFill>
+                  <a:srgbClr val="1F6FA8"/>
+                </a:solidFill>
+                <a:latin typeface="Arial"/>
+                <a:ea typeface="Microsoft JhengHei"/>
+              </a:rPr>
+              <a:t>這題在演什麼:</a:t>
+            </a:r>
+            <a:r>
+              <a:rPr sz="750" b="0">
+                <a:solidFill>
+                  <a:srgbClr val="333F48"/>
+                </a:solidFill>
+                <a:latin typeface="Arial"/>
+                <a:ea typeface="Microsoft JhengHei"/>
+              </a:rPr>
+              <a:t>兩顆不同的 cell 用了同一個 PCI(實體識別碼只有 1008 個,會撞號)。UE 回報「我看到 PCI 7」時,基地台無法確定指的是哪一顆 —— 照 PCI 換手就是在賭,賭錯就把 UE 送去錯的 cell。難點:要先確定「該換到哪一顆」才敢動作,而 PCI 本身給不出答案。</a:t>
+            </a:r>
+          </a:p>
+        </p:txBody>
+      </p:sp>
     </p:spTree>
   </p:cSld>
   <p:clrMapOvr>
@@ -13812,7 +13815,7 @@
           <p:nvPr/>
         </p:nvGraphicFramePr>
         <p:xfrm>
-          <a:off x="320040" y="1600200"/>
+          <a:off x="320040" y="1830000"/>
           <a:ext cx="5577840" cy="2377440"/>
         </p:xfrm>
         <a:graphic>
@@ -13826,7 +13829,7 @@
                 <a:gridCol w="1691640"/>
                 <a:gridCol w="1920240"/>
               </a:tblGrid>
-              <a:tr h="450000">
+              <a:tr h="520000">
                 <a:tc>
                   <a:txBody>
                     <a:bodyPr/>
@@ -13897,48 +13900,7 @@
                   </a:tcPr>
                 </a:tc>
               </a:tr>
-              <a:tr h="600000">
-                <a:tc gridSpan="3">
-                  <a:txBody>
-                    <a:bodyPr/>
-                    <a:lstStyle/>
-                    <a:p>
-                      <a:r>
-                        <a:rPr sz="800" b="0">
-                          <a:solidFill>
-                            <a:srgbClr val="222A30"/>
-                          </a:solidFill>
-                          <a:latin typeface="Arial"/>
-                          <a:ea typeface="Microsoft JhengHei"/>
-                        </a:rPr>
-                        <a:t>這題在演什麼:關係在、訊號正常,但兩個基地台之間的 Xn 傳輸沒接上 —— 換手請求連送都送不出去,UE 只能困在原地。難點:xApp 修不了 Xn(那是管理面的職權),它只能先止血、通報,然後等人修好;而且「修好了」不能只看旗標,要看換手成功率真的回升。</a:t>
-                      </a:r>
-                    </a:p>
-                  </a:txBody>
-                  <a:tcPr anchor="ctr" marL="45720" marR="45720" marT="18288" marB="18288">
-                    <a:solidFill>
-                      <a:srgbClr val="FFFFFF"/>
-                    </a:solidFill>
-                  </a:tcPr>
-                </a:tc>
-                <a:tc hMerge="1">
-                  <a:txBody>
-                    <a:bodyPr/>
-                    <a:lstStyle/>
-                    <a:p/>
-                  </a:txBody>
-                  <a:tcPr/>
-                </a:tc>
-                <a:tc hMerge="1">
-                  <a:txBody>
-                    <a:bodyPr/>
-                    <a:lstStyle/>
-                    <a:p/>
-                  </a:txBody>
-                  <a:tcPr/>
-                </a:tc>
-              </a:tr>
-              <a:tr h="450000">
+              <a:tr h="520000">
                 <a:tc>
                   <a:txBody>
                     <a:bodyPr/>
@@ -14009,7 +13971,7 @@
                   </a:tcPr>
                 </a:tc>
               </a:tr>
-              <a:tr h="450000">
+              <a:tr h="520000">
                 <a:tc>
                   <a:txBody>
                     <a:bodyPr/>
@@ -14080,7 +14042,7 @@
                   </a:tcPr>
                 </a:tc>
               </a:tr>
-              <a:tr h="450000">
+              <a:tr h="520000">
                 <a:tc>
                   <a:txBody>
                     <a:bodyPr/>
@@ -14469,6 +14431,50 @@
           </a:p>
         </p:txBody>
       </p:sp>
+      <p:sp>
+        <p:nvSpPr>
+          <p:cNvPr id="8" name="StoryLine"/>
+          <p:cNvSpPr txBox="1"/>
+          <p:nvPr/>
+        </p:nvSpPr>
+        <p:spPr>
+          <a:xfrm>
+            <a:off x="320040" y="1415000"/>
+            <a:ext cx="5577840" cy="400000"/>
+          </a:xfrm>
+          <a:prstGeom prst="rect">
+            <a:avLst/>
+          </a:prstGeom>
+          <a:noFill/>
+        </p:spPr>
+        <p:txBody>
+          <a:bodyPr rtlCol="0" anchor="ctr" wrap="square" lIns="0" rIns="0" tIns="0" bIns="0"/>
+          <a:lstStyle/>
+          <a:p>
+            <a:pPr/>
+            <a:r>
+              <a:rPr sz="750" b="1">
+                <a:solidFill>
+                  <a:srgbClr val="1F6FA8"/>
+                </a:solidFill>
+                <a:latin typeface="Arial"/>
+                <a:ea typeface="Microsoft JhengHei"/>
+              </a:rPr>
+              <a:t>這題在演什麼:</a:t>
+            </a:r>
+            <a:r>
+              <a:rPr sz="750" b="0">
+                <a:solidFill>
+                  <a:srgbClr val="333F48"/>
+                </a:solidFill>
+                <a:latin typeface="Arial"/>
+                <a:ea typeface="Microsoft JhengHei"/>
+              </a:rPr>
+              <a:t>關係在、訊號正常,但兩個基地台之間的 Xn 傳輸沒接上 —— 換手請求連送都送不出去,UE 只能困在原地。難點:xApp 修不了 Xn(那是管理面的職權),它只能先止血、通報,然後等人修好;而且「修好了」不能只看旗標,要看換手成功率真的回升。</a:t>
+            </a:r>
+          </a:p>
+        </p:txBody>
+      </p:sp>
     </p:spTree>
   </p:cSld>
   <p:clrMapOvr>
@@ -14552,7 +14558,7 @@
           <p:nvPr/>
         </p:nvGraphicFramePr>
         <p:xfrm>
-          <a:off x="320040" y="1600200"/>
+          <a:off x="320040" y="1830000"/>
           <a:ext cx="5577840" cy="2377440"/>
         </p:xfrm>
         <a:graphic>
@@ -14635,47 +14641,6 @@
                       <a:srgbClr val="335B74"/>
                     </a:solidFill>
                   </a:tcPr>
-                </a:tc>
-              </a:tr>
-              <a:tr h="680000">
-                <a:tc gridSpan="3">
-                  <a:txBody>
-                    <a:bodyPr/>
-                    <a:lstStyle/>
-                    <a:p>
-                      <a:r>
-                        <a:rPr sz="800" b="0">
-                          <a:solidFill>
-                            <a:srgbClr val="222A30"/>
-                          </a:solidFill>
-                          <a:latin typeface="Arial"/>
-                          <a:ea typeface="Microsoft JhengHei"/>
-                        </a:rPr>
-                        <a:t>這題在演什麼:UE 量到的訊號一切正常,換手也真的發起了,卻在最後一步「接進去」時失敗 —— 目標 cell 的隨機接取程序壞掉了。與第 6 題的分野:第 6 題是連換手請求都送不出去(準備階段),這題是送得出去、UE 也走過去了、就是接不進(執行階段)。難點:所有訊號指標都正常,只能從「失敗原因的分佈」看出來;而且這種病可能自己好,不能一關就永遠關著。</a:t>
-                      </a:r>
-                    </a:p>
-                  </a:txBody>
-                  <a:tcPr anchor="ctr" marL="45720" marR="45720" marT="18288" marB="18288">
-                    <a:solidFill>
-                      <a:srgbClr val="FFFFFF"/>
-                    </a:solidFill>
-                  </a:tcPr>
-                </a:tc>
-                <a:tc hMerge="1">
-                  <a:txBody>
-                    <a:bodyPr/>
-                    <a:lstStyle/>
-                    <a:p/>
-                  </a:txBody>
-                  <a:tcPr/>
-                </a:tc>
-                <a:tc hMerge="1">
-                  <a:txBody>
-                    <a:bodyPr/>
-                    <a:lstStyle/>
-                    <a:p/>
-                  </a:txBody>
-                  <a:tcPr/>
                 </a:tc>
               </a:tr>
               <a:tr h="430000">
@@ -15209,6 +15174,50 @@
           </a:p>
         </p:txBody>
       </p:sp>
+      <p:sp>
+        <p:nvSpPr>
+          <p:cNvPr id="8" name="StoryLine"/>
+          <p:cNvSpPr txBox="1"/>
+          <p:nvPr/>
+        </p:nvSpPr>
+        <p:spPr>
+          <a:xfrm>
+            <a:off x="320040" y="1415000"/>
+            <a:ext cx="5577840" cy="400000"/>
+          </a:xfrm>
+          <a:prstGeom prst="rect">
+            <a:avLst/>
+          </a:prstGeom>
+          <a:noFill/>
+        </p:spPr>
+        <p:txBody>
+          <a:bodyPr rtlCol="0" anchor="ctr" wrap="square" lIns="0" rIns="0" tIns="0" bIns="0"/>
+          <a:lstStyle/>
+          <a:p>
+            <a:pPr/>
+            <a:r>
+              <a:rPr sz="750" b="1">
+                <a:solidFill>
+                  <a:srgbClr val="1F6FA8"/>
+                </a:solidFill>
+                <a:latin typeface="Arial"/>
+                <a:ea typeface="Microsoft JhengHei"/>
+              </a:rPr>
+              <a:t>這題在演什麼:</a:t>
+            </a:r>
+            <a:r>
+              <a:rPr sz="750" b="0">
+                <a:solidFill>
+                  <a:srgbClr val="333F48"/>
+                </a:solidFill>
+                <a:latin typeface="Arial"/>
+                <a:ea typeface="Microsoft JhengHei"/>
+              </a:rPr>
+              <a:t>UE 量到的訊號一切正常,換手也真的發起了,卻在最後一步「接進去」時失敗 —— 目標 cell 的隨機接取程序壞掉了。與第 6 題的分野:第 6 題是連換手請求都送不出去(準備階段),這題是送得出去、UE 也走過去了、就是接不進(執行階段)。難點:所有訊號指標都正常,只能從「失敗原因的分佈」看出來;而且這種病可能自己好,不能一關就永遠關著。</a:t>
+            </a:r>
+          </a:p>
+        </p:txBody>
+      </p:sp>
     </p:spTree>
   </p:cSld>
   <p:clrMapOvr>
@@ -15292,7 +15301,7 @@
           <p:nvPr/>
         </p:nvGraphicFramePr>
         <p:xfrm>
-          <a:off x="320040" y="1600200"/>
+          <a:off x="320040" y="1830000"/>
           <a:ext cx="5577840" cy="2377440"/>
         </p:xfrm>
         <a:graphic>
@@ -15375,47 +15384,6 @@
                       <a:srgbClr val="335B74"/>
                     </a:solidFill>
                   </a:tcPr>
-                </a:tc>
-              </a:tr>
-              <a:tr h="640000">
-                <a:tc gridSpan="3">
-                  <a:txBody>
-                    <a:bodyPr/>
-                    <a:lstStyle/>
-                    <a:p>
-                      <a:r>
-                        <a:rPr sz="800" b="0">
-                          <a:solidFill>
-                            <a:srgbClr val="222A30"/>
-                          </a:solidFill>
-                          <a:latin typeface="Arial"/>
-                          <a:ea typeface="Microsoft JhengHei"/>
-                        </a:rPr>
-                        <a:t>這題在演什麼:網路有兩層頻段 —— UE 現在待在 3.5GHz,另一層 2.1GHz 也有基地台。UE 明明量得到 2.1GHz 那層的好幾顆 cell,卻一顆都換不過去,因為鄰區表裡「整層」都沒有。與前幾題的差別:缺的不是某一條關係,是整個頻率層 —— 所以要先讓基地台知道「這個頻點值得量」,個別 cell 的關係才輪得到補。</a:t>
-                      </a:r>
-                    </a:p>
-                  </a:txBody>
-                  <a:tcPr anchor="ctr" marL="45720" marR="45720" marT="18288" marB="18288">
-                    <a:solidFill>
-                      <a:srgbClr val="FFFFFF"/>
-                    </a:solidFill>
-                  </a:tcPr>
-                </a:tc>
-                <a:tc hMerge="1">
-                  <a:txBody>
-                    <a:bodyPr/>
-                    <a:lstStyle/>
-                    <a:p/>
-                  </a:txBody>
-                  <a:tcPr/>
-                </a:tc>
-                <a:tc hMerge="1">
-                  <a:txBody>
-                    <a:bodyPr/>
-                    <a:lstStyle/>
-                    <a:p/>
-                  </a:txBody>
-                  <a:tcPr/>
                 </a:tc>
               </a:tr>
               <a:tr h="440000">
@@ -15949,6 +15917,50 @@
           </a:p>
         </p:txBody>
       </p:sp>
+      <p:sp>
+        <p:nvSpPr>
+          <p:cNvPr id="8" name="StoryLine"/>
+          <p:cNvSpPr txBox="1"/>
+          <p:nvPr/>
+        </p:nvSpPr>
+        <p:spPr>
+          <a:xfrm>
+            <a:off x="320040" y="1415000"/>
+            <a:ext cx="5577840" cy="400000"/>
+          </a:xfrm>
+          <a:prstGeom prst="rect">
+            <a:avLst/>
+          </a:prstGeom>
+          <a:noFill/>
+        </p:spPr>
+        <p:txBody>
+          <a:bodyPr rtlCol="0" anchor="ctr" wrap="square" lIns="0" rIns="0" tIns="0" bIns="0"/>
+          <a:lstStyle/>
+          <a:p>
+            <a:pPr/>
+            <a:r>
+              <a:rPr sz="750" b="1">
+                <a:solidFill>
+                  <a:srgbClr val="1F6FA8"/>
+                </a:solidFill>
+                <a:latin typeface="Arial"/>
+                <a:ea typeface="Microsoft JhengHei"/>
+              </a:rPr>
+              <a:t>這題在演什麼:</a:t>
+            </a:r>
+            <a:r>
+              <a:rPr sz="750" b="0">
+                <a:solidFill>
+                  <a:srgbClr val="333F48"/>
+                </a:solidFill>
+                <a:latin typeface="Arial"/>
+                <a:ea typeface="Microsoft JhengHei"/>
+              </a:rPr>
+              <a:t>網路有兩層頻段 —— UE 現在待在 3.5GHz,另一層 2.1GHz 也有基地台。UE 明明量得到 2.1GHz 那層的好幾顆 cell,卻一顆都換不過去,因為鄰區表裡「整層」都沒有。與前幾題的差別:缺的不是某一條關係,是整個頻率層 —— 所以要先讓基地台知道「這個頻點值得量」,個別 cell 的關係才輪得到補。</a:t>
+            </a:r>
+          </a:p>
+        </p:txBody>
+      </p:sp>
     </p:spTree>
   </p:cSld>
   <p:clrMapOvr>
@@ -16032,7 +16044,7 @@
           <p:nvPr/>
         </p:nvGraphicFramePr>
         <p:xfrm>
-          <a:off x="320040" y="1600200"/>
+          <a:off x="320040" y="1830000"/>
           <a:ext cx="5577840" cy="2377440"/>
         </p:xfrm>
         <a:graphic>
@@ -16115,47 +16127,6 @@
                       <a:srgbClr val="335B74"/>
                     </a:solidFill>
                   </a:tcPr>
-                </a:tc>
-              </a:tr>
-              <a:tr h="620000">
-                <a:tc gridSpan="3">
-                  <a:txBody>
-                    <a:bodyPr/>
-                    <a:lstStyle/>
-                    <a:p>
-                      <a:r>
-                        <a:rPr sz="800" b="0">
-                          <a:solidFill>
-                            <a:srgbClr val="222A30"/>
-                          </a:solidFill>
-                          <a:latin typeface="Arial"/>
-                          <a:ea typeface="Microsoft JhengHei"/>
-                        </a:rPr>
-                        <a:t>這題在演什麼:鄰區表有容量上限(本場設每顆 cell 8 條)。三顆 cell 的表都已經塞滿,而旁邊真的有一顆新 cell 需要被加進來 —— 表滿了,加不進去。難點:得先騰位,但「哪一條可以刪」事先看不出來(v10 把「可否移除」這個欄位拿掉了),只能刪下去才知道會不會被拒絕。</a:t>
-                      </a:r>
-                    </a:p>
-                  </a:txBody>
-                  <a:tcPr anchor="ctr" marL="45720" marR="45720" marT="18288" marB="18288">
-                    <a:solidFill>
-                      <a:srgbClr val="FFFFFF"/>
-                    </a:solidFill>
-                  </a:tcPr>
-                </a:tc>
-                <a:tc hMerge="1">
-                  <a:txBody>
-                    <a:bodyPr/>
-                    <a:lstStyle/>
-                    <a:p/>
-                  </a:txBody>
-                  <a:tcPr/>
-                </a:tc>
-                <a:tc hMerge="1">
-                  <a:txBody>
-                    <a:bodyPr/>
-                    <a:lstStyle/>
-                    <a:p/>
-                  </a:txBody>
-                  <a:tcPr/>
                 </a:tc>
               </a:tr>
               <a:tr h="440000">
@@ -16689,6 +16660,50 @@
           </a:p>
         </p:txBody>
       </p:sp>
+      <p:sp>
+        <p:nvSpPr>
+          <p:cNvPr id="8" name="StoryLine"/>
+          <p:cNvSpPr txBox="1"/>
+          <p:nvPr/>
+        </p:nvSpPr>
+        <p:spPr>
+          <a:xfrm>
+            <a:off x="320040" y="1415000"/>
+            <a:ext cx="5577840" cy="400000"/>
+          </a:xfrm>
+          <a:prstGeom prst="rect">
+            <a:avLst/>
+          </a:prstGeom>
+          <a:noFill/>
+        </p:spPr>
+        <p:txBody>
+          <a:bodyPr rtlCol="0" anchor="ctr" wrap="square" lIns="0" rIns="0" tIns="0" bIns="0"/>
+          <a:lstStyle/>
+          <a:p>
+            <a:pPr/>
+            <a:r>
+              <a:rPr sz="750" b="1">
+                <a:solidFill>
+                  <a:srgbClr val="1F6FA8"/>
+                </a:solidFill>
+                <a:latin typeface="Arial"/>
+                <a:ea typeface="Microsoft JhengHei"/>
+              </a:rPr>
+              <a:t>這題在演什麼:</a:t>
+            </a:r>
+            <a:r>
+              <a:rPr sz="750" b="0">
+                <a:solidFill>
+                  <a:srgbClr val="333F48"/>
+                </a:solidFill>
+                <a:latin typeface="Arial"/>
+                <a:ea typeface="Microsoft JhengHei"/>
+              </a:rPr>
+              <a:t>鄰區表有容量上限(本場設每顆 cell 8 條)。三顆 cell 的表都已經塞滿,而旁邊真的有一顆新 cell 需要被加進來 —— 表滿了,加不進去。難點:得先騰位,但「哪一條可以刪」事先看不出來(v10 把「可否移除」這個欄位拿掉了),只能刪下去才知道會不會被拒絕。</a:t>
+            </a:r>
+          </a:p>
+        </p:txBody>
+      </p:sp>
     </p:spTree>
   </p:cSld>
   <p:clrMapOvr>
@@ -16772,7 +16787,7 @@
           <p:nvPr/>
         </p:nvGraphicFramePr>
         <p:xfrm>
-          <a:off x="320040" y="1600200"/>
+          <a:off x="320040" y="1830000"/>
           <a:ext cx="5577840" cy="2377440"/>
         </p:xfrm>
         <a:graphic>
@@ -16855,47 +16870,6 @@
                       <a:srgbClr val="335B74"/>
                     </a:solidFill>
                   </a:tcPr>
-                </a:tc>
-              </a:tr>
-              <a:tr h="640000">
-                <a:tc gridSpan="3">
-                  <a:txBody>
-                    <a:bodyPr/>
-                    <a:lstStyle/>
-                    <a:p>
-                      <a:r>
-                        <a:rPr sz="800" b="0">
-                          <a:solidFill>
-                            <a:srgbClr val="222A30"/>
-                          </a:solidFill>
-                          <a:latin typeface="Arial"/>
-                          <a:ea typeface="Microsoft JhengHei"/>
-                        </a:rPr>
-                        <a:t>這題在演什麼:鄰區關係還在,但表裡記的目標 PCI 是舊的(205),那顆 cell 早就改成 233 了。每次 A3 想換手,系統照表去找 205 → 找不到 → 回「目標不可用」。UE 換不過去又沒掉線,就一直卡在原地反覆嘗試。難點有兩個:①這是「該修對應」不是「該建新關係」,兩者處置完全不同;②病本身會把來源 cell 的資源使用率推到滿,很容易被誤判成壅塞而放過。</a:t>
-                      </a:r>
-                    </a:p>
-                  </a:txBody>
-                  <a:tcPr anchor="ctr" marL="45720" marR="45720" marT="18288" marB="18288">
-                    <a:solidFill>
-                      <a:srgbClr val="FFFFFF"/>
-                    </a:solidFill>
-                  </a:tcPr>
-                </a:tc>
-                <a:tc hMerge="1">
-                  <a:txBody>
-                    <a:bodyPr/>
-                    <a:lstStyle/>
-                    <a:p/>
-                  </a:txBody>
-                  <a:tcPr/>
-                </a:tc>
-                <a:tc hMerge="1">
-                  <a:txBody>
-                    <a:bodyPr/>
-                    <a:lstStyle/>
-                    <a:p/>
-                  </a:txBody>
-                  <a:tcPr/>
                 </a:tc>
               </a:tr>
               <a:tr h="440000">
@@ -17429,6 +17403,50 @@
           </a:p>
         </p:txBody>
       </p:sp>
+      <p:sp>
+        <p:nvSpPr>
+          <p:cNvPr id="8" name="StoryLine"/>
+          <p:cNvSpPr txBox="1"/>
+          <p:nvPr/>
+        </p:nvSpPr>
+        <p:spPr>
+          <a:xfrm>
+            <a:off x="320040" y="1415000"/>
+            <a:ext cx="5577840" cy="400000"/>
+          </a:xfrm>
+          <a:prstGeom prst="rect">
+            <a:avLst/>
+          </a:prstGeom>
+          <a:noFill/>
+        </p:spPr>
+        <p:txBody>
+          <a:bodyPr rtlCol="0" anchor="ctr" wrap="square" lIns="0" rIns="0" tIns="0" bIns="0"/>
+          <a:lstStyle/>
+          <a:p>
+            <a:pPr/>
+            <a:r>
+              <a:rPr sz="750" b="1">
+                <a:solidFill>
+                  <a:srgbClr val="1F6FA8"/>
+                </a:solidFill>
+                <a:latin typeface="Arial"/>
+                <a:ea typeface="Microsoft JhengHei"/>
+              </a:rPr>
+              <a:t>這題在演什麼:</a:t>
+            </a:r>
+            <a:r>
+              <a:rPr sz="750" b="0">
+                <a:solidFill>
+                  <a:srgbClr val="333F48"/>
+                </a:solidFill>
+                <a:latin typeface="Arial"/>
+                <a:ea typeface="Microsoft JhengHei"/>
+              </a:rPr>
+              <a:t>鄰區關係還在,但表裡記的目標 PCI 是舊的(205),那顆 cell 早就改成 233 了。每次 A3 想換手,系統照表去找 205 → 找不到 → 回「目標不可用」。UE 換不過去又沒掉線,就一直卡在原地反覆嘗試。難點有兩個:①這是「該修對應」不是「該建新關係」,兩者處置完全不同;②病本身會把來源 cell 的資源使用率推到滿,很容易被誤判成壅塞而放過。</a:t>
+            </a:r>
+          </a:p>
+        </p:txBody>
+      </p:sp>
     </p:spTree>
   </p:cSld>
   <p:clrMapOvr>
@@ -17512,7 +17530,7 @@
           <p:nvPr/>
         </p:nvGraphicFramePr>
         <p:xfrm>
-          <a:off x="320040" y="1600200"/>
+          <a:off x="320040" y="1830000"/>
           <a:ext cx="5577840" cy="2377440"/>
         </p:xfrm>
         <a:graphic>
@@ -17526,7 +17544,7 @@
                 <a:gridCol w="1691640"/>
                 <a:gridCol w="1920240"/>
               </a:tblGrid>
-              <a:tr h="450000">
+              <a:tr h="520000">
                 <a:tc>
                   <a:txBody>
                     <a:bodyPr/>
@@ -17597,48 +17615,7 @@
                   </a:tcPr>
                 </a:tc>
               </a:tr>
-              <a:tr h="600000">
-                <a:tc gridSpan="3">
-                  <a:txBody>
-                    <a:bodyPr/>
-                    <a:lstStyle/>
-                    <a:p>
-                      <a:r>
-                        <a:rPr sz="800" b="0">
-                          <a:solidFill>
-                            <a:srgbClr val="222A30"/>
-                          </a:solidFill>
-                          <a:latin typeface="Arial"/>
-                          <a:ea typeface="Microsoft JhengHei"/>
-                        </a:rPr>
-                        <a:t>這題在演什麼:鄰區表裡留著一條「沒人在用」的關係 —— 對面那顆 cell 可能已經拆站、搬走或改組態。它不會造成故障,但佔著容量上限的一格,而且會誤導後續判斷。難點:怎麼確定「真的沒人用」而不是「剛好這陣子沒人經過」?卷面的答案是:兩個訊號同時為零、而且要連續夠久。</a:t>
-                      </a:r>
-                    </a:p>
-                  </a:txBody>
-                  <a:tcPr anchor="ctr" marL="45720" marR="45720" marT="18288" marB="18288">
-                    <a:solidFill>
-                      <a:srgbClr val="FFFFFF"/>
-                    </a:solidFill>
-                  </a:tcPr>
-                </a:tc>
-                <a:tc hMerge="1">
-                  <a:txBody>
-                    <a:bodyPr/>
-                    <a:lstStyle/>
-                    <a:p/>
-                  </a:txBody>
-                  <a:tcPr/>
-                </a:tc>
-                <a:tc hMerge="1">
-                  <a:txBody>
-                    <a:bodyPr/>
-                    <a:lstStyle/>
-                    <a:p/>
-                  </a:txBody>
-                  <a:tcPr/>
-                </a:tc>
-              </a:tr>
-              <a:tr h="450000">
+              <a:tr h="520000">
                 <a:tc>
                   <a:txBody>
                     <a:bodyPr/>
@@ -17709,7 +17686,7 @@
                   </a:tcPr>
                 </a:tc>
               </a:tr>
-              <a:tr h="450000">
+              <a:tr h="520000">
                 <a:tc>
                   <a:txBody>
                     <a:bodyPr/>
@@ -17780,7 +17757,7 @@
                   </a:tcPr>
                 </a:tc>
               </a:tr>
-              <a:tr h="450000">
+              <a:tr h="520000">
                 <a:tc>
                   <a:txBody>
                     <a:bodyPr/>
@@ -18186,6 +18163,50 @@
           </a:p>
         </p:txBody>
       </p:sp>
+      <p:sp>
+        <p:nvSpPr>
+          <p:cNvPr id="8" name="StoryLine"/>
+          <p:cNvSpPr txBox="1"/>
+          <p:nvPr/>
+        </p:nvSpPr>
+        <p:spPr>
+          <a:xfrm>
+            <a:off x="320040" y="1415000"/>
+            <a:ext cx="5577840" cy="400000"/>
+          </a:xfrm>
+          <a:prstGeom prst="rect">
+            <a:avLst/>
+          </a:prstGeom>
+          <a:noFill/>
+        </p:spPr>
+        <p:txBody>
+          <a:bodyPr rtlCol="0" anchor="ctr" wrap="square" lIns="0" rIns="0" tIns="0" bIns="0"/>
+          <a:lstStyle/>
+          <a:p>
+            <a:pPr/>
+            <a:r>
+              <a:rPr sz="750" b="1">
+                <a:solidFill>
+                  <a:srgbClr val="1F6FA8"/>
+                </a:solidFill>
+                <a:latin typeface="Arial"/>
+                <a:ea typeface="Microsoft JhengHei"/>
+              </a:rPr>
+              <a:t>這題在演什麼:</a:t>
+            </a:r>
+            <a:r>
+              <a:rPr sz="750" b="0">
+                <a:solidFill>
+                  <a:srgbClr val="333F48"/>
+                </a:solidFill>
+                <a:latin typeface="Arial"/>
+                <a:ea typeface="Microsoft JhengHei"/>
+              </a:rPr>
+              <a:t>鄰區表裡留著一條「沒人在用」的關係 —— 對面那顆 cell 可能已經拆站、搬走或改組態。它不會造成故障,但佔著容量上限的一格,而且會誤導後續判斷。難點:怎麼確定「真的沒人用」而不是「剛好這陣子沒人經過」?卷面的答案是:兩個訊號同時為零、而且要連續夠久。</a:t>
+            </a:r>
+          </a:p>
+        </p:txBody>
+      </p:sp>
     </p:spTree>
   </p:cSld>
   <p:clrMapOvr>
@@ -18269,7 +18290,7 @@
           <p:nvPr/>
         </p:nvGraphicFramePr>
         <p:xfrm>
-          <a:off x="320040" y="1600200"/>
+          <a:off x="320040" y="1830000"/>
           <a:ext cx="5577840" cy="2377440"/>
         </p:xfrm>
         <a:graphic>
@@ -18352,47 +18373,6 @@
                       <a:srgbClr val="335B74"/>
                     </a:solidFill>
                   </a:tcPr>
-                </a:tc>
-              </a:tr>
-              <a:tr h="620000">
-                <a:tc gridSpan="3">
-                  <a:txBody>
-                    <a:bodyPr/>
-                    <a:lstStyle/>
-                    <a:p>
-                      <a:r>
-                        <a:rPr sz="800" b="0">
-                          <a:solidFill>
-                            <a:srgbClr val="222A30"/>
-                          </a:solidFill>
-                          <a:latin typeface="Arial"/>
-                          <a:ea typeface="Microsoft JhengHei"/>
-                        </a:rPr>
-                        <a:t>這題在演什麼:有兩條關係都被「封鎖」了(禁止當換手目標)。一條是有道理的 —— 它以前正常服務過,後來一直接入失敗才被封;另一條沒道理 —— 從來沒服務成功過、也沒有任何失敗紀錄,可能是誤操作或舊組態殘留。難點:v10 規定封鎖旗標在 E2 上「看不到」,所以無法直接比對旗標,只能從行為訊號反推哪一條封得沒道理、該解開。</a:t>
-                      </a:r>
-                    </a:p>
-                  </a:txBody>
-                  <a:tcPr anchor="ctr" marL="45720" marR="45720" marT="18288" marB="18288">
-                    <a:solidFill>
-                      <a:srgbClr val="FFFFFF"/>
-                    </a:solidFill>
-                  </a:tcPr>
-                </a:tc>
-                <a:tc hMerge="1">
-                  <a:txBody>
-                    <a:bodyPr/>
-                    <a:lstStyle/>
-                    <a:p/>
-                  </a:txBody>
-                  <a:tcPr/>
-                </a:tc>
-                <a:tc hMerge="1">
-                  <a:txBody>
-                    <a:bodyPr/>
-                    <a:lstStyle/>
-                    <a:p/>
-                  </a:txBody>
-                  <a:tcPr/>
                 </a:tc>
               </a:tr>
               <a:tr h="440000">
@@ -18922,6 +18902,50 @@
                 <a:ea typeface="Microsoft JhengHei"/>
               </a:rPr>
               <a:t>場景:s19 為服務 cell,d02 與 n80 都量得到。佈病:兩條關係的旗標設成一模一樣,差別只造在行為 —— n80 灌 40 筆歷史失敗,d02 一筆都沒有。</a:t>
+            </a:r>
+          </a:p>
+        </p:txBody>
+      </p:sp>
+      <p:sp>
+        <p:nvSpPr>
+          <p:cNvPr id="8" name="StoryLine"/>
+          <p:cNvSpPr txBox="1"/>
+          <p:nvPr/>
+        </p:nvSpPr>
+        <p:spPr>
+          <a:xfrm>
+            <a:off x="320040" y="1415000"/>
+            <a:ext cx="5577840" cy="400000"/>
+          </a:xfrm>
+          <a:prstGeom prst="rect">
+            <a:avLst/>
+          </a:prstGeom>
+          <a:noFill/>
+        </p:spPr>
+        <p:txBody>
+          <a:bodyPr rtlCol="0" anchor="ctr" wrap="square" lIns="0" rIns="0" tIns="0" bIns="0"/>
+          <a:lstStyle/>
+          <a:p>
+            <a:pPr/>
+            <a:r>
+              <a:rPr sz="750" b="1">
+                <a:solidFill>
+                  <a:srgbClr val="1F6FA8"/>
+                </a:solidFill>
+                <a:latin typeface="Arial"/>
+                <a:ea typeface="Microsoft JhengHei"/>
+              </a:rPr>
+              <a:t>這題在演什麼:</a:t>
+            </a:r>
+            <a:r>
+              <a:rPr sz="750" b="0">
+                <a:solidFill>
+                  <a:srgbClr val="333F48"/>
+                </a:solidFill>
+                <a:latin typeface="Arial"/>
+                <a:ea typeface="Microsoft JhengHei"/>
+              </a:rPr>
+              <a:t>有兩條關係都被「封鎖」了(禁止當換手目標)。一條是有道理的 —— 它以前正常服務過,後來一直接入失敗才被封;另一條沒道理 —— 從來沒服務成功過、也沒有任何失敗紀錄,可能是誤操作或舊組態殘留。難點:v10 規定封鎖旗標在 E2 上「看不到」,所以無法直接比對旗標,只能從行為訊號反推哪一條封得沒道理、該解開。</a:t>
             </a:r>
           </a:p>
         </p:txBody>
@@ -21288,7 +21312,7 @@
           <p:nvPr/>
         </p:nvGraphicFramePr>
         <p:xfrm>
-          <a:off x="320040" y="1600200"/>
+          <a:off x="320040" y="1830000"/>
           <a:ext cx="5577840" cy="2377440"/>
         </p:xfrm>
         <a:graphic>
@@ -21302,7 +21326,7 @@
                 <a:gridCol w="1691640"/>
                 <a:gridCol w="1920240"/>
               </a:tblGrid>
-              <a:tr h="450000">
+              <a:tr h="520000">
                 <a:tc>
                   <a:txBody>
                     <a:bodyPr/>
@@ -21373,48 +21397,7 @@
                   </a:tcPr>
                 </a:tc>
               </a:tr>
-              <a:tr h="620000">
-                <a:tc gridSpan="3">
-                  <a:txBody>
-                    <a:bodyPr/>
-                    <a:lstStyle/>
-                    <a:p>
-                      <a:r>
-                        <a:rPr sz="800" b="0">
-                          <a:solidFill>
-                            <a:srgbClr val="222A30"/>
-                          </a:solidFill>
-                          <a:latin typeface="Arial"/>
-                          <a:ea typeface="Microsoft JhengHei"/>
-                        </a:rPr>
-                        <a:t>這題在演什麼:UE 走到兩顆 cell 的邊界,想換到對面那顆,但鄰區表裡沒有這條關係 —— A3 被擋住,UE 只能撐到訊號斷掉、用「重建」硬跳過去。證據不在來源 cell,而在目標那一側:它收到一堆「從同一個 PCI 重建進來」的 UE。難點:要從目標側的統計反推「該幫誰補關係」,而 PCI 可能撞號,反推前得先消歧。</a:t>
-                      </a:r>
-                    </a:p>
-                  </a:txBody>
-                  <a:tcPr anchor="ctr" marL="45720" marR="45720" marT="18288" marB="18288">
-                    <a:solidFill>
-                      <a:srgbClr val="FFFFFF"/>
-                    </a:solidFill>
-                  </a:tcPr>
-                </a:tc>
-                <a:tc hMerge="1">
-                  <a:txBody>
-                    <a:bodyPr/>
-                    <a:lstStyle/>
-                    <a:p/>
-                  </a:txBody>
-                  <a:tcPr/>
-                </a:tc>
-                <a:tc hMerge="1">
-                  <a:txBody>
-                    <a:bodyPr/>
-                    <a:lstStyle/>
-                    <a:p/>
-                  </a:txBody>
-                  <a:tcPr/>
-                </a:tc>
-              </a:tr>
-              <a:tr h="450000">
+              <a:tr h="520000">
                 <a:tc>
                   <a:txBody>
                     <a:bodyPr/>
@@ -21485,7 +21468,7 @@
                   </a:tcPr>
                 </a:tc>
               </a:tr>
-              <a:tr h="450000">
+              <a:tr h="520000">
                 <a:tc>
                   <a:txBody>
                     <a:bodyPr/>
@@ -21556,7 +21539,7 @@
                   </a:tcPr>
                 </a:tc>
               </a:tr>
-              <a:tr h="450000">
+              <a:tr h="520000">
                 <a:tc>
                   <a:txBody>
                     <a:bodyPr/>
@@ -21945,6 +21928,50 @@
           </a:p>
         </p:txBody>
       </p:sp>
+      <p:sp>
+        <p:nvSpPr>
+          <p:cNvPr id="9" name="StoryLine"/>
+          <p:cNvSpPr txBox="1"/>
+          <p:nvPr/>
+        </p:nvSpPr>
+        <p:spPr>
+          <a:xfrm>
+            <a:off x="320040" y="1415000"/>
+            <a:ext cx="5577840" cy="400000"/>
+          </a:xfrm>
+          <a:prstGeom prst="rect">
+            <a:avLst/>
+          </a:prstGeom>
+          <a:noFill/>
+        </p:spPr>
+        <p:txBody>
+          <a:bodyPr rtlCol="0" anchor="ctr" wrap="square" lIns="0" rIns="0" tIns="0" bIns="0"/>
+          <a:lstStyle/>
+          <a:p>
+            <a:pPr/>
+            <a:r>
+              <a:rPr sz="750" b="1">
+                <a:solidFill>
+                  <a:srgbClr val="1F6FA8"/>
+                </a:solidFill>
+                <a:latin typeface="Arial"/>
+                <a:ea typeface="Microsoft JhengHei"/>
+              </a:rPr>
+              <a:t>這題在演什麼:</a:t>
+            </a:r>
+            <a:r>
+              <a:rPr sz="750" b="0">
+                <a:solidFill>
+                  <a:srgbClr val="333F48"/>
+                </a:solidFill>
+                <a:latin typeface="Arial"/>
+                <a:ea typeface="Microsoft JhengHei"/>
+              </a:rPr>
+              <a:t>UE 走到兩顆 cell 的邊界,想換到對面那顆,但鄰區表裡沒有這條關係 —— A3 被擋住,UE 只能撐到訊號斷掉、用「重建」硬跳過去。證據不在來源 cell,而在目標那一側:它收到一堆「從同一個 PCI 重建進來」的 UE。難點:要從目標側的統計反推「該幫誰補關係」,而 PCI 可能撞號,反推前得先消歧。</a:t>
+            </a:r>
+          </a:p>
+        </p:txBody>
+      </p:sp>
     </p:spTree>
     <p:extLst>
       <p:ext uri="{BB962C8B-B14F-4D97-AF65-F5344CB8AC3E}">
@@ -22118,7 +22145,7 @@
           <p:nvPr/>
         </p:nvGraphicFramePr>
         <p:xfrm>
-          <a:off x="320040" y="1600200"/>
+          <a:off x="320040" y="1830000"/>
           <a:ext cx="5577840" cy="2377440"/>
         </p:xfrm>
         <a:graphic>
@@ -22132,7 +22159,7 @@
                 <a:gridCol w="1691640"/>
                 <a:gridCol w="1920240"/>
               </a:tblGrid>
-              <a:tr h="450000">
+              <a:tr h="520000">
                 <a:tc>
                   <a:txBody>
                     <a:bodyPr/>
@@ -22203,48 +22230,7 @@
                   </a:tcPr>
                 </a:tc>
               </a:tr>
-              <a:tr h="620000">
-                <a:tc gridSpan="3">
-                  <a:txBody>
-                    <a:bodyPr/>
-                    <a:lstStyle/>
-                    <a:p>
-                      <a:r>
-                        <a:rPr sz="800" b="0">
-                          <a:solidFill>
-                            <a:srgbClr val="222A30"/>
-                          </a:solidFill>
-                          <a:latin typeface="Arial"/>
-                          <a:ea typeface="Microsoft JhengHei"/>
-                        </a:rPr>
-                        <a:t>這題在演什麼:跟第 1 題同一種病(表上缺一條關係),但 UE 還撐得住、沒有掉線 —— 所以完全沒有重建統計可用。證據只剩量測面:某顆 cell 被穩定量到、只落後目前服務 cell 6dB 以內(已達「該換手」的等效門檻),表上卻查無。考點:能不能在 UE 掉線「之前」就發現並補上。</a:t>
-                      </a:r>
-                    </a:p>
-                  </a:txBody>
-                  <a:tcPr anchor="ctr" marL="45720" marR="45720" marT="18288" marB="18288">
-                    <a:solidFill>
-                      <a:srgbClr val="FFFFFF"/>
-                    </a:solidFill>
-                  </a:tcPr>
-                </a:tc>
-                <a:tc hMerge="1">
-                  <a:txBody>
-                    <a:bodyPr/>
-                    <a:lstStyle/>
-                    <a:p/>
-                  </a:txBody>
-                  <a:tcPr/>
-                </a:tc>
-                <a:tc hMerge="1">
-                  <a:txBody>
-                    <a:bodyPr/>
-                    <a:lstStyle/>
-                    <a:p/>
-                  </a:txBody>
-                  <a:tcPr/>
-                </a:tc>
-              </a:tr>
-              <a:tr h="450000">
+              <a:tr h="520000">
                 <a:tc>
                   <a:txBody>
                     <a:bodyPr/>
@@ -22315,7 +22301,7 @@
                   </a:tcPr>
                 </a:tc>
               </a:tr>
-              <a:tr h="450000">
+              <a:tr h="520000">
                 <a:tc>
                   <a:txBody>
                     <a:bodyPr/>
@@ -22386,7 +22372,7 @@
                   </a:tcPr>
                 </a:tc>
               </a:tr>
-              <a:tr h="450000">
+              <a:tr h="520000">
                 <a:tc>
                   <a:txBody>
                     <a:bodyPr/>
@@ -22771,6 +22757,50 @@
                 <a:ea typeface="Microsoft JhengHei"/>
               </a:rPr>
               <a:t>場景:s25 在中間,n35 在東側 400 公尺。佈病:剪掉 s25→n35。難在 UE 位置 —— 要讓鄰區訊號逼近卻又不掉線,靠 PathSolver 逐點實測挑出窄帶。</a:t>
+            </a:r>
+          </a:p>
+        </p:txBody>
+      </p:sp>
+      <p:sp>
+        <p:nvSpPr>
+          <p:cNvPr id="9" name="StoryLine"/>
+          <p:cNvSpPr txBox="1"/>
+          <p:nvPr/>
+        </p:nvSpPr>
+        <p:spPr>
+          <a:xfrm>
+            <a:off x="320040" y="1415000"/>
+            <a:ext cx="5577840" cy="400000"/>
+          </a:xfrm>
+          <a:prstGeom prst="rect">
+            <a:avLst/>
+          </a:prstGeom>
+          <a:noFill/>
+        </p:spPr>
+        <p:txBody>
+          <a:bodyPr rtlCol="0" anchor="ctr" wrap="square" lIns="0" rIns="0" tIns="0" bIns="0"/>
+          <a:lstStyle/>
+          <a:p>
+            <a:pPr/>
+            <a:r>
+              <a:rPr sz="750" b="1">
+                <a:solidFill>
+                  <a:srgbClr val="1F6FA8"/>
+                </a:solidFill>
+                <a:latin typeface="Arial"/>
+                <a:ea typeface="Microsoft JhengHei"/>
+              </a:rPr>
+              <a:t>這題在演什麼:</a:t>
+            </a:r>
+            <a:r>
+              <a:rPr sz="750" b="0">
+                <a:solidFill>
+                  <a:srgbClr val="333F48"/>
+                </a:solidFill>
+                <a:latin typeface="Arial"/>
+                <a:ea typeface="Microsoft JhengHei"/>
+              </a:rPr>
+              <a:t>跟第 1 題同一種病(表上缺一條關係),但 UE 還撐得住、沒有掉線 —— 所以完全沒有重建統計可用。證據只剩量測面:某顆 cell 被穩定量到、只落後目前服務 cell 6dB 以內(已達「該換手」的等效門檻),表上卻查無。考點:能不能在 UE 掉線「之前」就發現並補上。</a:t>
             </a:r>
           </a:p>
         </p:txBody>
@@ -24272,7 +24302,7 @@
           <p:nvPr/>
         </p:nvGraphicFramePr>
         <p:xfrm>
-          <a:off x="320040" y="1600200"/>
+          <a:off x="320040" y="1830000"/>
           <a:ext cx="5577840" cy="2377440"/>
         </p:xfrm>
         <a:graphic>
@@ -24286,7 +24316,7 @@
                 <a:gridCol w="1691640"/>
                 <a:gridCol w="1920240"/>
               </a:tblGrid>
-              <a:tr h="450000">
+              <a:tr h="520000">
                 <a:tc>
                   <a:txBody>
                     <a:bodyPr/>
@@ -24357,48 +24387,7 @@
                   </a:tcPr>
                 </a:tc>
               </a:tr>
-              <a:tr h="620000">
-                <a:tc gridSpan="3">
-                  <a:txBody>
-                    <a:bodyPr/>
-                    <a:lstStyle/>
-                    <a:p>
-                      <a:r>
-                        <a:rPr sz="800" b="0">
-                          <a:solidFill>
-                            <a:srgbClr val="222A30"/>
-                          </a:solidFill>
-                          <a:latin typeface="Arial"/>
-                          <a:ea typeface="Microsoft JhengHei"/>
-                        </a:rPr>
-                        <a:t>這題在演什麼:UE 站在服務 cell 的覆蓋極邊緣(訊號只有 −107.5dBm),旁邊有一顆好上 20dB 的 cell,但鄰區表裡沒有這條關係 —— 換不過去,只能撐到掉線重建。難點:深邊緣人少、訊號又天生弱,傳統「樣本要夠多、訊號要夠強」的門檻會直接把它篩掉。</a:t>
-                      </a:r>
-                    </a:p>
-                  </a:txBody>
-                  <a:tcPr anchor="ctr" marL="45720" marR="45720" marT="18288" marB="18288">
-                    <a:solidFill>
-                      <a:srgbClr val="FFFFFF"/>
-                    </a:solidFill>
-                  </a:tcPr>
-                </a:tc>
-                <a:tc hMerge="1">
-                  <a:txBody>
-                    <a:bodyPr/>
-                    <a:lstStyle/>
-                    <a:p/>
-                  </a:txBody>
-                  <a:tcPr/>
-                </a:tc>
-                <a:tc hMerge="1">
-                  <a:txBody>
-                    <a:bodyPr/>
-                    <a:lstStyle/>
-                    <a:p/>
-                  </a:txBody>
-                  <a:tcPr/>
-                </a:tc>
-              </a:tr>
-              <a:tr h="450000">
+              <a:tr h="520000">
                 <a:tc>
                   <a:txBody>
                     <a:bodyPr/>
@@ -24469,7 +24458,7 @@
                   </a:tcPr>
                 </a:tc>
               </a:tr>
-              <a:tr h="450000">
+              <a:tr h="520000">
                 <a:tc>
                   <a:txBody>
                     <a:bodyPr/>
@@ -24540,7 +24529,7 @@
                   </a:tcPr>
                 </a:tc>
               </a:tr>
-              <a:tr h="450000">
+              <a:tr h="520000">
                 <a:tc>
                   <a:txBody>
                     <a:bodyPr/>
@@ -24929,6 +24918,50 @@
           </a:p>
         </p:txBody>
       </p:sp>
+      <p:sp>
+        <p:nvSpPr>
+          <p:cNvPr id="8" name="StoryLine"/>
+          <p:cNvSpPr txBox="1"/>
+          <p:nvPr/>
+        </p:nvSpPr>
+        <p:spPr>
+          <a:xfrm>
+            <a:off x="320040" y="1415000"/>
+            <a:ext cx="5577840" cy="400000"/>
+          </a:xfrm>
+          <a:prstGeom prst="rect">
+            <a:avLst/>
+          </a:prstGeom>
+          <a:noFill/>
+        </p:spPr>
+        <p:txBody>
+          <a:bodyPr rtlCol="0" anchor="ctr" wrap="square" lIns="0" rIns="0" tIns="0" bIns="0"/>
+          <a:lstStyle/>
+          <a:p>
+            <a:pPr/>
+            <a:r>
+              <a:rPr sz="750" b="1">
+                <a:solidFill>
+                  <a:srgbClr val="1F6FA8"/>
+                </a:solidFill>
+                <a:latin typeface="Arial"/>
+                <a:ea typeface="Microsoft JhengHei"/>
+              </a:rPr>
+              <a:t>這題在演什麼:</a:t>
+            </a:r>
+            <a:r>
+              <a:rPr sz="750" b="0">
+                <a:solidFill>
+                  <a:srgbClr val="333F48"/>
+                </a:solidFill>
+                <a:latin typeface="Arial"/>
+                <a:ea typeface="Microsoft JhengHei"/>
+              </a:rPr>
+              <a:t>UE 站在服務 cell 的覆蓋極邊緣(訊號只有 −107.5dBm),旁邊有一顆好上 20dB 的 cell,但鄰區表裡沒有這條關係 —— 換不過去,只能撐到掉線重建。難點:深邊緣人少、訊號又天生弱,傳統「樣本要夠多、訊號要夠強」的門檻會直接把它篩掉。</a:t>
+            </a:r>
+          </a:p>
+        </p:txBody>
+      </p:sp>
     </p:spTree>
   </p:cSld>
   <p:clrMapOvr>
@@ -25012,7 +25045,7 @@
           <p:nvPr/>
         </p:nvGraphicFramePr>
         <p:xfrm>
-          <a:off x="320040" y="1600200"/>
+          <a:off x="320040" y="1830000"/>
           <a:ext cx="5577840" cy="2377440"/>
         </p:xfrm>
         <a:graphic>
@@ -25026,7 +25059,7 @@
                 <a:gridCol w="1691640"/>
                 <a:gridCol w="1920240"/>
               </a:tblGrid>
-              <a:tr h="450000">
+              <a:tr h="520000">
                 <a:tc>
                   <a:txBody>
                     <a:bodyPr/>
@@ -25097,48 +25130,7 @@
                   </a:tcPr>
                 </a:tc>
               </a:tr>
-              <a:tr h="620000">
-                <a:tc gridSpan="3">
-                  <a:txBody>
-                    <a:bodyPr/>
-                    <a:lstStyle/>
-                    <a:p>
-                      <a:r>
-                        <a:rPr sz="800" b="0">
-                          <a:solidFill>
-                            <a:srgbClr val="222A30"/>
-                          </a:solidFill>
-                          <a:latin typeface="Arial"/>
-                          <a:ea typeface="Microsoft JhengHei"/>
-                        </a:rPr>
-                        <a:t>這題在演什麼:網路裡冒出一顆全新的 cell(剛開台、或鄰家設備上線),UE 量得到、也解得出它的全域識別,但整張鄰區表裡沒有任何一條指向它。與第 1、2 題的差別:那兩題是「本來該有的關係被漏掉」,這題是「這顆 cell 從來沒被登記過」。所以動手前要先確認它真的不在任何既有關係裡,否則會把既有的病誤判成新鄰居。</a:t>
-                      </a:r>
-                    </a:p>
-                  </a:txBody>
-                  <a:tcPr anchor="ctr" marL="45720" marR="45720" marT="18288" marB="18288">
-                    <a:solidFill>
-                      <a:srgbClr val="FFFFFF"/>
-                    </a:solidFill>
-                  </a:tcPr>
-                </a:tc>
-                <a:tc hMerge="1">
-                  <a:txBody>
-                    <a:bodyPr/>
-                    <a:lstStyle/>
-                    <a:p/>
-                  </a:txBody>
-                  <a:tcPr/>
-                </a:tc>
-                <a:tc hMerge="1">
-                  <a:txBody>
-                    <a:bodyPr/>
-                    <a:lstStyle/>
-                    <a:p/>
-                  </a:txBody>
-                  <a:tcPr/>
-                </a:tc>
-              </a:tr>
-              <a:tr h="450000">
+              <a:tr h="520000">
                 <a:tc>
                   <a:txBody>
                     <a:bodyPr/>
@@ -25209,7 +25201,7 @@
                   </a:tcPr>
                 </a:tc>
               </a:tr>
-              <a:tr h="450000">
+              <a:tr h="520000">
                 <a:tc>
                   <a:txBody>
                     <a:bodyPr/>
@@ -25280,7 +25272,7 @@
                   </a:tcPr>
                 </a:tc>
               </a:tr>
-              <a:tr h="450000">
+              <a:tr h="520000">
                 <a:tc>
                   <a:txBody>
                     <a:bodyPr/>
@@ -25665,6 +25657,50 @@
                 <a:ea typeface="Microsoft JhengHei"/>
               </a:rPr>
               <a:t>場景:s01 為服務 cell,unk 在東側 150 公尺。佈病:讓 unk 存在但不建任何指向它的關係 —— cell 真的在、UE 量得到,唯獨表上查無。</a:t>
+            </a:r>
+          </a:p>
+        </p:txBody>
+      </p:sp>
+      <p:sp>
+        <p:nvSpPr>
+          <p:cNvPr id="8" name="StoryLine"/>
+          <p:cNvSpPr txBox="1"/>
+          <p:nvPr/>
+        </p:nvSpPr>
+        <p:spPr>
+          <a:xfrm>
+            <a:off x="320040" y="1415000"/>
+            <a:ext cx="5577840" cy="400000"/>
+          </a:xfrm>
+          <a:prstGeom prst="rect">
+            <a:avLst/>
+          </a:prstGeom>
+          <a:noFill/>
+        </p:spPr>
+        <p:txBody>
+          <a:bodyPr rtlCol="0" anchor="ctr" wrap="square" lIns="0" rIns="0" tIns="0" bIns="0"/>
+          <a:lstStyle/>
+          <a:p>
+            <a:pPr/>
+            <a:r>
+              <a:rPr sz="750" b="1">
+                <a:solidFill>
+                  <a:srgbClr val="1F6FA8"/>
+                </a:solidFill>
+                <a:latin typeface="Arial"/>
+                <a:ea typeface="Microsoft JhengHei"/>
+              </a:rPr>
+              <a:t>這題在演什麼:</a:t>
+            </a:r>
+            <a:r>
+              <a:rPr sz="750" b="0">
+                <a:solidFill>
+                  <a:srgbClr val="333F48"/>
+                </a:solidFill>
+                <a:latin typeface="Arial"/>
+                <a:ea typeface="Microsoft JhengHei"/>
+              </a:rPr>
+              <a:t>網路裡冒出一顆全新的 cell(剛開台、或鄰家設備上線),UE 量得到、也解得出它的全域識別,但整張鄰區表裡沒有任何一條指向它。與第 1、2 題的差別:那兩題是「本來該有的關係被漏掉」,這題是「這顆 cell 從來沒被登記過」。所以動手前要先確認它真的不在任何既有關係裡,否則會把既有的病誤判成新鄰居。</a:t>
             </a:r>
           </a:p>
         </p:txBody>

--- a/docs/report/8_27_進度報告_v10十二題.pptx
+++ b/docs/report/8_27_進度報告_v10十二題.pptx
@@ -19856,7 +19856,7 @@
                           <a:latin typeface="Arial"/>
                           <a:ea typeface="Microsoft JhengHei"/>
                         </a:rPr>
-                        <a:t>同樣缺關係,但 UE 還沒掉線 —— 只能從量測面發現(落後 服務訊號 ≤6dB 卻查無)</a:t>
+                        <a:t>同樣缺關係,但 UE 還沒掉線 —— 鄰居訊號已強到該換手(落後不到 6dB),鄰區表裡卻沒有這條關係</a:t>
                       </a:r>
                     </a:p>
                   </a:txBody>
@@ -19880,7 +19880,7 @@
                           <a:latin typeface="Arial"/>
                           <a:ea typeface="Microsoft JhengHei"/>
                         </a:rPr>
-                        <a:t>在 UE 掉線前就補上;ANR 自動建立被關掉時改走通報</a:t>
+                        <a:t>在 UE 掉線前就補上關係;若基地台的「自動建立鄰區」功能被關閉,只偵測不寫入、改通報管理面</a:t>
                       </a:r>
                     </a:p>
                   </a:txBody>
@@ -22536,7 +22536,7 @@
                 <a:latin typeface="Arial"/>
                 <a:ea typeface="Microsoft JhengHei"/>
               </a:rPr>
-              <a:t>② 前置檢查:該基地台的「ANR 自動建立」開關是否開著</a:t>
+              <a:t>② 前置檢查:該基地台的「自動建立鄰區關係」功能是否開啟</a:t>
             </a:r>
           </a:p>
           <a:p>
@@ -22570,7 +22570,7 @@
                 <a:latin typeface="Arial"/>
                 <a:ea typeface="Microsoft JhengHei"/>
               </a:rPr>
-              <a:t>④ 關著 → 只偵測不寫入,改通報請管理面建立(停用 ≠ 禁止改鄰區表)</a:t>
+              <a:t>④ 關著 → 只偵測不寫入,改通報管理面「這裡缺一條關係、目標是哪顆」請人建立</a:t>
             </a:r>
           </a:p>
           <a:p>
@@ -22618,7 +22618,7 @@
                 <a:latin typeface="Arial"/>
                 <a:ea typeface="Microsoft JhengHei"/>
               </a:rPr>
-              <a:t>預計操作結果:在 UE 掉線前就從量測面發現並補關係;ANR 停用時改走通報</a:t>
+              <a:t>預計操作結果:在 UE 掉線前就從量測面發現並補上關係;自動建立被關閉時改走通報</a:t>
             </a:r>
           </a:p>
         </p:txBody>

--- a/docs/report/8_27_進度報告_v10十二題.pptx
+++ b/docs/report/8_27_進度報告_v10十二題.pptx
@@ -15471,7 +15471,7 @@
                           <a:latin typeface="Arial"/>
                           <a:ea typeface="Microsoft JhengHei"/>
                         </a:rPr>
-                        <a:t>≥−88dBm、≥5/min、連 3 窗</a:t>
+                        <a:t>≥−88dBm、≥5/min、連續 3 個觀測窗</a:t>
                       </a:r>
                     </a:p>
                   </a:txBody>
@@ -15743,7 +15743,7 @@
                 <a:latin typeface="Arial"/>
                 <a:ea typeface="Microsoft JhengHei"/>
               </a:rPr>
-              <a:t>⑤ 頻率層關係由 gNB 自己長出來,xApp 不用另外建</a:t>
+              <a:t>⑤ 頻率層關係由基地台 自己長出來,xApp 不用另外建</a:t>
             </a:r>
           </a:p>
           <a:p>
@@ -19978,7 +19978,7 @@
                           <a:latin typeface="Arial"/>
                           <a:ea typeface="Microsoft JhengHei"/>
                         </a:rPr>
-                        <a:t>UE 在覆蓋極邊緣、旁邊有明顯更好的 cell 卻不在鄰區表;該處人少,樣本天生稀疏</a:t>
+                        <a:t>UE 在覆蓋極邊緣(訊號極弱),旁邊有明顯更好的 cell 卻不在鄰區表;該處人少,樣本天生稀疏</a:t>
                       </a:r>
                     </a:p>
                   </a:txBody>
@@ -20002,7 +20002,7 @@
                           <a:latin typeface="Arial"/>
                           <a:ea typeface="Microsoft JhengHei"/>
                         </a:rPr>
-                        <a:t>xApp 改看「比服務 cell 好 ≥10dB 且連 3 窗」而非樣本量 → 解出識別碼 → 請基地台補關係</a:t>
+                        <a:t>改看「比服務 cell 好 ≥10dB 且持續 15 分鐘」,不再要求樣本數 → 解出識別碼 → 請基地台補關係</a:t>
                       </a:r>
                     </a:p>
                   </a:txBody>
@@ -22315,7 +22315,7 @@
                           <a:latin typeface="Arial"/>
                           <a:ea typeface="Microsoft JhengHei"/>
                         </a:rPr>
-                        <a:t>≥−85dBm、≥5/min、連 3 窗</a:t>
+                        <a:t>≥−85dBm、≥5/min、連續 3 個觀測窗</a:t>
                       </a:r>
                     </a:p>
                   </a:txBody>
@@ -24543,7 +24543,7 @@
                           <a:latin typeface="Arial"/>
                           <a:ea typeface="Microsoft JhengHei"/>
                         </a:rPr>
-                        <a:t>樣本稀疏(僅為簽名)</a:t>
+                        <a:t>樣本稀疏(只是特徵,不當判準)</a:t>
                       </a:r>
                     </a:p>
                   </a:txBody>
@@ -24693,7 +24693,7 @@
                 <a:latin typeface="Arial"/>
                 <a:ea typeface="Microsoft JhengHei"/>
               </a:rPr>
-              <a:t>② 連 3 個窗都成立才動手(服務訊號 ≤−105、增益 ≥10dB、鄰區表查無)</a:t>
+              <a:t>② 連續 3 個觀測窗(共 15 分鐘)都成立才動手:服務訊號 ≤−105、增益 ≥10dB、鄰區表查無</a:t>
             </a:r>
           </a:p>
           <a:p>
@@ -24775,7 +24775,7 @@
                 <a:latin typeface="Arial"/>
                 <a:ea typeface="Microsoft JhengHei"/>
               </a:rPr>
-              <a:t>預計操作結果:xApp 靠相對增益(而非樣本量)認出深邊緣缺鄰,請 gNB 補上關係</a:t>
+              <a:t>預計操作結果:改用「相對好多少」而非「樣本夠不夠多」認出深邊緣缺鄰,請基地台 補上關係</a:t>
             </a:r>
           </a:p>
         </p:txBody>
@@ -24957,7 +24957,7 @@
                 <a:latin typeface="Arial"/>
                 <a:ea typeface="Microsoft JhengHei"/>
               </a:rPr>
-              <a:t>UE 站在服務 cell 的覆蓋極邊緣(訊號只有 −107.5dBm),旁邊有一顆好上 20dB 的 cell,但鄰區表裡沒有這條關係 —— 換不過去,只能撐到掉線重建。難點:深邊緣人少、訊號又天生弱,傳統「樣本要夠多、訊號要夠強」的門檻會直接把它篩掉。</a:t>
+              <a:t>UE 站在服務 cell 的覆蓋極邊緣(訊號只有 −107.5dBm),旁邊有一顆好上 20dB 的 cell,但鄰區表裡沒有這條關係 —— 換不過去,只能撐到掉線重建。難點:深邊緣人少、訊號又天生弱,傳統「樣本要夠多、訊號要夠強」的門檻會直接把它篩掉。與第 2 題的分野:那題訊號都正常、只是表上缺一條;這題訊號本身就弱,只有「相對比較」才看得出來。</a:t>
             </a:r>
           </a:p>
         </p:txBody>
@@ -25215,7 +25215,7 @@
                           <a:latin typeface="Arial"/>
                           <a:ea typeface="Microsoft JhengHei"/>
                         </a:rPr>
-                        <a:t>≥−100dBm、≥5/min、連 2 窗</a:t>
+                        <a:t>≥−100dBm、≥5/min、連續 2 個觀測窗</a:t>
                       </a:r>
                     </a:p>
                   </a:txBody>
